--- a/topic03-dataTypes-variables-and-expressions/unit-1/talk-1/a-data-types.pptx
+++ b/topic03-dataTypes-variables-and-expressions/unit-1/talk-1/a-data-types.pptx
@@ -5,10 +5,10 @@
     <p:sldMasterId id="2147483955" r:id="rId1"/>
   </p:sldMasterIdLst>
   <p:notesMasterIdLst>
-    <p:notesMasterId r:id="rId33"/>
+    <p:notesMasterId r:id="rId36"/>
   </p:notesMasterIdLst>
   <p:handoutMasterIdLst>
-    <p:handoutMasterId r:id="rId34"/>
+    <p:handoutMasterId r:id="rId37"/>
   </p:handoutMasterIdLst>
   <p:sldIdLst>
     <p:sldId id="256" r:id="rId2"/>
@@ -31,17 +31,20 @@
     <p:sldId id="362" r:id="rId19"/>
     <p:sldId id="363" r:id="rId20"/>
     <p:sldId id="364" r:id="rId21"/>
-    <p:sldId id="365" r:id="rId22"/>
-    <p:sldId id="353" r:id="rId23"/>
+    <p:sldId id="367" r:id="rId22"/>
+    <p:sldId id="370" r:id="rId23"/>
     <p:sldId id="278" r:id="rId24"/>
-    <p:sldId id="296" r:id="rId25"/>
-    <p:sldId id="285" r:id="rId26"/>
-    <p:sldId id="284" r:id="rId27"/>
-    <p:sldId id="300" r:id="rId28"/>
-    <p:sldId id="295" r:id="rId29"/>
-    <p:sldId id="274" r:id="rId30"/>
-    <p:sldId id="297" r:id="rId31"/>
-    <p:sldId id="347" r:id="rId32"/>
+    <p:sldId id="368" r:id="rId25"/>
+    <p:sldId id="369" r:id="rId26"/>
+    <p:sldId id="371" r:id="rId27"/>
+    <p:sldId id="296" r:id="rId28"/>
+    <p:sldId id="285" r:id="rId29"/>
+    <p:sldId id="284" r:id="rId30"/>
+    <p:sldId id="300" r:id="rId31"/>
+    <p:sldId id="295" r:id="rId32"/>
+    <p:sldId id="274" r:id="rId33"/>
+    <p:sldId id="297" r:id="rId34"/>
+    <p:sldId id="347" r:id="rId35"/>
   </p:sldIdLst>
   <p:sldSz cx="12192000" cy="6858000"/>
   <p:notesSz cx="6858000" cy="9144000"/>
@@ -511,14 +514,14 @@
           </a:ln>
           <a:extLst>
             <a:ext uri="{909E8E84-426E-40dd-AFC4-6F175D3DCCD1}">
-              <a14:hiddenFill xmlns="" xmlns:a14="http://schemas.microsoft.com/office/drawing/2010/main">
+              <a14:hiddenFill xmlns:a14="http://schemas.microsoft.com/office/drawing/2010/main" xmlns="">
                 <a:solidFill>
                   <a:srgbClr val="FFFFFF"/>
                 </a:solidFill>
               </a14:hiddenFill>
             </a:ext>
             <a:ext uri="{FAA26D3D-D897-4be2-8F04-BA451C77F1D7}">
-              <ma14:placeholderFlag xmlns="" xmlns:ma14="http://schemas.microsoft.com/office/mac/drawingml/2011/main" val="1"/>
+              <ma14:placeholderFlag xmlns:ma14="http://schemas.microsoft.com/office/mac/drawingml/2011/main" xmlns="" val="1"/>
             </a:ext>
           </a:extLst>
         </p:spPr>
@@ -862,14 +865,14 @@
           <a:noFill/>
           <a:extLst>
             <a:ext uri="{909E8E84-426E-40dd-AFC4-6F175D3DCCD1}">
-              <a14:hiddenFill xmlns="" xmlns:a14="http://schemas.microsoft.com/office/drawing/2010/main">
+              <a14:hiddenFill xmlns:a14="http://schemas.microsoft.com/office/drawing/2010/main" xmlns="">
                 <a:solidFill>
                   <a:srgbClr val="FFFFFF"/>
                 </a:solidFill>
               </a14:hiddenFill>
             </a:ext>
             <a:ext uri="{91240B29-F687-4f45-9708-019B960494DF}">
-              <a14:hiddenLine xmlns="" xmlns:a14="http://schemas.microsoft.com/office/drawing/2010/main" w="9525">
+              <a14:hiddenLine xmlns:a14="http://schemas.microsoft.com/office/drawing/2010/main" xmlns="" w="9525">
                 <a:solidFill>
                   <a:srgbClr val="000000"/>
                 </a:solidFill>
@@ -1017,14 +1020,14 @@
           <a:noFill/>
           <a:extLst>
             <a:ext uri="{909E8E84-426E-40dd-AFC4-6F175D3DCCD1}">
-              <a14:hiddenFill xmlns="" xmlns:a14="http://schemas.microsoft.com/office/drawing/2010/main">
+              <a14:hiddenFill xmlns:a14="http://schemas.microsoft.com/office/drawing/2010/main" xmlns="">
                 <a:solidFill>
                   <a:srgbClr val="FFFFFF"/>
                 </a:solidFill>
               </a14:hiddenFill>
             </a:ext>
             <a:ext uri="{91240B29-F687-4f45-9708-019B960494DF}">
-              <a14:hiddenLine xmlns="" xmlns:a14="http://schemas.microsoft.com/office/drawing/2010/main" w="9525">
+              <a14:hiddenLine xmlns:a14="http://schemas.microsoft.com/office/drawing/2010/main" xmlns="" w="9525">
                 <a:solidFill>
                   <a:srgbClr val="000000"/>
                 </a:solidFill>
@@ -1172,14 +1175,14 @@
           <a:noFill/>
           <a:extLst>
             <a:ext uri="{909E8E84-426E-40dd-AFC4-6F175D3DCCD1}">
-              <a14:hiddenFill xmlns="" xmlns:a14="http://schemas.microsoft.com/office/drawing/2010/main">
+              <a14:hiddenFill xmlns:a14="http://schemas.microsoft.com/office/drawing/2010/main" xmlns="">
                 <a:solidFill>
                   <a:srgbClr val="FFFFFF"/>
                 </a:solidFill>
               </a14:hiddenFill>
             </a:ext>
             <a:ext uri="{91240B29-F687-4f45-9708-019B960494DF}">
-              <a14:hiddenLine xmlns="" xmlns:a14="http://schemas.microsoft.com/office/drawing/2010/main" w="9525">
+              <a14:hiddenLine xmlns:a14="http://schemas.microsoft.com/office/drawing/2010/main" xmlns="" w="9525">
                 <a:solidFill>
                   <a:srgbClr val="000000"/>
                 </a:solidFill>
@@ -1351,7 +1354,7 @@
         <p:spPr>
           <a:extLst>
             <a:ext uri="{FAA26D3D-D897-4be2-8F04-BA451C77F1D7}">
-              <ma14:placeholderFlag xmlns="" xmlns:ma14="http://schemas.microsoft.com/office/mac/drawingml/2011/main" val="1"/>
+              <ma14:placeholderFlag xmlns:ma14="http://schemas.microsoft.com/office/mac/drawingml/2011/main" xmlns="" val="1"/>
             </a:ext>
           </a:extLst>
         </p:spPr>
@@ -1413,14 +1416,14 @@
           <a:noFill/>
           <a:extLst>
             <a:ext uri="{909E8E84-426E-40dd-AFC4-6F175D3DCCD1}">
-              <a14:hiddenFill xmlns="" xmlns:a14="http://schemas.microsoft.com/office/drawing/2010/main">
+              <a14:hiddenFill xmlns:a14="http://schemas.microsoft.com/office/drawing/2010/main" xmlns="">
                 <a:solidFill>
                   <a:srgbClr val="FFFFFF"/>
                 </a:solidFill>
               </a14:hiddenFill>
             </a:ext>
             <a:ext uri="{91240B29-F687-4f45-9708-019B960494DF}">
-              <a14:hiddenLine xmlns="" xmlns:a14="http://schemas.microsoft.com/office/drawing/2010/main" w="9525">
+              <a14:hiddenLine xmlns:a14="http://schemas.microsoft.com/office/drawing/2010/main" xmlns="" w="9525">
                 <a:solidFill>
                   <a:srgbClr val="000000"/>
                 </a:solidFill>
@@ -1568,14 +1571,14 @@
           <a:noFill/>
           <a:extLst>
             <a:ext uri="{909E8E84-426E-40dd-AFC4-6F175D3DCCD1}">
-              <a14:hiddenFill xmlns="" xmlns:a14="http://schemas.microsoft.com/office/drawing/2010/main">
+              <a14:hiddenFill xmlns:a14="http://schemas.microsoft.com/office/drawing/2010/main" xmlns="">
                 <a:solidFill>
                   <a:srgbClr val="FFFFFF"/>
                 </a:solidFill>
               </a14:hiddenFill>
             </a:ext>
             <a:ext uri="{91240B29-F687-4f45-9708-019B960494DF}">
-              <a14:hiddenLine xmlns="" xmlns:a14="http://schemas.microsoft.com/office/drawing/2010/main" w="9525">
+              <a14:hiddenLine xmlns:a14="http://schemas.microsoft.com/office/drawing/2010/main" xmlns="" w="9525">
                 <a:solidFill>
                   <a:srgbClr val="000000"/>
                 </a:solidFill>
@@ -1723,14 +1726,14 @@
           <a:noFill/>
           <a:extLst>
             <a:ext uri="{909E8E84-426E-40dd-AFC4-6F175D3DCCD1}">
-              <a14:hiddenFill xmlns="" xmlns:a14="http://schemas.microsoft.com/office/drawing/2010/main">
+              <a14:hiddenFill xmlns:a14="http://schemas.microsoft.com/office/drawing/2010/main" xmlns="">
                 <a:solidFill>
                   <a:srgbClr val="FFFFFF"/>
                 </a:solidFill>
               </a14:hiddenFill>
             </a:ext>
             <a:ext uri="{91240B29-F687-4f45-9708-019B960494DF}">
-              <a14:hiddenLine xmlns="" xmlns:a14="http://schemas.microsoft.com/office/drawing/2010/main" w="9525">
+              <a14:hiddenLine xmlns:a14="http://schemas.microsoft.com/office/drawing/2010/main" xmlns="" w="9525">
                 <a:solidFill>
                   <a:srgbClr val="000000"/>
                 </a:solidFill>
@@ -1860,7 +1863,7 @@
                 <a:latin typeface="Times New Roman" charset="0"/>
               </a:rPr>
               <a:pPr algn="r"/>
-              <a:t>26</a:t>
+              <a:t>29</a:t>
             </a:fld>
             <a:endParaRPr lang="en-GB" altLang="en-US" sz="1200" b="0">
               <a:solidFill>
@@ -1910,14 +1913,14 @@
           <a:noFill/>
           <a:extLst>
             <a:ext uri="{909E8E84-426E-40dd-AFC4-6F175D3DCCD1}">
-              <a14:hiddenFill xmlns="" xmlns:a14="http://schemas.microsoft.com/office/drawing/2010/main">
+              <a14:hiddenFill xmlns:a14="http://schemas.microsoft.com/office/drawing/2010/main" xmlns="">
                 <a:solidFill>
                   <a:srgbClr val="FFFFFF"/>
                 </a:solidFill>
               </a14:hiddenFill>
             </a:ext>
             <a:ext uri="{91240B29-F687-4f45-9708-019B960494DF}">
-              <a14:hiddenLine xmlns="" xmlns:a14="http://schemas.microsoft.com/office/drawing/2010/main" w="9525">
+              <a14:hiddenLine xmlns:a14="http://schemas.microsoft.com/office/drawing/2010/main" xmlns="" w="9525">
                 <a:solidFill>
                   <a:srgbClr val="000000"/>
                 </a:solidFill>
@@ -1927,7 +1930,7 @@
               </a14:hiddenLine>
             </a:ext>
             <a:ext uri="{AF507438-7753-43e0-B8FC-AC1667EBCBE1}">
-              <a14:hiddenEffects xmlns="" xmlns:a14="http://schemas.microsoft.com/office/drawing/2010/main">
+              <a14:hiddenEffects xmlns:a14="http://schemas.microsoft.com/office/drawing/2010/main" xmlns="">
                 <a:effectLst>
                   <a:outerShdw dist="35921" dir="2700000" algn="ctr" rotWithShape="0">
                     <a:srgbClr val="808080"/>
@@ -1936,7 +1939,7 @@
               </a14:hiddenEffects>
             </a:ext>
             <a:ext uri="{53640926-AAD7-44d8-BBD7-CCE9431645EC}">
-              <a14:shadowObscured xmlns="" xmlns:a14="http://schemas.microsoft.com/office/drawing/2010/main" val="1"/>
+              <a14:shadowObscured xmlns:a14="http://schemas.microsoft.com/office/drawing/2010/main" xmlns="" val="1"/>
             </a:ext>
           </a:extLst>
         </p:spPr>
@@ -2009,14 +2012,14 @@
           <a:noFill/>
           <a:extLst>
             <a:ext uri="{909E8E84-426E-40dd-AFC4-6F175D3DCCD1}">
-              <a14:hiddenFill xmlns="" xmlns:a14="http://schemas.microsoft.com/office/drawing/2010/main">
+              <a14:hiddenFill xmlns:a14="http://schemas.microsoft.com/office/drawing/2010/main" xmlns="">
                 <a:solidFill>
                   <a:srgbClr val="FFFFFF"/>
                 </a:solidFill>
               </a14:hiddenFill>
             </a:ext>
             <a:ext uri="{91240B29-F687-4f45-9708-019B960494DF}">
-              <a14:hiddenLine xmlns="" xmlns:a14="http://schemas.microsoft.com/office/drawing/2010/main" w="9525">
+              <a14:hiddenLine xmlns:a14="http://schemas.microsoft.com/office/drawing/2010/main" xmlns="" w="9525">
                 <a:solidFill>
                   <a:srgbClr val="000000"/>
                 </a:solidFill>
@@ -2164,14 +2167,14 @@
           <a:noFill/>
           <a:extLst>
             <a:ext uri="{909E8E84-426E-40dd-AFC4-6F175D3DCCD1}">
-              <a14:hiddenFill xmlns="" xmlns:a14="http://schemas.microsoft.com/office/drawing/2010/main">
+              <a14:hiddenFill xmlns:a14="http://schemas.microsoft.com/office/drawing/2010/main" xmlns="">
                 <a:solidFill>
                   <a:srgbClr val="FFFFFF"/>
                 </a:solidFill>
               </a14:hiddenFill>
             </a:ext>
             <a:ext uri="{91240B29-F687-4f45-9708-019B960494DF}">
-              <a14:hiddenLine xmlns="" xmlns:a14="http://schemas.microsoft.com/office/drawing/2010/main" w="9525">
+              <a14:hiddenLine xmlns:a14="http://schemas.microsoft.com/office/drawing/2010/main" xmlns="" w="9525">
                 <a:solidFill>
                   <a:srgbClr val="000000"/>
                 </a:solidFill>
@@ -2319,14 +2322,14 @@
           <a:noFill/>
           <a:extLst>
             <a:ext uri="{909E8E84-426E-40dd-AFC4-6F175D3DCCD1}">
-              <a14:hiddenFill xmlns="" xmlns:a14="http://schemas.microsoft.com/office/drawing/2010/main">
+              <a14:hiddenFill xmlns:a14="http://schemas.microsoft.com/office/drawing/2010/main" xmlns="">
                 <a:solidFill>
                   <a:srgbClr val="FFFFFF"/>
                 </a:solidFill>
               </a14:hiddenFill>
             </a:ext>
             <a:ext uri="{91240B29-F687-4f45-9708-019B960494DF}">
-              <a14:hiddenLine xmlns="" xmlns:a14="http://schemas.microsoft.com/office/drawing/2010/main" w="9525">
+              <a14:hiddenLine xmlns:a14="http://schemas.microsoft.com/office/drawing/2010/main" xmlns="" w="9525">
                 <a:solidFill>
                   <a:srgbClr val="000000"/>
                 </a:solidFill>
@@ -2456,7 +2459,7 @@
                 <a:latin typeface="Times New Roman" charset="0"/>
               </a:rPr>
               <a:pPr algn="r"/>
-              <a:t>29</a:t>
+              <a:t>32</a:t>
             </a:fld>
             <a:endParaRPr lang="en-GB" altLang="en-US" sz="1200" b="0">
               <a:solidFill>
@@ -2498,7 +2501,7 @@
         <p:spPr>
           <a:extLst>
             <a:ext uri="{FAA26D3D-D897-4be2-8F04-BA451C77F1D7}">
-              <ma14:placeholderFlag xmlns="" xmlns:ma14="http://schemas.microsoft.com/office/mac/drawingml/2011/main" val="1"/>
+              <ma14:placeholderFlag xmlns:ma14="http://schemas.microsoft.com/office/mac/drawingml/2011/main" xmlns="" val="1"/>
             </a:ext>
           </a:extLst>
         </p:spPr>
@@ -2663,14 +2666,14 @@
           <a:noFill/>
           <a:extLst>
             <a:ext uri="{909E8E84-426E-40dd-AFC4-6F175D3DCCD1}">
-              <a14:hiddenFill xmlns="" xmlns:a14="http://schemas.microsoft.com/office/drawing/2010/main">
+              <a14:hiddenFill xmlns:a14="http://schemas.microsoft.com/office/drawing/2010/main" xmlns="">
                 <a:solidFill>
                   <a:srgbClr val="FFFFFF"/>
                 </a:solidFill>
               </a14:hiddenFill>
             </a:ext>
             <a:ext uri="{91240B29-F687-4f45-9708-019B960494DF}">
-              <a14:hiddenLine xmlns="" xmlns:a14="http://schemas.microsoft.com/office/drawing/2010/main" w="9525">
+              <a14:hiddenLine xmlns:a14="http://schemas.microsoft.com/office/drawing/2010/main" xmlns="" w="9525">
                 <a:solidFill>
                   <a:srgbClr val="000000"/>
                 </a:solidFill>
@@ -2818,14 +2821,14 @@
           <a:noFill/>
           <a:extLst>
             <a:ext uri="{909E8E84-426E-40dd-AFC4-6F175D3DCCD1}">
-              <a14:hiddenFill xmlns="" xmlns:a14="http://schemas.microsoft.com/office/drawing/2010/main">
+              <a14:hiddenFill xmlns:a14="http://schemas.microsoft.com/office/drawing/2010/main" xmlns="">
                 <a:solidFill>
                   <a:srgbClr val="FFFFFF"/>
                 </a:solidFill>
               </a14:hiddenFill>
             </a:ext>
             <a:ext uri="{91240B29-F687-4f45-9708-019B960494DF}">
-              <a14:hiddenLine xmlns="" xmlns:a14="http://schemas.microsoft.com/office/drawing/2010/main" w="9525">
+              <a14:hiddenLine xmlns:a14="http://schemas.microsoft.com/office/drawing/2010/main" xmlns="" w="9525">
                 <a:solidFill>
                   <a:srgbClr val="000000"/>
                 </a:solidFill>
@@ -2973,14 +2976,14 @@
           <a:noFill/>
           <a:extLst>
             <a:ext uri="{909E8E84-426E-40dd-AFC4-6F175D3DCCD1}">
-              <a14:hiddenFill xmlns="" xmlns:a14="http://schemas.microsoft.com/office/drawing/2010/main">
+              <a14:hiddenFill xmlns:a14="http://schemas.microsoft.com/office/drawing/2010/main" xmlns="">
                 <a:solidFill>
                   <a:srgbClr val="FFFFFF"/>
                 </a:solidFill>
               </a14:hiddenFill>
             </a:ext>
             <a:ext uri="{91240B29-F687-4f45-9708-019B960494DF}">
-              <a14:hiddenLine xmlns="" xmlns:a14="http://schemas.microsoft.com/office/drawing/2010/main" w="9525">
+              <a14:hiddenLine xmlns:a14="http://schemas.microsoft.com/office/drawing/2010/main" xmlns="" w="9525">
                 <a:solidFill>
                   <a:srgbClr val="000000"/>
                 </a:solidFill>
@@ -3152,7 +3155,7 @@
         <p:spPr>
           <a:extLst>
             <a:ext uri="{FAA26D3D-D897-4be2-8F04-BA451C77F1D7}">
-              <ma14:placeholderFlag xmlns="" xmlns:ma14="http://schemas.microsoft.com/office/mac/drawingml/2011/main" val="1"/>
+              <ma14:placeholderFlag xmlns:ma14="http://schemas.microsoft.com/office/mac/drawingml/2011/main" xmlns="" val="1"/>
             </a:ext>
           </a:extLst>
         </p:spPr>
@@ -3696,14 +3699,14 @@
           <a:noFill/>
           <a:extLst>
             <a:ext uri="{909E8E84-426E-40dd-AFC4-6F175D3DCCD1}">
-              <a14:hiddenFill xmlns="" xmlns:a14="http://schemas.microsoft.com/office/drawing/2010/main">
+              <a14:hiddenFill xmlns:a14="http://schemas.microsoft.com/office/drawing/2010/main" xmlns="">
                 <a:solidFill>
                   <a:srgbClr val="FFFFFF"/>
                 </a:solidFill>
               </a14:hiddenFill>
             </a:ext>
             <a:ext uri="{91240B29-F687-4f45-9708-019B960494DF}">
-              <a14:hiddenLine xmlns="" xmlns:a14="http://schemas.microsoft.com/office/drawing/2010/main" w="9525">
+              <a14:hiddenLine xmlns:a14="http://schemas.microsoft.com/office/drawing/2010/main" xmlns="" w="9525">
                 <a:solidFill>
                   <a:srgbClr val="000000"/>
                 </a:solidFill>
@@ -3851,14 +3854,14 @@
           <a:noFill/>
           <a:extLst>
             <a:ext uri="{909E8E84-426E-40dd-AFC4-6F175D3DCCD1}">
-              <a14:hiddenFill xmlns="" xmlns:a14="http://schemas.microsoft.com/office/drawing/2010/main">
+              <a14:hiddenFill xmlns:a14="http://schemas.microsoft.com/office/drawing/2010/main" xmlns="">
                 <a:solidFill>
                   <a:srgbClr val="FFFFFF"/>
                 </a:solidFill>
               </a14:hiddenFill>
             </a:ext>
             <a:ext uri="{91240B29-F687-4f45-9708-019B960494DF}">
-              <a14:hiddenLine xmlns="" xmlns:a14="http://schemas.microsoft.com/office/drawing/2010/main" w="9525">
+              <a14:hiddenLine xmlns:a14="http://schemas.microsoft.com/office/drawing/2010/main" xmlns="" w="9525">
                 <a:solidFill>
                   <a:srgbClr val="000000"/>
                 </a:solidFill>
@@ -4006,14 +4009,14 @@
           <a:noFill/>
           <a:extLst>
             <a:ext uri="{909E8E84-426E-40dd-AFC4-6F175D3DCCD1}">
-              <a14:hiddenFill xmlns="" xmlns:a14="http://schemas.microsoft.com/office/drawing/2010/main">
+              <a14:hiddenFill xmlns:a14="http://schemas.microsoft.com/office/drawing/2010/main" xmlns="">
                 <a:solidFill>
                   <a:srgbClr val="FFFFFF"/>
                 </a:solidFill>
               </a14:hiddenFill>
             </a:ext>
             <a:ext uri="{91240B29-F687-4f45-9708-019B960494DF}">
-              <a14:hiddenLine xmlns="" xmlns:a14="http://schemas.microsoft.com/office/drawing/2010/main" w="9525">
+              <a14:hiddenLine xmlns:a14="http://schemas.microsoft.com/office/drawing/2010/main" xmlns="" w="9525">
                 <a:solidFill>
                   <a:srgbClr val="000000"/>
                 </a:solidFill>
@@ -4143,7 +4146,7 @@
                 <a:latin typeface="Times New Roman" charset="0"/>
               </a:rPr>
               <a:pPr algn="r"/>
-              <a:t>25</a:t>
+              <a:t>28</a:t>
             </a:fld>
             <a:endParaRPr lang="en-GB" altLang="en-US" sz="1200" b="0">
               <a:solidFill>
@@ -4199,7 +4202,7 @@
           </a:ln>
           <a:extLst>
             <a:ext uri="{FAA26D3D-D897-4be2-8F04-BA451C77F1D7}">
-              <ma14:placeholderFlag xmlns="" xmlns:ma14="http://schemas.microsoft.com/office/mac/drawingml/2011/main" val="1"/>
+              <ma14:placeholderFlag xmlns:ma14="http://schemas.microsoft.com/office/mac/drawingml/2011/main" xmlns="" val="1"/>
             </a:ext>
           </a:extLst>
         </p:spPr>
@@ -4411,7 +4414,7 @@
           <a:p>
             <a:fld id="{C764DE79-268F-4C1A-8933-263129D2AF90}" type="datetimeFigureOut">
               <a:rPr lang="en-US" smtClean="0"/>
-              <a:t>9/24/25</a:t>
+              <a:t>9/25/25</a:t>
             </a:fld>
             <a:endParaRPr lang="en-US" dirty="0"/>
           </a:p>
@@ -4582,7 +4585,7 @@
           <a:p>
             <a:fld id="{C764DE79-268F-4C1A-8933-263129D2AF90}" type="datetimeFigureOut">
               <a:rPr lang="en-US" smtClean="0"/>
-              <a:t>9/24/25</a:t>
+              <a:t>9/25/25</a:t>
             </a:fld>
             <a:endParaRPr lang="en-US" dirty="0"/>
           </a:p>
@@ -4763,7 +4766,7 @@
           <a:p>
             <a:fld id="{C764DE79-268F-4C1A-8933-263129D2AF90}" type="datetimeFigureOut">
               <a:rPr lang="en-US" smtClean="0"/>
-              <a:t>9/24/25</a:t>
+              <a:t>9/25/25</a:t>
             </a:fld>
             <a:endParaRPr lang="en-US" dirty="0"/>
           </a:p>
@@ -5494,7 +5497,7 @@
           <a:p>
             <a:fld id="{C764DE79-268F-4C1A-8933-263129D2AF90}" type="datetimeFigureOut">
               <a:rPr lang="en-US" smtClean="0"/>
-              <a:t>9/24/25</a:t>
+              <a:t>9/25/25</a:t>
             </a:fld>
             <a:endParaRPr lang="en-US" dirty="0"/>
           </a:p>
@@ -5866,7 +5869,7 @@
           <a:p>
             <a:fld id="{C764DE79-268F-4C1A-8933-263129D2AF90}" type="datetimeFigureOut">
               <a:rPr lang="en-US" smtClean="0"/>
-              <a:t>9/24/25</a:t>
+              <a:t>9/25/25</a:t>
             </a:fld>
             <a:endParaRPr lang="en-US" dirty="0"/>
           </a:p>
@@ -6166,7 +6169,7 @@
           <a:p>
             <a:fld id="{C764DE79-268F-4C1A-8933-263129D2AF90}" type="datetimeFigureOut">
               <a:rPr lang="en-US" smtClean="0"/>
-              <a:t>9/24/25</a:t>
+              <a:t>9/25/25</a:t>
             </a:fld>
             <a:endParaRPr lang="en-US" dirty="0"/>
           </a:p>
@@ -6713,7 +6716,7 @@
           <a:p>
             <a:fld id="{C764DE79-268F-4C1A-8933-263129D2AF90}" type="datetimeFigureOut">
               <a:rPr lang="en-US" smtClean="0"/>
-              <a:t>9/24/25</a:t>
+              <a:t>9/25/25</a:t>
             </a:fld>
             <a:endParaRPr lang="en-US" dirty="0"/>
           </a:p>
@@ -6919,7 +6922,7 @@
           <a:p>
             <a:fld id="{C764DE79-268F-4C1A-8933-263129D2AF90}" type="datetimeFigureOut">
               <a:rPr lang="en-US" smtClean="0"/>
-              <a:t>9/24/25</a:t>
+              <a:t>9/25/25</a:t>
             </a:fld>
             <a:endParaRPr lang="en-US" dirty="0"/>
           </a:p>
@@ -7131,7 +7134,7 @@
           <a:p>
             <a:fld id="{C764DE79-268F-4C1A-8933-263129D2AF90}" type="datetimeFigureOut">
               <a:rPr lang="en-US" smtClean="0"/>
-              <a:t>9/24/25</a:t>
+              <a:t>9/25/25</a:t>
             </a:fld>
             <a:endParaRPr lang="en-US" dirty="0"/>
           </a:p>
@@ -7408,7 +7411,7 @@
           <a:p>
             <a:fld id="{C764DE79-268F-4C1A-8933-263129D2AF90}" type="datetimeFigureOut">
               <a:rPr lang="en-US" smtClean="0"/>
-              <a:t>9/24/25</a:t>
+              <a:t>9/25/25</a:t>
             </a:fld>
             <a:endParaRPr lang="en-US" dirty="0"/>
           </a:p>
@@ -7666,7 +7669,7 @@
           <a:p>
             <a:fld id="{C764DE79-268F-4C1A-8933-263129D2AF90}" type="datetimeFigureOut">
               <a:rPr lang="en-US" smtClean="0"/>
-              <a:t>9/24/25</a:t>
+              <a:t>9/25/25</a:t>
             </a:fld>
             <a:endParaRPr lang="en-US" dirty="0"/>
           </a:p>
@@ -7885,7 +7888,7 @@
           <a:p>
             <a:fld id="{C764DE79-268F-4C1A-8933-263129D2AF90}" type="datetimeFigureOut">
               <a:rPr lang="en-US" smtClean="0"/>
-              <a:t>9/24/25</a:t>
+              <a:t>9/25/25</a:t>
             </a:fld>
             <a:endParaRPr lang="en-US" dirty="0"/>
           </a:p>
@@ -8354,14 +8357,14 @@
           </a:ln>
           <a:extLst>
             <a:ext uri="{909E8E84-426E-40dd-AFC4-6F175D3DCCD1}">
-              <a14:hiddenFill xmlns="" xmlns:a14="http://schemas.microsoft.com/office/drawing/2010/main">
+              <a14:hiddenFill xmlns:a14="http://schemas.microsoft.com/office/drawing/2010/main" xmlns="">
                 <a:solidFill>
                   <a:srgbClr val="FFFFFF"/>
                 </a:solidFill>
               </a14:hiddenFill>
             </a:ext>
             <a:ext uri="{91240B29-F687-4f45-9708-019B960494DF}">
-              <a14:hiddenLine xmlns="" xmlns:a14="http://schemas.microsoft.com/office/drawing/2010/main" w="9525">
+              <a14:hiddenLine xmlns:a14="http://schemas.microsoft.com/office/drawing/2010/main" xmlns="" w="9525">
                 <a:solidFill>
                   <a:srgbClr val="000000"/>
                 </a:solidFill>
@@ -10658,7 +10661,7 @@
             </a:pPr>
             <a:r>
               <a:rPr lang="en-IE" dirty="0"/>
-              <a:t>Java Keywords</a:t>
+              <a:t>Java Keywords, tokens</a:t>
             </a:r>
           </a:p>
           <a:p>
@@ -10958,111 +10961,152 @@
         </p:nvSpPr>
         <p:spPr>
           <a:xfrm>
-            <a:off x="1981200" y="1600200"/>
-            <a:ext cx="8229600" cy="4800600"/>
+            <a:off x="0" y="1600200"/>
+            <a:ext cx="10560496" cy="4983162"/>
           </a:xfrm>
         </p:spPr>
         <p:txBody>
           <a:bodyPr>
-            <a:normAutofit fontScale="70000" lnSpcReduction="20000"/>
+            <a:noAutofit/>
           </a:bodyPr>
           <a:lstStyle/>
           <a:p>
             <a:r>
-              <a:rPr lang="en-IE" dirty="0"/>
+              <a:rPr lang="en-IE" sz="2800" dirty="0"/>
               <a:t>In Java, when we define a variable, we </a:t>
             </a:r>
             <a:r>
-              <a:rPr lang="en-IE" b="1" u="sng" dirty="0"/>
+              <a:rPr lang="en-IE" sz="2800" b="1" u="sng" dirty="0"/>
               <a:t>have</a:t>
             </a:r>
             <a:r>
-              <a:rPr lang="en-IE" dirty="0"/>
+              <a:rPr lang="en-IE" sz="2800" dirty="0"/>
               <a:t> to give it a data type.</a:t>
             </a:r>
           </a:p>
           <a:p>
-            <a:endParaRPr lang="en-IE" dirty="0"/>
-          </a:p>
-          <a:p>
-            <a:r>
-              <a:rPr lang="en-IE" dirty="0"/>
+            <a:endParaRPr lang="en-IE" sz="2800" dirty="0"/>
+          </a:p>
+          <a:p>
+            <a:r>
+              <a:rPr lang="en-IE" sz="2800" dirty="0"/>
               <a:t>The data type defines the </a:t>
             </a:r>
             <a:r>
-              <a:rPr lang="en-IE" b="1" u="sng" dirty="0"/>
+              <a:rPr lang="en-IE" sz="2800" b="1" u="sng" dirty="0"/>
               <a:t>kinds of values</a:t>
             </a:r>
             <a:r>
-              <a:rPr lang="en-IE" b="1" dirty="0"/>
+              <a:rPr lang="en-IE" sz="2800" b="1" dirty="0"/>
               <a:t> </a:t>
             </a:r>
             <a:r>
-              <a:rPr lang="en-IE" dirty="0"/>
+              <a:rPr lang="en-IE" sz="2800" dirty="0"/>
               <a:t>(data) that can be stored in the variable e.g. </a:t>
             </a:r>
           </a:p>
           <a:p>
             <a:pPr lvl="2"/>
             <a:r>
-              <a:rPr lang="en-IE" sz="2900" dirty="0"/>
+              <a:rPr lang="en-IE" sz="2800" dirty="0"/>
               <a:t>- 456</a:t>
             </a:r>
           </a:p>
           <a:p>
             <a:pPr lvl="2"/>
             <a:r>
-              <a:rPr lang="en-IE" sz="2900" dirty="0"/>
+              <a:rPr lang="en-IE" sz="2800" dirty="0"/>
               <a:t>2</a:t>
             </a:r>
           </a:p>
           <a:p>
             <a:pPr lvl="2"/>
             <a:r>
-              <a:rPr lang="en-IE" sz="2900" dirty="0"/>
+              <a:rPr lang="en-IE" sz="2800" dirty="0"/>
               <a:t>45.7897</a:t>
-            </a:r>
-          </a:p>
-          <a:p>
-            <a:pPr lvl="2"/>
-            <a:r>
-              <a:rPr lang="en-IE" sz="2900" dirty="0"/>
-              <a:t>I Love Programming</a:t>
-            </a:r>
-          </a:p>
-          <a:p>
-            <a:pPr lvl="2"/>
-            <a:r>
-              <a:rPr lang="en-IE" sz="2900" dirty="0"/>
-              <a:t>S</a:t>
-            </a:r>
-          </a:p>
-          <a:p>
-            <a:pPr lvl="2"/>
-            <a:r>
-              <a:rPr lang="en-IE" sz="2900" dirty="0"/>
-              <a:t>true</a:t>
             </a:r>
           </a:p>
           <a:p>
             <a:pPr marL="914400" lvl="2" indent="0">
               <a:buNone/>
             </a:pPr>
-            <a:endParaRPr lang="en-IE" sz="2900" dirty="0"/>
-          </a:p>
-          <a:p>
-            <a:r>
-              <a:rPr lang="en-US" dirty="0"/>
+            <a:endParaRPr lang="en-IE" sz="2800" dirty="0"/>
+          </a:p>
+          <a:p>
+            <a:r>
+              <a:rPr lang="en-US" sz="2800" dirty="0"/>
               <a:t>The data type also determines the </a:t>
             </a:r>
             <a:r>
-              <a:rPr lang="en-US" b="1" u="sng" dirty="0"/>
+              <a:rPr lang="en-US" sz="2800" b="1" u="sng" dirty="0"/>
               <a:t>operations</a:t>
             </a:r>
             <a:r>
-              <a:rPr lang="en-US" dirty="0"/>
+              <a:rPr lang="en-US" sz="2800" dirty="0"/>
               <a:t> that may be performed on it.</a:t>
             </a:r>
+          </a:p>
+        </p:txBody>
+      </p:sp>
+      <p:sp>
+        <p:nvSpPr>
+          <p:cNvPr id="6" name="TextBox 5">
+            <a:extLst>
+              <a:ext uri="{FF2B5EF4-FFF2-40B4-BE49-F238E27FC236}">
+                <a16:creationId xmlns:a16="http://schemas.microsoft.com/office/drawing/2014/main" id="{2F569317-95B6-AEA3-8D40-0A99CC3F8C03}"/>
+              </a:ext>
+            </a:extLst>
+          </p:cNvPr>
+          <p:cNvSpPr txBox="1"/>
+          <p:nvPr/>
+        </p:nvSpPr>
+        <p:spPr>
+          <a:xfrm>
+            <a:off x="3287688" y="4149080"/>
+            <a:ext cx="10225136" cy="1661993"/>
+          </a:xfrm>
+          <a:prstGeom prst="rect">
+            <a:avLst/>
+          </a:prstGeom>
+          <a:noFill/>
+        </p:spPr>
+        <p:txBody>
+          <a:bodyPr wrap="square" rtlCol="0">
+            <a:spAutoFit/>
+          </a:bodyPr>
+          <a:lstStyle/>
+          <a:p>
+            <a:pPr marL="1371600" lvl="2" indent="-457200">
+              <a:buFont typeface="Arial" panose="020B0604020202020204" pitchFamily="34" charset="0"/>
+              <a:buChar char="•"/>
+            </a:pPr>
+            <a:r>
+              <a:rPr lang="en-IE" sz="2800" dirty="0"/>
+              <a:t>I Love Programming</a:t>
+            </a:r>
+          </a:p>
+          <a:p>
+            <a:pPr marL="1371600" lvl="2" indent="-457200">
+              <a:buFont typeface="Arial" panose="020B0604020202020204" pitchFamily="34" charset="0"/>
+              <a:buChar char="•"/>
+            </a:pPr>
+            <a:r>
+              <a:rPr lang="en-IE" sz="2800" dirty="0"/>
+              <a:t>S</a:t>
+            </a:r>
+          </a:p>
+          <a:p>
+            <a:pPr marL="1371600" lvl="2" indent="-457200">
+              <a:buFont typeface="Arial" panose="020B0604020202020204" pitchFamily="34" charset="0"/>
+              <a:buChar char="•"/>
+            </a:pPr>
+            <a:r>
+              <a:rPr lang="en-IE" sz="2800" dirty="0"/>
+              <a:t>true</a:t>
+            </a:r>
+          </a:p>
+          <a:p>
+            <a:endParaRPr lang="en-US" dirty="0"/>
           </a:p>
         </p:txBody>
       </p:sp>
@@ -11627,7 +11671,7 @@
                                         <p:tgtEl>
                                           <p:spTgt spid="3">
                                             <p:txEl>
-                                              <p:pRg st="6" end="6"/>
+                                              <p:pRg st="7" end="7"/>
                                             </p:txEl>
                                           </p:spTgt>
                                         </p:tgtEl>
@@ -11645,109 +11689,6 @@
                                         <p:tgtEl>
                                           <p:spTgt spid="3">
                                             <p:txEl>
-                                              <p:pRg st="6" end="6"/>
-                                            </p:txEl>
-                                          </p:spTgt>
-                                        </p:tgtEl>
-                                        <p:attrNameLst>
-                                          <p:attrName>ppt_x</p:attrName>
-                                        </p:attrNameLst>
-                                      </p:cBhvr>
-                                      <p:tavLst>
-                                        <p:tav tm="0">
-                                          <p:val>
-                                            <p:strVal val="#ppt_x"/>
-                                          </p:val>
-                                        </p:tav>
-                                        <p:tav tm="100000">
-                                          <p:val>
-                                            <p:strVal val="#ppt_x"/>
-                                          </p:val>
-                                        </p:tav>
-                                      </p:tavLst>
-                                    </p:anim>
-                                    <p:anim calcmode="lin" valueType="num">
-                                      <p:cBhvr additive="base">
-                                        <p:cTn id="38" dur="500" fill="hold"/>
-                                        <p:tgtEl>
-                                          <p:spTgt spid="3">
-                                            <p:txEl>
-                                              <p:pRg st="6" end="6"/>
-                                            </p:txEl>
-                                          </p:spTgt>
-                                        </p:tgtEl>
-                                        <p:attrNameLst>
-                                          <p:attrName>ppt_y</p:attrName>
-                                        </p:attrNameLst>
-                                      </p:cBhvr>
-                                      <p:tavLst>
-                                        <p:tav tm="0">
-                                          <p:val>
-                                            <p:strVal val="1+#ppt_h/2"/>
-                                          </p:val>
-                                        </p:tav>
-                                        <p:tav tm="100000">
-                                          <p:val>
-                                            <p:strVal val="#ppt_y"/>
-                                          </p:val>
-                                        </p:tav>
-                                      </p:tavLst>
-                                    </p:anim>
-                                  </p:childTnLst>
-                                </p:cTn>
-                              </p:par>
-                            </p:childTnLst>
-                          </p:cTn>
-                        </p:par>
-                      </p:childTnLst>
-                    </p:cTn>
-                  </p:par>
-                  <p:par>
-                    <p:cTn id="39" fill="hold">
-                      <p:stCondLst>
-                        <p:cond delay="indefinite"/>
-                      </p:stCondLst>
-                      <p:childTnLst>
-                        <p:par>
-                          <p:cTn id="40" fill="hold">
-                            <p:stCondLst>
-                              <p:cond delay="0"/>
-                            </p:stCondLst>
-                            <p:childTnLst>
-                              <p:par>
-                                <p:cTn id="41" presetID="2" presetClass="entr" presetSubtype="4" fill="hold" nodeType="clickEffect">
-                                  <p:stCondLst>
-                                    <p:cond delay="0"/>
-                                  </p:stCondLst>
-                                  <p:childTnLst>
-                                    <p:set>
-                                      <p:cBhvr>
-                                        <p:cTn id="42" dur="1" fill="hold">
-                                          <p:stCondLst>
-                                            <p:cond delay="0"/>
-                                          </p:stCondLst>
-                                        </p:cTn>
-                                        <p:tgtEl>
-                                          <p:spTgt spid="3">
-                                            <p:txEl>
-                                              <p:pRg st="7" end="7"/>
-                                            </p:txEl>
-                                          </p:spTgt>
-                                        </p:tgtEl>
-                                        <p:attrNameLst>
-                                          <p:attrName>style.visibility</p:attrName>
-                                        </p:attrNameLst>
-                                      </p:cBhvr>
-                                      <p:to>
-                                        <p:strVal val="visible"/>
-                                      </p:to>
-                                    </p:set>
-                                    <p:anim calcmode="lin" valueType="num">
-                                      <p:cBhvr additive="base">
-                                        <p:cTn id="43" dur="500" fill="hold"/>
-                                        <p:tgtEl>
-                                          <p:spTgt spid="3">
-                                            <p:txEl>
                                               <p:pRg st="7" end="7"/>
                                             </p:txEl>
                                           </p:spTgt>
@@ -11771,217 +11712,11 @@
                                     </p:anim>
                                     <p:anim calcmode="lin" valueType="num">
                                       <p:cBhvr additive="base">
-                                        <p:cTn id="44" dur="500" fill="hold"/>
+                                        <p:cTn id="38" dur="500" fill="hold"/>
                                         <p:tgtEl>
                                           <p:spTgt spid="3">
                                             <p:txEl>
                                               <p:pRg st="7" end="7"/>
-                                            </p:txEl>
-                                          </p:spTgt>
-                                        </p:tgtEl>
-                                        <p:attrNameLst>
-                                          <p:attrName>ppt_y</p:attrName>
-                                        </p:attrNameLst>
-                                      </p:cBhvr>
-                                      <p:tavLst>
-                                        <p:tav tm="0">
-                                          <p:val>
-                                            <p:strVal val="1+#ppt_h/2"/>
-                                          </p:val>
-                                        </p:tav>
-                                        <p:tav tm="100000">
-                                          <p:val>
-                                            <p:strVal val="#ppt_y"/>
-                                          </p:val>
-                                        </p:tav>
-                                      </p:tavLst>
-                                    </p:anim>
-                                  </p:childTnLst>
-                                </p:cTn>
-                              </p:par>
-                            </p:childTnLst>
-                          </p:cTn>
-                        </p:par>
-                      </p:childTnLst>
-                    </p:cTn>
-                  </p:par>
-                  <p:par>
-                    <p:cTn id="45" fill="hold">
-                      <p:stCondLst>
-                        <p:cond delay="indefinite"/>
-                      </p:stCondLst>
-                      <p:childTnLst>
-                        <p:par>
-                          <p:cTn id="46" fill="hold">
-                            <p:stCondLst>
-                              <p:cond delay="0"/>
-                            </p:stCondLst>
-                            <p:childTnLst>
-                              <p:par>
-                                <p:cTn id="47" presetID="2" presetClass="entr" presetSubtype="4" fill="hold" nodeType="clickEffect">
-                                  <p:stCondLst>
-                                    <p:cond delay="0"/>
-                                  </p:stCondLst>
-                                  <p:childTnLst>
-                                    <p:set>
-                                      <p:cBhvr>
-                                        <p:cTn id="48" dur="1" fill="hold">
-                                          <p:stCondLst>
-                                            <p:cond delay="0"/>
-                                          </p:stCondLst>
-                                        </p:cTn>
-                                        <p:tgtEl>
-                                          <p:spTgt spid="3">
-                                            <p:txEl>
-                                              <p:pRg st="8" end="8"/>
-                                            </p:txEl>
-                                          </p:spTgt>
-                                        </p:tgtEl>
-                                        <p:attrNameLst>
-                                          <p:attrName>style.visibility</p:attrName>
-                                        </p:attrNameLst>
-                                      </p:cBhvr>
-                                      <p:to>
-                                        <p:strVal val="visible"/>
-                                      </p:to>
-                                    </p:set>
-                                    <p:anim calcmode="lin" valueType="num">
-                                      <p:cBhvr additive="base">
-                                        <p:cTn id="49" dur="500" fill="hold"/>
-                                        <p:tgtEl>
-                                          <p:spTgt spid="3">
-                                            <p:txEl>
-                                              <p:pRg st="8" end="8"/>
-                                            </p:txEl>
-                                          </p:spTgt>
-                                        </p:tgtEl>
-                                        <p:attrNameLst>
-                                          <p:attrName>ppt_x</p:attrName>
-                                        </p:attrNameLst>
-                                      </p:cBhvr>
-                                      <p:tavLst>
-                                        <p:tav tm="0">
-                                          <p:val>
-                                            <p:strVal val="#ppt_x"/>
-                                          </p:val>
-                                        </p:tav>
-                                        <p:tav tm="100000">
-                                          <p:val>
-                                            <p:strVal val="#ppt_x"/>
-                                          </p:val>
-                                        </p:tav>
-                                      </p:tavLst>
-                                    </p:anim>
-                                    <p:anim calcmode="lin" valueType="num">
-                                      <p:cBhvr additive="base">
-                                        <p:cTn id="50" dur="500" fill="hold"/>
-                                        <p:tgtEl>
-                                          <p:spTgt spid="3">
-                                            <p:txEl>
-                                              <p:pRg st="8" end="8"/>
-                                            </p:txEl>
-                                          </p:spTgt>
-                                        </p:tgtEl>
-                                        <p:attrNameLst>
-                                          <p:attrName>ppt_y</p:attrName>
-                                        </p:attrNameLst>
-                                      </p:cBhvr>
-                                      <p:tavLst>
-                                        <p:tav tm="0">
-                                          <p:val>
-                                            <p:strVal val="1+#ppt_h/2"/>
-                                          </p:val>
-                                        </p:tav>
-                                        <p:tav tm="100000">
-                                          <p:val>
-                                            <p:strVal val="#ppt_y"/>
-                                          </p:val>
-                                        </p:tav>
-                                      </p:tavLst>
-                                    </p:anim>
-                                  </p:childTnLst>
-                                </p:cTn>
-                              </p:par>
-                            </p:childTnLst>
-                          </p:cTn>
-                        </p:par>
-                      </p:childTnLst>
-                    </p:cTn>
-                  </p:par>
-                  <p:par>
-                    <p:cTn id="51" fill="hold">
-                      <p:stCondLst>
-                        <p:cond delay="indefinite"/>
-                      </p:stCondLst>
-                      <p:childTnLst>
-                        <p:par>
-                          <p:cTn id="52" fill="hold">
-                            <p:stCondLst>
-                              <p:cond delay="0"/>
-                            </p:stCondLst>
-                            <p:childTnLst>
-                              <p:par>
-                                <p:cTn id="53" presetID="2" presetClass="entr" presetSubtype="4" fill="hold" nodeType="clickEffect">
-                                  <p:stCondLst>
-                                    <p:cond delay="0"/>
-                                  </p:stCondLst>
-                                  <p:childTnLst>
-                                    <p:set>
-                                      <p:cBhvr>
-                                        <p:cTn id="54" dur="1" fill="hold">
-                                          <p:stCondLst>
-                                            <p:cond delay="0"/>
-                                          </p:stCondLst>
-                                        </p:cTn>
-                                        <p:tgtEl>
-                                          <p:spTgt spid="3">
-                                            <p:txEl>
-                                              <p:pRg st="10" end="10"/>
-                                            </p:txEl>
-                                          </p:spTgt>
-                                        </p:tgtEl>
-                                        <p:attrNameLst>
-                                          <p:attrName>style.visibility</p:attrName>
-                                        </p:attrNameLst>
-                                      </p:cBhvr>
-                                      <p:to>
-                                        <p:strVal val="visible"/>
-                                      </p:to>
-                                    </p:set>
-                                    <p:anim calcmode="lin" valueType="num">
-                                      <p:cBhvr additive="base">
-                                        <p:cTn id="55" dur="500" fill="hold"/>
-                                        <p:tgtEl>
-                                          <p:spTgt spid="3">
-                                            <p:txEl>
-                                              <p:pRg st="10" end="10"/>
-                                            </p:txEl>
-                                          </p:spTgt>
-                                        </p:tgtEl>
-                                        <p:attrNameLst>
-                                          <p:attrName>ppt_x</p:attrName>
-                                        </p:attrNameLst>
-                                      </p:cBhvr>
-                                      <p:tavLst>
-                                        <p:tav tm="0">
-                                          <p:val>
-                                            <p:strVal val="#ppt_x"/>
-                                          </p:val>
-                                        </p:tav>
-                                        <p:tav tm="100000">
-                                          <p:val>
-                                            <p:strVal val="#ppt_x"/>
-                                          </p:val>
-                                        </p:tav>
-                                      </p:tavLst>
-                                    </p:anim>
-                                    <p:anim calcmode="lin" valueType="num">
-                                      <p:cBhvr additive="base">
-                                        <p:cTn id="56" dur="500" fill="hold"/>
-                                        <p:tgtEl>
-                                          <p:spTgt spid="3">
-                                            <p:txEl>
-                                              <p:pRg st="10" end="10"/>
                                             </p:txEl>
                                           </p:spTgt>
                                         </p:tgtEl>
@@ -13163,7 +12898,7 @@
             </a:pPr>
             <a:r>
               <a:rPr lang="en-IE" dirty="0"/>
-              <a:t>Java Keywords</a:t>
+              <a:t>Java Keywords, tokens</a:t>
             </a:r>
           </a:p>
           <a:p>
@@ -15169,6 +14904,9 @@
           <a:prstGeom prst="frame">
             <a:avLst/>
           </a:prstGeom>
+          <a:solidFill>
+            <a:srgbClr val="FFC000"/>
+          </a:solidFill>
         </p:spPr>
         <p:style>
           <a:lnRef idx="2">
@@ -15249,6 +14987,68 @@
           </a:p>
         </p:txBody>
       </p:sp>
+      <p:sp>
+        <p:nvSpPr>
+          <p:cNvPr id="5" name="Line Callout 1 (Border and Accent Bar) 4">
+            <a:extLst>
+              <a:ext uri="{FF2B5EF4-FFF2-40B4-BE49-F238E27FC236}">
+                <a16:creationId xmlns:a16="http://schemas.microsoft.com/office/drawing/2014/main" id="{93889B07-AE43-C27E-5ED7-8A13D5EBEFD9}"/>
+              </a:ext>
+            </a:extLst>
+          </p:cNvPr>
+          <p:cNvSpPr/>
+          <p:nvPr/>
+        </p:nvSpPr>
+        <p:spPr>
+          <a:xfrm>
+            <a:off x="8256240" y="3001051"/>
+            <a:ext cx="2880320" cy="1207380"/>
+          </a:xfrm>
+          <a:prstGeom prst="accentBorderCallout1">
+            <a:avLst>
+              <a:gd name="adj1" fmla="val 18750"/>
+              <a:gd name="adj2" fmla="val -8333"/>
+              <a:gd name="adj3" fmla="val 118326"/>
+              <a:gd name="adj4" fmla="val -84732"/>
+            </a:avLst>
+          </a:prstGeom>
+        </p:spPr>
+        <p:style>
+          <a:lnRef idx="2">
+            <a:schemeClr val="accent1">
+              <a:shade val="15000"/>
+            </a:schemeClr>
+          </a:lnRef>
+          <a:fillRef idx="1">
+            <a:schemeClr val="accent1"/>
+          </a:fillRef>
+          <a:effectRef idx="0">
+            <a:schemeClr val="accent1"/>
+          </a:effectRef>
+          <a:fontRef idx="minor">
+            <a:schemeClr val="lt1"/>
+          </a:fontRef>
+        </p:style>
+        <p:txBody>
+          <a:bodyPr rtlCol="0" anchor="ctr"/>
+          <a:lstStyle/>
+          <a:p>
+            <a:pPr algn="ctr"/>
+            <a:r>
+              <a:rPr lang="en-US" dirty="0"/>
+              <a:t>We can assign a value at the same time as declaration. This is called </a:t>
+            </a:r>
+            <a:r>
+              <a:rPr lang="en-US" dirty="0">
+                <a:solidFill>
+                  <a:srgbClr val="FF0000"/>
+                </a:solidFill>
+              </a:rPr>
+              <a:t>defining the variable</a:t>
+            </a:r>
+          </a:p>
+        </p:txBody>
+      </p:sp>
     </p:spTree>
     <p:extLst>
       <p:ext uri="{BB962C8B-B14F-4D97-AF65-F5344CB8AC3E}">
@@ -15259,6 +15059,296 @@
   <p:clrMapOvr>
     <a:masterClrMapping/>
   </p:clrMapOvr>
+  <p:timing>
+    <p:tnLst>
+      <p:par>
+        <p:cTn id="1" dur="indefinite" restart="never" nodeType="tmRoot">
+          <p:childTnLst>
+            <p:seq concurrent="1" nextAc="seek">
+              <p:cTn id="2" dur="indefinite" nodeType="mainSeq">
+                <p:childTnLst>
+                  <p:par>
+                    <p:cTn id="3" fill="hold">
+                      <p:stCondLst>
+                        <p:cond delay="indefinite"/>
+                      </p:stCondLst>
+                      <p:childTnLst>
+                        <p:par>
+                          <p:cTn id="4" fill="hold">
+                            <p:stCondLst>
+                              <p:cond delay="0"/>
+                            </p:stCondLst>
+                            <p:childTnLst>
+                              <p:par>
+                                <p:cTn id="5" presetID="2" presetClass="entr" presetSubtype="4" fill="hold" grpId="0" nodeType="clickEffect">
+                                  <p:stCondLst>
+                                    <p:cond delay="0"/>
+                                  </p:stCondLst>
+                                  <p:childTnLst>
+                                    <p:set>
+                                      <p:cBhvr>
+                                        <p:cTn id="6" dur="1" fill="hold">
+                                          <p:stCondLst>
+                                            <p:cond delay="0"/>
+                                          </p:stCondLst>
+                                        </p:cTn>
+                                        <p:tgtEl>
+                                          <p:spTgt spid="11"/>
+                                        </p:tgtEl>
+                                        <p:attrNameLst>
+                                          <p:attrName>style.visibility</p:attrName>
+                                        </p:attrNameLst>
+                                      </p:cBhvr>
+                                      <p:to>
+                                        <p:strVal val="visible"/>
+                                      </p:to>
+                                    </p:set>
+                                    <p:anim calcmode="lin" valueType="num">
+                                      <p:cBhvr additive="base">
+                                        <p:cTn id="7" dur="500" fill="hold"/>
+                                        <p:tgtEl>
+                                          <p:spTgt spid="11"/>
+                                        </p:tgtEl>
+                                        <p:attrNameLst>
+                                          <p:attrName>ppt_x</p:attrName>
+                                        </p:attrNameLst>
+                                      </p:cBhvr>
+                                      <p:tavLst>
+                                        <p:tav tm="0">
+                                          <p:val>
+                                            <p:strVal val="#ppt_x"/>
+                                          </p:val>
+                                        </p:tav>
+                                        <p:tav tm="100000">
+                                          <p:val>
+                                            <p:strVal val="#ppt_x"/>
+                                          </p:val>
+                                        </p:tav>
+                                      </p:tavLst>
+                                    </p:anim>
+                                    <p:anim calcmode="lin" valueType="num">
+                                      <p:cBhvr additive="base">
+                                        <p:cTn id="8" dur="500" fill="hold"/>
+                                        <p:tgtEl>
+                                          <p:spTgt spid="11"/>
+                                        </p:tgtEl>
+                                        <p:attrNameLst>
+                                          <p:attrName>ppt_y</p:attrName>
+                                        </p:attrNameLst>
+                                      </p:cBhvr>
+                                      <p:tavLst>
+                                        <p:tav tm="0">
+                                          <p:val>
+                                            <p:strVal val="1+#ppt_h/2"/>
+                                          </p:val>
+                                        </p:tav>
+                                        <p:tav tm="100000">
+                                          <p:val>
+                                            <p:strVal val="#ppt_y"/>
+                                          </p:val>
+                                        </p:tav>
+                                      </p:tavLst>
+                                    </p:anim>
+                                  </p:childTnLst>
+                                </p:cTn>
+                              </p:par>
+                              <p:par>
+                                <p:cTn id="9" presetID="2" presetClass="entr" presetSubtype="4" fill="hold" grpId="0" nodeType="withEffect">
+                                  <p:stCondLst>
+                                    <p:cond delay="0"/>
+                                  </p:stCondLst>
+                                  <p:childTnLst>
+                                    <p:set>
+                                      <p:cBhvr>
+                                        <p:cTn id="10" dur="1" fill="hold">
+                                          <p:stCondLst>
+                                            <p:cond delay="0"/>
+                                          </p:stCondLst>
+                                        </p:cTn>
+                                        <p:tgtEl>
+                                          <p:spTgt spid="5"/>
+                                        </p:tgtEl>
+                                        <p:attrNameLst>
+                                          <p:attrName>style.visibility</p:attrName>
+                                        </p:attrNameLst>
+                                      </p:cBhvr>
+                                      <p:to>
+                                        <p:strVal val="visible"/>
+                                      </p:to>
+                                    </p:set>
+                                    <p:anim calcmode="lin" valueType="num">
+                                      <p:cBhvr additive="base">
+                                        <p:cTn id="11" dur="500" fill="hold"/>
+                                        <p:tgtEl>
+                                          <p:spTgt spid="5"/>
+                                        </p:tgtEl>
+                                        <p:attrNameLst>
+                                          <p:attrName>ppt_x</p:attrName>
+                                        </p:attrNameLst>
+                                      </p:cBhvr>
+                                      <p:tavLst>
+                                        <p:tav tm="0">
+                                          <p:val>
+                                            <p:strVal val="#ppt_x"/>
+                                          </p:val>
+                                        </p:tav>
+                                        <p:tav tm="100000">
+                                          <p:val>
+                                            <p:strVal val="#ppt_x"/>
+                                          </p:val>
+                                        </p:tav>
+                                      </p:tavLst>
+                                    </p:anim>
+                                    <p:anim calcmode="lin" valueType="num">
+                                      <p:cBhvr additive="base">
+                                        <p:cTn id="12" dur="500" fill="hold"/>
+                                        <p:tgtEl>
+                                          <p:spTgt spid="5"/>
+                                        </p:tgtEl>
+                                        <p:attrNameLst>
+                                          <p:attrName>ppt_y</p:attrName>
+                                        </p:attrNameLst>
+                                      </p:cBhvr>
+                                      <p:tavLst>
+                                        <p:tav tm="0">
+                                          <p:val>
+                                            <p:strVal val="1+#ppt_h/2"/>
+                                          </p:val>
+                                        </p:tav>
+                                        <p:tav tm="100000">
+                                          <p:val>
+                                            <p:strVal val="#ppt_y"/>
+                                          </p:val>
+                                        </p:tav>
+                                      </p:tavLst>
+                                    </p:anim>
+                                  </p:childTnLst>
+                                </p:cTn>
+                              </p:par>
+                            </p:childTnLst>
+                          </p:cTn>
+                        </p:par>
+                      </p:childTnLst>
+                    </p:cTn>
+                  </p:par>
+                  <p:par>
+                    <p:cTn id="13" fill="hold">
+                      <p:stCondLst>
+                        <p:cond delay="indefinite"/>
+                      </p:stCondLst>
+                      <p:childTnLst>
+                        <p:par>
+                          <p:cTn id="14" fill="hold">
+                            <p:stCondLst>
+                              <p:cond delay="0"/>
+                            </p:stCondLst>
+                            <p:childTnLst>
+                              <p:par>
+                                <p:cTn id="15" presetID="2" presetClass="entr" presetSubtype="4" fill="hold" grpId="0" nodeType="clickEffect">
+                                  <p:stCondLst>
+                                    <p:cond delay="0"/>
+                                  </p:stCondLst>
+                                  <p:childTnLst>
+                                    <p:set>
+                                      <p:cBhvr>
+                                        <p:cTn id="16" dur="1" fill="hold">
+                                          <p:stCondLst>
+                                            <p:cond delay="0"/>
+                                          </p:stCondLst>
+                                        </p:cTn>
+                                        <p:tgtEl>
+                                          <p:spTgt spid="10"/>
+                                        </p:tgtEl>
+                                        <p:attrNameLst>
+                                          <p:attrName>style.visibility</p:attrName>
+                                        </p:attrNameLst>
+                                      </p:cBhvr>
+                                      <p:to>
+                                        <p:strVal val="visible"/>
+                                      </p:to>
+                                    </p:set>
+                                    <p:anim calcmode="lin" valueType="num">
+                                      <p:cBhvr additive="base">
+                                        <p:cTn id="17" dur="500" fill="hold"/>
+                                        <p:tgtEl>
+                                          <p:spTgt spid="10"/>
+                                        </p:tgtEl>
+                                        <p:attrNameLst>
+                                          <p:attrName>ppt_x</p:attrName>
+                                        </p:attrNameLst>
+                                      </p:cBhvr>
+                                      <p:tavLst>
+                                        <p:tav tm="0">
+                                          <p:val>
+                                            <p:strVal val="#ppt_x"/>
+                                          </p:val>
+                                        </p:tav>
+                                        <p:tav tm="100000">
+                                          <p:val>
+                                            <p:strVal val="#ppt_x"/>
+                                          </p:val>
+                                        </p:tav>
+                                      </p:tavLst>
+                                    </p:anim>
+                                    <p:anim calcmode="lin" valueType="num">
+                                      <p:cBhvr additive="base">
+                                        <p:cTn id="18" dur="500" fill="hold"/>
+                                        <p:tgtEl>
+                                          <p:spTgt spid="10"/>
+                                        </p:tgtEl>
+                                        <p:attrNameLst>
+                                          <p:attrName>ppt_y</p:attrName>
+                                        </p:attrNameLst>
+                                      </p:cBhvr>
+                                      <p:tavLst>
+                                        <p:tav tm="0">
+                                          <p:val>
+                                            <p:strVal val="1+#ppt_h/2"/>
+                                          </p:val>
+                                        </p:tav>
+                                        <p:tav tm="100000">
+                                          <p:val>
+                                            <p:strVal val="#ppt_y"/>
+                                          </p:val>
+                                        </p:tav>
+                                      </p:tavLst>
+                                    </p:anim>
+                                  </p:childTnLst>
+                                </p:cTn>
+                              </p:par>
+                            </p:childTnLst>
+                          </p:cTn>
+                        </p:par>
+                      </p:childTnLst>
+                    </p:cTn>
+                  </p:par>
+                </p:childTnLst>
+              </p:cTn>
+              <p:prevCondLst>
+                <p:cond evt="onPrev" delay="0">
+                  <p:tgtEl>
+                    <p:sldTgt/>
+                  </p:tgtEl>
+                </p:cond>
+              </p:prevCondLst>
+              <p:nextCondLst>
+                <p:cond evt="onNext" delay="0">
+                  <p:tgtEl>
+                    <p:sldTgt/>
+                  </p:tgtEl>
+                </p:cond>
+              </p:nextCondLst>
+            </p:seq>
+          </p:childTnLst>
+        </p:cTn>
+      </p:par>
+    </p:tnLst>
+    <p:bldLst>
+      <p:bldP spid="10" grpId="0" animBg="1"/>
+      <p:bldP spid="11" grpId="0" animBg="1"/>
+      <p:bldP spid="5" grpId="0" animBg="1"/>
+    </p:bldLst>
+  </p:timing>
 </p:sld>
 </file>
 
@@ -15342,7 +15432,7 @@
             </a:pPr>
             <a:r>
               <a:rPr lang="en-IE" dirty="0"/>
-              <a:t>Java Keywords</a:t>
+              <a:t>Java Keywords, tokens</a:t>
             </a:r>
           </a:p>
           <a:p>
@@ -15630,7 +15720,7 @@
           <a:p>
             <a:r>
               <a:rPr lang="en-US" dirty="0"/>
-              <a:t>Declaring variables – some errors</a:t>
+              <a:t>Declaring variables – some errors - 1</a:t>
             </a:r>
           </a:p>
         </p:txBody>
@@ -16545,10 +16635,197 @@
   <p:cSld>
     <p:spTree>
       <p:nvGrpSpPr>
+        <p:cNvPr id="1" name=""/>
+        <p:cNvGrpSpPr/>
+        <p:nvPr/>
+      </p:nvGrpSpPr>
+      <p:grpSpPr>
+        <a:xfrm>
+          <a:off x="0" y="0"/>
+          <a:ext cx="0" cy="0"/>
+          <a:chOff x="0" y="0"/>
+          <a:chExt cx="0" cy="0"/>
+        </a:xfrm>
+      </p:grpSpPr>
+      <p:sp>
+        <p:nvSpPr>
+          <p:cNvPr id="3" name="Title 1">
+            <a:extLst>
+              <a:ext uri="{FF2B5EF4-FFF2-40B4-BE49-F238E27FC236}">
+                <a16:creationId xmlns:a16="http://schemas.microsoft.com/office/drawing/2014/main" id="{FEF6A1B6-5BB0-141D-92F7-56C4126B05B8}"/>
+              </a:ext>
+            </a:extLst>
+          </p:cNvPr>
+          <p:cNvSpPr txBox="1">
+            <a:spLocks/>
+          </p:cNvSpPr>
+          <p:nvPr/>
+        </p:nvSpPr>
+        <p:spPr>
+          <a:xfrm>
+            <a:off x="609600" y="274638"/>
+            <a:ext cx="10972800" cy="1143000"/>
+          </a:xfrm>
+          <a:prstGeom prst="rect">
+            <a:avLst/>
+          </a:prstGeom>
+        </p:spPr>
+        <p:txBody>
+          <a:bodyPr vert="horz" lIns="91440" tIns="45720" rIns="91440" bIns="45720" rtlCol="0" anchor="ctr">
+            <a:normAutofit/>
+          </a:bodyPr>
+          <a:lstStyle>
+            <a:lvl1pPr algn="ctr" defTabSz="914400" rtl="0" eaLnBrk="1" latinLnBrk="0" hangingPunct="1">
+              <a:spcBef>
+                <a:spcPct val="0"/>
+              </a:spcBef>
+              <a:buNone/>
+              <a:defRPr sz="4400" kern="1200">
+                <a:solidFill>
+                  <a:schemeClr val="tx1"/>
+                </a:solidFill>
+                <a:latin typeface="+mj-lt"/>
+                <a:ea typeface="+mj-ea"/>
+                <a:cs typeface="+mj-cs"/>
+              </a:defRPr>
+            </a:lvl1pPr>
+          </a:lstStyle>
+          <a:p>
+            <a:pPr algn="l">
+              <a:spcAft>
+                <a:spcPts val="600"/>
+              </a:spcAft>
+            </a:pPr>
+            <a:r>
+              <a:rPr lang="en-US" dirty="0">
+                <a:solidFill>
+                  <a:schemeClr val="tx1">
+                    <a:lumMod val="65000"/>
+                    <a:lumOff val="35000"/>
+                  </a:schemeClr>
+                </a:solidFill>
+              </a:rPr>
+              <a:t>Declaring variables – some errors - 2</a:t>
+            </a:r>
+          </a:p>
+        </p:txBody>
+      </p:sp>
+      <p:sp>
+        <p:nvSpPr>
+          <p:cNvPr id="16" name="Content Placeholder 2">
+            <a:extLst>
+              <a:ext uri="{FF2B5EF4-FFF2-40B4-BE49-F238E27FC236}">
+                <a16:creationId xmlns:a16="http://schemas.microsoft.com/office/drawing/2014/main" id="{9D40B67E-BEC1-0DF1-23DA-6F34C2B2A2AE}"/>
+              </a:ext>
+            </a:extLst>
+          </p:cNvPr>
+          <p:cNvSpPr>
+            <a:spLocks noGrp="1"/>
+          </p:cNvSpPr>
+          <p:nvPr>
+            <p:ph sz="half" idx="1"/>
+          </p:nvPr>
+        </p:nvSpPr>
+        <p:spPr>
+          <a:xfrm>
+            <a:off x="407368" y="2708920"/>
+            <a:ext cx="5384800" cy="4525963"/>
+          </a:xfrm>
+        </p:spPr>
+        <p:txBody>
+          <a:bodyPr/>
+          <a:lstStyle/>
+          <a:p>
+            <a:r>
+              <a:rPr lang="en-US" dirty="0"/>
+              <a:t>You can only have one declaration of any variable in a context. </a:t>
+            </a:r>
+          </a:p>
+        </p:txBody>
+      </p:sp>
+      <p:pic>
+        <p:nvPicPr>
+          <p:cNvPr id="7" name="Picture 6">
+            <a:extLst>
+              <a:ext uri="{FF2B5EF4-FFF2-40B4-BE49-F238E27FC236}">
+                <a16:creationId xmlns:a16="http://schemas.microsoft.com/office/drawing/2014/main" id="{824B22CE-4054-9142-1DC0-975F7B9AB8BB}"/>
+              </a:ext>
+            </a:extLst>
+          </p:cNvPr>
+          <p:cNvPicPr>
+            <a:picLocks noChangeAspect="1"/>
+          </p:cNvPicPr>
+          <p:nvPr/>
+        </p:nvPicPr>
+        <p:blipFill>
+          <a:blip r:embed="rId2"/>
+          <a:stretch>
+            <a:fillRect/>
+          </a:stretch>
+        </p:blipFill>
+        <p:spPr>
+          <a:xfrm>
+            <a:off x="5788292" y="1838047"/>
+            <a:ext cx="6544057" cy="4040955"/>
+          </a:xfrm>
+          <a:prstGeom prst="rect">
+            <a:avLst/>
+          </a:prstGeom>
+          <a:noFill/>
+        </p:spPr>
+      </p:pic>
+      <p:sp>
+        <p:nvSpPr>
+          <p:cNvPr id="17" name="Footer Placeholder 4">
+            <a:extLst>
+              <a:ext uri="{FF2B5EF4-FFF2-40B4-BE49-F238E27FC236}">
+                <a16:creationId xmlns:a16="http://schemas.microsoft.com/office/drawing/2014/main" id="{BCF0BC1E-BB31-0BF1-7837-35A52FAF90E0}"/>
+              </a:ext>
+            </a:extLst>
+          </p:cNvPr>
+          <p:cNvSpPr>
+            <a:spLocks noGrp="1"/>
+          </p:cNvSpPr>
+          <p:nvPr>
+            <p:ph type="ftr" sz="quarter" idx="11"/>
+          </p:nvPr>
+        </p:nvSpPr>
+        <p:spPr>
+          <a:xfrm>
+            <a:off x="4165600" y="6356351"/>
+            <a:ext cx="3860800" cy="365125"/>
+          </a:xfrm>
+        </p:spPr>
+        <p:txBody>
+          <a:bodyPr/>
+          <a:lstStyle/>
+          <a:p>
+            <a:endParaRPr lang="en-US"/>
+          </a:p>
+        </p:txBody>
+      </p:sp>
+    </p:spTree>
+    <p:extLst>
+      <p:ext uri="{BB962C8B-B14F-4D97-AF65-F5344CB8AC3E}">
+        <p14:creationId xmlns:p14="http://schemas.microsoft.com/office/powerpoint/2010/main" val="2318931471"/>
+      </p:ext>
+    </p:extLst>
+  </p:cSld>
+  <p:clrMapOvr>
+    <a:masterClrMapping/>
+  </p:clrMapOvr>
+</p:sld>
+</file>
+
+<file path=ppt/slides/slide22.xml><?xml version="1.0" encoding="utf-8"?>
+<p:sld xmlns:a="http://schemas.openxmlformats.org/drawingml/2006/main" xmlns:r="http://schemas.openxmlformats.org/officeDocument/2006/relationships" xmlns:p="http://schemas.openxmlformats.org/presentationml/2006/main">
+  <p:cSld>
+    <p:spTree>
+      <p:nvGrpSpPr>
         <p:cNvPr id="1" name="">
           <a:extLst>
             <a:ext uri="{FF2B5EF4-FFF2-40B4-BE49-F238E27FC236}">
-              <a16:creationId xmlns:a16="http://schemas.microsoft.com/office/drawing/2014/main" id="{D81A1B7D-6408-6AAF-9FE9-2DBEFFC23CCC}"/>
+              <a16:creationId xmlns:a16="http://schemas.microsoft.com/office/drawing/2014/main" id="{A2EB53BA-DD11-31F9-4F42-F5080AD95131}"/>
             </a:ext>
           </a:extLst>
         </p:cNvPr>
@@ -16568,7 +16845,7 @@
           <p:cNvPr id="2" name="Title 1">
             <a:extLst>
               <a:ext uri="{FF2B5EF4-FFF2-40B4-BE49-F238E27FC236}">
-                <a16:creationId xmlns:a16="http://schemas.microsoft.com/office/drawing/2014/main" id="{92FE5011-B997-D155-FBF8-7E98AEC9D62C}"/>
+                <a16:creationId xmlns:a16="http://schemas.microsoft.com/office/drawing/2014/main" id="{2CDD581B-E0EE-6F64-CD56-F00EFE6C89FE}"/>
               </a:ext>
             </a:extLst>
           </p:cNvPr>
@@ -16579,31 +16856,25 @@
             <p:ph type="title"/>
           </p:nvPr>
         </p:nvSpPr>
-        <p:spPr>
-          <a:xfrm>
-            <a:off x="609600" y="274638"/>
-            <a:ext cx="10972800" cy="1143000"/>
-          </a:xfrm>
-        </p:spPr>
+        <p:spPr/>
         <p:txBody>
-          <a:bodyPr vert="horz" lIns="91440" tIns="45720" rIns="91440" bIns="45720" rtlCol="0" anchor="ctr">
-            <a:normAutofit/>
-          </a:bodyPr>
+          <a:bodyPr/>
           <a:lstStyle/>
           <a:p>
             <a:r>
-              <a:rPr lang="en-US" dirty="0"/>
-              <a:t>Declaring variables – some errors</a:t>
-            </a:r>
+              <a:rPr lang="en-IE"/>
+              <a:t>Topics list</a:t>
+            </a:r>
+            <a:endParaRPr lang="en-IE" dirty="0"/>
           </a:p>
         </p:txBody>
       </p:sp>
       <p:sp>
         <p:nvSpPr>
-          <p:cNvPr id="13" name="Content Placeholder 3">
+          <p:cNvPr id="5" name="Content Placeholder 4">
             <a:extLst>
               <a:ext uri="{FF2B5EF4-FFF2-40B4-BE49-F238E27FC236}">
-                <a16:creationId xmlns:a16="http://schemas.microsoft.com/office/drawing/2014/main" id="{17DD95E6-8529-66C8-DB8D-B07C7E1C15D9}"/>
+                <a16:creationId xmlns:a16="http://schemas.microsoft.com/office/drawing/2014/main" id="{EC600019-935E-A74B-5C5D-BEDC1D8332F9}"/>
               </a:ext>
             </a:extLst>
           </p:cNvPr>
@@ -16611,62 +16882,138 @@
             <a:spLocks noGrp="1"/>
           </p:cNvSpPr>
           <p:nvPr>
-            <p:ph sz="half" idx="2"/>
+            <p:ph idx="1"/>
           </p:nvPr>
         </p:nvSpPr>
-        <p:spPr>
-          <a:xfrm>
-            <a:off x="609600" y="2174875"/>
-            <a:ext cx="5386917" cy="3951288"/>
-          </a:xfrm>
-        </p:spPr>
+        <p:spPr/>
         <p:txBody>
-          <a:bodyPr/>
+          <a:bodyPr>
+            <a:normAutofit fontScale="70000" lnSpcReduction="20000"/>
+          </a:bodyPr>
           <a:lstStyle/>
           <a:p>
-            <a:r>
-              <a:rPr lang="en-US" sz="4000" dirty="0"/>
-              <a:t>Data types are case sensitive </a:t>
-            </a:r>
-          </a:p>
-          <a:p>
-            <a:pPr lvl="1"/>
-            <a:r>
-              <a:rPr lang="en-US" sz="3200" dirty="0">
-                <a:solidFill>
-                  <a:srgbClr val="FF0000"/>
-                </a:solidFill>
-              </a:rPr>
-              <a:t>Int</a:t>
-            </a:r>
-            <a:r>
-              <a:rPr lang="en-US" sz="3200" dirty="0"/>
-              <a:t> is not valid</a:t>
-            </a:r>
-          </a:p>
-          <a:p>
-            <a:pPr lvl="1"/>
-            <a:r>
-              <a:rPr lang="en-US" sz="3200" dirty="0">
-                <a:solidFill>
-                  <a:srgbClr val="00B050"/>
-                </a:solidFill>
-              </a:rPr>
-              <a:t>int</a:t>
-            </a:r>
-            <a:r>
-              <a:rPr lang="en-US" sz="3200" dirty="0"/>
-              <a:t> is valid</a:t>
+            <a:pPr marL="514350" indent="-514350">
+              <a:buFont typeface="+mj-lt"/>
+              <a:buAutoNum type="arabicPeriod"/>
+            </a:pPr>
+            <a:r>
+              <a:rPr lang="en-IE" dirty="0"/>
+              <a:t>Variables.</a:t>
+            </a:r>
+          </a:p>
+          <a:p>
+            <a:pPr marL="514350" indent="-514350">
+              <a:buFont typeface="+mj-lt"/>
+              <a:buAutoNum type="arabicPeriod"/>
+            </a:pPr>
+            <a:endParaRPr lang="en-IE" dirty="0"/>
+          </a:p>
+          <a:p>
+            <a:pPr marL="514350" indent="-514350">
+              <a:buFont typeface="+mj-lt"/>
+              <a:buAutoNum type="arabicPeriod"/>
+            </a:pPr>
+            <a:r>
+              <a:rPr lang="en-IE" dirty="0"/>
+              <a:t>Java Keywords, tokens</a:t>
+            </a:r>
+          </a:p>
+          <a:p>
+            <a:pPr marL="514350" indent="-514350">
+              <a:buFont typeface="+mj-lt"/>
+              <a:buAutoNum type="arabicPeriod"/>
+            </a:pPr>
+            <a:endParaRPr lang="en-IE" dirty="0"/>
+          </a:p>
+          <a:p>
+            <a:pPr marL="514350" indent="-514350">
+              <a:buFont typeface="+mj-lt"/>
+              <a:buAutoNum type="arabicPeriod"/>
+            </a:pPr>
+            <a:r>
+              <a:rPr lang="en-IE" dirty="0"/>
+              <a:t>Data Types.</a:t>
+            </a:r>
+          </a:p>
+          <a:p>
+            <a:pPr marL="514350" indent="-514350">
+              <a:buFont typeface="+mj-lt"/>
+              <a:buAutoNum type="arabicPeriod"/>
+            </a:pPr>
+            <a:endParaRPr lang="en-IE" dirty="0"/>
+          </a:p>
+          <a:p>
+            <a:pPr marL="514350" indent="-514350">
+              <a:buFont typeface="+mj-lt"/>
+              <a:buAutoNum type="arabicPeriod"/>
+            </a:pPr>
+            <a:endParaRPr lang="en-IE" dirty="0"/>
+          </a:p>
+          <a:p>
+            <a:pPr marL="514350" indent="-514350">
+              <a:buFont typeface="+mj-lt"/>
+              <a:buAutoNum type="arabicPeriod"/>
+            </a:pPr>
+            <a:r>
+              <a:rPr lang="en-IE" dirty="0"/>
+              <a:t>Java’s Primitive Data Types</a:t>
+            </a:r>
+          </a:p>
+          <a:p>
+            <a:pPr marL="971550" lvl="1" indent="-514350">
+              <a:buFont typeface="+mj-lt"/>
+              <a:buAutoNum type="arabicPeriod"/>
+            </a:pPr>
+            <a:r>
+              <a:rPr lang="en-IE" dirty="0"/>
+              <a:t>Whole numbers.</a:t>
+            </a:r>
+          </a:p>
+          <a:p>
+            <a:pPr marL="971550" lvl="1" indent="-514350">
+              <a:buFont typeface="+mj-lt"/>
+              <a:buAutoNum type="arabicPeriod"/>
+            </a:pPr>
+            <a:r>
+              <a:rPr lang="en-IE" dirty="0"/>
+              <a:t>Decimal numbers.</a:t>
+            </a:r>
+          </a:p>
+          <a:p>
+            <a:pPr marL="971550" lvl="1" indent="-514350">
+              <a:buFont typeface="+mj-lt"/>
+              <a:buAutoNum type="arabicPeriod"/>
+            </a:pPr>
+            <a:r>
+              <a:rPr lang="en-IE" dirty="0"/>
+              <a:t>Others.</a:t>
+            </a:r>
+          </a:p>
+          <a:p>
+            <a:pPr marL="514350" indent="-514350">
+              <a:buFont typeface="+mj-lt"/>
+              <a:buAutoNum type="arabicPeriod"/>
+            </a:pPr>
+            <a:endParaRPr lang="en-IE" dirty="0"/>
+          </a:p>
+          <a:p>
+            <a:pPr marL="514350" indent="-514350">
+              <a:buFont typeface="+mj-lt"/>
+              <a:buAutoNum type="arabicPeriod"/>
+            </a:pPr>
+            <a:r>
+              <a:rPr lang="en-IE" dirty="0"/>
+              <a:t>Arithmetic operators.</a:t>
             </a:r>
           </a:p>
         </p:txBody>
       </p:sp>
       <p:sp>
         <p:nvSpPr>
-          <p:cNvPr id="6" name="Line Callout 1 (Border and Accent Bar) 5">
+          <p:cNvPr id="4" name="Rectangle 3">
             <a:extLst>
               <a:ext uri="{FF2B5EF4-FFF2-40B4-BE49-F238E27FC236}">
-                <a16:creationId xmlns:a16="http://schemas.microsoft.com/office/drawing/2014/main" id="{3613A1D1-12F3-997E-5767-1A0E1F4626A9}"/>
+                <a16:creationId xmlns:a16="http://schemas.microsoft.com/office/drawing/2014/main" id="{D6DEC47B-C82E-88AE-1FDE-6F52EF2FCF2C}"/>
               </a:ext>
             </a:extLst>
           </p:cNvPr>
@@ -16675,176 +17022,23 @@
         </p:nvSpPr>
         <p:spPr>
           <a:xfrm>
-            <a:off x="6193368" y="1535113"/>
-            <a:ext cx="5389033" cy="639762"/>
-          </a:xfrm>
-          <a:prstGeom prst="rect">
-            <a:avLst/>
-          </a:prstGeom>
-        </p:spPr>
-        <p:style>
-          <a:lnRef idx="2">
-            <a:schemeClr val="dk1">
-              <a:shade val="15000"/>
-            </a:schemeClr>
-          </a:lnRef>
-          <a:fillRef idx="1">
-            <a:schemeClr val="dk1"/>
-          </a:fillRef>
-          <a:effectRef idx="0">
-            <a:schemeClr val="dk1"/>
-          </a:effectRef>
-          <a:fontRef idx="minor">
-            <a:schemeClr val="lt1"/>
-          </a:fontRef>
-        </p:style>
-        <p:txBody>
-          <a:bodyPr vert="horz" lIns="91440" tIns="45720" rIns="91440" bIns="45720" rtlCol="0" anchor="b">
-            <a:normAutofit/>
-          </a:bodyPr>
-          <a:lstStyle/>
-          <a:p>
-            <a:pPr>
-              <a:lnSpc>
-                <a:spcPct val="90000"/>
-              </a:lnSpc>
-              <a:spcBef>
-                <a:spcPct val="20000"/>
-              </a:spcBef>
-            </a:pPr>
-            <a:r>
-              <a:rPr lang="en-GB" sz="1900" b="1" kern="1200" dirty="0">
-                <a:solidFill>
-                  <a:schemeClr val="bg1"/>
-                </a:solidFill>
-                <a:latin typeface="+mn-lt"/>
-                <a:ea typeface="+mn-ea"/>
-                <a:cs typeface="+mn-cs"/>
-              </a:rPr>
-              <a:t>If you right-click on red underline, </a:t>
-            </a:r>
-            <a:r>
-              <a:rPr lang="en-GB" sz="1900" b="1" kern="1200" dirty="0" err="1">
-                <a:solidFill>
-                  <a:schemeClr val="bg1"/>
-                </a:solidFill>
-                <a:latin typeface="+mn-lt"/>
-                <a:ea typeface="+mn-ea"/>
-                <a:cs typeface="+mn-cs"/>
-              </a:rPr>
-              <a:t>BlueJ</a:t>
-            </a:r>
-            <a:r>
-              <a:rPr lang="en-GB" sz="1900" b="1" kern="1200" dirty="0">
-                <a:solidFill>
-                  <a:schemeClr val="bg1"/>
-                </a:solidFill>
-                <a:latin typeface="+mn-lt"/>
-                <a:ea typeface="+mn-ea"/>
-                <a:cs typeface="+mn-cs"/>
-              </a:rPr>
-              <a:t> will help you fix the error</a:t>
-            </a:r>
-          </a:p>
-        </p:txBody>
-      </p:sp>
-      <p:pic>
-        <p:nvPicPr>
-          <p:cNvPr id="5" name="Content Placeholder 4">
-            <a:extLst>
-              <a:ext uri="{FF2B5EF4-FFF2-40B4-BE49-F238E27FC236}">
-                <a16:creationId xmlns:a16="http://schemas.microsoft.com/office/drawing/2014/main" id="{E2CD089C-FD9F-9530-82E3-CCDCE810E1D1}"/>
-              </a:ext>
-            </a:extLst>
-          </p:cNvPr>
-          <p:cNvPicPr>
-            <a:picLocks noGrp="1" noChangeAspect="1"/>
-          </p:cNvPicPr>
-          <p:nvPr>
-            <p:ph sz="quarter" idx="4"/>
-          </p:nvPr>
-        </p:nvPicPr>
-        <p:blipFill>
-          <a:blip r:embed="rId2"/>
-          <a:srcRect r="7595" b="-3"/>
-          <a:stretch>
-            <a:fillRect/>
-          </a:stretch>
-        </p:blipFill>
-        <p:spPr>
-          <a:xfrm>
-            <a:off x="6193368" y="2174875"/>
-            <a:ext cx="5389033" cy="3951288"/>
+            <a:off x="1055440" y="4293096"/>
+            <a:ext cx="3240360" cy="964703"/>
           </a:xfrm>
           <a:prstGeom prst="rect">
             <a:avLst/>
           </a:prstGeom>
           <a:noFill/>
-        </p:spPr>
-      </p:pic>
-      <p:sp>
-        <p:nvSpPr>
-          <p:cNvPr id="15" name="Footer Placeholder 6">
-            <a:extLst>
-              <a:ext uri="{FF2B5EF4-FFF2-40B4-BE49-F238E27FC236}">
-                <a16:creationId xmlns:a16="http://schemas.microsoft.com/office/drawing/2014/main" id="{E0E6A47A-05DD-8E5C-AC1E-645A0E7123FB}"/>
-              </a:ext>
-            </a:extLst>
-          </p:cNvPr>
-          <p:cNvSpPr>
-            <a:spLocks noGrp="1"/>
-          </p:cNvSpPr>
-          <p:nvPr>
-            <p:ph type="ftr" sz="quarter" idx="11"/>
-          </p:nvPr>
-        </p:nvSpPr>
-        <p:spPr>
-          <a:xfrm>
-            <a:off x="4165600" y="6356351"/>
-            <a:ext cx="3860800" cy="365125"/>
-          </a:xfrm>
-        </p:spPr>
-        <p:txBody>
-          <a:bodyPr/>
-          <a:lstStyle/>
-          <a:p>
-            <a:endParaRPr lang="en-US"/>
-          </a:p>
-        </p:txBody>
-      </p:sp>
-      <p:sp>
-        <p:nvSpPr>
-          <p:cNvPr id="7" name="Line Callout 1 (Border and Accent Bar) 6">
-            <a:extLst>
-              <a:ext uri="{FF2B5EF4-FFF2-40B4-BE49-F238E27FC236}">
-                <a16:creationId xmlns:a16="http://schemas.microsoft.com/office/drawing/2014/main" id="{D096155B-6A9F-AD68-CC58-188CEFAC942F}"/>
-              </a:ext>
-            </a:extLst>
-          </p:cNvPr>
-          <p:cNvSpPr/>
-          <p:nvPr/>
-        </p:nvSpPr>
-        <p:spPr>
-          <a:xfrm>
-            <a:off x="4007768" y="4839402"/>
-            <a:ext cx="1609536" cy="1666058"/>
-          </a:xfrm>
-          <a:prstGeom prst="accentBorderCallout1">
-            <a:avLst>
-              <a:gd name="adj1" fmla="val 15701"/>
-              <a:gd name="adj2" fmla="val 103186"/>
-              <a:gd name="adj3" fmla="val 7814"/>
-              <a:gd name="adj4" fmla="val 223631"/>
-            </a:avLst>
-          </a:prstGeom>
-          <a:solidFill>
-            <a:srgbClr val="FF0000"/>
-          </a:solidFill>
+          <a:ln w="47625">
+            <a:solidFill>
+              <a:srgbClr val="FF0000"/>
+            </a:solidFill>
+          </a:ln>
         </p:spPr>
         <p:style>
           <a:lnRef idx="2">
             <a:schemeClr val="accent1">
-              <a:shade val="15000"/>
+              <a:shade val="50000"/>
             </a:schemeClr>
           </a:lnRef>
           <a:fillRef idx="1">
@@ -16861,31 +17055,17 @@
           <a:bodyPr rtlCol="0" anchor="ctr"/>
           <a:lstStyle/>
           <a:p>
-            <a:pPr>
-              <a:lnSpc>
-                <a:spcPct val="90000"/>
-              </a:lnSpc>
-              <a:spcBef>
-                <a:spcPct val="20000"/>
-              </a:spcBef>
-            </a:pPr>
-            <a:r>
-              <a:rPr lang="en-GB" b="1" dirty="0">
-                <a:solidFill>
-                  <a:schemeClr val="tx1"/>
-                </a:solidFill>
-              </a:rPr>
-              <a:t>Red underline indicates that there is a syntax error. </a:t>
-            </a:r>
+            <a:pPr algn="ctr"/>
+            <a:endParaRPr lang="en-IE"/>
           </a:p>
         </p:txBody>
       </p:sp>
       <p:sp>
         <p:nvSpPr>
-          <p:cNvPr id="8" name="Down Arrow 7">
+          <p:cNvPr id="3" name="Left Arrow 2">
             <a:extLst>
               <a:ext uri="{FF2B5EF4-FFF2-40B4-BE49-F238E27FC236}">
-                <a16:creationId xmlns:a16="http://schemas.microsoft.com/office/drawing/2014/main" id="{A883E77A-4E53-95B9-FD2D-3505F0A86354}"/>
+                <a16:creationId xmlns:a16="http://schemas.microsoft.com/office/drawing/2014/main" id="{33A6DFA6-341A-7144-71E0-46FF98841964}"/>
               </a:ext>
             </a:extLst>
           </p:cNvPr>
@@ -16893,25 +17073,25 @@
           <p:nvPr/>
         </p:nvSpPr>
         <p:spPr>
-          <a:xfrm rot="1548875">
-            <a:off x="10013313" y="2044955"/>
-            <a:ext cx="484632" cy="2952328"/>
+          <a:xfrm>
+            <a:off x="4511824" y="4661147"/>
+            <a:ext cx="2057400" cy="228600"/>
           </a:xfrm>
-          <a:prstGeom prst="downArrow">
+          <a:prstGeom prst="leftArrow">
             <a:avLst/>
           </a:prstGeom>
         </p:spPr>
         <p:style>
           <a:lnRef idx="2">
-            <a:schemeClr val="dk1">
-              <a:shade val="15000"/>
+            <a:schemeClr val="accent2">
+              <a:shade val="50000"/>
             </a:schemeClr>
           </a:lnRef>
           <a:fillRef idx="1">
-            <a:schemeClr val="dk1"/>
+            <a:schemeClr val="accent2"/>
           </a:fillRef>
           <a:effectRef idx="0">
-            <a:schemeClr val="dk1"/>
+            <a:schemeClr val="accent2"/>
           </a:effectRef>
           <a:fontRef idx="minor">
             <a:schemeClr val="lt1"/>
@@ -16922,14 +17102,14 @@
           <a:lstStyle/>
           <a:p>
             <a:pPr algn="ctr"/>
-            <a:endParaRPr lang="en-US"/>
+            <a:endParaRPr lang="en-GB"/>
           </a:p>
         </p:txBody>
       </p:sp>
     </p:spTree>
     <p:extLst>
       <p:ext uri="{BB962C8B-B14F-4D97-AF65-F5344CB8AC3E}">
-        <p14:creationId xmlns:p14="http://schemas.microsoft.com/office/powerpoint/2010/main" val="1866859824"/>
+        <p14:creationId xmlns:p14="http://schemas.microsoft.com/office/powerpoint/2010/main" val="614556318"/>
       </p:ext>
     </p:extLst>
   </p:cSld>
@@ -16948,6 +17128,9 @@
                     <p:cTn id="3" fill="hold">
                       <p:stCondLst>
                         <p:cond delay="indefinite"/>
+                        <p:cond evt="onBegin" delay="0">
+                          <p:tn val="2"/>
+                        </p:cond>
                       </p:stCondLst>
                       <p:childTnLst>
                         <p:par>
@@ -16957,7 +17140,7 @@
                             </p:stCondLst>
                             <p:childTnLst>
                               <p:par>
-                                <p:cTn id="5" presetID="2" presetClass="entr" presetSubtype="4" fill="hold" grpId="0" nodeType="clickEffect">
+                                <p:cTn id="5" presetID="21" presetClass="entr" presetSubtype="1" fill="hold" grpId="0" nodeType="withEffect">
                                   <p:stCondLst>
                                     <p:cond delay="0"/>
                                   </p:stCondLst>
@@ -16970,11 +17153,42 @@
                                           </p:stCondLst>
                                         </p:cTn>
                                         <p:tgtEl>
-                                          <p:spTgt spid="13">
-                                            <p:txEl>
-                                              <p:pRg st="0" end="0"/>
-                                            </p:txEl>
-                                          </p:spTgt>
+                                          <p:spTgt spid="4"/>
+                                        </p:tgtEl>
+                                        <p:attrNameLst>
+                                          <p:attrName>style.visibility</p:attrName>
+                                        </p:attrNameLst>
+                                      </p:cBhvr>
+                                      <p:to>
+                                        <p:strVal val="visible"/>
+                                      </p:to>
+                                    </p:set>
+                                    <p:animEffect transition="in" filter="wheel(1)">
+                                      <p:cBhvr>
+                                        <p:cTn id="7" dur="2000"/>
+                                        <p:tgtEl>
+                                          <p:spTgt spid="4"/>
+                                        </p:tgtEl>
+                                      </p:cBhvr>
+                                    </p:animEffect>
+                                  </p:childTnLst>
+                                </p:cTn>
+                              </p:par>
+                              <p:par>
+                                <p:cTn id="8" presetID="55" presetClass="entr" presetSubtype="0" fill="hold" grpId="0" nodeType="withEffect">
+                                  <p:stCondLst>
+                                    <p:cond delay="0"/>
+                                  </p:stCondLst>
+                                  <p:childTnLst>
+                                    <p:set>
+                                      <p:cBhvr>
+                                        <p:cTn id="9" dur="1" fill="hold">
+                                          <p:stCondLst>
+                                            <p:cond delay="0"/>
+                                          </p:stCondLst>
+                                        </p:cTn>
+                                        <p:tgtEl>
+                                          <p:spTgt spid="3"/>
                                         </p:tgtEl>
                                         <p:attrNameLst>
                                           <p:attrName>style.visibility</p:attrName>
@@ -16985,484 +17199,59 @@
                                       </p:to>
                                     </p:set>
                                     <p:anim calcmode="lin" valueType="num">
-                                      <p:cBhvr additive="base">
-                                        <p:cTn id="7" dur="500" fill="hold"/>
+                                      <p:cBhvr>
+                                        <p:cTn id="10" dur="1000" fill="hold"/>
                                         <p:tgtEl>
-                                          <p:spTgt spid="13">
-                                            <p:txEl>
-                                              <p:pRg st="0" end="0"/>
-                                            </p:txEl>
-                                          </p:spTgt>
+                                          <p:spTgt spid="3"/>
                                         </p:tgtEl>
                                         <p:attrNameLst>
-                                          <p:attrName>ppt_x</p:attrName>
+                                          <p:attrName>ppt_w</p:attrName>
                                         </p:attrNameLst>
                                       </p:cBhvr>
                                       <p:tavLst>
                                         <p:tav tm="0">
                                           <p:val>
-                                            <p:strVal val="#ppt_x"/>
+                                            <p:strVal val="#ppt_w*0.70"/>
                                           </p:val>
                                         </p:tav>
                                         <p:tav tm="100000">
                                           <p:val>
-                                            <p:strVal val="#ppt_x"/>
+                                            <p:strVal val="#ppt_w"/>
                                           </p:val>
                                         </p:tav>
                                       </p:tavLst>
                                     </p:anim>
                                     <p:anim calcmode="lin" valueType="num">
-                                      <p:cBhvr additive="base">
-                                        <p:cTn id="8" dur="500" fill="hold"/>
+                                      <p:cBhvr>
+                                        <p:cTn id="11" dur="1000" fill="hold"/>
                                         <p:tgtEl>
-                                          <p:spTgt spid="13">
-                                            <p:txEl>
-                                              <p:pRg st="0" end="0"/>
-                                            </p:txEl>
-                                          </p:spTgt>
+                                          <p:spTgt spid="3"/>
                                         </p:tgtEl>
                                         <p:attrNameLst>
-                                          <p:attrName>ppt_y</p:attrName>
+                                          <p:attrName>ppt_h</p:attrName>
                                         </p:attrNameLst>
                                       </p:cBhvr>
                                       <p:tavLst>
                                         <p:tav tm="0">
                                           <p:val>
-                                            <p:strVal val="1+#ppt_h/2"/>
+                                            <p:strVal val="#ppt_h"/>
                                           </p:val>
                                         </p:tav>
                                         <p:tav tm="100000">
                                           <p:val>
-                                            <p:strVal val="#ppt_y"/>
+                                            <p:strVal val="#ppt_h"/>
                                           </p:val>
                                         </p:tav>
                                       </p:tavLst>
                                     </p:anim>
-                                  </p:childTnLst>
-                                </p:cTn>
-                              </p:par>
-                              <p:par>
-                                <p:cTn id="9" presetID="2" presetClass="entr" presetSubtype="4" fill="hold" grpId="0" nodeType="withEffect">
-                                  <p:stCondLst>
-                                    <p:cond delay="0"/>
-                                  </p:stCondLst>
-                                  <p:childTnLst>
-                                    <p:set>
+                                    <p:animEffect transition="in" filter="fade">
                                       <p:cBhvr>
-                                        <p:cTn id="10" dur="1" fill="hold">
-                                          <p:stCondLst>
-                                            <p:cond delay="0"/>
-                                          </p:stCondLst>
-                                        </p:cTn>
+                                        <p:cTn id="12" dur="1000"/>
                                         <p:tgtEl>
-                                          <p:spTgt spid="13">
-                                            <p:txEl>
-                                              <p:pRg st="1" end="1"/>
-                                            </p:txEl>
-                                          </p:spTgt>
+                                          <p:spTgt spid="3"/>
                                         </p:tgtEl>
-                                        <p:attrNameLst>
-                                          <p:attrName>style.visibility</p:attrName>
-                                        </p:attrNameLst>
                                       </p:cBhvr>
-                                      <p:to>
-                                        <p:strVal val="visible"/>
-                                      </p:to>
-                                    </p:set>
-                                    <p:anim calcmode="lin" valueType="num">
-                                      <p:cBhvr additive="base">
-                                        <p:cTn id="11" dur="500" fill="hold"/>
-                                        <p:tgtEl>
-                                          <p:spTgt spid="13">
-                                            <p:txEl>
-                                              <p:pRg st="1" end="1"/>
-                                            </p:txEl>
-                                          </p:spTgt>
-                                        </p:tgtEl>
-                                        <p:attrNameLst>
-                                          <p:attrName>ppt_x</p:attrName>
-                                        </p:attrNameLst>
-                                      </p:cBhvr>
-                                      <p:tavLst>
-                                        <p:tav tm="0">
-                                          <p:val>
-                                            <p:strVal val="#ppt_x"/>
-                                          </p:val>
-                                        </p:tav>
-                                        <p:tav tm="100000">
-                                          <p:val>
-                                            <p:strVal val="#ppt_x"/>
-                                          </p:val>
-                                        </p:tav>
-                                      </p:tavLst>
-                                    </p:anim>
-                                    <p:anim calcmode="lin" valueType="num">
-                                      <p:cBhvr additive="base">
-                                        <p:cTn id="12" dur="500" fill="hold"/>
-                                        <p:tgtEl>
-                                          <p:spTgt spid="13">
-                                            <p:txEl>
-                                              <p:pRg st="1" end="1"/>
-                                            </p:txEl>
-                                          </p:spTgt>
-                                        </p:tgtEl>
-                                        <p:attrNameLst>
-                                          <p:attrName>ppt_y</p:attrName>
-                                        </p:attrNameLst>
-                                      </p:cBhvr>
-                                      <p:tavLst>
-                                        <p:tav tm="0">
-                                          <p:val>
-                                            <p:strVal val="1+#ppt_h/2"/>
-                                          </p:val>
-                                        </p:tav>
-                                        <p:tav tm="100000">
-                                          <p:val>
-                                            <p:strVal val="#ppt_y"/>
-                                          </p:val>
-                                        </p:tav>
-                                      </p:tavLst>
-                                    </p:anim>
-                                  </p:childTnLst>
-                                </p:cTn>
-                              </p:par>
-                              <p:par>
-                                <p:cTn id="13" presetID="2" presetClass="entr" presetSubtype="4" fill="hold" grpId="0" nodeType="withEffect">
-                                  <p:stCondLst>
-                                    <p:cond delay="0"/>
-                                  </p:stCondLst>
-                                  <p:childTnLst>
-                                    <p:set>
-                                      <p:cBhvr>
-                                        <p:cTn id="14" dur="1" fill="hold">
-                                          <p:stCondLst>
-                                            <p:cond delay="0"/>
-                                          </p:stCondLst>
-                                        </p:cTn>
-                                        <p:tgtEl>
-                                          <p:spTgt spid="13">
-                                            <p:txEl>
-                                              <p:pRg st="2" end="2"/>
-                                            </p:txEl>
-                                          </p:spTgt>
-                                        </p:tgtEl>
-                                        <p:attrNameLst>
-                                          <p:attrName>style.visibility</p:attrName>
-                                        </p:attrNameLst>
-                                      </p:cBhvr>
-                                      <p:to>
-                                        <p:strVal val="visible"/>
-                                      </p:to>
-                                    </p:set>
-                                    <p:anim calcmode="lin" valueType="num">
-                                      <p:cBhvr additive="base">
-                                        <p:cTn id="15" dur="500" fill="hold"/>
-                                        <p:tgtEl>
-                                          <p:spTgt spid="13">
-                                            <p:txEl>
-                                              <p:pRg st="2" end="2"/>
-                                            </p:txEl>
-                                          </p:spTgt>
-                                        </p:tgtEl>
-                                        <p:attrNameLst>
-                                          <p:attrName>ppt_x</p:attrName>
-                                        </p:attrNameLst>
-                                      </p:cBhvr>
-                                      <p:tavLst>
-                                        <p:tav tm="0">
-                                          <p:val>
-                                            <p:strVal val="#ppt_x"/>
-                                          </p:val>
-                                        </p:tav>
-                                        <p:tav tm="100000">
-                                          <p:val>
-                                            <p:strVal val="#ppt_x"/>
-                                          </p:val>
-                                        </p:tav>
-                                      </p:tavLst>
-                                    </p:anim>
-                                    <p:anim calcmode="lin" valueType="num">
-                                      <p:cBhvr additive="base">
-                                        <p:cTn id="16" dur="500" fill="hold"/>
-                                        <p:tgtEl>
-                                          <p:spTgt spid="13">
-                                            <p:txEl>
-                                              <p:pRg st="2" end="2"/>
-                                            </p:txEl>
-                                          </p:spTgt>
-                                        </p:tgtEl>
-                                        <p:attrNameLst>
-                                          <p:attrName>ppt_y</p:attrName>
-                                        </p:attrNameLst>
-                                      </p:cBhvr>
-                                      <p:tavLst>
-                                        <p:tav tm="0">
-                                          <p:val>
-                                            <p:strVal val="1+#ppt_h/2"/>
-                                          </p:val>
-                                        </p:tav>
-                                        <p:tav tm="100000">
-                                          <p:val>
-                                            <p:strVal val="#ppt_y"/>
-                                          </p:val>
-                                        </p:tav>
-                                      </p:tavLst>
-                                    </p:anim>
-                                  </p:childTnLst>
-                                </p:cTn>
-                              </p:par>
-                            </p:childTnLst>
-                          </p:cTn>
-                        </p:par>
-                      </p:childTnLst>
-                    </p:cTn>
-                  </p:par>
-                  <p:par>
-                    <p:cTn id="17" fill="hold">
-                      <p:stCondLst>
-                        <p:cond delay="indefinite"/>
-                      </p:stCondLst>
-                      <p:childTnLst>
-                        <p:par>
-                          <p:cTn id="18" fill="hold">
-                            <p:stCondLst>
-                              <p:cond delay="0"/>
-                            </p:stCondLst>
-                            <p:childTnLst>
-                              <p:par>
-                                <p:cTn id="19" presetID="2" presetClass="entr" presetSubtype="4" fill="hold" grpId="0" nodeType="clickEffect">
-                                  <p:stCondLst>
-                                    <p:cond delay="0"/>
-                                  </p:stCondLst>
-                                  <p:childTnLst>
-                                    <p:set>
-                                      <p:cBhvr>
-                                        <p:cTn id="20" dur="1" fill="hold">
-                                          <p:stCondLst>
-                                            <p:cond delay="0"/>
-                                          </p:stCondLst>
-                                        </p:cTn>
-                                        <p:tgtEl>
-                                          <p:spTgt spid="7"/>
-                                        </p:tgtEl>
-                                        <p:attrNameLst>
-                                          <p:attrName>style.visibility</p:attrName>
-                                        </p:attrNameLst>
-                                      </p:cBhvr>
-                                      <p:to>
-                                        <p:strVal val="visible"/>
-                                      </p:to>
-                                    </p:set>
-                                    <p:anim calcmode="lin" valueType="num">
-                                      <p:cBhvr additive="base">
-                                        <p:cTn id="21" dur="500" fill="hold"/>
-                                        <p:tgtEl>
-                                          <p:spTgt spid="7"/>
-                                        </p:tgtEl>
-                                        <p:attrNameLst>
-                                          <p:attrName>ppt_x</p:attrName>
-                                        </p:attrNameLst>
-                                      </p:cBhvr>
-                                      <p:tavLst>
-                                        <p:tav tm="0">
-                                          <p:val>
-                                            <p:strVal val="#ppt_x"/>
-                                          </p:val>
-                                        </p:tav>
-                                        <p:tav tm="100000">
-                                          <p:val>
-                                            <p:strVal val="#ppt_x"/>
-                                          </p:val>
-                                        </p:tav>
-                                      </p:tavLst>
-                                    </p:anim>
-                                    <p:anim calcmode="lin" valueType="num">
-                                      <p:cBhvr additive="base">
-                                        <p:cTn id="22" dur="500" fill="hold"/>
-                                        <p:tgtEl>
-                                          <p:spTgt spid="7"/>
-                                        </p:tgtEl>
-                                        <p:attrNameLst>
-                                          <p:attrName>ppt_y</p:attrName>
-                                        </p:attrNameLst>
-                                      </p:cBhvr>
-                                      <p:tavLst>
-                                        <p:tav tm="0">
-                                          <p:val>
-                                            <p:strVal val="1+#ppt_h/2"/>
-                                          </p:val>
-                                        </p:tav>
-                                        <p:tav tm="100000">
-                                          <p:val>
-                                            <p:strVal val="#ppt_y"/>
-                                          </p:val>
-                                        </p:tav>
-                                      </p:tavLst>
-                                    </p:anim>
-                                  </p:childTnLst>
-                                </p:cTn>
-                              </p:par>
-                            </p:childTnLst>
-                          </p:cTn>
-                        </p:par>
-                      </p:childTnLst>
-                    </p:cTn>
-                  </p:par>
-                  <p:par>
-                    <p:cTn id="23" fill="hold">
-                      <p:stCondLst>
-                        <p:cond delay="indefinite"/>
-                      </p:stCondLst>
-                      <p:childTnLst>
-                        <p:par>
-                          <p:cTn id="24" fill="hold">
-                            <p:stCondLst>
-                              <p:cond delay="0"/>
-                            </p:stCondLst>
-                            <p:childTnLst>
-                              <p:par>
-                                <p:cTn id="25" presetID="2" presetClass="entr" presetSubtype="4" fill="hold" grpId="0" nodeType="clickEffect">
-                                  <p:stCondLst>
-                                    <p:cond delay="0"/>
-                                  </p:stCondLst>
-                                  <p:childTnLst>
-                                    <p:set>
-                                      <p:cBhvr>
-                                        <p:cTn id="26" dur="1" fill="hold">
-                                          <p:stCondLst>
-                                            <p:cond delay="0"/>
-                                          </p:stCondLst>
-                                        </p:cTn>
-                                        <p:tgtEl>
-                                          <p:spTgt spid="6"/>
-                                        </p:tgtEl>
-                                        <p:attrNameLst>
-                                          <p:attrName>style.visibility</p:attrName>
-                                        </p:attrNameLst>
-                                      </p:cBhvr>
-                                      <p:to>
-                                        <p:strVal val="visible"/>
-                                      </p:to>
-                                    </p:set>
-                                    <p:anim calcmode="lin" valueType="num">
-                                      <p:cBhvr additive="base">
-                                        <p:cTn id="27" dur="500" fill="hold"/>
-                                        <p:tgtEl>
-                                          <p:spTgt spid="6"/>
-                                        </p:tgtEl>
-                                        <p:attrNameLst>
-                                          <p:attrName>ppt_x</p:attrName>
-                                        </p:attrNameLst>
-                                      </p:cBhvr>
-                                      <p:tavLst>
-                                        <p:tav tm="0">
-                                          <p:val>
-                                            <p:strVal val="#ppt_x"/>
-                                          </p:val>
-                                        </p:tav>
-                                        <p:tav tm="100000">
-                                          <p:val>
-                                            <p:strVal val="#ppt_x"/>
-                                          </p:val>
-                                        </p:tav>
-                                      </p:tavLst>
-                                    </p:anim>
-                                    <p:anim calcmode="lin" valueType="num">
-                                      <p:cBhvr additive="base">
-                                        <p:cTn id="28" dur="500" fill="hold"/>
-                                        <p:tgtEl>
-                                          <p:spTgt spid="6"/>
-                                        </p:tgtEl>
-                                        <p:attrNameLst>
-                                          <p:attrName>ppt_y</p:attrName>
-                                        </p:attrNameLst>
-                                      </p:cBhvr>
-                                      <p:tavLst>
-                                        <p:tav tm="0">
-                                          <p:val>
-                                            <p:strVal val="1+#ppt_h/2"/>
-                                          </p:val>
-                                        </p:tav>
-                                        <p:tav tm="100000">
-                                          <p:val>
-                                            <p:strVal val="#ppt_y"/>
-                                          </p:val>
-                                        </p:tav>
-                                      </p:tavLst>
-                                    </p:anim>
-                                  </p:childTnLst>
-                                </p:cTn>
-                              </p:par>
-                              <p:par>
-                                <p:cTn id="29" presetID="2" presetClass="entr" presetSubtype="4" fill="hold" grpId="0" nodeType="withEffect">
-                                  <p:stCondLst>
-                                    <p:cond delay="0"/>
-                                  </p:stCondLst>
-                                  <p:childTnLst>
-                                    <p:set>
-                                      <p:cBhvr>
-                                        <p:cTn id="30" dur="1" fill="hold">
-                                          <p:stCondLst>
-                                            <p:cond delay="0"/>
-                                          </p:stCondLst>
-                                        </p:cTn>
-                                        <p:tgtEl>
-                                          <p:spTgt spid="8"/>
-                                        </p:tgtEl>
-                                        <p:attrNameLst>
-                                          <p:attrName>style.visibility</p:attrName>
-                                        </p:attrNameLst>
-                                      </p:cBhvr>
-                                      <p:to>
-                                        <p:strVal val="visible"/>
-                                      </p:to>
-                                    </p:set>
-                                    <p:anim calcmode="lin" valueType="num">
-                                      <p:cBhvr additive="base">
-                                        <p:cTn id="31" dur="500" fill="hold"/>
-                                        <p:tgtEl>
-                                          <p:spTgt spid="8"/>
-                                        </p:tgtEl>
-                                        <p:attrNameLst>
-                                          <p:attrName>ppt_x</p:attrName>
-                                        </p:attrNameLst>
-                                      </p:cBhvr>
-                                      <p:tavLst>
-                                        <p:tav tm="0">
-                                          <p:val>
-                                            <p:strVal val="#ppt_x"/>
-                                          </p:val>
-                                        </p:tav>
-                                        <p:tav tm="100000">
-                                          <p:val>
-                                            <p:strVal val="#ppt_x"/>
-                                          </p:val>
-                                        </p:tav>
-                                      </p:tavLst>
-                                    </p:anim>
-                                    <p:anim calcmode="lin" valueType="num">
-                                      <p:cBhvr additive="base">
-                                        <p:cTn id="32" dur="500" fill="hold"/>
-                                        <p:tgtEl>
-                                          <p:spTgt spid="8"/>
-                                        </p:tgtEl>
-                                        <p:attrNameLst>
-                                          <p:attrName>ppt_y</p:attrName>
-                                        </p:attrNameLst>
-                                      </p:cBhvr>
-                                      <p:tavLst>
-                                        <p:tav tm="0">
-                                          <p:val>
-                                            <p:strVal val="1+#ppt_h/2"/>
-                                          </p:val>
-                                        </p:tav>
-                                        <p:tav tm="100000">
-                                          <p:val>
-                                            <p:strVal val="#ppt_y"/>
-                                          </p:val>
-                                        </p:tav>
-                                      </p:tavLst>
-                                    </p:anim>
+                                    </p:animEffect>
                                   </p:childTnLst>
                                 </p:cTn>
                               </p:par>
@@ -17494,125 +17283,10 @@
       </p:par>
     </p:tnLst>
     <p:bldLst>
-      <p:bldP spid="13" grpId="0" build="p"/>
-      <p:bldP spid="6" grpId="0" animBg="1"/>
-      <p:bldP spid="7" grpId="0" animBg="1"/>
-      <p:bldP spid="8" grpId="0" animBg="1"/>
+      <p:bldP spid="4" grpId="0" animBg="1"/>
+      <p:bldP spid="3" grpId="0" animBg="1"/>
     </p:bldLst>
   </p:timing>
-</p:sld>
-</file>
-
-<file path=ppt/slides/slide22.xml><?xml version="1.0" encoding="utf-8"?>
-<p:sld xmlns:a="http://schemas.openxmlformats.org/drawingml/2006/main" xmlns:r="http://schemas.openxmlformats.org/officeDocument/2006/relationships" xmlns:p="http://schemas.openxmlformats.org/presentationml/2006/main">
-  <p:cSld>
-    <p:spTree>
-      <p:nvGrpSpPr>
-        <p:cNvPr id="1" name=""/>
-        <p:cNvGrpSpPr/>
-        <p:nvPr/>
-      </p:nvGrpSpPr>
-      <p:grpSpPr>
-        <a:xfrm>
-          <a:off x="0" y="0"/>
-          <a:ext cx="0" cy="0"/>
-          <a:chOff x="0" y="0"/>
-          <a:chExt cx="0" cy="0"/>
-        </a:xfrm>
-      </p:grpSpPr>
-      <p:sp>
-        <p:nvSpPr>
-          <p:cNvPr id="2" name="Title 1">
-            <a:extLst>
-              <a:ext uri="{FF2B5EF4-FFF2-40B4-BE49-F238E27FC236}">
-                <a16:creationId xmlns:a16="http://schemas.microsoft.com/office/drawing/2014/main" id="{88F021DA-5DD8-793A-428D-D32F8FB9EBF5}"/>
-              </a:ext>
-            </a:extLst>
-          </p:cNvPr>
-          <p:cNvSpPr>
-            <a:spLocks noGrp="1"/>
-          </p:cNvSpPr>
-          <p:nvPr>
-            <p:ph type="title"/>
-          </p:nvPr>
-        </p:nvSpPr>
-        <p:spPr/>
-        <p:txBody>
-          <a:bodyPr/>
-          <a:lstStyle/>
-          <a:p>
-            <a:pPr algn="r"/>
-            <a:r>
-              <a:rPr lang="en-US" dirty="0"/>
-              <a:t>TO HERE – </a:t>
-            </a:r>
-            <a:r>
-              <a:rPr lang="en-US"/>
-              <a:t>add from 24 data types®</a:t>
-            </a:r>
-          </a:p>
-        </p:txBody>
-      </p:sp>
-      <p:sp>
-        <p:nvSpPr>
-          <p:cNvPr id="3" name="Content Placeholder 2">
-            <a:extLst>
-              <a:ext uri="{FF2B5EF4-FFF2-40B4-BE49-F238E27FC236}">
-                <a16:creationId xmlns:a16="http://schemas.microsoft.com/office/drawing/2014/main" id="{83E9363A-0174-92D8-A922-DA33A0826B8E}"/>
-              </a:ext>
-            </a:extLst>
-          </p:cNvPr>
-          <p:cNvSpPr>
-            <a:spLocks noGrp="1"/>
-          </p:cNvSpPr>
-          <p:nvPr>
-            <p:ph idx="1"/>
-          </p:nvPr>
-        </p:nvSpPr>
-        <p:spPr/>
-        <p:txBody>
-          <a:bodyPr/>
-          <a:lstStyle/>
-          <a:p>
-            <a:endParaRPr lang="en-US"/>
-          </a:p>
-        </p:txBody>
-      </p:sp>
-      <p:sp>
-        <p:nvSpPr>
-          <p:cNvPr id="4" name="Footer Placeholder 3">
-            <a:extLst>
-              <a:ext uri="{FF2B5EF4-FFF2-40B4-BE49-F238E27FC236}">
-                <a16:creationId xmlns:a16="http://schemas.microsoft.com/office/drawing/2014/main" id="{6DC35D6E-BC64-E645-B9D9-7619AB7C661B}"/>
-              </a:ext>
-            </a:extLst>
-          </p:cNvPr>
-          <p:cNvSpPr>
-            <a:spLocks noGrp="1"/>
-          </p:cNvSpPr>
-          <p:nvPr>
-            <p:ph type="ftr" sz="quarter" idx="11"/>
-          </p:nvPr>
-        </p:nvSpPr>
-        <p:spPr/>
-        <p:txBody>
-          <a:bodyPr/>
-          <a:lstStyle/>
-          <a:p>
-            <a:endParaRPr lang="en-US" dirty="0"/>
-          </a:p>
-        </p:txBody>
-      </p:sp>
-    </p:spTree>
-    <p:extLst>
-      <p:ext uri="{BB962C8B-B14F-4D97-AF65-F5344CB8AC3E}">
-        <p14:creationId xmlns:p14="http://schemas.microsoft.com/office/powerpoint/2010/main" val="3658310121"/>
-      </p:ext>
-    </p:extLst>
-  </p:cSld>
-  <p:clrMapOvr>
-    <a:masterClrMapping/>
-  </p:clrMapOvr>
 </p:sld>
 </file>
 
@@ -18699,6 +18373,467 @@
       </p:grpSpPr>
       <p:sp>
         <p:nvSpPr>
+          <p:cNvPr id="11" name="Title 1">
+            <a:extLst>
+              <a:ext uri="{FF2B5EF4-FFF2-40B4-BE49-F238E27FC236}">
+                <a16:creationId xmlns:a16="http://schemas.microsoft.com/office/drawing/2014/main" id="{1DF8CE2D-64D5-8C44-1C6B-E49F80023B25}"/>
+              </a:ext>
+            </a:extLst>
+          </p:cNvPr>
+          <p:cNvSpPr>
+            <a:spLocks noGrp="1"/>
+          </p:cNvSpPr>
+          <p:nvPr>
+            <p:ph type="title"/>
+          </p:nvPr>
+        </p:nvSpPr>
+        <p:spPr>
+          <a:xfrm>
+            <a:off x="609600" y="274638"/>
+            <a:ext cx="10972800" cy="1143000"/>
+          </a:xfrm>
+        </p:spPr>
+        <p:txBody>
+          <a:bodyPr/>
+          <a:lstStyle/>
+          <a:p>
+            <a:r>
+              <a:rPr lang="en-US" dirty="0"/>
+              <a:t>Declaring/defining a floating point field</a:t>
+            </a:r>
+          </a:p>
+        </p:txBody>
+      </p:sp>
+      <p:sp>
+        <p:nvSpPr>
+          <p:cNvPr id="6" name="Content Placeholder 2">
+            <a:extLst>
+              <a:ext uri="{FF2B5EF4-FFF2-40B4-BE49-F238E27FC236}">
+                <a16:creationId xmlns:a16="http://schemas.microsoft.com/office/drawing/2014/main" id="{20DB33BE-7416-B8C3-AA88-C98FFFA517C2}"/>
+              </a:ext>
+            </a:extLst>
+          </p:cNvPr>
+          <p:cNvSpPr>
+            <a:spLocks noGrp="1"/>
+          </p:cNvSpPr>
+          <p:nvPr>
+            <p:ph sz="half" idx="2"/>
+          </p:nvPr>
+        </p:nvSpPr>
+        <p:spPr>
+          <a:xfrm>
+            <a:off x="609601" y="2174875"/>
+            <a:ext cx="4406280" cy="3486373"/>
+          </a:xfrm>
+        </p:spPr>
+        <p:txBody>
+          <a:bodyPr>
+            <a:normAutofit/>
+          </a:bodyPr>
+          <a:lstStyle/>
+          <a:p>
+            <a:r>
+              <a:rPr lang="en-US" dirty="0"/>
+              <a:t>Use float  or double for non-integer numbers. </a:t>
+            </a:r>
+          </a:p>
+          <a:p>
+            <a:endParaRPr lang="en-US" dirty="0"/>
+          </a:p>
+          <a:p>
+            <a:r>
+              <a:rPr lang="en-US" dirty="0"/>
+              <a:t>When assigning numbers, use the f or d suffix with float or double. </a:t>
+            </a:r>
+          </a:p>
+        </p:txBody>
+      </p:sp>
+      <p:sp>
+        <p:nvSpPr>
+          <p:cNvPr id="17" name="Footer Placeholder 6">
+            <a:extLst>
+              <a:ext uri="{FF2B5EF4-FFF2-40B4-BE49-F238E27FC236}">
+                <a16:creationId xmlns:a16="http://schemas.microsoft.com/office/drawing/2014/main" id="{F9AA7C96-5B74-4925-8330-6278678D898C}"/>
+              </a:ext>
+            </a:extLst>
+          </p:cNvPr>
+          <p:cNvSpPr>
+            <a:spLocks noGrp="1"/>
+          </p:cNvSpPr>
+          <p:nvPr>
+            <p:ph type="ftr" sz="quarter" idx="11"/>
+          </p:nvPr>
+        </p:nvSpPr>
+        <p:spPr>
+          <a:xfrm>
+            <a:off x="4165600" y="6356351"/>
+            <a:ext cx="3860800" cy="365125"/>
+          </a:xfrm>
+        </p:spPr>
+        <p:txBody>
+          <a:bodyPr/>
+          <a:lstStyle/>
+          <a:p>
+            <a:endParaRPr lang="en-US"/>
+          </a:p>
+        </p:txBody>
+      </p:sp>
+      <p:pic>
+        <p:nvPicPr>
+          <p:cNvPr id="7" name="Picture 6">
+            <a:extLst>
+              <a:ext uri="{FF2B5EF4-FFF2-40B4-BE49-F238E27FC236}">
+                <a16:creationId xmlns:a16="http://schemas.microsoft.com/office/drawing/2014/main" id="{C78E3FC8-EA5F-3324-A362-1C224D8D6F0C}"/>
+              </a:ext>
+            </a:extLst>
+          </p:cNvPr>
+          <p:cNvPicPr>
+            <a:picLocks noChangeAspect="1"/>
+          </p:cNvPicPr>
+          <p:nvPr/>
+        </p:nvPicPr>
+        <p:blipFill>
+          <a:blip r:embed="rId2"/>
+          <a:stretch>
+            <a:fillRect/>
+          </a:stretch>
+        </p:blipFill>
+        <p:spPr>
+          <a:xfrm>
+            <a:off x="5159896" y="1724248"/>
+            <a:ext cx="6858000" cy="3937000"/>
+          </a:xfrm>
+          <a:prstGeom prst="rect">
+            <a:avLst/>
+          </a:prstGeom>
+        </p:spPr>
+      </p:pic>
+    </p:spTree>
+    <p:extLst>
+      <p:ext uri="{BB962C8B-B14F-4D97-AF65-F5344CB8AC3E}">
+        <p14:creationId xmlns:p14="http://schemas.microsoft.com/office/powerpoint/2010/main" val="4070631545"/>
+      </p:ext>
+    </p:extLst>
+  </p:cSld>
+  <p:clrMapOvr>
+    <a:masterClrMapping/>
+  </p:clrMapOvr>
+</p:sld>
+</file>
+
+<file path=ppt/slides/slide25.xml><?xml version="1.0" encoding="utf-8"?>
+<p:sld xmlns:a="http://schemas.openxmlformats.org/drawingml/2006/main" xmlns:r="http://schemas.openxmlformats.org/officeDocument/2006/relationships" xmlns:p="http://schemas.openxmlformats.org/presentationml/2006/main">
+  <p:cSld>
+    <p:spTree>
+      <p:nvGrpSpPr>
+        <p:cNvPr id="1" name=""/>
+        <p:cNvGrpSpPr/>
+        <p:nvPr/>
+      </p:nvGrpSpPr>
+      <p:grpSpPr>
+        <a:xfrm>
+          <a:off x="0" y="0"/>
+          <a:ext cx="0" cy="0"/>
+          <a:chOff x="0" y="0"/>
+          <a:chExt cx="0" cy="0"/>
+        </a:xfrm>
+      </p:grpSpPr>
+      <p:sp>
+        <p:nvSpPr>
+          <p:cNvPr id="10" name="Content Placeholder 9">
+            <a:extLst>
+              <a:ext uri="{FF2B5EF4-FFF2-40B4-BE49-F238E27FC236}">
+                <a16:creationId xmlns:a16="http://schemas.microsoft.com/office/drawing/2014/main" id="{DDAB0CD6-34CB-6B7B-C4FE-0760782C4D3A}"/>
+              </a:ext>
+            </a:extLst>
+          </p:cNvPr>
+          <p:cNvSpPr>
+            <a:spLocks noGrp="1"/>
+          </p:cNvSpPr>
+          <p:nvPr>
+            <p:ph sz="half" idx="1"/>
+          </p:nvPr>
+        </p:nvSpPr>
+        <p:spPr>
+          <a:xfrm>
+            <a:off x="335360" y="2204859"/>
+            <a:ext cx="3326160" cy="4525963"/>
+          </a:xfrm>
+        </p:spPr>
+        <p:txBody>
+          <a:bodyPr/>
+          <a:lstStyle/>
+          <a:p>
+            <a:r>
+              <a:rPr lang="en-US" dirty="0"/>
+              <a:t>Cannot assign a non-integer value to an integer variable. </a:t>
+            </a:r>
+          </a:p>
+        </p:txBody>
+      </p:sp>
+      <p:pic>
+        <p:nvPicPr>
+          <p:cNvPr id="12" name="Content Placeholder 11">
+            <a:extLst>
+              <a:ext uri="{FF2B5EF4-FFF2-40B4-BE49-F238E27FC236}">
+                <a16:creationId xmlns:a16="http://schemas.microsoft.com/office/drawing/2014/main" id="{A3DEBA28-6C4F-ACC8-1BF3-27FAB5B545EB}"/>
+              </a:ext>
+            </a:extLst>
+          </p:cNvPr>
+          <p:cNvPicPr>
+            <a:picLocks noGrp="1" noChangeAspect="1"/>
+          </p:cNvPicPr>
+          <p:nvPr>
+            <p:ph sz="half" idx="2"/>
+          </p:nvPr>
+        </p:nvPicPr>
+        <p:blipFill>
+          <a:blip r:embed="rId2"/>
+          <a:stretch>
+            <a:fillRect/>
+          </a:stretch>
+        </p:blipFill>
+        <p:spPr>
+          <a:xfrm>
+            <a:off x="3819448" y="1772816"/>
+            <a:ext cx="8453440" cy="3816424"/>
+          </a:xfrm>
+          <a:prstGeom prst="rect">
+            <a:avLst/>
+          </a:prstGeom>
+        </p:spPr>
+      </p:pic>
+      <p:sp>
+        <p:nvSpPr>
+          <p:cNvPr id="7" name="Footer Placeholder 6">
+            <a:extLst>
+              <a:ext uri="{FF2B5EF4-FFF2-40B4-BE49-F238E27FC236}">
+                <a16:creationId xmlns:a16="http://schemas.microsoft.com/office/drawing/2014/main" id="{51CEA2F2-9BCF-3453-9560-7BA70379319C}"/>
+              </a:ext>
+            </a:extLst>
+          </p:cNvPr>
+          <p:cNvSpPr>
+            <a:spLocks noGrp="1"/>
+          </p:cNvSpPr>
+          <p:nvPr>
+            <p:ph type="ftr" sz="quarter" idx="11"/>
+          </p:nvPr>
+        </p:nvSpPr>
+        <p:spPr/>
+        <p:txBody>
+          <a:bodyPr/>
+          <a:lstStyle/>
+          <a:p>
+            <a:endParaRPr lang="en-US" dirty="0"/>
+          </a:p>
+        </p:txBody>
+      </p:sp>
+      <p:sp>
+        <p:nvSpPr>
+          <p:cNvPr id="13" name="Title 1">
+            <a:extLst>
+              <a:ext uri="{FF2B5EF4-FFF2-40B4-BE49-F238E27FC236}">
+                <a16:creationId xmlns:a16="http://schemas.microsoft.com/office/drawing/2014/main" id="{B35FB4E3-9F3B-F931-6D6E-484DCF43A5BA}"/>
+              </a:ext>
+            </a:extLst>
+          </p:cNvPr>
+          <p:cNvSpPr txBox="1">
+            <a:spLocks noGrp="1"/>
+          </p:cNvSpPr>
+          <p:nvPr>
+            <p:ph type="title"/>
+          </p:nvPr>
+        </p:nvSpPr>
+        <p:spPr>
+          <a:prstGeom prst="rect">
+            <a:avLst/>
+          </a:prstGeom>
+        </p:spPr>
+        <p:txBody>
+          <a:bodyPr vert="horz" lIns="91440" tIns="45720" rIns="91440" bIns="45720" rtlCol="0" anchor="ctr">
+            <a:normAutofit/>
+          </a:bodyPr>
+          <a:lstStyle>
+            <a:lvl1pPr algn="ctr" defTabSz="914400" rtl="0" eaLnBrk="1" latinLnBrk="0" hangingPunct="1">
+              <a:spcBef>
+                <a:spcPct val="0"/>
+              </a:spcBef>
+              <a:buNone/>
+              <a:defRPr sz="4400" kern="1200">
+                <a:solidFill>
+                  <a:schemeClr val="tx1"/>
+                </a:solidFill>
+                <a:latin typeface="+mj-lt"/>
+                <a:ea typeface="+mj-ea"/>
+                <a:cs typeface="+mj-cs"/>
+              </a:defRPr>
+            </a:lvl1pPr>
+          </a:lstStyle>
+          <a:p>
+            <a:pPr algn="l">
+              <a:spcAft>
+                <a:spcPts val="600"/>
+              </a:spcAft>
+            </a:pPr>
+            <a:r>
+              <a:rPr lang="en-US" dirty="0">
+                <a:solidFill>
+                  <a:schemeClr val="tx1">
+                    <a:lumMod val="65000"/>
+                    <a:lumOff val="35000"/>
+                  </a:schemeClr>
+                </a:solidFill>
+              </a:rPr>
+              <a:t>Declaring variables – some errors - 3</a:t>
+            </a:r>
+          </a:p>
+        </p:txBody>
+      </p:sp>
+    </p:spTree>
+    <p:extLst>
+      <p:ext uri="{BB962C8B-B14F-4D97-AF65-F5344CB8AC3E}">
+        <p14:creationId xmlns:p14="http://schemas.microsoft.com/office/powerpoint/2010/main" val="2149008804"/>
+      </p:ext>
+    </p:extLst>
+  </p:cSld>
+  <p:clrMapOvr>
+    <a:masterClrMapping/>
+  </p:clrMapOvr>
+</p:sld>
+</file>
+
+<file path=ppt/slides/slide26.xml><?xml version="1.0" encoding="utf-8"?>
+<p:sld xmlns:a="http://schemas.openxmlformats.org/drawingml/2006/main" xmlns:r="http://schemas.openxmlformats.org/officeDocument/2006/relationships" xmlns:p="http://schemas.openxmlformats.org/presentationml/2006/main">
+  <p:cSld>
+    <p:spTree>
+      <p:nvGrpSpPr>
+        <p:cNvPr id="1" name=""/>
+        <p:cNvGrpSpPr/>
+        <p:nvPr/>
+      </p:nvGrpSpPr>
+      <p:grpSpPr>
+        <a:xfrm>
+          <a:off x="0" y="0"/>
+          <a:ext cx="0" cy="0"/>
+          <a:chOff x="0" y="0"/>
+          <a:chExt cx="0" cy="0"/>
+        </a:xfrm>
+      </p:grpSpPr>
+      <p:sp>
+        <p:nvSpPr>
+          <p:cNvPr id="6" name="Title 5">
+            <a:extLst>
+              <a:ext uri="{FF2B5EF4-FFF2-40B4-BE49-F238E27FC236}">
+                <a16:creationId xmlns:a16="http://schemas.microsoft.com/office/drawing/2014/main" id="{0497BC0A-69EA-8943-B754-86476F97F05B}"/>
+              </a:ext>
+            </a:extLst>
+          </p:cNvPr>
+          <p:cNvSpPr>
+            <a:spLocks noGrp="1"/>
+          </p:cNvSpPr>
+          <p:nvPr>
+            <p:ph type="title"/>
+          </p:nvPr>
+        </p:nvSpPr>
+        <p:spPr/>
+        <p:txBody>
+          <a:bodyPr/>
+          <a:lstStyle/>
+          <a:p>
+            <a:r>
+              <a:rPr lang="en-US" dirty="0"/>
+              <a:t>Scope of Variables</a:t>
+            </a:r>
+          </a:p>
+        </p:txBody>
+      </p:sp>
+      <p:sp>
+        <p:nvSpPr>
+          <p:cNvPr id="5" name="Footer Placeholder 4">
+            <a:extLst>
+              <a:ext uri="{FF2B5EF4-FFF2-40B4-BE49-F238E27FC236}">
+                <a16:creationId xmlns:a16="http://schemas.microsoft.com/office/drawing/2014/main" id="{3DA14DAD-4B25-40D1-B0D4-D93D4C15D3E0}"/>
+              </a:ext>
+            </a:extLst>
+          </p:cNvPr>
+          <p:cNvSpPr>
+            <a:spLocks noGrp="1"/>
+          </p:cNvSpPr>
+          <p:nvPr>
+            <p:ph type="ftr" sz="quarter" idx="11"/>
+          </p:nvPr>
+        </p:nvSpPr>
+        <p:spPr/>
+        <p:txBody>
+          <a:bodyPr/>
+          <a:lstStyle/>
+          <a:p>
+            <a:endParaRPr lang="en-US" dirty="0"/>
+          </a:p>
+        </p:txBody>
+      </p:sp>
+      <p:pic>
+        <p:nvPicPr>
+          <p:cNvPr id="8" name="Picture 7">
+            <a:extLst>
+              <a:ext uri="{FF2B5EF4-FFF2-40B4-BE49-F238E27FC236}">
+                <a16:creationId xmlns:a16="http://schemas.microsoft.com/office/drawing/2014/main" id="{24900E19-5D43-883E-DED1-4771A2A0D682}"/>
+              </a:ext>
+            </a:extLst>
+          </p:cNvPr>
+          <p:cNvPicPr>
+            <a:picLocks noChangeAspect="1"/>
+          </p:cNvPicPr>
+          <p:nvPr/>
+        </p:nvPicPr>
+        <p:blipFill>
+          <a:blip r:embed="rId2"/>
+          <a:stretch>
+            <a:fillRect/>
+          </a:stretch>
+        </p:blipFill>
+        <p:spPr>
+          <a:xfrm>
+            <a:off x="2209800" y="1345917"/>
+            <a:ext cx="7772400" cy="5254180"/>
+          </a:xfrm>
+          <a:prstGeom prst="rect">
+            <a:avLst/>
+          </a:prstGeom>
+        </p:spPr>
+      </p:pic>
+    </p:spTree>
+    <p:extLst>
+      <p:ext uri="{BB962C8B-B14F-4D97-AF65-F5344CB8AC3E}">
+        <p14:creationId xmlns:p14="http://schemas.microsoft.com/office/powerpoint/2010/main" val="2931275903"/>
+      </p:ext>
+    </p:extLst>
+  </p:cSld>
+  <p:clrMapOvr>
+    <a:masterClrMapping/>
+  </p:clrMapOvr>
+</p:sld>
+</file>
+
+<file path=ppt/slides/slide27.xml><?xml version="1.0" encoding="utf-8"?>
+<p:sld xmlns:a="http://schemas.openxmlformats.org/drawingml/2006/main" xmlns:r="http://schemas.openxmlformats.org/officeDocument/2006/relationships" xmlns:p="http://schemas.openxmlformats.org/presentationml/2006/main">
+  <p:cSld>
+    <p:spTree>
+      <p:nvGrpSpPr>
+        <p:cNvPr id="1" name=""/>
+        <p:cNvGrpSpPr/>
+        <p:nvPr/>
+      </p:nvGrpSpPr>
+      <p:grpSpPr>
+        <a:xfrm>
+          <a:off x="0" y="0"/>
+          <a:ext cx="0" cy="0"/>
+          <a:chOff x="0" y="0"/>
+          <a:chExt cx="0" cy="0"/>
+        </a:xfrm>
+      </p:grpSpPr>
+      <p:sp>
+        <p:nvSpPr>
           <p:cNvPr id="79873" name="Rectangle 4"/>
           <p:cNvSpPr>
             <a:spLocks noGrp="1" noChangeArrowheads="1"/>
@@ -18756,14 +18891,14 @@
           </a:ln>
           <a:extLst>
             <a:ext uri="{909E8E84-426E-40dd-AFC4-6F175D3DCCD1}">
-              <a14:hiddenFill xmlns="" xmlns:a14="http://schemas.microsoft.com/office/drawing/2010/main">
+              <a14:hiddenFill xmlns:a14="http://schemas.microsoft.com/office/drawing/2010/main" xmlns="">
                 <a:solidFill>
                   <a:srgbClr val="FFFFFF"/>
                 </a:solidFill>
               </a14:hiddenFill>
             </a:ext>
             <a:ext uri="{91240B29-F687-4f45-9708-019B960494DF}">
-              <a14:hiddenLine xmlns="" xmlns:a14="http://schemas.microsoft.com/office/drawing/2010/main" w="9525">
+              <a14:hiddenLine xmlns:a14="http://schemas.microsoft.com/office/drawing/2010/main" xmlns="" w="9525">
                 <a:solidFill>
                   <a:srgbClr val="000000"/>
                 </a:solidFill>
@@ -18783,7 +18918,7 @@
 </p:sld>
 </file>
 
-<file path=ppt/slides/slide25.xml><?xml version="1.0" encoding="utf-8"?>
+<file path=ppt/slides/slide28.xml><?xml version="1.0" encoding="utf-8"?>
 <p:sld xmlns:a="http://schemas.openxmlformats.org/drawingml/2006/main" xmlns:r="http://schemas.openxmlformats.org/officeDocument/2006/relationships" xmlns:p="http://schemas.openxmlformats.org/presentationml/2006/main">
   <p:cSld>
     <p:spTree>
@@ -19204,7 +19339,7 @@
 </p:sld>
 </file>
 
-<file path=ppt/slides/slide26.xml><?xml version="1.0" encoding="utf-8"?>
+<file path=ppt/slides/slide29.xml><?xml version="1.0" encoding="utf-8"?>
 <p:sld xmlns:a="http://schemas.openxmlformats.org/drawingml/2006/main" xmlns:r="http://schemas.openxmlformats.org/officeDocument/2006/relationships" xmlns:p="http://schemas.openxmlformats.org/presentationml/2006/main">
   <p:cSld>
     <p:spTree>
@@ -19499,1963 +19634,6 @@
       </p:par>
     </p:tnLst>
   </p:timing>
-</p:sld>
-</file>
-
-<file path=ppt/slides/slide27.xml><?xml version="1.0" encoding="utf-8"?>
-<p:sld xmlns:a="http://schemas.openxmlformats.org/drawingml/2006/main" xmlns:r="http://schemas.openxmlformats.org/officeDocument/2006/relationships" xmlns:p="http://schemas.openxmlformats.org/presentationml/2006/main">
-  <p:cSld>
-    <p:spTree>
-      <p:nvGrpSpPr>
-        <p:cNvPr id="1" name=""/>
-        <p:cNvGrpSpPr/>
-        <p:nvPr/>
-      </p:nvGrpSpPr>
-      <p:grpSpPr>
-        <a:xfrm>
-          <a:off x="0" y="0"/>
-          <a:ext cx="0" cy="0"/>
-          <a:chOff x="0" y="0"/>
-          <a:chExt cx="0" cy="0"/>
-        </a:xfrm>
-      </p:grpSpPr>
-      <p:sp>
-        <p:nvSpPr>
-          <p:cNvPr id="2" name="Title 1"/>
-          <p:cNvSpPr>
-            <a:spLocks noGrp="1"/>
-          </p:cNvSpPr>
-          <p:nvPr>
-            <p:ph type="title"/>
-          </p:nvPr>
-        </p:nvSpPr>
-        <p:spPr/>
-        <p:txBody>
-          <a:bodyPr/>
-          <a:lstStyle/>
-          <a:p>
-            <a:r>
-              <a:rPr lang="en-US" dirty="0"/>
-              <a:t>Unsuccessful attempt</a:t>
-            </a:r>
-          </a:p>
-        </p:txBody>
-      </p:sp>
-      <p:sp>
-        <p:nvSpPr>
-          <p:cNvPr id="5" name="Text Box 3"/>
-          <p:cNvSpPr txBox="1">
-            <a:spLocks noChangeArrowheads="1"/>
-          </p:cNvSpPr>
-          <p:nvPr/>
-        </p:nvSpPr>
-        <p:spPr bwMode="auto">
-          <a:xfrm>
-            <a:off x="3071664" y="1984654"/>
-            <a:ext cx="6628738" cy="3108543"/>
-          </a:xfrm>
-          <a:prstGeom prst="rect">
-            <a:avLst/>
-          </a:prstGeom>
-          <a:noFill/>
-          <a:ln>
-            <a:noFill/>
-          </a:ln>
-          <a:extLst>
-            <a:ext uri="{909E8E84-426E-40dd-AFC4-6F175D3DCCD1}">
-              <a14:hiddenFill xmlns="" xmlns:a14="http://schemas.microsoft.com/office/drawing/2010/main">
-                <a:solidFill>
-                  <a:srgbClr val="FFFFFF"/>
-                </a:solidFill>
-              </a14:hiddenFill>
-            </a:ext>
-            <a:ext uri="{91240B29-F687-4f45-9708-019B960494DF}">
-              <a14:hiddenLine xmlns="" xmlns:a14="http://schemas.microsoft.com/office/drawing/2010/main" w="9525">
-                <a:solidFill>
-                  <a:srgbClr val="000000"/>
-                </a:solidFill>
-                <a:miter lim="800000"/>
-                <a:headEnd/>
-                <a:tailEnd/>
-              </a14:hiddenLine>
-            </a:ext>
-          </a:extLst>
-        </p:spPr>
-        <p:txBody>
-          <a:bodyPr wrap="none">
-            <a:spAutoFit/>
-          </a:bodyPr>
-          <a:lstStyle>
-            <a:lvl1pPr>
-              <a:spcBef>
-                <a:spcPct val="20000"/>
-              </a:spcBef>
-              <a:buClr>
-                <a:srgbClr val="264D8B"/>
-              </a:buClr>
-              <a:buFont typeface="Times" charset="0"/>
-              <a:buChar char="•"/>
-              <a:defRPr sz="3200">
-                <a:solidFill>
-                  <a:srgbClr val="1A3170"/>
-                </a:solidFill>
-                <a:latin typeface="Trebuchet MS" charset="0"/>
-                <a:ea typeface="MS PGothic" charset="-128"/>
-              </a:defRPr>
-            </a:lvl1pPr>
-            <a:lvl2pPr marL="742950" indent="-285750">
-              <a:spcBef>
-                <a:spcPct val="20000"/>
-              </a:spcBef>
-              <a:buClr>
-                <a:srgbClr val="264D8B"/>
-              </a:buClr>
-              <a:buChar char="–"/>
-              <a:defRPr sz="2800">
-                <a:solidFill>
-                  <a:srgbClr val="1A3170"/>
-                </a:solidFill>
-                <a:latin typeface="Trebuchet MS" charset="0"/>
-                <a:ea typeface="MS PGothic" charset="-128"/>
-              </a:defRPr>
-            </a:lvl2pPr>
-            <a:lvl3pPr marL="1143000" indent="-228600">
-              <a:spcBef>
-                <a:spcPct val="20000"/>
-              </a:spcBef>
-              <a:buClr>
-                <a:srgbClr val="264D8B"/>
-              </a:buClr>
-              <a:buChar char="•"/>
-              <a:defRPr sz="2400">
-                <a:solidFill>
-                  <a:srgbClr val="1A3170"/>
-                </a:solidFill>
-                <a:latin typeface="Trebuchet MS" charset="0"/>
-                <a:ea typeface="MS PGothic" charset="-128"/>
-              </a:defRPr>
-            </a:lvl3pPr>
-            <a:lvl4pPr marL="1600200" indent="-228600">
-              <a:spcBef>
-                <a:spcPct val="20000"/>
-              </a:spcBef>
-              <a:buClr>
-                <a:srgbClr val="264D8B"/>
-              </a:buClr>
-              <a:buChar char="–"/>
-              <a:defRPr sz="2000">
-                <a:solidFill>
-                  <a:srgbClr val="1A3170"/>
-                </a:solidFill>
-                <a:latin typeface="Trebuchet MS" charset="0"/>
-                <a:ea typeface="MS PGothic" charset="-128"/>
-              </a:defRPr>
-            </a:lvl4pPr>
-            <a:lvl5pPr marL="2057400" indent="-228600">
-              <a:spcBef>
-                <a:spcPct val="20000"/>
-              </a:spcBef>
-              <a:buClr>
-                <a:srgbClr val="264D8B"/>
-              </a:buClr>
-              <a:buChar char="»"/>
-              <a:defRPr sz="2000">
-                <a:solidFill>
-                  <a:srgbClr val="1A3170"/>
-                </a:solidFill>
-                <a:latin typeface="Trebuchet MS" charset="0"/>
-                <a:ea typeface="MS PGothic" charset="-128"/>
-              </a:defRPr>
-            </a:lvl5pPr>
-            <a:lvl6pPr marL="2514600" indent="-228600" eaLnBrk="0" fontAlgn="base" hangingPunct="0">
-              <a:spcBef>
-                <a:spcPct val="20000"/>
-              </a:spcBef>
-              <a:spcAft>
-                <a:spcPct val="0"/>
-              </a:spcAft>
-              <a:buClr>
-                <a:srgbClr val="264D8B"/>
-              </a:buClr>
-              <a:buChar char="»"/>
-              <a:defRPr sz="2000">
-                <a:solidFill>
-                  <a:srgbClr val="1A3170"/>
-                </a:solidFill>
-                <a:latin typeface="Trebuchet MS" charset="0"/>
-                <a:ea typeface="MS PGothic" charset="-128"/>
-              </a:defRPr>
-            </a:lvl6pPr>
-            <a:lvl7pPr marL="2971800" indent="-228600" eaLnBrk="0" fontAlgn="base" hangingPunct="0">
-              <a:spcBef>
-                <a:spcPct val="20000"/>
-              </a:spcBef>
-              <a:spcAft>
-                <a:spcPct val="0"/>
-              </a:spcAft>
-              <a:buClr>
-                <a:srgbClr val="264D8B"/>
-              </a:buClr>
-              <a:buChar char="»"/>
-              <a:defRPr sz="2000">
-                <a:solidFill>
-                  <a:srgbClr val="1A3170"/>
-                </a:solidFill>
-                <a:latin typeface="Trebuchet MS" charset="0"/>
-                <a:ea typeface="MS PGothic" charset="-128"/>
-              </a:defRPr>
-            </a:lvl7pPr>
-            <a:lvl8pPr marL="3429000" indent="-228600" eaLnBrk="0" fontAlgn="base" hangingPunct="0">
-              <a:spcBef>
-                <a:spcPct val="20000"/>
-              </a:spcBef>
-              <a:spcAft>
-                <a:spcPct val="0"/>
-              </a:spcAft>
-              <a:buClr>
-                <a:srgbClr val="264D8B"/>
-              </a:buClr>
-              <a:buChar char="»"/>
-              <a:defRPr sz="2000">
-                <a:solidFill>
-                  <a:srgbClr val="1A3170"/>
-                </a:solidFill>
-                <a:latin typeface="Trebuchet MS" charset="0"/>
-                <a:ea typeface="MS PGothic" charset="-128"/>
-              </a:defRPr>
-            </a:lvl8pPr>
-            <a:lvl9pPr marL="3886200" indent="-228600" eaLnBrk="0" fontAlgn="base" hangingPunct="0">
-              <a:spcBef>
-                <a:spcPct val="20000"/>
-              </a:spcBef>
-              <a:spcAft>
-                <a:spcPct val="0"/>
-              </a:spcAft>
-              <a:buClr>
-                <a:srgbClr val="264D8B"/>
-              </a:buClr>
-              <a:buChar char="»"/>
-              <a:defRPr sz="2000">
-                <a:solidFill>
-                  <a:srgbClr val="1A3170"/>
-                </a:solidFill>
-                <a:latin typeface="Trebuchet MS" charset="0"/>
-                <a:ea typeface="MS PGothic" charset="-128"/>
-              </a:defRPr>
-            </a:lvl9pPr>
-          </a:lstStyle>
-          <a:p>
-            <a:pPr eaLnBrk="1" hangingPunct="1">
-              <a:spcBef>
-                <a:spcPct val="0"/>
-              </a:spcBef>
-              <a:buClrTx/>
-              <a:buFontTx/>
-              <a:buNone/>
-            </a:pPr>
-            <a:r>
-              <a:rPr lang="en-US" altLang="en-US" sz="2800" dirty="0">
-                <a:solidFill>
-                  <a:schemeClr val="tx1"/>
-                </a:solidFill>
-                <a:latin typeface="Courier New" charset="0"/>
-              </a:rPr>
-              <a:t>public </a:t>
-            </a:r>
-            <a:r>
-              <a:rPr lang="en-US" altLang="en-US" sz="2800" dirty="0" err="1">
-                <a:solidFill>
-                  <a:schemeClr val="tx1"/>
-                </a:solidFill>
-                <a:latin typeface="Courier New" charset="0"/>
-              </a:rPr>
-              <a:t>int</a:t>
-            </a:r>
-            <a:r>
-              <a:rPr lang="en-US" altLang="en-US" sz="2800" dirty="0">
-                <a:solidFill>
-                  <a:schemeClr val="tx1"/>
-                </a:solidFill>
-                <a:latin typeface="Courier New" charset="0"/>
-              </a:rPr>
-              <a:t> </a:t>
-            </a:r>
-            <a:r>
-              <a:rPr lang="en-US" altLang="en-US" sz="2800" dirty="0" err="1">
-                <a:solidFill>
-                  <a:schemeClr val="tx1"/>
-                </a:solidFill>
-                <a:latin typeface="Courier New" charset="0"/>
-              </a:rPr>
-              <a:t>refundBalance</a:t>
-            </a:r>
-            <a:r>
-              <a:rPr lang="en-US" altLang="en-US" sz="2800" dirty="0">
-                <a:solidFill>
-                  <a:schemeClr val="tx1"/>
-                </a:solidFill>
-                <a:latin typeface="Courier New" charset="0"/>
-              </a:rPr>
-              <a:t>()</a:t>
-            </a:r>
-          </a:p>
-          <a:p>
-            <a:pPr eaLnBrk="1" hangingPunct="1">
-              <a:spcBef>
-                <a:spcPct val="0"/>
-              </a:spcBef>
-              <a:buClrTx/>
-              <a:buFontTx/>
-              <a:buNone/>
-            </a:pPr>
-            <a:r>
-              <a:rPr lang="en-US" altLang="en-US" sz="2800" dirty="0">
-                <a:solidFill>
-                  <a:schemeClr val="tx1"/>
-                </a:solidFill>
-                <a:latin typeface="Courier New" charset="0"/>
-              </a:rPr>
-              <a:t>{</a:t>
-            </a:r>
-          </a:p>
-          <a:p>
-            <a:pPr eaLnBrk="1" hangingPunct="1">
-              <a:spcBef>
-                <a:spcPct val="0"/>
-              </a:spcBef>
-              <a:buClrTx/>
-              <a:buFontTx/>
-              <a:buNone/>
-            </a:pPr>
-            <a:r>
-              <a:rPr lang="en-US" altLang="en-US" sz="2800" dirty="0">
-                <a:solidFill>
-                  <a:schemeClr val="tx1"/>
-                </a:solidFill>
-                <a:latin typeface="Courier New" charset="0"/>
-              </a:rPr>
-              <a:t>    // Return the amount left.</a:t>
-            </a:r>
-          </a:p>
-          <a:p>
-            <a:pPr eaLnBrk="1" hangingPunct="1">
-              <a:spcBef>
-                <a:spcPct val="0"/>
-              </a:spcBef>
-              <a:buClrTx/>
-              <a:buFontTx/>
-              <a:buNone/>
-            </a:pPr>
-            <a:r>
-              <a:rPr lang="en-US" altLang="en-US" sz="2800" dirty="0">
-                <a:solidFill>
-                  <a:schemeClr val="tx1"/>
-                </a:solidFill>
-                <a:latin typeface="Courier New" charset="0"/>
-              </a:rPr>
-              <a:t>    return balance;</a:t>
-            </a:r>
-          </a:p>
-          <a:p>
-            <a:pPr eaLnBrk="1" hangingPunct="1">
-              <a:spcBef>
-                <a:spcPct val="0"/>
-              </a:spcBef>
-              <a:buClrTx/>
-              <a:buFontTx/>
-              <a:buNone/>
-            </a:pPr>
-            <a:r>
-              <a:rPr lang="en-US" altLang="en-US" sz="2800" dirty="0">
-                <a:solidFill>
-                  <a:schemeClr val="tx1"/>
-                </a:solidFill>
-                <a:latin typeface="Courier New" charset="0"/>
-              </a:rPr>
-              <a:t>    // Clear the balance.</a:t>
-            </a:r>
-          </a:p>
-          <a:p>
-            <a:pPr eaLnBrk="1" hangingPunct="1">
-              <a:spcBef>
-                <a:spcPct val="0"/>
-              </a:spcBef>
-              <a:buClrTx/>
-              <a:buFontTx/>
-              <a:buNone/>
-            </a:pPr>
-            <a:r>
-              <a:rPr lang="en-US" altLang="en-US" sz="2800" dirty="0">
-                <a:solidFill>
-                  <a:schemeClr val="tx1"/>
-                </a:solidFill>
-                <a:latin typeface="Courier New" charset="0"/>
-              </a:rPr>
-              <a:t>    balance = 0;</a:t>
-            </a:r>
-          </a:p>
-          <a:p>
-            <a:pPr eaLnBrk="1" hangingPunct="1">
-              <a:spcBef>
-                <a:spcPct val="0"/>
-              </a:spcBef>
-              <a:buClrTx/>
-              <a:buFontTx/>
-              <a:buNone/>
-            </a:pPr>
-            <a:r>
-              <a:rPr lang="en-US" altLang="en-US" sz="2800" dirty="0">
-                <a:solidFill>
-                  <a:schemeClr val="tx1"/>
-                </a:solidFill>
-                <a:latin typeface="Courier New" charset="0"/>
-              </a:rPr>
-              <a:t>} </a:t>
-            </a:r>
-          </a:p>
-        </p:txBody>
-      </p:sp>
-      <p:sp>
-        <p:nvSpPr>
-          <p:cNvPr id="6" name="TextBox 5"/>
-          <p:cNvSpPr txBox="1"/>
-          <p:nvPr/>
-        </p:nvSpPr>
-        <p:spPr>
-          <a:xfrm>
-            <a:off x="695400" y="5475547"/>
-            <a:ext cx="9371733" cy="830997"/>
-          </a:xfrm>
-          <a:prstGeom prst="rect">
-            <a:avLst/>
-          </a:prstGeom>
-          <a:gradFill>
-            <a:gsLst>
-              <a:gs pos="0">
-                <a:schemeClr val="accent6">
-                  <a:tint val="50000"/>
-                  <a:satMod val="300000"/>
-                </a:schemeClr>
-              </a:gs>
-              <a:gs pos="35000">
-                <a:schemeClr val="accent6">
-                  <a:tint val="37000"/>
-                  <a:satMod val="300000"/>
-                </a:schemeClr>
-              </a:gs>
-              <a:gs pos="100000">
-                <a:schemeClr val="accent6">
-                  <a:tint val="15000"/>
-                  <a:satMod val="350000"/>
-                </a:schemeClr>
-              </a:gs>
-            </a:gsLst>
-            <a:lin ang="16200000" scaled="1"/>
-          </a:gradFill>
-        </p:spPr>
-        <p:txBody>
-          <a:bodyPr wrap="none" rtlCol="0">
-            <a:spAutoFit/>
-          </a:bodyPr>
-          <a:lstStyle/>
-          <a:p>
-            <a:r>
-              <a:rPr lang="en-US" sz="2400" dirty="0">
-                <a:solidFill>
-                  <a:srgbClr val="0070C0"/>
-                </a:solidFill>
-              </a:rPr>
-              <a:t>It looks logical, but the language does not allow it. </a:t>
-            </a:r>
-          </a:p>
-          <a:p>
-            <a:r>
-              <a:rPr lang="en-US" sz="2400" dirty="0">
-                <a:solidFill>
-                  <a:srgbClr val="0070C0"/>
-                </a:solidFill>
-              </a:rPr>
-              <a:t>A method will terminate immediately after executing a return statement! </a:t>
-            </a:r>
-          </a:p>
-        </p:txBody>
-      </p:sp>
-    </p:spTree>
-    <p:extLst>
-      <p:ext uri="{BB962C8B-B14F-4D97-AF65-F5344CB8AC3E}">
-        <p14:creationId xmlns:p14="http://schemas.microsoft.com/office/powerpoint/2010/main" val="1105692568"/>
-      </p:ext>
-    </p:extLst>
-  </p:cSld>
-  <p:clrMapOvr>
-    <a:masterClrMapping/>
-  </p:clrMapOvr>
-  <p:timing>
-    <p:tnLst>
-      <p:par>
-        <p:cTn id="1" dur="indefinite" restart="never" nodeType="tmRoot">
-          <p:childTnLst>
-            <p:seq concurrent="1" nextAc="seek">
-              <p:cTn id="2" dur="indefinite" nodeType="mainSeq">
-                <p:childTnLst>
-                  <p:par>
-                    <p:cTn id="3" fill="hold">
-                      <p:stCondLst>
-                        <p:cond delay="indefinite"/>
-                      </p:stCondLst>
-                      <p:childTnLst>
-                        <p:par>
-                          <p:cTn id="4" fill="hold">
-                            <p:stCondLst>
-                              <p:cond delay="0"/>
-                            </p:stCondLst>
-                            <p:childTnLst>
-                              <p:par>
-                                <p:cTn id="5" presetID="2" presetClass="entr" presetSubtype="4" fill="hold" grpId="0" nodeType="clickEffect">
-                                  <p:stCondLst>
-                                    <p:cond delay="0"/>
-                                  </p:stCondLst>
-                                  <p:childTnLst>
-                                    <p:set>
-                                      <p:cBhvr>
-                                        <p:cTn id="6" dur="1" fill="hold">
-                                          <p:stCondLst>
-                                            <p:cond delay="0"/>
-                                          </p:stCondLst>
-                                        </p:cTn>
-                                        <p:tgtEl>
-                                          <p:spTgt spid="6"/>
-                                        </p:tgtEl>
-                                        <p:attrNameLst>
-                                          <p:attrName>style.visibility</p:attrName>
-                                        </p:attrNameLst>
-                                      </p:cBhvr>
-                                      <p:to>
-                                        <p:strVal val="visible"/>
-                                      </p:to>
-                                    </p:set>
-                                    <p:anim calcmode="lin" valueType="num">
-                                      <p:cBhvr additive="base">
-                                        <p:cTn id="7" dur="500" fill="hold"/>
-                                        <p:tgtEl>
-                                          <p:spTgt spid="6"/>
-                                        </p:tgtEl>
-                                        <p:attrNameLst>
-                                          <p:attrName>ppt_x</p:attrName>
-                                        </p:attrNameLst>
-                                      </p:cBhvr>
-                                      <p:tavLst>
-                                        <p:tav tm="0">
-                                          <p:val>
-                                            <p:strVal val="#ppt_x"/>
-                                          </p:val>
-                                        </p:tav>
-                                        <p:tav tm="100000">
-                                          <p:val>
-                                            <p:strVal val="#ppt_x"/>
-                                          </p:val>
-                                        </p:tav>
-                                      </p:tavLst>
-                                    </p:anim>
-                                    <p:anim calcmode="lin" valueType="num">
-                                      <p:cBhvr additive="base">
-                                        <p:cTn id="8" dur="500" fill="hold"/>
-                                        <p:tgtEl>
-                                          <p:spTgt spid="6"/>
-                                        </p:tgtEl>
-                                        <p:attrNameLst>
-                                          <p:attrName>ppt_y</p:attrName>
-                                        </p:attrNameLst>
-                                      </p:cBhvr>
-                                      <p:tavLst>
-                                        <p:tav tm="0">
-                                          <p:val>
-                                            <p:strVal val="1+#ppt_h/2"/>
-                                          </p:val>
-                                        </p:tav>
-                                        <p:tav tm="100000">
-                                          <p:val>
-                                            <p:strVal val="#ppt_y"/>
-                                          </p:val>
-                                        </p:tav>
-                                      </p:tavLst>
-                                    </p:anim>
-                                  </p:childTnLst>
-                                </p:cTn>
-                              </p:par>
-                            </p:childTnLst>
-                          </p:cTn>
-                        </p:par>
-                      </p:childTnLst>
-                    </p:cTn>
-                  </p:par>
-                </p:childTnLst>
-              </p:cTn>
-              <p:prevCondLst>
-                <p:cond evt="onPrev" delay="0">
-                  <p:tgtEl>
-                    <p:sldTgt/>
-                  </p:tgtEl>
-                </p:cond>
-              </p:prevCondLst>
-              <p:nextCondLst>
-                <p:cond evt="onNext" delay="0">
-                  <p:tgtEl>
-                    <p:sldTgt/>
-                  </p:tgtEl>
-                </p:cond>
-              </p:nextCondLst>
-            </p:seq>
-          </p:childTnLst>
-        </p:cTn>
-      </p:par>
-    </p:tnLst>
-    <p:bldLst>
-      <p:bldP spid="6" grpId="0" animBg="1"/>
-    </p:bldLst>
-  </p:timing>
-</p:sld>
-</file>
-
-<file path=ppt/slides/slide28.xml><?xml version="1.0" encoding="utf-8"?>
-<p:sld xmlns:a="http://schemas.openxmlformats.org/drawingml/2006/main" xmlns:r="http://schemas.openxmlformats.org/officeDocument/2006/relationships" xmlns:p="http://schemas.openxmlformats.org/presentationml/2006/main">
-  <p:cSld>
-    <p:spTree>
-      <p:nvGrpSpPr>
-        <p:cNvPr id="1" name=""/>
-        <p:cNvGrpSpPr/>
-        <p:nvPr/>
-      </p:nvGrpSpPr>
-      <p:grpSpPr>
-        <a:xfrm>
-          <a:off x="0" y="0"/>
-          <a:ext cx="0" cy="0"/>
-          <a:chOff x="0" y="0"/>
-          <a:chExt cx="0" cy="0"/>
-        </a:xfrm>
-      </p:grpSpPr>
-      <p:sp>
-        <p:nvSpPr>
-          <p:cNvPr id="78849" name="Rectangle 2"/>
-          <p:cNvSpPr>
-            <a:spLocks noGrp="1" noChangeArrowheads="1"/>
-          </p:cNvSpPr>
-          <p:nvPr>
-            <p:ph type="title"/>
-          </p:nvPr>
-        </p:nvSpPr>
-        <p:spPr/>
-        <p:txBody>
-          <a:bodyPr/>
-          <a:lstStyle/>
-          <a:p>
-            <a:r>
-              <a:rPr lang="en-GB" altLang="en-US">
-                <a:ea typeface="MS PGothic" charset="-128"/>
-              </a:rPr>
-              <a:t>Local variables</a:t>
-            </a:r>
-          </a:p>
-        </p:txBody>
-      </p:sp>
-      <p:sp>
-        <p:nvSpPr>
-          <p:cNvPr id="78850" name="Rectangle 3"/>
-          <p:cNvSpPr>
-            <a:spLocks noGrp="1" noChangeArrowheads="1"/>
-          </p:cNvSpPr>
-          <p:nvPr>
-            <p:ph idx="1"/>
-          </p:nvPr>
-        </p:nvSpPr>
-        <p:spPr/>
-        <p:txBody>
-          <a:bodyPr>
-            <a:normAutofit/>
-          </a:bodyPr>
-          <a:lstStyle/>
-          <a:p>
-            <a:pPr eaLnBrk="1" hangingPunct="1">
-              <a:lnSpc>
-                <a:spcPct val="90000"/>
-              </a:lnSpc>
-            </a:pPr>
-            <a:r>
-              <a:rPr lang="en-US" altLang="en-US" sz="3600" dirty="0">
-                <a:ea typeface="MS PGothic" charset="-128"/>
-              </a:rPr>
-              <a:t>Methods can define their own, </a:t>
-            </a:r>
-            <a:r>
-              <a:rPr lang="en-US" altLang="en-US" sz="3600" i="1" dirty="0">
-                <a:ea typeface="MS PGothic" charset="-128"/>
-              </a:rPr>
-              <a:t>local</a:t>
-            </a:r>
-            <a:r>
-              <a:rPr lang="en-US" altLang="en-US" sz="3600" dirty="0">
-                <a:ea typeface="MS PGothic" charset="-128"/>
-              </a:rPr>
-              <a:t> variables:</a:t>
-            </a:r>
-          </a:p>
-          <a:p>
-            <a:pPr lvl="1" eaLnBrk="1" hangingPunct="1">
-              <a:lnSpc>
-                <a:spcPct val="90000"/>
-              </a:lnSpc>
-            </a:pPr>
-            <a:r>
-              <a:rPr lang="en-US" altLang="en-US" sz="3200" dirty="0">
-                <a:ea typeface="MS PGothic" charset="-128"/>
-              </a:rPr>
-              <a:t>Short lived, like parameters.</a:t>
-            </a:r>
-          </a:p>
-          <a:p>
-            <a:pPr lvl="1" eaLnBrk="1" hangingPunct="1">
-              <a:lnSpc>
-                <a:spcPct val="90000"/>
-              </a:lnSpc>
-            </a:pPr>
-            <a:r>
-              <a:rPr lang="en-US" altLang="en-US" sz="3200" dirty="0">
-                <a:ea typeface="MS PGothic" charset="-128"/>
-              </a:rPr>
-              <a:t>The method sets their values – unlike parameters, they do not receive external values.</a:t>
-            </a:r>
-          </a:p>
-          <a:p>
-            <a:pPr lvl="1" eaLnBrk="1" hangingPunct="1">
-              <a:lnSpc>
-                <a:spcPct val="90000"/>
-              </a:lnSpc>
-            </a:pPr>
-            <a:r>
-              <a:rPr lang="en-US" altLang="en-US" sz="3200" dirty="0">
-                <a:ea typeface="MS PGothic" charset="-128"/>
-              </a:rPr>
-              <a:t>Used for </a:t>
-            </a:r>
-            <a:r>
-              <a:rPr lang="ja-JP" altLang="en-US" sz="3200">
-                <a:ea typeface="MS PGothic" charset="-128"/>
-              </a:rPr>
-              <a:t>‘</a:t>
-            </a:r>
-            <a:r>
-              <a:rPr lang="en-US" altLang="ja-JP" sz="3200" dirty="0">
-                <a:ea typeface="MS PGothic" charset="-128"/>
-              </a:rPr>
-              <a:t>temporary</a:t>
-            </a:r>
-            <a:r>
-              <a:rPr lang="ja-JP" altLang="en-US" sz="3200">
-                <a:ea typeface="MS PGothic" charset="-128"/>
-              </a:rPr>
-              <a:t>’</a:t>
-            </a:r>
-            <a:r>
-              <a:rPr lang="en-US" altLang="ja-JP" sz="3200" dirty="0">
-                <a:ea typeface="MS PGothic" charset="-128"/>
-              </a:rPr>
-              <a:t> calculation and storage.</a:t>
-            </a:r>
-          </a:p>
-          <a:p>
-            <a:pPr lvl="1" eaLnBrk="1" hangingPunct="1">
-              <a:lnSpc>
-                <a:spcPct val="90000"/>
-              </a:lnSpc>
-            </a:pPr>
-            <a:r>
-              <a:rPr lang="en-US" altLang="en-US" sz="3200" dirty="0">
-                <a:ea typeface="MS PGothic" charset="-128"/>
-              </a:rPr>
-              <a:t>They exist only as long as the method is being executed.</a:t>
-            </a:r>
-          </a:p>
-          <a:p>
-            <a:pPr lvl="1" eaLnBrk="1" hangingPunct="1">
-              <a:lnSpc>
-                <a:spcPct val="90000"/>
-              </a:lnSpc>
-            </a:pPr>
-            <a:r>
-              <a:rPr lang="en-US" altLang="en-US" sz="3200" dirty="0">
-                <a:ea typeface="MS PGothic" charset="-128"/>
-              </a:rPr>
-              <a:t>They are only accessible from within the method.</a:t>
-            </a:r>
-          </a:p>
-          <a:p>
-            <a:pPr lvl="1" eaLnBrk="1" hangingPunct="1">
-              <a:lnSpc>
-                <a:spcPct val="90000"/>
-              </a:lnSpc>
-            </a:pPr>
-            <a:r>
-              <a:rPr lang="en-US" altLang="en-US" sz="3200" dirty="0">
-                <a:ea typeface="MS PGothic" charset="-128"/>
-              </a:rPr>
-              <a:t>They are defined within a particular </a:t>
-            </a:r>
-            <a:r>
-              <a:rPr lang="en-US" altLang="en-US" sz="3200" i="1" dirty="0">
-                <a:ea typeface="MS PGothic" charset="-128"/>
-              </a:rPr>
-              <a:t>scope</a:t>
-            </a:r>
-            <a:r>
-              <a:rPr lang="en-US" altLang="en-US" sz="3200" dirty="0">
-                <a:ea typeface="MS PGothic" charset="-128"/>
-              </a:rPr>
-              <a:t>.</a:t>
-            </a:r>
-          </a:p>
-          <a:p>
-            <a:endParaRPr lang="en-GB" altLang="en-US" sz="5400" dirty="0">
-              <a:ea typeface="MS PGothic" charset="-128"/>
-            </a:endParaRPr>
-          </a:p>
-        </p:txBody>
-      </p:sp>
-    </p:spTree>
-  </p:cSld>
-  <p:clrMapOvr>
-    <a:masterClrMapping/>
-  </p:clrMapOvr>
-</p:sld>
-</file>
-
-<file path=ppt/slides/slide29.xml><?xml version="1.0" encoding="utf-8"?>
-<p:sld xmlns:a="http://schemas.openxmlformats.org/drawingml/2006/main" xmlns:r="http://schemas.openxmlformats.org/officeDocument/2006/relationships" xmlns:p="http://schemas.openxmlformats.org/presentationml/2006/main">
-  <p:cSld>
-    <p:spTree>
-      <p:nvGrpSpPr>
-        <p:cNvPr id="1" name=""/>
-        <p:cNvGrpSpPr/>
-        <p:nvPr/>
-      </p:nvGrpSpPr>
-      <p:grpSpPr>
-        <a:xfrm>
-          <a:off x="0" y="0"/>
-          <a:ext cx="0" cy="0"/>
-          <a:chOff x="0" y="0"/>
-          <a:chExt cx="0" cy="0"/>
-        </a:xfrm>
-      </p:grpSpPr>
-      <p:sp>
-        <p:nvSpPr>
-          <p:cNvPr id="26626" name="Rectangle 2"/>
-          <p:cNvSpPr>
-            <a:spLocks noGrp="1" noChangeArrowheads="1"/>
-          </p:cNvSpPr>
-          <p:nvPr>
-            <p:ph type="title"/>
-          </p:nvPr>
-        </p:nvSpPr>
-        <p:spPr/>
-        <p:txBody>
-          <a:bodyPr/>
-          <a:lstStyle/>
-          <a:p>
-            <a:pPr eaLnBrk="1" hangingPunct="1">
-              <a:defRPr/>
-            </a:pPr>
-            <a:r>
-              <a:rPr lang="en-US">
-                <a:ea typeface="+mj-ea"/>
-                <a:cs typeface="+mj-cs"/>
-              </a:rPr>
-              <a:t>Local variables</a:t>
-            </a:r>
-          </a:p>
-        </p:txBody>
-      </p:sp>
-      <p:sp>
-        <p:nvSpPr>
-          <p:cNvPr id="82947" name="Text Box 3"/>
-          <p:cNvSpPr txBox="1">
-            <a:spLocks noChangeArrowheads="1"/>
-          </p:cNvSpPr>
-          <p:nvPr/>
-        </p:nvSpPr>
-        <p:spPr bwMode="auto">
-          <a:xfrm>
-            <a:off x="4648200" y="2638428"/>
-            <a:ext cx="6413935" cy="3108543"/>
-          </a:xfrm>
-          <a:prstGeom prst="rect">
-            <a:avLst/>
-          </a:prstGeom>
-          <a:noFill/>
-          <a:ln>
-            <a:noFill/>
-          </a:ln>
-          <a:extLst>
-            <a:ext uri="{909E8E84-426E-40dd-AFC4-6F175D3DCCD1}">
-              <a14:hiddenFill xmlns="" xmlns:a14="http://schemas.microsoft.com/office/drawing/2010/main">
-                <a:solidFill>
-                  <a:srgbClr val="FFFFFF"/>
-                </a:solidFill>
-              </a14:hiddenFill>
-            </a:ext>
-            <a:ext uri="{91240B29-F687-4f45-9708-019B960494DF}">
-              <a14:hiddenLine xmlns="" xmlns:a14="http://schemas.microsoft.com/office/drawing/2010/main" w="9525">
-                <a:solidFill>
-                  <a:srgbClr val="000000"/>
-                </a:solidFill>
-                <a:miter lim="800000"/>
-                <a:headEnd/>
-                <a:tailEnd/>
-              </a14:hiddenLine>
-            </a:ext>
-          </a:extLst>
-        </p:spPr>
-        <p:txBody>
-          <a:bodyPr wrap="none">
-            <a:spAutoFit/>
-          </a:bodyPr>
-          <a:lstStyle>
-            <a:lvl1pPr>
-              <a:spcBef>
-                <a:spcPct val="20000"/>
-              </a:spcBef>
-              <a:buClr>
-                <a:srgbClr val="264D8B"/>
-              </a:buClr>
-              <a:buFont typeface="Times" charset="0"/>
-              <a:buChar char="•"/>
-              <a:defRPr sz="3200">
-                <a:solidFill>
-                  <a:srgbClr val="1A3170"/>
-                </a:solidFill>
-                <a:latin typeface="Trebuchet MS" charset="0"/>
-                <a:ea typeface="MS PGothic" charset="-128"/>
-              </a:defRPr>
-            </a:lvl1pPr>
-            <a:lvl2pPr marL="742950" indent="-285750">
-              <a:spcBef>
-                <a:spcPct val="20000"/>
-              </a:spcBef>
-              <a:buClr>
-                <a:srgbClr val="264D8B"/>
-              </a:buClr>
-              <a:buChar char="–"/>
-              <a:defRPr sz="2800">
-                <a:solidFill>
-                  <a:srgbClr val="1A3170"/>
-                </a:solidFill>
-                <a:latin typeface="Trebuchet MS" charset="0"/>
-                <a:ea typeface="MS PGothic" charset="-128"/>
-              </a:defRPr>
-            </a:lvl2pPr>
-            <a:lvl3pPr marL="1143000" indent="-228600">
-              <a:spcBef>
-                <a:spcPct val="20000"/>
-              </a:spcBef>
-              <a:buClr>
-                <a:srgbClr val="264D8B"/>
-              </a:buClr>
-              <a:buChar char="•"/>
-              <a:defRPr sz="2400">
-                <a:solidFill>
-                  <a:srgbClr val="1A3170"/>
-                </a:solidFill>
-                <a:latin typeface="Trebuchet MS" charset="0"/>
-                <a:ea typeface="MS PGothic" charset="-128"/>
-              </a:defRPr>
-            </a:lvl3pPr>
-            <a:lvl4pPr marL="1600200" indent="-228600">
-              <a:spcBef>
-                <a:spcPct val="20000"/>
-              </a:spcBef>
-              <a:buClr>
-                <a:srgbClr val="264D8B"/>
-              </a:buClr>
-              <a:buChar char="–"/>
-              <a:defRPr sz="2000">
-                <a:solidFill>
-                  <a:srgbClr val="1A3170"/>
-                </a:solidFill>
-                <a:latin typeface="Trebuchet MS" charset="0"/>
-                <a:ea typeface="MS PGothic" charset="-128"/>
-              </a:defRPr>
-            </a:lvl4pPr>
-            <a:lvl5pPr marL="2057400" indent="-228600">
-              <a:spcBef>
-                <a:spcPct val="20000"/>
-              </a:spcBef>
-              <a:buClr>
-                <a:srgbClr val="264D8B"/>
-              </a:buClr>
-              <a:buChar char="»"/>
-              <a:defRPr sz="2000">
-                <a:solidFill>
-                  <a:srgbClr val="1A3170"/>
-                </a:solidFill>
-                <a:latin typeface="Trebuchet MS" charset="0"/>
-                <a:ea typeface="MS PGothic" charset="-128"/>
-              </a:defRPr>
-            </a:lvl5pPr>
-            <a:lvl6pPr marL="2514600" indent="-228600" eaLnBrk="0" fontAlgn="base" hangingPunct="0">
-              <a:spcBef>
-                <a:spcPct val="20000"/>
-              </a:spcBef>
-              <a:spcAft>
-                <a:spcPct val="0"/>
-              </a:spcAft>
-              <a:buClr>
-                <a:srgbClr val="264D8B"/>
-              </a:buClr>
-              <a:buChar char="»"/>
-              <a:defRPr sz="2000">
-                <a:solidFill>
-                  <a:srgbClr val="1A3170"/>
-                </a:solidFill>
-                <a:latin typeface="Trebuchet MS" charset="0"/>
-                <a:ea typeface="MS PGothic" charset="-128"/>
-              </a:defRPr>
-            </a:lvl6pPr>
-            <a:lvl7pPr marL="2971800" indent="-228600" eaLnBrk="0" fontAlgn="base" hangingPunct="0">
-              <a:spcBef>
-                <a:spcPct val="20000"/>
-              </a:spcBef>
-              <a:spcAft>
-                <a:spcPct val="0"/>
-              </a:spcAft>
-              <a:buClr>
-                <a:srgbClr val="264D8B"/>
-              </a:buClr>
-              <a:buChar char="»"/>
-              <a:defRPr sz="2000">
-                <a:solidFill>
-                  <a:srgbClr val="1A3170"/>
-                </a:solidFill>
-                <a:latin typeface="Trebuchet MS" charset="0"/>
-                <a:ea typeface="MS PGothic" charset="-128"/>
-              </a:defRPr>
-            </a:lvl7pPr>
-            <a:lvl8pPr marL="3429000" indent="-228600" eaLnBrk="0" fontAlgn="base" hangingPunct="0">
-              <a:spcBef>
-                <a:spcPct val="20000"/>
-              </a:spcBef>
-              <a:spcAft>
-                <a:spcPct val="0"/>
-              </a:spcAft>
-              <a:buClr>
-                <a:srgbClr val="264D8B"/>
-              </a:buClr>
-              <a:buChar char="»"/>
-              <a:defRPr sz="2000">
-                <a:solidFill>
-                  <a:srgbClr val="1A3170"/>
-                </a:solidFill>
-                <a:latin typeface="Trebuchet MS" charset="0"/>
-                <a:ea typeface="MS PGothic" charset="-128"/>
-              </a:defRPr>
-            </a:lvl8pPr>
-            <a:lvl9pPr marL="3886200" indent="-228600" eaLnBrk="0" fontAlgn="base" hangingPunct="0">
-              <a:spcBef>
-                <a:spcPct val="20000"/>
-              </a:spcBef>
-              <a:spcAft>
-                <a:spcPct val="0"/>
-              </a:spcAft>
-              <a:buClr>
-                <a:srgbClr val="264D8B"/>
-              </a:buClr>
-              <a:buChar char="»"/>
-              <a:defRPr sz="2000">
-                <a:solidFill>
-                  <a:srgbClr val="1A3170"/>
-                </a:solidFill>
-                <a:latin typeface="Trebuchet MS" charset="0"/>
-                <a:ea typeface="MS PGothic" charset="-128"/>
-              </a:defRPr>
-            </a:lvl9pPr>
-          </a:lstStyle>
-          <a:p>
-            <a:pPr eaLnBrk="1" hangingPunct="1">
-              <a:spcBef>
-                <a:spcPct val="0"/>
-              </a:spcBef>
-              <a:buClrTx/>
-              <a:buFontTx/>
-              <a:buNone/>
-            </a:pPr>
-            <a:r>
-              <a:rPr lang="en-US" altLang="en-US" sz="2800" dirty="0">
-                <a:solidFill>
-                  <a:schemeClr val="tx1"/>
-                </a:solidFill>
-                <a:latin typeface="Courier New" charset="0"/>
-              </a:rPr>
-              <a:t>public int </a:t>
-            </a:r>
-            <a:r>
-              <a:rPr lang="en-US" altLang="en-US" sz="2800" dirty="0" err="1">
-                <a:solidFill>
-                  <a:schemeClr val="tx1"/>
-                </a:solidFill>
-                <a:latin typeface="Courier New" charset="0"/>
-              </a:rPr>
-              <a:t>refundBalance</a:t>
-            </a:r>
-            <a:r>
-              <a:rPr lang="en-US" altLang="en-US" sz="2800" dirty="0">
-                <a:solidFill>
-                  <a:schemeClr val="tx1"/>
-                </a:solidFill>
-                <a:latin typeface="Courier New" charset="0"/>
-              </a:rPr>
-              <a:t>()</a:t>
-            </a:r>
-          </a:p>
-          <a:p>
-            <a:pPr eaLnBrk="1" hangingPunct="1">
-              <a:spcBef>
-                <a:spcPct val="0"/>
-              </a:spcBef>
-              <a:buClrTx/>
-              <a:buFontTx/>
-              <a:buNone/>
-            </a:pPr>
-            <a:r>
-              <a:rPr lang="en-US" altLang="en-US" sz="2800" dirty="0">
-                <a:solidFill>
-                  <a:schemeClr val="tx1"/>
-                </a:solidFill>
-                <a:latin typeface="Courier New" charset="0"/>
-              </a:rPr>
-              <a:t>{</a:t>
-            </a:r>
-          </a:p>
-          <a:p>
-            <a:pPr eaLnBrk="1" hangingPunct="1">
-              <a:spcBef>
-                <a:spcPct val="0"/>
-              </a:spcBef>
-              <a:buClrTx/>
-              <a:buFontTx/>
-              <a:buNone/>
-            </a:pPr>
-            <a:r>
-              <a:rPr lang="en-US" altLang="en-US" sz="2800" dirty="0">
-                <a:solidFill>
-                  <a:schemeClr val="tx1"/>
-                </a:solidFill>
-                <a:latin typeface="Courier New" charset="0"/>
-              </a:rPr>
-              <a:t>    </a:t>
-            </a:r>
-            <a:r>
-              <a:rPr lang="en-US" altLang="en-US" sz="2800" dirty="0" err="1">
-                <a:solidFill>
-                  <a:schemeClr val="tx1"/>
-                </a:solidFill>
-                <a:latin typeface="Courier New" charset="0"/>
-              </a:rPr>
-              <a:t>int</a:t>
-            </a:r>
-            <a:r>
-              <a:rPr lang="en-US" altLang="en-US" sz="2800" dirty="0">
-                <a:solidFill>
-                  <a:schemeClr val="tx1"/>
-                </a:solidFill>
-                <a:latin typeface="Courier New" charset="0"/>
-              </a:rPr>
-              <a:t> </a:t>
-            </a:r>
-            <a:r>
-              <a:rPr lang="en-US" altLang="en-US" sz="2800" dirty="0" err="1">
-                <a:solidFill>
-                  <a:schemeClr val="tx1"/>
-                </a:solidFill>
-                <a:latin typeface="Courier New" charset="0"/>
-              </a:rPr>
-              <a:t>amountToRefund</a:t>
-            </a:r>
-            <a:r>
-              <a:rPr lang="en-US" altLang="en-US" sz="2800" dirty="0">
-                <a:solidFill>
-                  <a:schemeClr val="tx1"/>
-                </a:solidFill>
-                <a:latin typeface="Courier New" charset="0"/>
-              </a:rPr>
-              <a:t>;</a:t>
-            </a:r>
-          </a:p>
-          <a:p>
-            <a:pPr eaLnBrk="1" hangingPunct="1">
-              <a:spcBef>
-                <a:spcPct val="0"/>
-              </a:spcBef>
-              <a:buClrTx/>
-              <a:buFontTx/>
-              <a:buNone/>
-            </a:pPr>
-            <a:r>
-              <a:rPr lang="en-US" altLang="en-US" sz="2800" dirty="0">
-                <a:solidFill>
-                  <a:schemeClr val="tx1"/>
-                </a:solidFill>
-                <a:latin typeface="Courier New" charset="0"/>
-              </a:rPr>
-              <a:t>    </a:t>
-            </a:r>
-            <a:r>
-              <a:rPr lang="en-US" altLang="en-US" sz="2800" dirty="0" err="1">
-                <a:solidFill>
-                  <a:schemeClr val="tx1"/>
-                </a:solidFill>
-                <a:latin typeface="Courier New" charset="0"/>
-              </a:rPr>
-              <a:t>amountToRefund</a:t>
-            </a:r>
-            <a:r>
-              <a:rPr lang="en-US" altLang="en-US" sz="2800" dirty="0">
-                <a:solidFill>
-                  <a:schemeClr val="tx1"/>
-                </a:solidFill>
-                <a:latin typeface="Courier New" charset="0"/>
-              </a:rPr>
-              <a:t> = balance;</a:t>
-            </a:r>
-          </a:p>
-          <a:p>
-            <a:pPr eaLnBrk="1" hangingPunct="1">
-              <a:spcBef>
-                <a:spcPct val="0"/>
-              </a:spcBef>
-              <a:buClrTx/>
-              <a:buFontTx/>
-              <a:buNone/>
-            </a:pPr>
-            <a:r>
-              <a:rPr lang="en-US" altLang="en-US" sz="2800" dirty="0">
-                <a:solidFill>
-                  <a:schemeClr val="tx1"/>
-                </a:solidFill>
-                <a:latin typeface="Courier New" charset="0"/>
-              </a:rPr>
-              <a:t>    balance = 0;</a:t>
-            </a:r>
-          </a:p>
-          <a:p>
-            <a:pPr eaLnBrk="1" hangingPunct="1">
-              <a:spcBef>
-                <a:spcPct val="0"/>
-              </a:spcBef>
-              <a:buClrTx/>
-              <a:buFontTx/>
-              <a:buNone/>
-            </a:pPr>
-            <a:r>
-              <a:rPr lang="en-US" altLang="en-US" sz="2800" dirty="0">
-                <a:solidFill>
-                  <a:schemeClr val="tx1"/>
-                </a:solidFill>
-                <a:latin typeface="Courier New" charset="0"/>
-              </a:rPr>
-              <a:t>    return </a:t>
-            </a:r>
-            <a:r>
-              <a:rPr lang="en-US" altLang="en-US" sz="2800" dirty="0" err="1">
-                <a:solidFill>
-                  <a:schemeClr val="tx1"/>
-                </a:solidFill>
-                <a:latin typeface="Courier New" charset="0"/>
-              </a:rPr>
-              <a:t>amountToRefund</a:t>
-            </a:r>
-            <a:r>
-              <a:rPr lang="en-US" altLang="en-US" sz="2800" dirty="0">
-                <a:solidFill>
-                  <a:schemeClr val="tx1"/>
-                </a:solidFill>
-                <a:latin typeface="Courier New" charset="0"/>
-              </a:rPr>
-              <a:t>;</a:t>
-            </a:r>
-          </a:p>
-          <a:p>
-            <a:pPr eaLnBrk="1" hangingPunct="1">
-              <a:spcBef>
-                <a:spcPct val="0"/>
-              </a:spcBef>
-              <a:buClrTx/>
-              <a:buFontTx/>
-              <a:buNone/>
-            </a:pPr>
-            <a:r>
-              <a:rPr lang="en-US" altLang="en-US" sz="2800" dirty="0">
-                <a:solidFill>
-                  <a:schemeClr val="tx1"/>
-                </a:solidFill>
-                <a:latin typeface="Courier New" charset="0"/>
-              </a:rPr>
-              <a:t>} </a:t>
-            </a:r>
-          </a:p>
-        </p:txBody>
-      </p:sp>
-      <p:sp>
-        <p:nvSpPr>
-          <p:cNvPr id="82948" name="Text Box 4"/>
-          <p:cNvSpPr txBox="1">
-            <a:spLocks noChangeArrowheads="1"/>
-          </p:cNvSpPr>
-          <p:nvPr/>
-        </p:nvSpPr>
-        <p:spPr bwMode="auto">
-          <a:xfrm>
-            <a:off x="1575434" y="3095382"/>
-            <a:ext cx="2680542" cy="523220"/>
-          </a:xfrm>
-          <a:prstGeom prst="rect">
-            <a:avLst/>
-          </a:prstGeom>
-          <a:noFill/>
-          <a:ln>
-            <a:noFill/>
-          </a:ln>
-          <a:extLst>
-            <a:ext uri="{909E8E84-426E-40dd-AFC4-6F175D3DCCD1}">
-              <a14:hiddenFill xmlns="" xmlns:a14="http://schemas.microsoft.com/office/drawing/2010/main">
-                <a:solidFill>
-                  <a:srgbClr val="FFFFFF"/>
-                </a:solidFill>
-              </a14:hiddenFill>
-            </a:ext>
-            <a:ext uri="{91240B29-F687-4f45-9708-019B960494DF}">
-              <a14:hiddenLine xmlns="" xmlns:a14="http://schemas.microsoft.com/office/drawing/2010/main" w="9525">
-                <a:solidFill>
-                  <a:srgbClr val="000000"/>
-                </a:solidFill>
-                <a:miter lim="800000"/>
-                <a:headEnd/>
-                <a:tailEnd/>
-              </a14:hiddenLine>
-            </a:ext>
-          </a:extLst>
-        </p:spPr>
-        <p:txBody>
-          <a:bodyPr wrap="none">
-            <a:spAutoFit/>
-          </a:bodyPr>
-          <a:lstStyle>
-            <a:lvl1pPr>
-              <a:spcBef>
-                <a:spcPct val="20000"/>
-              </a:spcBef>
-              <a:buClr>
-                <a:srgbClr val="264D8B"/>
-              </a:buClr>
-              <a:buFont typeface="Times" charset="0"/>
-              <a:buChar char="•"/>
-              <a:defRPr sz="3200">
-                <a:solidFill>
-                  <a:srgbClr val="1A3170"/>
-                </a:solidFill>
-                <a:latin typeface="Trebuchet MS" charset="0"/>
-                <a:ea typeface="MS PGothic" charset="-128"/>
-              </a:defRPr>
-            </a:lvl1pPr>
-            <a:lvl2pPr marL="742950" indent="-285750">
-              <a:spcBef>
-                <a:spcPct val="20000"/>
-              </a:spcBef>
-              <a:buClr>
-                <a:srgbClr val="264D8B"/>
-              </a:buClr>
-              <a:buChar char="–"/>
-              <a:defRPr sz="2800">
-                <a:solidFill>
-                  <a:srgbClr val="1A3170"/>
-                </a:solidFill>
-                <a:latin typeface="Trebuchet MS" charset="0"/>
-                <a:ea typeface="MS PGothic" charset="-128"/>
-              </a:defRPr>
-            </a:lvl2pPr>
-            <a:lvl3pPr marL="1143000" indent="-228600">
-              <a:spcBef>
-                <a:spcPct val="20000"/>
-              </a:spcBef>
-              <a:buClr>
-                <a:srgbClr val="264D8B"/>
-              </a:buClr>
-              <a:buChar char="•"/>
-              <a:defRPr sz="2400">
-                <a:solidFill>
-                  <a:srgbClr val="1A3170"/>
-                </a:solidFill>
-                <a:latin typeface="Trebuchet MS" charset="0"/>
-                <a:ea typeface="MS PGothic" charset="-128"/>
-              </a:defRPr>
-            </a:lvl3pPr>
-            <a:lvl4pPr marL="1600200" indent="-228600">
-              <a:spcBef>
-                <a:spcPct val="20000"/>
-              </a:spcBef>
-              <a:buClr>
-                <a:srgbClr val="264D8B"/>
-              </a:buClr>
-              <a:buChar char="–"/>
-              <a:defRPr sz="2000">
-                <a:solidFill>
-                  <a:srgbClr val="1A3170"/>
-                </a:solidFill>
-                <a:latin typeface="Trebuchet MS" charset="0"/>
-                <a:ea typeface="MS PGothic" charset="-128"/>
-              </a:defRPr>
-            </a:lvl4pPr>
-            <a:lvl5pPr marL="2057400" indent="-228600">
-              <a:spcBef>
-                <a:spcPct val="20000"/>
-              </a:spcBef>
-              <a:buClr>
-                <a:srgbClr val="264D8B"/>
-              </a:buClr>
-              <a:buChar char="»"/>
-              <a:defRPr sz="2000">
-                <a:solidFill>
-                  <a:srgbClr val="1A3170"/>
-                </a:solidFill>
-                <a:latin typeface="Trebuchet MS" charset="0"/>
-                <a:ea typeface="MS PGothic" charset="-128"/>
-              </a:defRPr>
-            </a:lvl5pPr>
-            <a:lvl6pPr marL="2514600" indent="-228600" eaLnBrk="0" fontAlgn="base" hangingPunct="0">
-              <a:spcBef>
-                <a:spcPct val="20000"/>
-              </a:spcBef>
-              <a:spcAft>
-                <a:spcPct val="0"/>
-              </a:spcAft>
-              <a:buClr>
-                <a:srgbClr val="264D8B"/>
-              </a:buClr>
-              <a:buChar char="»"/>
-              <a:defRPr sz="2000">
-                <a:solidFill>
-                  <a:srgbClr val="1A3170"/>
-                </a:solidFill>
-                <a:latin typeface="Trebuchet MS" charset="0"/>
-                <a:ea typeface="MS PGothic" charset="-128"/>
-              </a:defRPr>
-            </a:lvl6pPr>
-            <a:lvl7pPr marL="2971800" indent="-228600" eaLnBrk="0" fontAlgn="base" hangingPunct="0">
-              <a:spcBef>
-                <a:spcPct val="20000"/>
-              </a:spcBef>
-              <a:spcAft>
-                <a:spcPct val="0"/>
-              </a:spcAft>
-              <a:buClr>
-                <a:srgbClr val="264D8B"/>
-              </a:buClr>
-              <a:buChar char="»"/>
-              <a:defRPr sz="2000">
-                <a:solidFill>
-                  <a:srgbClr val="1A3170"/>
-                </a:solidFill>
-                <a:latin typeface="Trebuchet MS" charset="0"/>
-                <a:ea typeface="MS PGothic" charset="-128"/>
-              </a:defRPr>
-            </a:lvl7pPr>
-            <a:lvl8pPr marL="3429000" indent="-228600" eaLnBrk="0" fontAlgn="base" hangingPunct="0">
-              <a:spcBef>
-                <a:spcPct val="20000"/>
-              </a:spcBef>
-              <a:spcAft>
-                <a:spcPct val="0"/>
-              </a:spcAft>
-              <a:buClr>
-                <a:srgbClr val="264D8B"/>
-              </a:buClr>
-              <a:buChar char="»"/>
-              <a:defRPr sz="2000">
-                <a:solidFill>
-                  <a:srgbClr val="1A3170"/>
-                </a:solidFill>
-                <a:latin typeface="Trebuchet MS" charset="0"/>
-                <a:ea typeface="MS PGothic" charset="-128"/>
-              </a:defRPr>
-            </a:lvl8pPr>
-            <a:lvl9pPr marL="3886200" indent="-228600" eaLnBrk="0" fontAlgn="base" hangingPunct="0">
-              <a:spcBef>
-                <a:spcPct val="20000"/>
-              </a:spcBef>
-              <a:spcAft>
-                <a:spcPct val="0"/>
-              </a:spcAft>
-              <a:buClr>
-                <a:srgbClr val="264D8B"/>
-              </a:buClr>
-              <a:buChar char="»"/>
-              <a:defRPr sz="2000">
-                <a:solidFill>
-                  <a:srgbClr val="1A3170"/>
-                </a:solidFill>
-                <a:latin typeface="Trebuchet MS" charset="0"/>
-                <a:ea typeface="MS PGothic" charset="-128"/>
-              </a:defRPr>
-            </a:lvl9pPr>
-          </a:lstStyle>
-          <a:p>
-            <a:pPr eaLnBrk="1" hangingPunct="1">
-              <a:spcBef>
-                <a:spcPct val="0"/>
-              </a:spcBef>
-              <a:buClrTx/>
-              <a:buFontTx/>
-              <a:buNone/>
-            </a:pPr>
-            <a:r>
-              <a:rPr lang="en-US" altLang="en-US" sz="2800" b="0" dirty="0">
-                <a:solidFill>
-                  <a:srgbClr val="A57133"/>
-                </a:solidFill>
-              </a:rPr>
-              <a:t>A local variable</a:t>
-            </a:r>
-          </a:p>
-        </p:txBody>
-      </p:sp>
-      <p:sp>
-        <p:nvSpPr>
-          <p:cNvPr id="82950" name="AutoShape 6"/>
-          <p:cNvSpPr>
-            <a:spLocks noChangeArrowheads="1"/>
-          </p:cNvSpPr>
-          <p:nvPr/>
-        </p:nvSpPr>
-        <p:spPr bwMode="auto">
-          <a:xfrm>
-            <a:off x="1243553" y="3789040"/>
-            <a:ext cx="2209800" cy="2362200"/>
-          </a:xfrm>
-          <a:prstGeom prst="irregularSeal1">
-            <a:avLst/>
-          </a:prstGeom>
-          <a:solidFill>
-            <a:schemeClr val="bg1"/>
-          </a:solidFill>
-          <a:ln w="9525">
-            <a:solidFill>
-              <a:schemeClr val="tx1"/>
-            </a:solidFill>
-            <a:miter lim="800000"/>
-            <a:headEnd/>
-            <a:tailEnd/>
-          </a:ln>
-        </p:spPr>
-        <p:txBody>
-          <a:bodyPr wrap="none" anchor="ctr"/>
-          <a:lstStyle>
-            <a:lvl1pPr algn="ctr">
-              <a:defRPr sz="2400" b="1">
-                <a:solidFill>
-                  <a:srgbClr val="006600"/>
-                </a:solidFill>
-                <a:latin typeface="Trebuchet MS" charset="0"/>
-                <a:ea typeface="MS PGothic" charset="-128"/>
-              </a:defRPr>
-            </a:lvl1pPr>
-            <a:lvl2pPr marL="742950" indent="-285750" algn="ctr">
-              <a:defRPr sz="2400" b="1">
-                <a:solidFill>
-                  <a:srgbClr val="006600"/>
-                </a:solidFill>
-                <a:latin typeface="Trebuchet MS" charset="0"/>
-                <a:ea typeface="MS PGothic" charset="-128"/>
-              </a:defRPr>
-            </a:lvl2pPr>
-            <a:lvl3pPr marL="1143000" indent="-228600" algn="ctr">
-              <a:defRPr sz="2400" b="1">
-                <a:solidFill>
-                  <a:srgbClr val="006600"/>
-                </a:solidFill>
-                <a:latin typeface="Trebuchet MS" charset="0"/>
-                <a:ea typeface="MS PGothic" charset="-128"/>
-              </a:defRPr>
-            </a:lvl3pPr>
-            <a:lvl4pPr marL="1600200" indent="-228600" algn="ctr">
-              <a:defRPr sz="2400" b="1">
-                <a:solidFill>
-                  <a:srgbClr val="006600"/>
-                </a:solidFill>
-                <a:latin typeface="Trebuchet MS" charset="0"/>
-                <a:ea typeface="MS PGothic" charset="-128"/>
-              </a:defRPr>
-            </a:lvl4pPr>
-            <a:lvl5pPr marL="2057400" indent="-228600" algn="ctr">
-              <a:defRPr sz="2400" b="1">
-                <a:solidFill>
-                  <a:srgbClr val="006600"/>
-                </a:solidFill>
-                <a:latin typeface="Trebuchet MS" charset="0"/>
-                <a:ea typeface="MS PGothic" charset="-128"/>
-              </a:defRPr>
-            </a:lvl5pPr>
-            <a:lvl6pPr marL="2514600" indent="-228600" algn="ctr" eaLnBrk="0" fontAlgn="base" hangingPunct="0">
-              <a:spcBef>
-                <a:spcPct val="0"/>
-              </a:spcBef>
-              <a:spcAft>
-                <a:spcPct val="0"/>
-              </a:spcAft>
-              <a:defRPr sz="2400" b="1">
-                <a:solidFill>
-                  <a:srgbClr val="006600"/>
-                </a:solidFill>
-                <a:latin typeface="Trebuchet MS" charset="0"/>
-                <a:ea typeface="MS PGothic" charset="-128"/>
-              </a:defRPr>
-            </a:lvl6pPr>
-            <a:lvl7pPr marL="2971800" indent="-228600" algn="ctr" eaLnBrk="0" fontAlgn="base" hangingPunct="0">
-              <a:spcBef>
-                <a:spcPct val="0"/>
-              </a:spcBef>
-              <a:spcAft>
-                <a:spcPct val="0"/>
-              </a:spcAft>
-              <a:defRPr sz="2400" b="1">
-                <a:solidFill>
-                  <a:srgbClr val="006600"/>
-                </a:solidFill>
-                <a:latin typeface="Trebuchet MS" charset="0"/>
-                <a:ea typeface="MS PGothic" charset="-128"/>
-              </a:defRPr>
-            </a:lvl7pPr>
-            <a:lvl8pPr marL="3429000" indent="-228600" algn="ctr" eaLnBrk="0" fontAlgn="base" hangingPunct="0">
-              <a:spcBef>
-                <a:spcPct val="0"/>
-              </a:spcBef>
-              <a:spcAft>
-                <a:spcPct val="0"/>
-              </a:spcAft>
-              <a:defRPr sz="2400" b="1">
-                <a:solidFill>
-                  <a:srgbClr val="006600"/>
-                </a:solidFill>
-                <a:latin typeface="Trebuchet MS" charset="0"/>
-                <a:ea typeface="MS PGothic" charset="-128"/>
-              </a:defRPr>
-            </a:lvl8pPr>
-            <a:lvl9pPr marL="3886200" indent="-228600" algn="ctr" eaLnBrk="0" fontAlgn="base" hangingPunct="0">
-              <a:spcBef>
-                <a:spcPct val="0"/>
-              </a:spcBef>
-              <a:spcAft>
-                <a:spcPct val="0"/>
-              </a:spcAft>
-              <a:defRPr sz="2400" b="1">
-                <a:solidFill>
-                  <a:srgbClr val="006600"/>
-                </a:solidFill>
-                <a:latin typeface="Trebuchet MS" charset="0"/>
-                <a:ea typeface="MS PGothic" charset="-128"/>
-              </a:defRPr>
-            </a:lvl9pPr>
-          </a:lstStyle>
-          <a:p>
-            <a:endParaRPr lang="en-GB" altLang="en-US"/>
-          </a:p>
-        </p:txBody>
-      </p:sp>
-      <p:sp>
-        <p:nvSpPr>
-          <p:cNvPr id="82951" name="Text Box 7"/>
-          <p:cNvSpPr txBox="1">
-            <a:spLocks noChangeArrowheads="1"/>
-          </p:cNvSpPr>
-          <p:nvPr/>
-        </p:nvSpPr>
-        <p:spPr bwMode="auto">
-          <a:xfrm>
-            <a:off x="1703512" y="4509120"/>
-            <a:ext cx="1532792" cy="707886"/>
-          </a:xfrm>
-          <a:prstGeom prst="rect">
-            <a:avLst/>
-          </a:prstGeom>
-          <a:noFill/>
-          <a:ln>
-            <a:noFill/>
-          </a:ln>
-          <a:extLst>
-            <a:ext uri="{909E8E84-426E-40dd-AFC4-6F175D3DCCD1}">
-              <a14:hiddenFill xmlns="" xmlns:a14="http://schemas.microsoft.com/office/drawing/2010/main">
-                <a:solidFill>
-                  <a:srgbClr val="FFFFFF"/>
-                </a:solidFill>
-              </a14:hiddenFill>
-            </a:ext>
-            <a:ext uri="{91240B29-F687-4f45-9708-019B960494DF}">
-              <a14:hiddenLine xmlns="" xmlns:a14="http://schemas.microsoft.com/office/drawing/2010/main" w="9525">
-                <a:solidFill>
-                  <a:srgbClr val="000000"/>
-                </a:solidFill>
-                <a:miter lim="800000"/>
-                <a:headEnd/>
-                <a:tailEnd/>
-              </a14:hiddenLine>
-            </a:ext>
-          </a:extLst>
-        </p:spPr>
-        <p:txBody>
-          <a:bodyPr wrap="none">
-            <a:spAutoFit/>
-          </a:bodyPr>
-          <a:lstStyle>
-            <a:lvl1pPr>
-              <a:spcBef>
-                <a:spcPct val="20000"/>
-              </a:spcBef>
-              <a:buClr>
-                <a:srgbClr val="264D8B"/>
-              </a:buClr>
-              <a:buFont typeface="Times" charset="0"/>
-              <a:buChar char="•"/>
-              <a:defRPr sz="3200">
-                <a:solidFill>
-                  <a:srgbClr val="1A3170"/>
-                </a:solidFill>
-                <a:latin typeface="Trebuchet MS" charset="0"/>
-                <a:ea typeface="MS PGothic" charset="-128"/>
-              </a:defRPr>
-            </a:lvl1pPr>
-            <a:lvl2pPr marL="742950" indent="-285750">
-              <a:spcBef>
-                <a:spcPct val="20000"/>
-              </a:spcBef>
-              <a:buClr>
-                <a:srgbClr val="264D8B"/>
-              </a:buClr>
-              <a:buChar char="–"/>
-              <a:defRPr sz="2800">
-                <a:solidFill>
-                  <a:srgbClr val="1A3170"/>
-                </a:solidFill>
-                <a:latin typeface="Trebuchet MS" charset="0"/>
-                <a:ea typeface="MS PGothic" charset="-128"/>
-              </a:defRPr>
-            </a:lvl2pPr>
-            <a:lvl3pPr marL="1143000" indent="-228600">
-              <a:spcBef>
-                <a:spcPct val="20000"/>
-              </a:spcBef>
-              <a:buClr>
-                <a:srgbClr val="264D8B"/>
-              </a:buClr>
-              <a:buChar char="•"/>
-              <a:defRPr sz="2400">
-                <a:solidFill>
-                  <a:srgbClr val="1A3170"/>
-                </a:solidFill>
-                <a:latin typeface="Trebuchet MS" charset="0"/>
-                <a:ea typeface="MS PGothic" charset="-128"/>
-              </a:defRPr>
-            </a:lvl3pPr>
-            <a:lvl4pPr marL="1600200" indent="-228600">
-              <a:spcBef>
-                <a:spcPct val="20000"/>
-              </a:spcBef>
-              <a:buClr>
-                <a:srgbClr val="264D8B"/>
-              </a:buClr>
-              <a:buChar char="–"/>
-              <a:defRPr sz="2000">
-                <a:solidFill>
-                  <a:srgbClr val="1A3170"/>
-                </a:solidFill>
-                <a:latin typeface="Trebuchet MS" charset="0"/>
-                <a:ea typeface="MS PGothic" charset="-128"/>
-              </a:defRPr>
-            </a:lvl4pPr>
-            <a:lvl5pPr marL="2057400" indent="-228600">
-              <a:spcBef>
-                <a:spcPct val="20000"/>
-              </a:spcBef>
-              <a:buClr>
-                <a:srgbClr val="264D8B"/>
-              </a:buClr>
-              <a:buChar char="»"/>
-              <a:defRPr sz="2000">
-                <a:solidFill>
-                  <a:srgbClr val="1A3170"/>
-                </a:solidFill>
-                <a:latin typeface="Trebuchet MS" charset="0"/>
-                <a:ea typeface="MS PGothic" charset="-128"/>
-              </a:defRPr>
-            </a:lvl5pPr>
-            <a:lvl6pPr marL="2514600" indent="-228600" eaLnBrk="0" fontAlgn="base" hangingPunct="0">
-              <a:spcBef>
-                <a:spcPct val="20000"/>
-              </a:spcBef>
-              <a:spcAft>
-                <a:spcPct val="0"/>
-              </a:spcAft>
-              <a:buClr>
-                <a:srgbClr val="264D8B"/>
-              </a:buClr>
-              <a:buChar char="»"/>
-              <a:defRPr sz="2000">
-                <a:solidFill>
-                  <a:srgbClr val="1A3170"/>
-                </a:solidFill>
-                <a:latin typeface="Trebuchet MS" charset="0"/>
-                <a:ea typeface="MS PGothic" charset="-128"/>
-              </a:defRPr>
-            </a:lvl6pPr>
-            <a:lvl7pPr marL="2971800" indent="-228600" eaLnBrk="0" fontAlgn="base" hangingPunct="0">
-              <a:spcBef>
-                <a:spcPct val="20000"/>
-              </a:spcBef>
-              <a:spcAft>
-                <a:spcPct val="0"/>
-              </a:spcAft>
-              <a:buClr>
-                <a:srgbClr val="264D8B"/>
-              </a:buClr>
-              <a:buChar char="»"/>
-              <a:defRPr sz="2000">
-                <a:solidFill>
-                  <a:srgbClr val="1A3170"/>
-                </a:solidFill>
-                <a:latin typeface="Trebuchet MS" charset="0"/>
-                <a:ea typeface="MS PGothic" charset="-128"/>
-              </a:defRPr>
-            </a:lvl7pPr>
-            <a:lvl8pPr marL="3429000" indent="-228600" eaLnBrk="0" fontAlgn="base" hangingPunct="0">
-              <a:spcBef>
-                <a:spcPct val="20000"/>
-              </a:spcBef>
-              <a:spcAft>
-                <a:spcPct val="0"/>
-              </a:spcAft>
-              <a:buClr>
-                <a:srgbClr val="264D8B"/>
-              </a:buClr>
-              <a:buChar char="»"/>
-              <a:defRPr sz="2000">
-                <a:solidFill>
-                  <a:srgbClr val="1A3170"/>
-                </a:solidFill>
-                <a:latin typeface="Trebuchet MS" charset="0"/>
-                <a:ea typeface="MS PGothic" charset="-128"/>
-              </a:defRPr>
-            </a:lvl8pPr>
-            <a:lvl9pPr marL="3886200" indent="-228600" eaLnBrk="0" fontAlgn="base" hangingPunct="0">
-              <a:spcBef>
-                <a:spcPct val="20000"/>
-              </a:spcBef>
-              <a:spcAft>
-                <a:spcPct val="0"/>
-              </a:spcAft>
-              <a:buClr>
-                <a:srgbClr val="264D8B"/>
-              </a:buClr>
-              <a:buChar char="»"/>
-              <a:defRPr sz="2000">
-                <a:solidFill>
-                  <a:srgbClr val="1A3170"/>
-                </a:solidFill>
-                <a:latin typeface="Trebuchet MS" charset="0"/>
-                <a:ea typeface="MS PGothic" charset="-128"/>
-              </a:defRPr>
-            </a:lvl9pPr>
-          </a:lstStyle>
-          <a:p>
-            <a:pPr eaLnBrk="1" hangingPunct="1">
-              <a:spcBef>
-                <a:spcPct val="0"/>
-              </a:spcBef>
-              <a:buClrTx/>
-              <a:buFontTx/>
-              <a:buNone/>
-            </a:pPr>
-            <a:r>
-              <a:rPr lang="en-US" altLang="en-US" sz="2000" b="0" dirty="0">
-                <a:solidFill>
-                  <a:srgbClr val="A57133"/>
-                </a:solidFill>
-              </a:rPr>
-              <a:t>No visibility</a:t>
-            </a:r>
-          </a:p>
-          <a:p>
-            <a:pPr eaLnBrk="1" hangingPunct="1">
-              <a:spcBef>
-                <a:spcPct val="0"/>
-              </a:spcBef>
-              <a:buClrTx/>
-              <a:buFontTx/>
-              <a:buNone/>
-            </a:pPr>
-            <a:r>
-              <a:rPr lang="en-US" altLang="en-US" sz="2000" b="0" dirty="0">
-                <a:solidFill>
-                  <a:srgbClr val="A57133"/>
-                </a:solidFill>
-              </a:rPr>
-              <a:t>modifier</a:t>
-            </a:r>
-          </a:p>
-        </p:txBody>
-      </p:sp>
-      <p:sp>
-        <p:nvSpPr>
-          <p:cNvPr id="82952" name="Line 8"/>
-          <p:cNvSpPr>
-            <a:spLocks noChangeShapeType="1"/>
-          </p:cNvSpPr>
-          <p:nvPr/>
-        </p:nvSpPr>
-        <p:spPr bwMode="auto">
-          <a:xfrm>
-            <a:off x="3863752" y="3717032"/>
-            <a:ext cx="1584176" cy="0"/>
-          </a:xfrm>
-          <a:prstGeom prst="line">
-            <a:avLst/>
-          </a:prstGeom>
-          <a:noFill/>
-          <a:ln w="38100">
-            <a:solidFill>
-              <a:schemeClr val="accent1">
-                <a:lumMod val="50000"/>
-              </a:schemeClr>
-            </a:solidFill>
-            <a:round/>
-            <a:headEnd/>
-            <a:tailEnd type="triangle" w="med" len="med"/>
-          </a:ln>
-          <a:extLst>
-            <a:ext uri="{909E8E84-426E-40dd-AFC4-6F175D3DCCD1}">
-              <a14:hiddenFill xmlns="" xmlns:a14="http://schemas.microsoft.com/office/drawing/2010/main">
-                <a:noFill/>
-              </a14:hiddenFill>
-            </a:ext>
-          </a:extLst>
-        </p:spPr>
-        <p:txBody>
-          <a:bodyPr/>
-          <a:lstStyle/>
-          <a:p>
-            <a:endParaRPr lang="en-US"/>
-          </a:p>
-        </p:txBody>
-      </p:sp>
-    </p:spTree>
-  </p:cSld>
-  <p:clrMapOvr>
-    <a:masterClrMapping/>
-  </p:clrMapOvr>
-  <p:transition spd="med"/>
 </p:sld>
 </file>
 
@@ -21825,6 +20003,1963 @@
       </p:grpSpPr>
       <p:sp>
         <p:nvSpPr>
+          <p:cNvPr id="2" name="Title 1"/>
+          <p:cNvSpPr>
+            <a:spLocks noGrp="1"/>
+          </p:cNvSpPr>
+          <p:nvPr>
+            <p:ph type="title"/>
+          </p:nvPr>
+        </p:nvSpPr>
+        <p:spPr/>
+        <p:txBody>
+          <a:bodyPr/>
+          <a:lstStyle/>
+          <a:p>
+            <a:r>
+              <a:rPr lang="en-US" dirty="0"/>
+              <a:t>Unsuccessful attempt</a:t>
+            </a:r>
+          </a:p>
+        </p:txBody>
+      </p:sp>
+      <p:sp>
+        <p:nvSpPr>
+          <p:cNvPr id="5" name="Text Box 3"/>
+          <p:cNvSpPr txBox="1">
+            <a:spLocks noChangeArrowheads="1"/>
+          </p:cNvSpPr>
+          <p:nvPr/>
+        </p:nvSpPr>
+        <p:spPr bwMode="auto">
+          <a:xfrm>
+            <a:off x="3071664" y="1984654"/>
+            <a:ext cx="6628738" cy="3108543"/>
+          </a:xfrm>
+          <a:prstGeom prst="rect">
+            <a:avLst/>
+          </a:prstGeom>
+          <a:noFill/>
+          <a:ln>
+            <a:noFill/>
+          </a:ln>
+          <a:extLst>
+            <a:ext uri="{909E8E84-426E-40dd-AFC4-6F175D3DCCD1}">
+              <a14:hiddenFill xmlns:a14="http://schemas.microsoft.com/office/drawing/2010/main" xmlns="">
+                <a:solidFill>
+                  <a:srgbClr val="FFFFFF"/>
+                </a:solidFill>
+              </a14:hiddenFill>
+            </a:ext>
+            <a:ext uri="{91240B29-F687-4f45-9708-019B960494DF}">
+              <a14:hiddenLine xmlns:a14="http://schemas.microsoft.com/office/drawing/2010/main" xmlns="" w="9525">
+                <a:solidFill>
+                  <a:srgbClr val="000000"/>
+                </a:solidFill>
+                <a:miter lim="800000"/>
+                <a:headEnd/>
+                <a:tailEnd/>
+              </a14:hiddenLine>
+            </a:ext>
+          </a:extLst>
+        </p:spPr>
+        <p:txBody>
+          <a:bodyPr wrap="none">
+            <a:spAutoFit/>
+          </a:bodyPr>
+          <a:lstStyle>
+            <a:lvl1pPr>
+              <a:spcBef>
+                <a:spcPct val="20000"/>
+              </a:spcBef>
+              <a:buClr>
+                <a:srgbClr val="264D8B"/>
+              </a:buClr>
+              <a:buFont typeface="Times" charset="0"/>
+              <a:buChar char="•"/>
+              <a:defRPr sz="3200">
+                <a:solidFill>
+                  <a:srgbClr val="1A3170"/>
+                </a:solidFill>
+                <a:latin typeface="Trebuchet MS" charset="0"/>
+                <a:ea typeface="MS PGothic" charset="-128"/>
+              </a:defRPr>
+            </a:lvl1pPr>
+            <a:lvl2pPr marL="742950" indent="-285750">
+              <a:spcBef>
+                <a:spcPct val="20000"/>
+              </a:spcBef>
+              <a:buClr>
+                <a:srgbClr val="264D8B"/>
+              </a:buClr>
+              <a:buChar char="–"/>
+              <a:defRPr sz="2800">
+                <a:solidFill>
+                  <a:srgbClr val="1A3170"/>
+                </a:solidFill>
+                <a:latin typeface="Trebuchet MS" charset="0"/>
+                <a:ea typeface="MS PGothic" charset="-128"/>
+              </a:defRPr>
+            </a:lvl2pPr>
+            <a:lvl3pPr marL="1143000" indent="-228600">
+              <a:spcBef>
+                <a:spcPct val="20000"/>
+              </a:spcBef>
+              <a:buClr>
+                <a:srgbClr val="264D8B"/>
+              </a:buClr>
+              <a:buChar char="•"/>
+              <a:defRPr sz="2400">
+                <a:solidFill>
+                  <a:srgbClr val="1A3170"/>
+                </a:solidFill>
+                <a:latin typeface="Trebuchet MS" charset="0"/>
+                <a:ea typeface="MS PGothic" charset="-128"/>
+              </a:defRPr>
+            </a:lvl3pPr>
+            <a:lvl4pPr marL="1600200" indent="-228600">
+              <a:spcBef>
+                <a:spcPct val="20000"/>
+              </a:spcBef>
+              <a:buClr>
+                <a:srgbClr val="264D8B"/>
+              </a:buClr>
+              <a:buChar char="–"/>
+              <a:defRPr sz="2000">
+                <a:solidFill>
+                  <a:srgbClr val="1A3170"/>
+                </a:solidFill>
+                <a:latin typeface="Trebuchet MS" charset="0"/>
+                <a:ea typeface="MS PGothic" charset="-128"/>
+              </a:defRPr>
+            </a:lvl4pPr>
+            <a:lvl5pPr marL="2057400" indent="-228600">
+              <a:spcBef>
+                <a:spcPct val="20000"/>
+              </a:spcBef>
+              <a:buClr>
+                <a:srgbClr val="264D8B"/>
+              </a:buClr>
+              <a:buChar char="»"/>
+              <a:defRPr sz="2000">
+                <a:solidFill>
+                  <a:srgbClr val="1A3170"/>
+                </a:solidFill>
+                <a:latin typeface="Trebuchet MS" charset="0"/>
+                <a:ea typeface="MS PGothic" charset="-128"/>
+              </a:defRPr>
+            </a:lvl5pPr>
+            <a:lvl6pPr marL="2514600" indent="-228600" eaLnBrk="0" fontAlgn="base" hangingPunct="0">
+              <a:spcBef>
+                <a:spcPct val="20000"/>
+              </a:spcBef>
+              <a:spcAft>
+                <a:spcPct val="0"/>
+              </a:spcAft>
+              <a:buClr>
+                <a:srgbClr val="264D8B"/>
+              </a:buClr>
+              <a:buChar char="»"/>
+              <a:defRPr sz="2000">
+                <a:solidFill>
+                  <a:srgbClr val="1A3170"/>
+                </a:solidFill>
+                <a:latin typeface="Trebuchet MS" charset="0"/>
+                <a:ea typeface="MS PGothic" charset="-128"/>
+              </a:defRPr>
+            </a:lvl6pPr>
+            <a:lvl7pPr marL="2971800" indent="-228600" eaLnBrk="0" fontAlgn="base" hangingPunct="0">
+              <a:spcBef>
+                <a:spcPct val="20000"/>
+              </a:spcBef>
+              <a:spcAft>
+                <a:spcPct val="0"/>
+              </a:spcAft>
+              <a:buClr>
+                <a:srgbClr val="264D8B"/>
+              </a:buClr>
+              <a:buChar char="»"/>
+              <a:defRPr sz="2000">
+                <a:solidFill>
+                  <a:srgbClr val="1A3170"/>
+                </a:solidFill>
+                <a:latin typeface="Trebuchet MS" charset="0"/>
+                <a:ea typeface="MS PGothic" charset="-128"/>
+              </a:defRPr>
+            </a:lvl7pPr>
+            <a:lvl8pPr marL="3429000" indent="-228600" eaLnBrk="0" fontAlgn="base" hangingPunct="0">
+              <a:spcBef>
+                <a:spcPct val="20000"/>
+              </a:spcBef>
+              <a:spcAft>
+                <a:spcPct val="0"/>
+              </a:spcAft>
+              <a:buClr>
+                <a:srgbClr val="264D8B"/>
+              </a:buClr>
+              <a:buChar char="»"/>
+              <a:defRPr sz="2000">
+                <a:solidFill>
+                  <a:srgbClr val="1A3170"/>
+                </a:solidFill>
+                <a:latin typeface="Trebuchet MS" charset="0"/>
+                <a:ea typeface="MS PGothic" charset="-128"/>
+              </a:defRPr>
+            </a:lvl8pPr>
+            <a:lvl9pPr marL="3886200" indent="-228600" eaLnBrk="0" fontAlgn="base" hangingPunct="0">
+              <a:spcBef>
+                <a:spcPct val="20000"/>
+              </a:spcBef>
+              <a:spcAft>
+                <a:spcPct val="0"/>
+              </a:spcAft>
+              <a:buClr>
+                <a:srgbClr val="264D8B"/>
+              </a:buClr>
+              <a:buChar char="»"/>
+              <a:defRPr sz="2000">
+                <a:solidFill>
+                  <a:srgbClr val="1A3170"/>
+                </a:solidFill>
+                <a:latin typeface="Trebuchet MS" charset="0"/>
+                <a:ea typeface="MS PGothic" charset="-128"/>
+              </a:defRPr>
+            </a:lvl9pPr>
+          </a:lstStyle>
+          <a:p>
+            <a:pPr eaLnBrk="1" hangingPunct="1">
+              <a:spcBef>
+                <a:spcPct val="0"/>
+              </a:spcBef>
+              <a:buClrTx/>
+              <a:buFontTx/>
+              <a:buNone/>
+            </a:pPr>
+            <a:r>
+              <a:rPr lang="en-US" altLang="en-US" sz="2800" dirty="0">
+                <a:solidFill>
+                  <a:schemeClr val="tx1"/>
+                </a:solidFill>
+                <a:latin typeface="Courier New" charset="0"/>
+              </a:rPr>
+              <a:t>public </a:t>
+            </a:r>
+            <a:r>
+              <a:rPr lang="en-US" altLang="en-US" sz="2800" dirty="0" err="1">
+                <a:solidFill>
+                  <a:schemeClr val="tx1"/>
+                </a:solidFill>
+                <a:latin typeface="Courier New" charset="0"/>
+              </a:rPr>
+              <a:t>int</a:t>
+            </a:r>
+            <a:r>
+              <a:rPr lang="en-US" altLang="en-US" sz="2800" dirty="0">
+                <a:solidFill>
+                  <a:schemeClr val="tx1"/>
+                </a:solidFill>
+                <a:latin typeface="Courier New" charset="0"/>
+              </a:rPr>
+              <a:t> </a:t>
+            </a:r>
+            <a:r>
+              <a:rPr lang="en-US" altLang="en-US" sz="2800" dirty="0" err="1">
+                <a:solidFill>
+                  <a:schemeClr val="tx1"/>
+                </a:solidFill>
+                <a:latin typeface="Courier New" charset="0"/>
+              </a:rPr>
+              <a:t>refundBalance</a:t>
+            </a:r>
+            <a:r>
+              <a:rPr lang="en-US" altLang="en-US" sz="2800" dirty="0">
+                <a:solidFill>
+                  <a:schemeClr val="tx1"/>
+                </a:solidFill>
+                <a:latin typeface="Courier New" charset="0"/>
+              </a:rPr>
+              <a:t>()</a:t>
+            </a:r>
+          </a:p>
+          <a:p>
+            <a:pPr eaLnBrk="1" hangingPunct="1">
+              <a:spcBef>
+                <a:spcPct val="0"/>
+              </a:spcBef>
+              <a:buClrTx/>
+              <a:buFontTx/>
+              <a:buNone/>
+            </a:pPr>
+            <a:r>
+              <a:rPr lang="en-US" altLang="en-US" sz="2800" dirty="0">
+                <a:solidFill>
+                  <a:schemeClr val="tx1"/>
+                </a:solidFill>
+                <a:latin typeface="Courier New" charset="0"/>
+              </a:rPr>
+              <a:t>{</a:t>
+            </a:r>
+          </a:p>
+          <a:p>
+            <a:pPr eaLnBrk="1" hangingPunct="1">
+              <a:spcBef>
+                <a:spcPct val="0"/>
+              </a:spcBef>
+              <a:buClrTx/>
+              <a:buFontTx/>
+              <a:buNone/>
+            </a:pPr>
+            <a:r>
+              <a:rPr lang="en-US" altLang="en-US" sz="2800" dirty="0">
+                <a:solidFill>
+                  <a:schemeClr val="tx1"/>
+                </a:solidFill>
+                <a:latin typeface="Courier New" charset="0"/>
+              </a:rPr>
+              <a:t>    // Return the amount left.</a:t>
+            </a:r>
+          </a:p>
+          <a:p>
+            <a:pPr eaLnBrk="1" hangingPunct="1">
+              <a:spcBef>
+                <a:spcPct val="0"/>
+              </a:spcBef>
+              <a:buClrTx/>
+              <a:buFontTx/>
+              <a:buNone/>
+            </a:pPr>
+            <a:r>
+              <a:rPr lang="en-US" altLang="en-US" sz="2800" dirty="0">
+                <a:solidFill>
+                  <a:schemeClr val="tx1"/>
+                </a:solidFill>
+                <a:latin typeface="Courier New" charset="0"/>
+              </a:rPr>
+              <a:t>    return balance;</a:t>
+            </a:r>
+          </a:p>
+          <a:p>
+            <a:pPr eaLnBrk="1" hangingPunct="1">
+              <a:spcBef>
+                <a:spcPct val="0"/>
+              </a:spcBef>
+              <a:buClrTx/>
+              <a:buFontTx/>
+              <a:buNone/>
+            </a:pPr>
+            <a:r>
+              <a:rPr lang="en-US" altLang="en-US" sz="2800" dirty="0">
+                <a:solidFill>
+                  <a:schemeClr val="tx1"/>
+                </a:solidFill>
+                <a:latin typeface="Courier New" charset="0"/>
+              </a:rPr>
+              <a:t>    // Clear the balance.</a:t>
+            </a:r>
+          </a:p>
+          <a:p>
+            <a:pPr eaLnBrk="1" hangingPunct="1">
+              <a:spcBef>
+                <a:spcPct val="0"/>
+              </a:spcBef>
+              <a:buClrTx/>
+              <a:buFontTx/>
+              <a:buNone/>
+            </a:pPr>
+            <a:r>
+              <a:rPr lang="en-US" altLang="en-US" sz="2800" dirty="0">
+                <a:solidFill>
+                  <a:schemeClr val="tx1"/>
+                </a:solidFill>
+                <a:latin typeface="Courier New" charset="0"/>
+              </a:rPr>
+              <a:t>    balance = 0;</a:t>
+            </a:r>
+          </a:p>
+          <a:p>
+            <a:pPr eaLnBrk="1" hangingPunct="1">
+              <a:spcBef>
+                <a:spcPct val="0"/>
+              </a:spcBef>
+              <a:buClrTx/>
+              <a:buFontTx/>
+              <a:buNone/>
+            </a:pPr>
+            <a:r>
+              <a:rPr lang="en-US" altLang="en-US" sz="2800" dirty="0">
+                <a:solidFill>
+                  <a:schemeClr val="tx1"/>
+                </a:solidFill>
+                <a:latin typeface="Courier New" charset="0"/>
+              </a:rPr>
+              <a:t>} </a:t>
+            </a:r>
+          </a:p>
+        </p:txBody>
+      </p:sp>
+      <p:sp>
+        <p:nvSpPr>
+          <p:cNvPr id="6" name="TextBox 5"/>
+          <p:cNvSpPr txBox="1"/>
+          <p:nvPr/>
+        </p:nvSpPr>
+        <p:spPr>
+          <a:xfrm>
+            <a:off x="695400" y="5475547"/>
+            <a:ext cx="9371733" cy="830997"/>
+          </a:xfrm>
+          <a:prstGeom prst="rect">
+            <a:avLst/>
+          </a:prstGeom>
+          <a:gradFill>
+            <a:gsLst>
+              <a:gs pos="0">
+                <a:schemeClr val="accent6">
+                  <a:tint val="50000"/>
+                  <a:satMod val="300000"/>
+                </a:schemeClr>
+              </a:gs>
+              <a:gs pos="35000">
+                <a:schemeClr val="accent6">
+                  <a:tint val="37000"/>
+                  <a:satMod val="300000"/>
+                </a:schemeClr>
+              </a:gs>
+              <a:gs pos="100000">
+                <a:schemeClr val="accent6">
+                  <a:tint val="15000"/>
+                  <a:satMod val="350000"/>
+                </a:schemeClr>
+              </a:gs>
+            </a:gsLst>
+            <a:lin ang="16200000" scaled="1"/>
+          </a:gradFill>
+        </p:spPr>
+        <p:txBody>
+          <a:bodyPr wrap="none" rtlCol="0">
+            <a:spAutoFit/>
+          </a:bodyPr>
+          <a:lstStyle/>
+          <a:p>
+            <a:r>
+              <a:rPr lang="en-US" sz="2400" dirty="0">
+                <a:solidFill>
+                  <a:srgbClr val="0070C0"/>
+                </a:solidFill>
+              </a:rPr>
+              <a:t>It looks logical, but the language does not allow it. </a:t>
+            </a:r>
+          </a:p>
+          <a:p>
+            <a:r>
+              <a:rPr lang="en-US" sz="2400" dirty="0">
+                <a:solidFill>
+                  <a:srgbClr val="0070C0"/>
+                </a:solidFill>
+              </a:rPr>
+              <a:t>A method will terminate immediately after executing a return statement! </a:t>
+            </a:r>
+          </a:p>
+        </p:txBody>
+      </p:sp>
+    </p:spTree>
+    <p:extLst>
+      <p:ext uri="{BB962C8B-B14F-4D97-AF65-F5344CB8AC3E}">
+        <p14:creationId xmlns:p14="http://schemas.microsoft.com/office/powerpoint/2010/main" val="1105692568"/>
+      </p:ext>
+    </p:extLst>
+  </p:cSld>
+  <p:clrMapOvr>
+    <a:masterClrMapping/>
+  </p:clrMapOvr>
+  <p:timing>
+    <p:tnLst>
+      <p:par>
+        <p:cTn id="1" dur="indefinite" restart="never" nodeType="tmRoot">
+          <p:childTnLst>
+            <p:seq concurrent="1" nextAc="seek">
+              <p:cTn id="2" dur="indefinite" nodeType="mainSeq">
+                <p:childTnLst>
+                  <p:par>
+                    <p:cTn id="3" fill="hold">
+                      <p:stCondLst>
+                        <p:cond delay="indefinite"/>
+                      </p:stCondLst>
+                      <p:childTnLst>
+                        <p:par>
+                          <p:cTn id="4" fill="hold">
+                            <p:stCondLst>
+                              <p:cond delay="0"/>
+                            </p:stCondLst>
+                            <p:childTnLst>
+                              <p:par>
+                                <p:cTn id="5" presetID="2" presetClass="entr" presetSubtype="4" fill="hold" grpId="0" nodeType="clickEffect">
+                                  <p:stCondLst>
+                                    <p:cond delay="0"/>
+                                  </p:stCondLst>
+                                  <p:childTnLst>
+                                    <p:set>
+                                      <p:cBhvr>
+                                        <p:cTn id="6" dur="1" fill="hold">
+                                          <p:stCondLst>
+                                            <p:cond delay="0"/>
+                                          </p:stCondLst>
+                                        </p:cTn>
+                                        <p:tgtEl>
+                                          <p:spTgt spid="6"/>
+                                        </p:tgtEl>
+                                        <p:attrNameLst>
+                                          <p:attrName>style.visibility</p:attrName>
+                                        </p:attrNameLst>
+                                      </p:cBhvr>
+                                      <p:to>
+                                        <p:strVal val="visible"/>
+                                      </p:to>
+                                    </p:set>
+                                    <p:anim calcmode="lin" valueType="num">
+                                      <p:cBhvr additive="base">
+                                        <p:cTn id="7" dur="500" fill="hold"/>
+                                        <p:tgtEl>
+                                          <p:spTgt spid="6"/>
+                                        </p:tgtEl>
+                                        <p:attrNameLst>
+                                          <p:attrName>ppt_x</p:attrName>
+                                        </p:attrNameLst>
+                                      </p:cBhvr>
+                                      <p:tavLst>
+                                        <p:tav tm="0">
+                                          <p:val>
+                                            <p:strVal val="#ppt_x"/>
+                                          </p:val>
+                                        </p:tav>
+                                        <p:tav tm="100000">
+                                          <p:val>
+                                            <p:strVal val="#ppt_x"/>
+                                          </p:val>
+                                        </p:tav>
+                                      </p:tavLst>
+                                    </p:anim>
+                                    <p:anim calcmode="lin" valueType="num">
+                                      <p:cBhvr additive="base">
+                                        <p:cTn id="8" dur="500" fill="hold"/>
+                                        <p:tgtEl>
+                                          <p:spTgt spid="6"/>
+                                        </p:tgtEl>
+                                        <p:attrNameLst>
+                                          <p:attrName>ppt_y</p:attrName>
+                                        </p:attrNameLst>
+                                      </p:cBhvr>
+                                      <p:tavLst>
+                                        <p:tav tm="0">
+                                          <p:val>
+                                            <p:strVal val="1+#ppt_h/2"/>
+                                          </p:val>
+                                        </p:tav>
+                                        <p:tav tm="100000">
+                                          <p:val>
+                                            <p:strVal val="#ppt_y"/>
+                                          </p:val>
+                                        </p:tav>
+                                      </p:tavLst>
+                                    </p:anim>
+                                  </p:childTnLst>
+                                </p:cTn>
+                              </p:par>
+                            </p:childTnLst>
+                          </p:cTn>
+                        </p:par>
+                      </p:childTnLst>
+                    </p:cTn>
+                  </p:par>
+                </p:childTnLst>
+              </p:cTn>
+              <p:prevCondLst>
+                <p:cond evt="onPrev" delay="0">
+                  <p:tgtEl>
+                    <p:sldTgt/>
+                  </p:tgtEl>
+                </p:cond>
+              </p:prevCondLst>
+              <p:nextCondLst>
+                <p:cond evt="onNext" delay="0">
+                  <p:tgtEl>
+                    <p:sldTgt/>
+                  </p:tgtEl>
+                </p:cond>
+              </p:nextCondLst>
+            </p:seq>
+          </p:childTnLst>
+        </p:cTn>
+      </p:par>
+    </p:tnLst>
+    <p:bldLst>
+      <p:bldP spid="6" grpId="0" animBg="1"/>
+    </p:bldLst>
+  </p:timing>
+</p:sld>
+</file>
+
+<file path=ppt/slides/slide31.xml><?xml version="1.0" encoding="utf-8"?>
+<p:sld xmlns:a="http://schemas.openxmlformats.org/drawingml/2006/main" xmlns:r="http://schemas.openxmlformats.org/officeDocument/2006/relationships" xmlns:p="http://schemas.openxmlformats.org/presentationml/2006/main">
+  <p:cSld>
+    <p:spTree>
+      <p:nvGrpSpPr>
+        <p:cNvPr id="1" name=""/>
+        <p:cNvGrpSpPr/>
+        <p:nvPr/>
+      </p:nvGrpSpPr>
+      <p:grpSpPr>
+        <a:xfrm>
+          <a:off x="0" y="0"/>
+          <a:ext cx="0" cy="0"/>
+          <a:chOff x="0" y="0"/>
+          <a:chExt cx="0" cy="0"/>
+        </a:xfrm>
+      </p:grpSpPr>
+      <p:sp>
+        <p:nvSpPr>
+          <p:cNvPr id="78849" name="Rectangle 2"/>
+          <p:cNvSpPr>
+            <a:spLocks noGrp="1" noChangeArrowheads="1"/>
+          </p:cNvSpPr>
+          <p:nvPr>
+            <p:ph type="title"/>
+          </p:nvPr>
+        </p:nvSpPr>
+        <p:spPr/>
+        <p:txBody>
+          <a:bodyPr/>
+          <a:lstStyle/>
+          <a:p>
+            <a:r>
+              <a:rPr lang="en-GB" altLang="en-US">
+                <a:ea typeface="MS PGothic" charset="-128"/>
+              </a:rPr>
+              <a:t>Local variables</a:t>
+            </a:r>
+          </a:p>
+        </p:txBody>
+      </p:sp>
+      <p:sp>
+        <p:nvSpPr>
+          <p:cNvPr id="78850" name="Rectangle 3"/>
+          <p:cNvSpPr>
+            <a:spLocks noGrp="1" noChangeArrowheads="1"/>
+          </p:cNvSpPr>
+          <p:nvPr>
+            <p:ph idx="1"/>
+          </p:nvPr>
+        </p:nvSpPr>
+        <p:spPr/>
+        <p:txBody>
+          <a:bodyPr>
+            <a:normAutofit/>
+          </a:bodyPr>
+          <a:lstStyle/>
+          <a:p>
+            <a:pPr eaLnBrk="1" hangingPunct="1">
+              <a:lnSpc>
+                <a:spcPct val="90000"/>
+              </a:lnSpc>
+            </a:pPr>
+            <a:r>
+              <a:rPr lang="en-US" altLang="en-US" sz="3600" dirty="0">
+                <a:ea typeface="MS PGothic" charset="-128"/>
+              </a:rPr>
+              <a:t>Methods can define their own, </a:t>
+            </a:r>
+            <a:r>
+              <a:rPr lang="en-US" altLang="en-US" sz="3600" i="1" dirty="0">
+                <a:ea typeface="MS PGothic" charset="-128"/>
+              </a:rPr>
+              <a:t>local</a:t>
+            </a:r>
+            <a:r>
+              <a:rPr lang="en-US" altLang="en-US" sz="3600" dirty="0">
+                <a:ea typeface="MS PGothic" charset="-128"/>
+              </a:rPr>
+              <a:t> variables:</a:t>
+            </a:r>
+          </a:p>
+          <a:p>
+            <a:pPr lvl="1" eaLnBrk="1" hangingPunct="1">
+              <a:lnSpc>
+                <a:spcPct val="90000"/>
+              </a:lnSpc>
+            </a:pPr>
+            <a:r>
+              <a:rPr lang="en-US" altLang="en-US" sz="3200" dirty="0">
+                <a:ea typeface="MS PGothic" charset="-128"/>
+              </a:rPr>
+              <a:t>Short lived, like parameters.</a:t>
+            </a:r>
+          </a:p>
+          <a:p>
+            <a:pPr lvl="1" eaLnBrk="1" hangingPunct="1">
+              <a:lnSpc>
+                <a:spcPct val="90000"/>
+              </a:lnSpc>
+            </a:pPr>
+            <a:r>
+              <a:rPr lang="en-US" altLang="en-US" sz="3200" dirty="0">
+                <a:ea typeface="MS PGothic" charset="-128"/>
+              </a:rPr>
+              <a:t>The method sets their values – unlike parameters, they do not receive external values.</a:t>
+            </a:r>
+          </a:p>
+          <a:p>
+            <a:pPr lvl="1" eaLnBrk="1" hangingPunct="1">
+              <a:lnSpc>
+                <a:spcPct val="90000"/>
+              </a:lnSpc>
+            </a:pPr>
+            <a:r>
+              <a:rPr lang="en-US" altLang="en-US" sz="3200" dirty="0">
+                <a:ea typeface="MS PGothic" charset="-128"/>
+              </a:rPr>
+              <a:t>Used for </a:t>
+            </a:r>
+            <a:r>
+              <a:rPr lang="ja-JP" altLang="en-US" sz="3200">
+                <a:ea typeface="MS PGothic" charset="-128"/>
+              </a:rPr>
+              <a:t>‘</a:t>
+            </a:r>
+            <a:r>
+              <a:rPr lang="en-US" altLang="ja-JP" sz="3200" dirty="0">
+                <a:ea typeface="MS PGothic" charset="-128"/>
+              </a:rPr>
+              <a:t>temporary</a:t>
+            </a:r>
+            <a:r>
+              <a:rPr lang="ja-JP" altLang="en-US" sz="3200">
+                <a:ea typeface="MS PGothic" charset="-128"/>
+              </a:rPr>
+              <a:t>’</a:t>
+            </a:r>
+            <a:r>
+              <a:rPr lang="en-US" altLang="ja-JP" sz="3200" dirty="0">
+                <a:ea typeface="MS PGothic" charset="-128"/>
+              </a:rPr>
+              <a:t> calculation and storage.</a:t>
+            </a:r>
+          </a:p>
+          <a:p>
+            <a:pPr lvl="1" eaLnBrk="1" hangingPunct="1">
+              <a:lnSpc>
+                <a:spcPct val="90000"/>
+              </a:lnSpc>
+            </a:pPr>
+            <a:r>
+              <a:rPr lang="en-US" altLang="en-US" sz="3200" dirty="0">
+                <a:ea typeface="MS PGothic" charset="-128"/>
+              </a:rPr>
+              <a:t>They exist only as long as the method is being executed.</a:t>
+            </a:r>
+          </a:p>
+          <a:p>
+            <a:pPr lvl="1" eaLnBrk="1" hangingPunct="1">
+              <a:lnSpc>
+                <a:spcPct val="90000"/>
+              </a:lnSpc>
+            </a:pPr>
+            <a:r>
+              <a:rPr lang="en-US" altLang="en-US" sz="3200" dirty="0">
+                <a:ea typeface="MS PGothic" charset="-128"/>
+              </a:rPr>
+              <a:t>They are only accessible from within the method.</a:t>
+            </a:r>
+          </a:p>
+          <a:p>
+            <a:pPr lvl="1" eaLnBrk="1" hangingPunct="1">
+              <a:lnSpc>
+                <a:spcPct val="90000"/>
+              </a:lnSpc>
+            </a:pPr>
+            <a:r>
+              <a:rPr lang="en-US" altLang="en-US" sz="3200" dirty="0">
+                <a:ea typeface="MS PGothic" charset="-128"/>
+              </a:rPr>
+              <a:t>They are defined within a particular </a:t>
+            </a:r>
+            <a:r>
+              <a:rPr lang="en-US" altLang="en-US" sz="3200" i="1" dirty="0">
+                <a:ea typeface="MS PGothic" charset="-128"/>
+              </a:rPr>
+              <a:t>scope</a:t>
+            </a:r>
+            <a:r>
+              <a:rPr lang="en-US" altLang="en-US" sz="3200" dirty="0">
+                <a:ea typeface="MS PGothic" charset="-128"/>
+              </a:rPr>
+              <a:t>.</a:t>
+            </a:r>
+          </a:p>
+          <a:p>
+            <a:endParaRPr lang="en-GB" altLang="en-US" sz="5400" dirty="0">
+              <a:ea typeface="MS PGothic" charset="-128"/>
+            </a:endParaRPr>
+          </a:p>
+        </p:txBody>
+      </p:sp>
+    </p:spTree>
+  </p:cSld>
+  <p:clrMapOvr>
+    <a:masterClrMapping/>
+  </p:clrMapOvr>
+</p:sld>
+</file>
+
+<file path=ppt/slides/slide32.xml><?xml version="1.0" encoding="utf-8"?>
+<p:sld xmlns:a="http://schemas.openxmlformats.org/drawingml/2006/main" xmlns:r="http://schemas.openxmlformats.org/officeDocument/2006/relationships" xmlns:p="http://schemas.openxmlformats.org/presentationml/2006/main">
+  <p:cSld>
+    <p:spTree>
+      <p:nvGrpSpPr>
+        <p:cNvPr id="1" name=""/>
+        <p:cNvGrpSpPr/>
+        <p:nvPr/>
+      </p:nvGrpSpPr>
+      <p:grpSpPr>
+        <a:xfrm>
+          <a:off x="0" y="0"/>
+          <a:ext cx="0" cy="0"/>
+          <a:chOff x="0" y="0"/>
+          <a:chExt cx="0" cy="0"/>
+        </a:xfrm>
+      </p:grpSpPr>
+      <p:sp>
+        <p:nvSpPr>
+          <p:cNvPr id="26626" name="Rectangle 2"/>
+          <p:cNvSpPr>
+            <a:spLocks noGrp="1" noChangeArrowheads="1"/>
+          </p:cNvSpPr>
+          <p:nvPr>
+            <p:ph type="title"/>
+          </p:nvPr>
+        </p:nvSpPr>
+        <p:spPr/>
+        <p:txBody>
+          <a:bodyPr/>
+          <a:lstStyle/>
+          <a:p>
+            <a:pPr eaLnBrk="1" hangingPunct="1">
+              <a:defRPr/>
+            </a:pPr>
+            <a:r>
+              <a:rPr lang="en-US">
+                <a:ea typeface="+mj-ea"/>
+                <a:cs typeface="+mj-cs"/>
+              </a:rPr>
+              <a:t>Local variables</a:t>
+            </a:r>
+          </a:p>
+        </p:txBody>
+      </p:sp>
+      <p:sp>
+        <p:nvSpPr>
+          <p:cNvPr id="82947" name="Text Box 3"/>
+          <p:cNvSpPr txBox="1">
+            <a:spLocks noChangeArrowheads="1"/>
+          </p:cNvSpPr>
+          <p:nvPr/>
+        </p:nvSpPr>
+        <p:spPr bwMode="auto">
+          <a:xfrm>
+            <a:off x="4648200" y="2638428"/>
+            <a:ext cx="6413935" cy="3108543"/>
+          </a:xfrm>
+          <a:prstGeom prst="rect">
+            <a:avLst/>
+          </a:prstGeom>
+          <a:noFill/>
+          <a:ln>
+            <a:noFill/>
+          </a:ln>
+          <a:extLst>
+            <a:ext uri="{909E8E84-426E-40dd-AFC4-6F175D3DCCD1}">
+              <a14:hiddenFill xmlns:a14="http://schemas.microsoft.com/office/drawing/2010/main" xmlns="">
+                <a:solidFill>
+                  <a:srgbClr val="FFFFFF"/>
+                </a:solidFill>
+              </a14:hiddenFill>
+            </a:ext>
+            <a:ext uri="{91240B29-F687-4f45-9708-019B960494DF}">
+              <a14:hiddenLine xmlns:a14="http://schemas.microsoft.com/office/drawing/2010/main" xmlns="" w="9525">
+                <a:solidFill>
+                  <a:srgbClr val="000000"/>
+                </a:solidFill>
+                <a:miter lim="800000"/>
+                <a:headEnd/>
+                <a:tailEnd/>
+              </a14:hiddenLine>
+            </a:ext>
+          </a:extLst>
+        </p:spPr>
+        <p:txBody>
+          <a:bodyPr wrap="none">
+            <a:spAutoFit/>
+          </a:bodyPr>
+          <a:lstStyle>
+            <a:lvl1pPr>
+              <a:spcBef>
+                <a:spcPct val="20000"/>
+              </a:spcBef>
+              <a:buClr>
+                <a:srgbClr val="264D8B"/>
+              </a:buClr>
+              <a:buFont typeface="Times" charset="0"/>
+              <a:buChar char="•"/>
+              <a:defRPr sz="3200">
+                <a:solidFill>
+                  <a:srgbClr val="1A3170"/>
+                </a:solidFill>
+                <a:latin typeface="Trebuchet MS" charset="0"/>
+                <a:ea typeface="MS PGothic" charset="-128"/>
+              </a:defRPr>
+            </a:lvl1pPr>
+            <a:lvl2pPr marL="742950" indent="-285750">
+              <a:spcBef>
+                <a:spcPct val="20000"/>
+              </a:spcBef>
+              <a:buClr>
+                <a:srgbClr val="264D8B"/>
+              </a:buClr>
+              <a:buChar char="–"/>
+              <a:defRPr sz="2800">
+                <a:solidFill>
+                  <a:srgbClr val="1A3170"/>
+                </a:solidFill>
+                <a:latin typeface="Trebuchet MS" charset="0"/>
+                <a:ea typeface="MS PGothic" charset="-128"/>
+              </a:defRPr>
+            </a:lvl2pPr>
+            <a:lvl3pPr marL="1143000" indent="-228600">
+              <a:spcBef>
+                <a:spcPct val="20000"/>
+              </a:spcBef>
+              <a:buClr>
+                <a:srgbClr val="264D8B"/>
+              </a:buClr>
+              <a:buChar char="•"/>
+              <a:defRPr sz="2400">
+                <a:solidFill>
+                  <a:srgbClr val="1A3170"/>
+                </a:solidFill>
+                <a:latin typeface="Trebuchet MS" charset="0"/>
+                <a:ea typeface="MS PGothic" charset="-128"/>
+              </a:defRPr>
+            </a:lvl3pPr>
+            <a:lvl4pPr marL="1600200" indent="-228600">
+              <a:spcBef>
+                <a:spcPct val="20000"/>
+              </a:spcBef>
+              <a:buClr>
+                <a:srgbClr val="264D8B"/>
+              </a:buClr>
+              <a:buChar char="–"/>
+              <a:defRPr sz="2000">
+                <a:solidFill>
+                  <a:srgbClr val="1A3170"/>
+                </a:solidFill>
+                <a:latin typeface="Trebuchet MS" charset="0"/>
+                <a:ea typeface="MS PGothic" charset="-128"/>
+              </a:defRPr>
+            </a:lvl4pPr>
+            <a:lvl5pPr marL="2057400" indent="-228600">
+              <a:spcBef>
+                <a:spcPct val="20000"/>
+              </a:spcBef>
+              <a:buClr>
+                <a:srgbClr val="264D8B"/>
+              </a:buClr>
+              <a:buChar char="»"/>
+              <a:defRPr sz="2000">
+                <a:solidFill>
+                  <a:srgbClr val="1A3170"/>
+                </a:solidFill>
+                <a:latin typeface="Trebuchet MS" charset="0"/>
+                <a:ea typeface="MS PGothic" charset="-128"/>
+              </a:defRPr>
+            </a:lvl5pPr>
+            <a:lvl6pPr marL="2514600" indent="-228600" eaLnBrk="0" fontAlgn="base" hangingPunct="0">
+              <a:spcBef>
+                <a:spcPct val="20000"/>
+              </a:spcBef>
+              <a:spcAft>
+                <a:spcPct val="0"/>
+              </a:spcAft>
+              <a:buClr>
+                <a:srgbClr val="264D8B"/>
+              </a:buClr>
+              <a:buChar char="»"/>
+              <a:defRPr sz="2000">
+                <a:solidFill>
+                  <a:srgbClr val="1A3170"/>
+                </a:solidFill>
+                <a:latin typeface="Trebuchet MS" charset="0"/>
+                <a:ea typeface="MS PGothic" charset="-128"/>
+              </a:defRPr>
+            </a:lvl6pPr>
+            <a:lvl7pPr marL="2971800" indent="-228600" eaLnBrk="0" fontAlgn="base" hangingPunct="0">
+              <a:spcBef>
+                <a:spcPct val="20000"/>
+              </a:spcBef>
+              <a:spcAft>
+                <a:spcPct val="0"/>
+              </a:spcAft>
+              <a:buClr>
+                <a:srgbClr val="264D8B"/>
+              </a:buClr>
+              <a:buChar char="»"/>
+              <a:defRPr sz="2000">
+                <a:solidFill>
+                  <a:srgbClr val="1A3170"/>
+                </a:solidFill>
+                <a:latin typeface="Trebuchet MS" charset="0"/>
+                <a:ea typeface="MS PGothic" charset="-128"/>
+              </a:defRPr>
+            </a:lvl7pPr>
+            <a:lvl8pPr marL="3429000" indent="-228600" eaLnBrk="0" fontAlgn="base" hangingPunct="0">
+              <a:spcBef>
+                <a:spcPct val="20000"/>
+              </a:spcBef>
+              <a:spcAft>
+                <a:spcPct val="0"/>
+              </a:spcAft>
+              <a:buClr>
+                <a:srgbClr val="264D8B"/>
+              </a:buClr>
+              <a:buChar char="»"/>
+              <a:defRPr sz="2000">
+                <a:solidFill>
+                  <a:srgbClr val="1A3170"/>
+                </a:solidFill>
+                <a:latin typeface="Trebuchet MS" charset="0"/>
+                <a:ea typeface="MS PGothic" charset="-128"/>
+              </a:defRPr>
+            </a:lvl8pPr>
+            <a:lvl9pPr marL="3886200" indent="-228600" eaLnBrk="0" fontAlgn="base" hangingPunct="0">
+              <a:spcBef>
+                <a:spcPct val="20000"/>
+              </a:spcBef>
+              <a:spcAft>
+                <a:spcPct val="0"/>
+              </a:spcAft>
+              <a:buClr>
+                <a:srgbClr val="264D8B"/>
+              </a:buClr>
+              <a:buChar char="»"/>
+              <a:defRPr sz="2000">
+                <a:solidFill>
+                  <a:srgbClr val="1A3170"/>
+                </a:solidFill>
+                <a:latin typeface="Trebuchet MS" charset="0"/>
+                <a:ea typeface="MS PGothic" charset="-128"/>
+              </a:defRPr>
+            </a:lvl9pPr>
+          </a:lstStyle>
+          <a:p>
+            <a:pPr eaLnBrk="1" hangingPunct="1">
+              <a:spcBef>
+                <a:spcPct val="0"/>
+              </a:spcBef>
+              <a:buClrTx/>
+              <a:buFontTx/>
+              <a:buNone/>
+            </a:pPr>
+            <a:r>
+              <a:rPr lang="en-US" altLang="en-US" sz="2800" dirty="0">
+                <a:solidFill>
+                  <a:schemeClr val="tx1"/>
+                </a:solidFill>
+                <a:latin typeface="Courier New" charset="0"/>
+              </a:rPr>
+              <a:t>public int </a:t>
+            </a:r>
+            <a:r>
+              <a:rPr lang="en-US" altLang="en-US" sz="2800" dirty="0" err="1">
+                <a:solidFill>
+                  <a:schemeClr val="tx1"/>
+                </a:solidFill>
+                <a:latin typeface="Courier New" charset="0"/>
+              </a:rPr>
+              <a:t>refundBalance</a:t>
+            </a:r>
+            <a:r>
+              <a:rPr lang="en-US" altLang="en-US" sz="2800" dirty="0">
+                <a:solidFill>
+                  <a:schemeClr val="tx1"/>
+                </a:solidFill>
+                <a:latin typeface="Courier New" charset="0"/>
+              </a:rPr>
+              <a:t>()</a:t>
+            </a:r>
+          </a:p>
+          <a:p>
+            <a:pPr eaLnBrk="1" hangingPunct="1">
+              <a:spcBef>
+                <a:spcPct val="0"/>
+              </a:spcBef>
+              <a:buClrTx/>
+              <a:buFontTx/>
+              <a:buNone/>
+            </a:pPr>
+            <a:r>
+              <a:rPr lang="en-US" altLang="en-US" sz="2800" dirty="0">
+                <a:solidFill>
+                  <a:schemeClr val="tx1"/>
+                </a:solidFill>
+                <a:latin typeface="Courier New" charset="0"/>
+              </a:rPr>
+              <a:t>{</a:t>
+            </a:r>
+          </a:p>
+          <a:p>
+            <a:pPr eaLnBrk="1" hangingPunct="1">
+              <a:spcBef>
+                <a:spcPct val="0"/>
+              </a:spcBef>
+              <a:buClrTx/>
+              <a:buFontTx/>
+              <a:buNone/>
+            </a:pPr>
+            <a:r>
+              <a:rPr lang="en-US" altLang="en-US" sz="2800" dirty="0">
+                <a:solidFill>
+                  <a:schemeClr val="tx1"/>
+                </a:solidFill>
+                <a:latin typeface="Courier New" charset="0"/>
+              </a:rPr>
+              <a:t>    </a:t>
+            </a:r>
+            <a:r>
+              <a:rPr lang="en-US" altLang="en-US" sz="2800" dirty="0" err="1">
+                <a:solidFill>
+                  <a:schemeClr val="tx1"/>
+                </a:solidFill>
+                <a:latin typeface="Courier New" charset="0"/>
+              </a:rPr>
+              <a:t>int</a:t>
+            </a:r>
+            <a:r>
+              <a:rPr lang="en-US" altLang="en-US" sz="2800" dirty="0">
+                <a:solidFill>
+                  <a:schemeClr val="tx1"/>
+                </a:solidFill>
+                <a:latin typeface="Courier New" charset="0"/>
+              </a:rPr>
+              <a:t> </a:t>
+            </a:r>
+            <a:r>
+              <a:rPr lang="en-US" altLang="en-US" sz="2800" dirty="0" err="1">
+                <a:solidFill>
+                  <a:schemeClr val="tx1"/>
+                </a:solidFill>
+                <a:latin typeface="Courier New" charset="0"/>
+              </a:rPr>
+              <a:t>amountToRefund</a:t>
+            </a:r>
+            <a:r>
+              <a:rPr lang="en-US" altLang="en-US" sz="2800" dirty="0">
+                <a:solidFill>
+                  <a:schemeClr val="tx1"/>
+                </a:solidFill>
+                <a:latin typeface="Courier New" charset="0"/>
+              </a:rPr>
+              <a:t>;</a:t>
+            </a:r>
+          </a:p>
+          <a:p>
+            <a:pPr eaLnBrk="1" hangingPunct="1">
+              <a:spcBef>
+                <a:spcPct val="0"/>
+              </a:spcBef>
+              <a:buClrTx/>
+              <a:buFontTx/>
+              <a:buNone/>
+            </a:pPr>
+            <a:r>
+              <a:rPr lang="en-US" altLang="en-US" sz="2800" dirty="0">
+                <a:solidFill>
+                  <a:schemeClr val="tx1"/>
+                </a:solidFill>
+                <a:latin typeface="Courier New" charset="0"/>
+              </a:rPr>
+              <a:t>    </a:t>
+            </a:r>
+            <a:r>
+              <a:rPr lang="en-US" altLang="en-US" sz="2800" dirty="0" err="1">
+                <a:solidFill>
+                  <a:schemeClr val="tx1"/>
+                </a:solidFill>
+                <a:latin typeface="Courier New" charset="0"/>
+              </a:rPr>
+              <a:t>amountToRefund</a:t>
+            </a:r>
+            <a:r>
+              <a:rPr lang="en-US" altLang="en-US" sz="2800" dirty="0">
+                <a:solidFill>
+                  <a:schemeClr val="tx1"/>
+                </a:solidFill>
+                <a:latin typeface="Courier New" charset="0"/>
+              </a:rPr>
+              <a:t> = balance;</a:t>
+            </a:r>
+          </a:p>
+          <a:p>
+            <a:pPr eaLnBrk="1" hangingPunct="1">
+              <a:spcBef>
+                <a:spcPct val="0"/>
+              </a:spcBef>
+              <a:buClrTx/>
+              <a:buFontTx/>
+              <a:buNone/>
+            </a:pPr>
+            <a:r>
+              <a:rPr lang="en-US" altLang="en-US" sz="2800" dirty="0">
+                <a:solidFill>
+                  <a:schemeClr val="tx1"/>
+                </a:solidFill>
+                <a:latin typeface="Courier New" charset="0"/>
+              </a:rPr>
+              <a:t>    balance = 0;</a:t>
+            </a:r>
+          </a:p>
+          <a:p>
+            <a:pPr eaLnBrk="1" hangingPunct="1">
+              <a:spcBef>
+                <a:spcPct val="0"/>
+              </a:spcBef>
+              <a:buClrTx/>
+              <a:buFontTx/>
+              <a:buNone/>
+            </a:pPr>
+            <a:r>
+              <a:rPr lang="en-US" altLang="en-US" sz="2800" dirty="0">
+                <a:solidFill>
+                  <a:schemeClr val="tx1"/>
+                </a:solidFill>
+                <a:latin typeface="Courier New" charset="0"/>
+              </a:rPr>
+              <a:t>    return </a:t>
+            </a:r>
+            <a:r>
+              <a:rPr lang="en-US" altLang="en-US" sz="2800" dirty="0" err="1">
+                <a:solidFill>
+                  <a:schemeClr val="tx1"/>
+                </a:solidFill>
+                <a:latin typeface="Courier New" charset="0"/>
+              </a:rPr>
+              <a:t>amountToRefund</a:t>
+            </a:r>
+            <a:r>
+              <a:rPr lang="en-US" altLang="en-US" sz="2800" dirty="0">
+                <a:solidFill>
+                  <a:schemeClr val="tx1"/>
+                </a:solidFill>
+                <a:latin typeface="Courier New" charset="0"/>
+              </a:rPr>
+              <a:t>;</a:t>
+            </a:r>
+          </a:p>
+          <a:p>
+            <a:pPr eaLnBrk="1" hangingPunct="1">
+              <a:spcBef>
+                <a:spcPct val="0"/>
+              </a:spcBef>
+              <a:buClrTx/>
+              <a:buFontTx/>
+              <a:buNone/>
+            </a:pPr>
+            <a:r>
+              <a:rPr lang="en-US" altLang="en-US" sz="2800" dirty="0">
+                <a:solidFill>
+                  <a:schemeClr val="tx1"/>
+                </a:solidFill>
+                <a:latin typeface="Courier New" charset="0"/>
+              </a:rPr>
+              <a:t>} </a:t>
+            </a:r>
+          </a:p>
+        </p:txBody>
+      </p:sp>
+      <p:sp>
+        <p:nvSpPr>
+          <p:cNvPr id="82948" name="Text Box 4"/>
+          <p:cNvSpPr txBox="1">
+            <a:spLocks noChangeArrowheads="1"/>
+          </p:cNvSpPr>
+          <p:nvPr/>
+        </p:nvSpPr>
+        <p:spPr bwMode="auto">
+          <a:xfrm>
+            <a:off x="1575434" y="3095382"/>
+            <a:ext cx="2680542" cy="523220"/>
+          </a:xfrm>
+          <a:prstGeom prst="rect">
+            <a:avLst/>
+          </a:prstGeom>
+          <a:noFill/>
+          <a:ln>
+            <a:noFill/>
+          </a:ln>
+          <a:extLst>
+            <a:ext uri="{909E8E84-426E-40dd-AFC4-6F175D3DCCD1}">
+              <a14:hiddenFill xmlns:a14="http://schemas.microsoft.com/office/drawing/2010/main" xmlns="">
+                <a:solidFill>
+                  <a:srgbClr val="FFFFFF"/>
+                </a:solidFill>
+              </a14:hiddenFill>
+            </a:ext>
+            <a:ext uri="{91240B29-F687-4f45-9708-019B960494DF}">
+              <a14:hiddenLine xmlns:a14="http://schemas.microsoft.com/office/drawing/2010/main" xmlns="" w="9525">
+                <a:solidFill>
+                  <a:srgbClr val="000000"/>
+                </a:solidFill>
+                <a:miter lim="800000"/>
+                <a:headEnd/>
+                <a:tailEnd/>
+              </a14:hiddenLine>
+            </a:ext>
+          </a:extLst>
+        </p:spPr>
+        <p:txBody>
+          <a:bodyPr wrap="none">
+            <a:spAutoFit/>
+          </a:bodyPr>
+          <a:lstStyle>
+            <a:lvl1pPr>
+              <a:spcBef>
+                <a:spcPct val="20000"/>
+              </a:spcBef>
+              <a:buClr>
+                <a:srgbClr val="264D8B"/>
+              </a:buClr>
+              <a:buFont typeface="Times" charset="0"/>
+              <a:buChar char="•"/>
+              <a:defRPr sz="3200">
+                <a:solidFill>
+                  <a:srgbClr val="1A3170"/>
+                </a:solidFill>
+                <a:latin typeface="Trebuchet MS" charset="0"/>
+                <a:ea typeface="MS PGothic" charset="-128"/>
+              </a:defRPr>
+            </a:lvl1pPr>
+            <a:lvl2pPr marL="742950" indent="-285750">
+              <a:spcBef>
+                <a:spcPct val="20000"/>
+              </a:spcBef>
+              <a:buClr>
+                <a:srgbClr val="264D8B"/>
+              </a:buClr>
+              <a:buChar char="–"/>
+              <a:defRPr sz="2800">
+                <a:solidFill>
+                  <a:srgbClr val="1A3170"/>
+                </a:solidFill>
+                <a:latin typeface="Trebuchet MS" charset="0"/>
+                <a:ea typeface="MS PGothic" charset="-128"/>
+              </a:defRPr>
+            </a:lvl2pPr>
+            <a:lvl3pPr marL="1143000" indent="-228600">
+              <a:spcBef>
+                <a:spcPct val="20000"/>
+              </a:spcBef>
+              <a:buClr>
+                <a:srgbClr val="264D8B"/>
+              </a:buClr>
+              <a:buChar char="•"/>
+              <a:defRPr sz="2400">
+                <a:solidFill>
+                  <a:srgbClr val="1A3170"/>
+                </a:solidFill>
+                <a:latin typeface="Trebuchet MS" charset="0"/>
+                <a:ea typeface="MS PGothic" charset="-128"/>
+              </a:defRPr>
+            </a:lvl3pPr>
+            <a:lvl4pPr marL="1600200" indent="-228600">
+              <a:spcBef>
+                <a:spcPct val="20000"/>
+              </a:spcBef>
+              <a:buClr>
+                <a:srgbClr val="264D8B"/>
+              </a:buClr>
+              <a:buChar char="–"/>
+              <a:defRPr sz="2000">
+                <a:solidFill>
+                  <a:srgbClr val="1A3170"/>
+                </a:solidFill>
+                <a:latin typeface="Trebuchet MS" charset="0"/>
+                <a:ea typeface="MS PGothic" charset="-128"/>
+              </a:defRPr>
+            </a:lvl4pPr>
+            <a:lvl5pPr marL="2057400" indent="-228600">
+              <a:spcBef>
+                <a:spcPct val="20000"/>
+              </a:spcBef>
+              <a:buClr>
+                <a:srgbClr val="264D8B"/>
+              </a:buClr>
+              <a:buChar char="»"/>
+              <a:defRPr sz="2000">
+                <a:solidFill>
+                  <a:srgbClr val="1A3170"/>
+                </a:solidFill>
+                <a:latin typeface="Trebuchet MS" charset="0"/>
+                <a:ea typeface="MS PGothic" charset="-128"/>
+              </a:defRPr>
+            </a:lvl5pPr>
+            <a:lvl6pPr marL="2514600" indent="-228600" eaLnBrk="0" fontAlgn="base" hangingPunct="0">
+              <a:spcBef>
+                <a:spcPct val="20000"/>
+              </a:spcBef>
+              <a:spcAft>
+                <a:spcPct val="0"/>
+              </a:spcAft>
+              <a:buClr>
+                <a:srgbClr val="264D8B"/>
+              </a:buClr>
+              <a:buChar char="»"/>
+              <a:defRPr sz="2000">
+                <a:solidFill>
+                  <a:srgbClr val="1A3170"/>
+                </a:solidFill>
+                <a:latin typeface="Trebuchet MS" charset="0"/>
+                <a:ea typeface="MS PGothic" charset="-128"/>
+              </a:defRPr>
+            </a:lvl6pPr>
+            <a:lvl7pPr marL="2971800" indent="-228600" eaLnBrk="0" fontAlgn="base" hangingPunct="0">
+              <a:spcBef>
+                <a:spcPct val="20000"/>
+              </a:spcBef>
+              <a:spcAft>
+                <a:spcPct val="0"/>
+              </a:spcAft>
+              <a:buClr>
+                <a:srgbClr val="264D8B"/>
+              </a:buClr>
+              <a:buChar char="»"/>
+              <a:defRPr sz="2000">
+                <a:solidFill>
+                  <a:srgbClr val="1A3170"/>
+                </a:solidFill>
+                <a:latin typeface="Trebuchet MS" charset="0"/>
+                <a:ea typeface="MS PGothic" charset="-128"/>
+              </a:defRPr>
+            </a:lvl7pPr>
+            <a:lvl8pPr marL="3429000" indent="-228600" eaLnBrk="0" fontAlgn="base" hangingPunct="0">
+              <a:spcBef>
+                <a:spcPct val="20000"/>
+              </a:spcBef>
+              <a:spcAft>
+                <a:spcPct val="0"/>
+              </a:spcAft>
+              <a:buClr>
+                <a:srgbClr val="264D8B"/>
+              </a:buClr>
+              <a:buChar char="»"/>
+              <a:defRPr sz="2000">
+                <a:solidFill>
+                  <a:srgbClr val="1A3170"/>
+                </a:solidFill>
+                <a:latin typeface="Trebuchet MS" charset="0"/>
+                <a:ea typeface="MS PGothic" charset="-128"/>
+              </a:defRPr>
+            </a:lvl8pPr>
+            <a:lvl9pPr marL="3886200" indent="-228600" eaLnBrk="0" fontAlgn="base" hangingPunct="0">
+              <a:spcBef>
+                <a:spcPct val="20000"/>
+              </a:spcBef>
+              <a:spcAft>
+                <a:spcPct val="0"/>
+              </a:spcAft>
+              <a:buClr>
+                <a:srgbClr val="264D8B"/>
+              </a:buClr>
+              <a:buChar char="»"/>
+              <a:defRPr sz="2000">
+                <a:solidFill>
+                  <a:srgbClr val="1A3170"/>
+                </a:solidFill>
+                <a:latin typeface="Trebuchet MS" charset="0"/>
+                <a:ea typeface="MS PGothic" charset="-128"/>
+              </a:defRPr>
+            </a:lvl9pPr>
+          </a:lstStyle>
+          <a:p>
+            <a:pPr eaLnBrk="1" hangingPunct="1">
+              <a:spcBef>
+                <a:spcPct val="0"/>
+              </a:spcBef>
+              <a:buClrTx/>
+              <a:buFontTx/>
+              <a:buNone/>
+            </a:pPr>
+            <a:r>
+              <a:rPr lang="en-US" altLang="en-US" sz="2800" b="0" dirty="0">
+                <a:solidFill>
+                  <a:srgbClr val="A57133"/>
+                </a:solidFill>
+              </a:rPr>
+              <a:t>A local variable</a:t>
+            </a:r>
+          </a:p>
+        </p:txBody>
+      </p:sp>
+      <p:sp>
+        <p:nvSpPr>
+          <p:cNvPr id="82950" name="AutoShape 6"/>
+          <p:cNvSpPr>
+            <a:spLocks noChangeArrowheads="1"/>
+          </p:cNvSpPr>
+          <p:nvPr/>
+        </p:nvSpPr>
+        <p:spPr bwMode="auto">
+          <a:xfrm>
+            <a:off x="1243553" y="3789040"/>
+            <a:ext cx="2209800" cy="2362200"/>
+          </a:xfrm>
+          <a:prstGeom prst="irregularSeal1">
+            <a:avLst/>
+          </a:prstGeom>
+          <a:solidFill>
+            <a:schemeClr val="bg1"/>
+          </a:solidFill>
+          <a:ln w="9525">
+            <a:solidFill>
+              <a:schemeClr val="tx1"/>
+            </a:solidFill>
+            <a:miter lim="800000"/>
+            <a:headEnd/>
+            <a:tailEnd/>
+          </a:ln>
+        </p:spPr>
+        <p:txBody>
+          <a:bodyPr wrap="none" anchor="ctr"/>
+          <a:lstStyle>
+            <a:lvl1pPr algn="ctr">
+              <a:defRPr sz="2400" b="1">
+                <a:solidFill>
+                  <a:srgbClr val="006600"/>
+                </a:solidFill>
+                <a:latin typeface="Trebuchet MS" charset="0"/>
+                <a:ea typeface="MS PGothic" charset="-128"/>
+              </a:defRPr>
+            </a:lvl1pPr>
+            <a:lvl2pPr marL="742950" indent="-285750" algn="ctr">
+              <a:defRPr sz="2400" b="1">
+                <a:solidFill>
+                  <a:srgbClr val="006600"/>
+                </a:solidFill>
+                <a:latin typeface="Trebuchet MS" charset="0"/>
+                <a:ea typeface="MS PGothic" charset="-128"/>
+              </a:defRPr>
+            </a:lvl2pPr>
+            <a:lvl3pPr marL="1143000" indent="-228600" algn="ctr">
+              <a:defRPr sz="2400" b="1">
+                <a:solidFill>
+                  <a:srgbClr val="006600"/>
+                </a:solidFill>
+                <a:latin typeface="Trebuchet MS" charset="0"/>
+                <a:ea typeface="MS PGothic" charset="-128"/>
+              </a:defRPr>
+            </a:lvl3pPr>
+            <a:lvl4pPr marL="1600200" indent="-228600" algn="ctr">
+              <a:defRPr sz="2400" b="1">
+                <a:solidFill>
+                  <a:srgbClr val="006600"/>
+                </a:solidFill>
+                <a:latin typeface="Trebuchet MS" charset="0"/>
+                <a:ea typeface="MS PGothic" charset="-128"/>
+              </a:defRPr>
+            </a:lvl4pPr>
+            <a:lvl5pPr marL="2057400" indent="-228600" algn="ctr">
+              <a:defRPr sz="2400" b="1">
+                <a:solidFill>
+                  <a:srgbClr val="006600"/>
+                </a:solidFill>
+                <a:latin typeface="Trebuchet MS" charset="0"/>
+                <a:ea typeface="MS PGothic" charset="-128"/>
+              </a:defRPr>
+            </a:lvl5pPr>
+            <a:lvl6pPr marL="2514600" indent="-228600" algn="ctr" eaLnBrk="0" fontAlgn="base" hangingPunct="0">
+              <a:spcBef>
+                <a:spcPct val="0"/>
+              </a:spcBef>
+              <a:spcAft>
+                <a:spcPct val="0"/>
+              </a:spcAft>
+              <a:defRPr sz="2400" b="1">
+                <a:solidFill>
+                  <a:srgbClr val="006600"/>
+                </a:solidFill>
+                <a:latin typeface="Trebuchet MS" charset="0"/>
+                <a:ea typeface="MS PGothic" charset="-128"/>
+              </a:defRPr>
+            </a:lvl6pPr>
+            <a:lvl7pPr marL="2971800" indent="-228600" algn="ctr" eaLnBrk="0" fontAlgn="base" hangingPunct="0">
+              <a:spcBef>
+                <a:spcPct val="0"/>
+              </a:spcBef>
+              <a:spcAft>
+                <a:spcPct val="0"/>
+              </a:spcAft>
+              <a:defRPr sz="2400" b="1">
+                <a:solidFill>
+                  <a:srgbClr val="006600"/>
+                </a:solidFill>
+                <a:latin typeface="Trebuchet MS" charset="0"/>
+                <a:ea typeface="MS PGothic" charset="-128"/>
+              </a:defRPr>
+            </a:lvl7pPr>
+            <a:lvl8pPr marL="3429000" indent="-228600" algn="ctr" eaLnBrk="0" fontAlgn="base" hangingPunct="0">
+              <a:spcBef>
+                <a:spcPct val="0"/>
+              </a:spcBef>
+              <a:spcAft>
+                <a:spcPct val="0"/>
+              </a:spcAft>
+              <a:defRPr sz="2400" b="1">
+                <a:solidFill>
+                  <a:srgbClr val="006600"/>
+                </a:solidFill>
+                <a:latin typeface="Trebuchet MS" charset="0"/>
+                <a:ea typeface="MS PGothic" charset="-128"/>
+              </a:defRPr>
+            </a:lvl8pPr>
+            <a:lvl9pPr marL="3886200" indent="-228600" algn="ctr" eaLnBrk="0" fontAlgn="base" hangingPunct="0">
+              <a:spcBef>
+                <a:spcPct val="0"/>
+              </a:spcBef>
+              <a:spcAft>
+                <a:spcPct val="0"/>
+              </a:spcAft>
+              <a:defRPr sz="2400" b="1">
+                <a:solidFill>
+                  <a:srgbClr val="006600"/>
+                </a:solidFill>
+                <a:latin typeface="Trebuchet MS" charset="0"/>
+                <a:ea typeface="MS PGothic" charset="-128"/>
+              </a:defRPr>
+            </a:lvl9pPr>
+          </a:lstStyle>
+          <a:p>
+            <a:endParaRPr lang="en-GB" altLang="en-US"/>
+          </a:p>
+        </p:txBody>
+      </p:sp>
+      <p:sp>
+        <p:nvSpPr>
+          <p:cNvPr id="82951" name="Text Box 7"/>
+          <p:cNvSpPr txBox="1">
+            <a:spLocks noChangeArrowheads="1"/>
+          </p:cNvSpPr>
+          <p:nvPr/>
+        </p:nvSpPr>
+        <p:spPr bwMode="auto">
+          <a:xfrm>
+            <a:off x="1703512" y="4509120"/>
+            <a:ext cx="1532792" cy="707886"/>
+          </a:xfrm>
+          <a:prstGeom prst="rect">
+            <a:avLst/>
+          </a:prstGeom>
+          <a:noFill/>
+          <a:ln>
+            <a:noFill/>
+          </a:ln>
+          <a:extLst>
+            <a:ext uri="{909E8E84-426E-40dd-AFC4-6F175D3DCCD1}">
+              <a14:hiddenFill xmlns:a14="http://schemas.microsoft.com/office/drawing/2010/main" xmlns="">
+                <a:solidFill>
+                  <a:srgbClr val="FFFFFF"/>
+                </a:solidFill>
+              </a14:hiddenFill>
+            </a:ext>
+            <a:ext uri="{91240B29-F687-4f45-9708-019B960494DF}">
+              <a14:hiddenLine xmlns:a14="http://schemas.microsoft.com/office/drawing/2010/main" xmlns="" w="9525">
+                <a:solidFill>
+                  <a:srgbClr val="000000"/>
+                </a:solidFill>
+                <a:miter lim="800000"/>
+                <a:headEnd/>
+                <a:tailEnd/>
+              </a14:hiddenLine>
+            </a:ext>
+          </a:extLst>
+        </p:spPr>
+        <p:txBody>
+          <a:bodyPr wrap="none">
+            <a:spAutoFit/>
+          </a:bodyPr>
+          <a:lstStyle>
+            <a:lvl1pPr>
+              <a:spcBef>
+                <a:spcPct val="20000"/>
+              </a:spcBef>
+              <a:buClr>
+                <a:srgbClr val="264D8B"/>
+              </a:buClr>
+              <a:buFont typeface="Times" charset="0"/>
+              <a:buChar char="•"/>
+              <a:defRPr sz="3200">
+                <a:solidFill>
+                  <a:srgbClr val="1A3170"/>
+                </a:solidFill>
+                <a:latin typeface="Trebuchet MS" charset="0"/>
+                <a:ea typeface="MS PGothic" charset="-128"/>
+              </a:defRPr>
+            </a:lvl1pPr>
+            <a:lvl2pPr marL="742950" indent="-285750">
+              <a:spcBef>
+                <a:spcPct val="20000"/>
+              </a:spcBef>
+              <a:buClr>
+                <a:srgbClr val="264D8B"/>
+              </a:buClr>
+              <a:buChar char="–"/>
+              <a:defRPr sz="2800">
+                <a:solidFill>
+                  <a:srgbClr val="1A3170"/>
+                </a:solidFill>
+                <a:latin typeface="Trebuchet MS" charset="0"/>
+                <a:ea typeface="MS PGothic" charset="-128"/>
+              </a:defRPr>
+            </a:lvl2pPr>
+            <a:lvl3pPr marL="1143000" indent="-228600">
+              <a:spcBef>
+                <a:spcPct val="20000"/>
+              </a:spcBef>
+              <a:buClr>
+                <a:srgbClr val="264D8B"/>
+              </a:buClr>
+              <a:buChar char="•"/>
+              <a:defRPr sz="2400">
+                <a:solidFill>
+                  <a:srgbClr val="1A3170"/>
+                </a:solidFill>
+                <a:latin typeface="Trebuchet MS" charset="0"/>
+                <a:ea typeface="MS PGothic" charset="-128"/>
+              </a:defRPr>
+            </a:lvl3pPr>
+            <a:lvl4pPr marL="1600200" indent="-228600">
+              <a:spcBef>
+                <a:spcPct val="20000"/>
+              </a:spcBef>
+              <a:buClr>
+                <a:srgbClr val="264D8B"/>
+              </a:buClr>
+              <a:buChar char="–"/>
+              <a:defRPr sz="2000">
+                <a:solidFill>
+                  <a:srgbClr val="1A3170"/>
+                </a:solidFill>
+                <a:latin typeface="Trebuchet MS" charset="0"/>
+                <a:ea typeface="MS PGothic" charset="-128"/>
+              </a:defRPr>
+            </a:lvl4pPr>
+            <a:lvl5pPr marL="2057400" indent="-228600">
+              <a:spcBef>
+                <a:spcPct val="20000"/>
+              </a:spcBef>
+              <a:buClr>
+                <a:srgbClr val="264D8B"/>
+              </a:buClr>
+              <a:buChar char="»"/>
+              <a:defRPr sz="2000">
+                <a:solidFill>
+                  <a:srgbClr val="1A3170"/>
+                </a:solidFill>
+                <a:latin typeface="Trebuchet MS" charset="0"/>
+                <a:ea typeface="MS PGothic" charset="-128"/>
+              </a:defRPr>
+            </a:lvl5pPr>
+            <a:lvl6pPr marL="2514600" indent="-228600" eaLnBrk="0" fontAlgn="base" hangingPunct="0">
+              <a:spcBef>
+                <a:spcPct val="20000"/>
+              </a:spcBef>
+              <a:spcAft>
+                <a:spcPct val="0"/>
+              </a:spcAft>
+              <a:buClr>
+                <a:srgbClr val="264D8B"/>
+              </a:buClr>
+              <a:buChar char="»"/>
+              <a:defRPr sz="2000">
+                <a:solidFill>
+                  <a:srgbClr val="1A3170"/>
+                </a:solidFill>
+                <a:latin typeface="Trebuchet MS" charset="0"/>
+                <a:ea typeface="MS PGothic" charset="-128"/>
+              </a:defRPr>
+            </a:lvl6pPr>
+            <a:lvl7pPr marL="2971800" indent="-228600" eaLnBrk="0" fontAlgn="base" hangingPunct="0">
+              <a:spcBef>
+                <a:spcPct val="20000"/>
+              </a:spcBef>
+              <a:spcAft>
+                <a:spcPct val="0"/>
+              </a:spcAft>
+              <a:buClr>
+                <a:srgbClr val="264D8B"/>
+              </a:buClr>
+              <a:buChar char="»"/>
+              <a:defRPr sz="2000">
+                <a:solidFill>
+                  <a:srgbClr val="1A3170"/>
+                </a:solidFill>
+                <a:latin typeface="Trebuchet MS" charset="0"/>
+                <a:ea typeface="MS PGothic" charset="-128"/>
+              </a:defRPr>
+            </a:lvl7pPr>
+            <a:lvl8pPr marL="3429000" indent="-228600" eaLnBrk="0" fontAlgn="base" hangingPunct="0">
+              <a:spcBef>
+                <a:spcPct val="20000"/>
+              </a:spcBef>
+              <a:spcAft>
+                <a:spcPct val="0"/>
+              </a:spcAft>
+              <a:buClr>
+                <a:srgbClr val="264D8B"/>
+              </a:buClr>
+              <a:buChar char="»"/>
+              <a:defRPr sz="2000">
+                <a:solidFill>
+                  <a:srgbClr val="1A3170"/>
+                </a:solidFill>
+                <a:latin typeface="Trebuchet MS" charset="0"/>
+                <a:ea typeface="MS PGothic" charset="-128"/>
+              </a:defRPr>
+            </a:lvl8pPr>
+            <a:lvl9pPr marL="3886200" indent="-228600" eaLnBrk="0" fontAlgn="base" hangingPunct="0">
+              <a:spcBef>
+                <a:spcPct val="20000"/>
+              </a:spcBef>
+              <a:spcAft>
+                <a:spcPct val="0"/>
+              </a:spcAft>
+              <a:buClr>
+                <a:srgbClr val="264D8B"/>
+              </a:buClr>
+              <a:buChar char="»"/>
+              <a:defRPr sz="2000">
+                <a:solidFill>
+                  <a:srgbClr val="1A3170"/>
+                </a:solidFill>
+                <a:latin typeface="Trebuchet MS" charset="0"/>
+                <a:ea typeface="MS PGothic" charset="-128"/>
+              </a:defRPr>
+            </a:lvl9pPr>
+          </a:lstStyle>
+          <a:p>
+            <a:pPr eaLnBrk="1" hangingPunct="1">
+              <a:spcBef>
+                <a:spcPct val="0"/>
+              </a:spcBef>
+              <a:buClrTx/>
+              <a:buFontTx/>
+              <a:buNone/>
+            </a:pPr>
+            <a:r>
+              <a:rPr lang="en-US" altLang="en-US" sz="2000" b="0" dirty="0">
+                <a:solidFill>
+                  <a:srgbClr val="A57133"/>
+                </a:solidFill>
+              </a:rPr>
+              <a:t>No visibility</a:t>
+            </a:r>
+          </a:p>
+          <a:p>
+            <a:pPr eaLnBrk="1" hangingPunct="1">
+              <a:spcBef>
+                <a:spcPct val="0"/>
+              </a:spcBef>
+              <a:buClrTx/>
+              <a:buFontTx/>
+              <a:buNone/>
+            </a:pPr>
+            <a:r>
+              <a:rPr lang="en-US" altLang="en-US" sz="2000" b="0" dirty="0">
+                <a:solidFill>
+                  <a:srgbClr val="A57133"/>
+                </a:solidFill>
+              </a:rPr>
+              <a:t>modifier</a:t>
+            </a:r>
+          </a:p>
+        </p:txBody>
+      </p:sp>
+      <p:sp>
+        <p:nvSpPr>
+          <p:cNvPr id="82952" name="Line 8"/>
+          <p:cNvSpPr>
+            <a:spLocks noChangeShapeType="1"/>
+          </p:cNvSpPr>
+          <p:nvPr/>
+        </p:nvSpPr>
+        <p:spPr bwMode="auto">
+          <a:xfrm>
+            <a:off x="3863752" y="3717032"/>
+            <a:ext cx="1584176" cy="0"/>
+          </a:xfrm>
+          <a:prstGeom prst="line">
+            <a:avLst/>
+          </a:prstGeom>
+          <a:noFill/>
+          <a:ln w="38100">
+            <a:solidFill>
+              <a:schemeClr val="accent1">
+                <a:lumMod val="50000"/>
+              </a:schemeClr>
+            </a:solidFill>
+            <a:round/>
+            <a:headEnd/>
+            <a:tailEnd type="triangle" w="med" len="med"/>
+          </a:ln>
+          <a:extLst>
+            <a:ext uri="{909E8E84-426E-40dd-AFC4-6F175D3DCCD1}">
+              <a14:hiddenFill xmlns:a14="http://schemas.microsoft.com/office/drawing/2010/main" xmlns="">
+                <a:noFill/>
+              </a14:hiddenFill>
+            </a:ext>
+          </a:extLst>
+        </p:spPr>
+        <p:txBody>
+          <a:bodyPr/>
+          <a:lstStyle/>
+          <a:p>
+            <a:endParaRPr lang="en-US"/>
+          </a:p>
+        </p:txBody>
+      </p:sp>
+    </p:spTree>
+  </p:cSld>
+  <p:clrMapOvr>
+    <a:masterClrMapping/>
+  </p:clrMapOvr>
+  <p:transition spd="med"/>
+</p:sld>
+</file>
+
+<file path=ppt/slides/slide33.xml><?xml version="1.0" encoding="utf-8"?>
+<p:sld xmlns:a="http://schemas.openxmlformats.org/drawingml/2006/main" xmlns:r="http://schemas.openxmlformats.org/officeDocument/2006/relationships" xmlns:p="http://schemas.openxmlformats.org/presentationml/2006/main">
+  <p:cSld>
+    <p:spTree>
+      <p:nvGrpSpPr>
+        <p:cNvPr id="1" name=""/>
+        <p:cNvGrpSpPr/>
+        <p:nvPr/>
+      </p:nvGrpSpPr>
+      <p:grpSpPr>
+        <a:xfrm>
+          <a:off x="0" y="0"/>
+          <a:ext cx="0" cy="0"/>
+          <a:chOff x="0" y="0"/>
+          <a:chExt cx="0" cy="0"/>
+        </a:xfrm>
+      </p:grpSpPr>
+      <p:sp>
+        <p:nvSpPr>
           <p:cNvPr id="84993" name="Rectangle 2"/>
           <p:cNvSpPr>
             <a:spLocks noGrp="1" noChangeArrowheads="1"/>
@@ -22370,7 +22505,7 @@
 </p:sld>
 </file>
 
-<file path=ppt/slides/slide31.xml><?xml version="1.0" encoding="utf-8"?>
+<file path=ppt/slides/slide34.xml><?xml version="1.0" encoding="utf-8"?>
 <p:sld xmlns:a="http://schemas.openxmlformats.org/drawingml/2006/main" xmlns:r="http://schemas.openxmlformats.org/officeDocument/2006/relationships" xmlns:p="http://schemas.openxmlformats.org/presentationml/2006/main">
   <p:cSld>
     <p:spTree>
@@ -25453,7 +25588,7 @@
             </a:pPr>
             <a:r>
               <a:rPr lang="en-IE" dirty="0"/>
-              <a:t>Java Keywords</a:t>
+              <a:t>Java Keywords, tokens</a:t>
             </a:r>
           </a:p>
           <a:p>
@@ -25561,7 +25696,7 @@
         <p:spPr>
           <a:xfrm>
             <a:off x="1127448" y="2276872"/>
-            <a:ext cx="1800200" cy="388639"/>
+            <a:ext cx="2664296" cy="388639"/>
           </a:xfrm>
           <a:prstGeom prst="rect">
             <a:avLst/>
@@ -25736,7 +25871,7 @@
               <a:rPr lang="en-GB" altLang="en-US" dirty="0">
                 <a:ea typeface="MS PGothic" charset="-128"/>
               </a:rPr>
-              <a:t>Keywords</a:t>
+              <a:t>Java Keywords</a:t>
             </a:r>
           </a:p>
         </p:txBody>

--- a/topic03-dataTypes-variables-and-expressions/unit-1/talk-1/a-data-types.pptx
+++ b/topic03-dataTypes-variables-and-expressions/unit-1/talk-1/a-data-types.pptx
@@ -5,10 +5,10 @@
     <p:sldMasterId id="2147483955" r:id="rId1"/>
   </p:sldMasterIdLst>
   <p:notesMasterIdLst>
-    <p:notesMasterId r:id="rId36"/>
+    <p:notesMasterId r:id="rId31"/>
   </p:notesMasterIdLst>
   <p:handoutMasterIdLst>
-    <p:handoutMasterId r:id="rId37"/>
+    <p:handoutMasterId r:id="rId32"/>
   </p:handoutMasterIdLst>
   <p:sldIdLst>
     <p:sldId id="256" r:id="rId2"/>
@@ -37,14 +37,9 @@
     <p:sldId id="368" r:id="rId25"/>
     <p:sldId id="369" r:id="rId26"/>
     <p:sldId id="371" r:id="rId27"/>
-    <p:sldId id="296" r:id="rId28"/>
-    <p:sldId id="285" r:id="rId29"/>
-    <p:sldId id="284" r:id="rId30"/>
-    <p:sldId id="300" r:id="rId31"/>
-    <p:sldId id="295" r:id="rId32"/>
-    <p:sldId id="274" r:id="rId33"/>
-    <p:sldId id="297" r:id="rId34"/>
-    <p:sldId id="347" r:id="rId35"/>
+    <p:sldId id="307" r:id="rId28"/>
+    <p:sldId id="372" r:id="rId29"/>
+    <p:sldId id="347" r:id="rId30"/>
   </p:sldIdLst>
   <p:sldSz cx="12192000" cy="6858000"/>
   <p:notesSz cx="6858000" cy="9144000"/>
@@ -1385,1153 +1380,6 @@
 </p:notes>
 </file>
 
-<file path=ppt/notesSlides/notesSlide10.xml><?xml version="1.0" encoding="utf-8"?>
-<p:notes xmlns:a="http://schemas.openxmlformats.org/drawingml/2006/main" xmlns:r="http://schemas.openxmlformats.org/officeDocument/2006/relationships" xmlns:p="http://schemas.openxmlformats.org/presentationml/2006/main">
-  <p:cSld>
-    <p:spTree>
-      <p:nvGrpSpPr>
-        <p:cNvPr id="1" name=""/>
-        <p:cNvGrpSpPr/>
-        <p:nvPr/>
-      </p:nvGrpSpPr>
-      <p:grpSpPr>
-        <a:xfrm>
-          <a:off x="0" y="0"/>
-          <a:ext cx="0" cy="0"/>
-          <a:chOff x="0" y="0"/>
-          <a:chExt cx="0" cy="0"/>
-        </a:xfrm>
-      </p:grpSpPr>
-      <p:sp>
-        <p:nvSpPr>
-          <p:cNvPr id="77825" name="Rectangle 2"/>
-          <p:cNvSpPr>
-            <a:spLocks noGrp="1" noChangeArrowheads="1"/>
-          </p:cNvSpPr>
-          <p:nvPr>
-            <p:ph type="hdr" sz="quarter"/>
-          </p:nvPr>
-        </p:nvSpPr>
-        <p:spPr>
-          <a:noFill/>
-          <a:extLst>
-            <a:ext uri="{909E8E84-426E-40dd-AFC4-6F175D3DCCD1}">
-              <a14:hiddenFill xmlns:a14="http://schemas.microsoft.com/office/drawing/2010/main" xmlns="">
-                <a:solidFill>
-                  <a:srgbClr val="FFFFFF"/>
-                </a:solidFill>
-              </a14:hiddenFill>
-            </a:ext>
-            <a:ext uri="{91240B29-F687-4f45-9708-019B960494DF}">
-              <a14:hiddenLine xmlns:a14="http://schemas.microsoft.com/office/drawing/2010/main" xmlns="" w="9525">
-                <a:solidFill>
-                  <a:srgbClr val="000000"/>
-                </a:solidFill>
-                <a:miter lim="800000"/>
-                <a:headEnd/>
-                <a:tailEnd/>
-              </a14:hiddenLine>
-            </a:ext>
-          </a:extLst>
-        </p:spPr>
-        <p:txBody>
-          <a:bodyPr/>
-          <a:lstStyle>
-            <a:lvl1pPr algn="ctr">
-              <a:defRPr sz="2400" b="1">
-                <a:solidFill>
-                  <a:srgbClr val="006600"/>
-                </a:solidFill>
-                <a:latin typeface="Trebuchet MS" charset="0"/>
-                <a:ea typeface="MS PGothic" charset="-128"/>
-              </a:defRPr>
-            </a:lvl1pPr>
-            <a:lvl2pPr marL="742950" indent="-285750" algn="ctr">
-              <a:defRPr sz="2400" b="1">
-                <a:solidFill>
-                  <a:srgbClr val="006600"/>
-                </a:solidFill>
-                <a:latin typeface="Trebuchet MS" charset="0"/>
-                <a:ea typeface="MS PGothic" charset="-128"/>
-              </a:defRPr>
-            </a:lvl2pPr>
-            <a:lvl3pPr marL="1143000" indent="-228600" algn="ctr">
-              <a:defRPr sz="2400" b="1">
-                <a:solidFill>
-                  <a:srgbClr val="006600"/>
-                </a:solidFill>
-                <a:latin typeface="Trebuchet MS" charset="0"/>
-                <a:ea typeface="MS PGothic" charset="-128"/>
-              </a:defRPr>
-            </a:lvl3pPr>
-            <a:lvl4pPr marL="1600200" indent="-228600" algn="ctr">
-              <a:defRPr sz="2400" b="1">
-                <a:solidFill>
-                  <a:srgbClr val="006600"/>
-                </a:solidFill>
-                <a:latin typeface="Trebuchet MS" charset="0"/>
-                <a:ea typeface="MS PGothic" charset="-128"/>
-              </a:defRPr>
-            </a:lvl4pPr>
-            <a:lvl5pPr marL="2057400" indent="-228600" algn="ctr">
-              <a:defRPr sz="2400" b="1">
-                <a:solidFill>
-                  <a:srgbClr val="006600"/>
-                </a:solidFill>
-                <a:latin typeface="Trebuchet MS" charset="0"/>
-                <a:ea typeface="MS PGothic" charset="-128"/>
-              </a:defRPr>
-            </a:lvl5pPr>
-            <a:lvl6pPr marL="2514600" indent="-228600" algn="ctr" eaLnBrk="0" fontAlgn="base" hangingPunct="0">
-              <a:spcBef>
-                <a:spcPct val="0"/>
-              </a:spcBef>
-              <a:spcAft>
-                <a:spcPct val="0"/>
-              </a:spcAft>
-              <a:defRPr sz="2400" b="1">
-                <a:solidFill>
-                  <a:srgbClr val="006600"/>
-                </a:solidFill>
-                <a:latin typeface="Trebuchet MS" charset="0"/>
-                <a:ea typeface="MS PGothic" charset="-128"/>
-              </a:defRPr>
-            </a:lvl6pPr>
-            <a:lvl7pPr marL="2971800" indent="-228600" algn="ctr" eaLnBrk="0" fontAlgn="base" hangingPunct="0">
-              <a:spcBef>
-                <a:spcPct val="0"/>
-              </a:spcBef>
-              <a:spcAft>
-                <a:spcPct val="0"/>
-              </a:spcAft>
-              <a:defRPr sz="2400" b="1">
-                <a:solidFill>
-                  <a:srgbClr val="006600"/>
-                </a:solidFill>
-                <a:latin typeface="Trebuchet MS" charset="0"/>
-                <a:ea typeface="MS PGothic" charset="-128"/>
-              </a:defRPr>
-            </a:lvl7pPr>
-            <a:lvl8pPr marL="3429000" indent="-228600" algn="ctr" eaLnBrk="0" fontAlgn="base" hangingPunct="0">
-              <a:spcBef>
-                <a:spcPct val="0"/>
-              </a:spcBef>
-              <a:spcAft>
-                <a:spcPct val="0"/>
-              </a:spcAft>
-              <a:defRPr sz="2400" b="1">
-                <a:solidFill>
-                  <a:srgbClr val="006600"/>
-                </a:solidFill>
-                <a:latin typeface="Trebuchet MS" charset="0"/>
-                <a:ea typeface="MS PGothic" charset="-128"/>
-              </a:defRPr>
-            </a:lvl8pPr>
-            <a:lvl9pPr marL="3886200" indent="-228600" algn="ctr" eaLnBrk="0" fontAlgn="base" hangingPunct="0">
-              <a:spcBef>
-                <a:spcPct val="0"/>
-              </a:spcBef>
-              <a:spcAft>
-                <a:spcPct val="0"/>
-              </a:spcAft>
-              <a:defRPr sz="2400" b="1">
-                <a:solidFill>
-                  <a:srgbClr val="006600"/>
-                </a:solidFill>
-                <a:latin typeface="Trebuchet MS" charset="0"/>
-                <a:ea typeface="MS PGothic" charset="-128"/>
-              </a:defRPr>
-            </a:lvl9pPr>
-          </a:lstStyle>
-          <a:p>
-            <a:pPr algn="l"/>
-            <a:r>
-              <a:rPr lang="en-GB" altLang="en-US" sz="1200" b="0">
-                <a:solidFill>
-                  <a:schemeClr val="tx1"/>
-                </a:solidFill>
-                <a:latin typeface="Times New Roman" charset="0"/>
-              </a:rPr>
-              <a:t>Objects First with Java</a:t>
-            </a:r>
-          </a:p>
-        </p:txBody>
-      </p:sp>
-      <p:sp>
-        <p:nvSpPr>
-          <p:cNvPr id="77826" name="Rectangle 6"/>
-          <p:cNvSpPr>
-            <a:spLocks noGrp="1" noChangeArrowheads="1"/>
-          </p:cNvSpPr>
-          <p:nvPr>
-            <p:ph type="ftr" sz="quarter" idx="4"/>
-          </p:nvPr>
-        </p:nvSpPr>
-        <p:spPr>
-          <a:noFill/>
-          <a:extLst>
-            <a:ext uri="{909E8E84-426E-40dd-AFC4-6F175D3DCCD1}">
-              <a14:hiddenFill xmlns:a14="http://schemas.microsoft.com/office/drawing/2010/main" xmlns="">
-                <a:solidFill>
-                  <a:srgbClr val="FFFFFF"/>
-                </a:solidFill>
-              </a14:hiddenFill>
-            </a:ext>
-            <a:ext uri="{91240B29-F687-4f45-9708-019B960494DF}">
-              <a14:hiddenLine xmlns:a14="http://schemas.microsoft.com/office/drawing/2010/main" xmlns="" w="9525">
-                <a:solidFill>
-                  <a:srgbClr val="000000"/>
-                </a:solidFill>
-                <a:miter lim="800000"/>
-                <a:headEnd/>
-                <a:tailEnd/>
-              </a14:hiddenLine>
-            </a:ext>
-          </a:extLst>
-        </p:spPr>
-        <p:txBody>
-          <a:bodyPr/>
-          <a:lstStyle>
-            <a:lvl1pPr algn="ctr">
-              <a:defRPr sz="2400" b="1">
-                <a:solidFill>
-                  <a:srgbClr val="006600"/>
-                </a:solidFill>
-                <a:latin typeface="Trebuchet MS" charset="0"/>
-                <a:ea typeface="MS PGothic" charset="-128"/>
-              </a:defRPr>
-            </a:lvl1pPr>
-            <a:lvl2pPr marL="742950" indent="-285750" algn="ctr">
-              <a:defRPr sz="2400" b="1">
-                <a:solidFill>
-                  <a:srgbClr val="006600"/>
-                </a:solidFill>
-                <a:latin typeface="Trebuchet MS" charset="0"/>
-                <a:ea typeface="MS PGothic" charset="-128"/>
-              </a:defRPr>
-            </a:lvl2pPr>
-            <a:lvl3pPr marL="1143000" indent="-228600" algn="ctr">
-              <a:defRPr sz="2400" b="1">
-                <a:solidFill>
-                  <a:srgbClr val="006600"/>
-                </a:solidFill>
-                <a:latin typeface="Trebuchet MS" charset="0"/>
-                <a:ea typeface="MS PGothic" charset="-128"/>
-              </a:defRPr>
-            </a:lvl3pPr>
-            <a:lvl4pPr marL="1600200" indent="-228600" algn="ctr">
-              <a:defRPr sz="2400" b="1">
-                <a:solidFill>
-                  <a:srgbClr val="006600"/>
-                </a:solidFill>
-                <a:latin typeface="Trebuchet MS" charset="0"/>
-                <a:ea typeface="MS PGothic" charset="-128"/>
-              </a:defRPr>
-            </a:lvl4pPr>
-            <a:lvl5pPr marL="2057400" indent="-228600" algn="ctr">
-              <a:defRPr sz="2400" b="1">
-                <a:solidFill>
-                  <a:srgbClr val="006600"/>
-                </a:solidFill>
-                <a:latin typeface="Trebuchet MS" charset="0"/>
-                <a:ea typeface="MS PGothic" charset="-128"/>
-              </a:defRPr>
-            </a:lvl5pPr>
-            <a:lvl6pPr marL="2514600" indent="-228600" algn="ctr" eaLnBrk="0" fontAlgn="base" hangingPunct="0">
-              <a:spcBef>
-                <a:spcPct val="0"/>
-              </a:spcBef>
-              <a:spcAft>
-                <a:spcPct val="0"/>
-              </a:spcAft>
-              <a:defRPr sz="2400" b="1">
-                <a:solidFill>
-                  <a:srgbClr val="006600"/>
-                </a:solidFill>
-                <a:latin typeface="Trebuchet MS" charset="0"/>
-                <a:ea typeface="MS PGothic" charset="-128"/>
-              </a:defRPr>
-            </a:lvl6pPr>
-            <a:lvl7pPr marL="2971800" indent="-228600" algn="ctr" eaLnBrk="0" fontAlgn="base" hangingPunct="0">
-              <a:spcBef>
-                <a:spcPct val="0"/>
-              </a:spcBef>
-              <a:spcAft>
-                <a:spcPct val="0"/>
-              </a:spcAft>
-              <a:defRPr sz="2400" b="1">
-                <a:solidFill>
-                  <a:srgbClr val="006600"/>
-                </a:solidFill>
-                <a:latin typeface="Trebuchet MS" charset="0"/>
-                <a:ea typeface="MS PGothic" charset="-128"/>
-              </a:defRPr>
-            </a:lvl7pPr>
-            <a:lvl8pPr marL="3429000" indent="-228600" algn="ctr" eaLnBrk="0" fontAlgn="base" hangingPunct="0">
-              <a:spcBef>
-                <a:spcPct val="0"/>
-              </a:spcBef>
-              <a:spcAft>
-                <a:spcPct val="0"/>
-              </a:spcAft>
-              <a:defRPr sz="2400" b="1">
-                <a:solidFill>
-                  <a:srgbClr val="006600"/>
-                </a:solidFill>
-                <a:latin typeface="Trebuchet MS" charset="0"/>
-                <a:ea typeface="MS PGothic" charset="-128"/>
-              </a:defRPr>
-            </a:lvl8pPr>
-            <a:lvl9pPr marL="3886200" indent="-228600" algn="ctr" eaLnBrk="0" fontAlgn="base" hangingPunct="0">
-              <a:spcBef>
-                <a:spcPct val="0"/>
-              </a:spcBef>
-              <a:spcAft>
-                <a:spcPct val="0"/>
-              </a:spcAft>
-              <a:defRPr sz="2400" b="1">
-                <a:solidFill>
-                  <a:srgbClr val="006600"/>
-                </a:solidFill>
-                <a:latin typeface="Trebuchet MS" charset="0"/>
-                <a:ea typeface="MS PGothic" charset="-128"/>
-              </a:defRPr>
-            </a:lvl9pPr>
-          </a:lstStyle>
-          <a:p>
-            <a:pPr algn="l"/>
-            <a:r>
-              <a:rPr lang="en-GB" altLang="en-US" sz="1200" b="0">
-                <a:solidFill>
-                  <a:schemeClr val="tx1"/>
-                </a:solidFill>
-                <a:latin typeface="Times New Roman" charset="0"/>
-              </a:rPr>
-              <a:t>© David J. Barnes and Michael Kölling</a:t>
-            </a:r>
-          </a:p>
-        </p:txBody>
-      </p:sp>
-      <p:sp>
-        <p:nvSpPr>
-          <p:cNvPr id="77827" name="Rectangle 7"/>
-          <p:cNvSpPr>
-            <a:spLocks noGrp="1" noChangeArrowheads="1"/>
-          </p:cNvSpPr>
-          <p:nvPr>
-            <p:ph type="sldNum" sz="quarter" idx="5"/>
-          </p:nvPr>
-        </p:nvSpPr>
-        <p:spPr>
-          <a:noFill/>
-          <a:extLst>
-            <a:ext uri="{909E8E84-426E-40dd-AFC4-6F175D3DCCD1}">
-              <a14:hiddenFill xmlns:a14="http://schemas.microsoft.com/office/drawing/2010/main" xmlns="">
-                <a:solidFill>
-                  <a:srgbClr val="FFFFFF"/>
-                </a:solidFill>
-              </a14:hiddenFill>
-            </a:ext>
-            <a:ext uri="{91240B29-F687-4f45-9708-019B960494DF}">
-              <a14:hiddenLine xmlns:a14="http://schemas.microsoft.com/office/drawing/2010/main" xmlns="" w="9525">
-                <a:solidFill>
-                  <a:srgbClr val="000000"/>
-                </a:solidFill>
-                <a:miter lim="800000"/>
-                <a:headEnd/>
-                <a:tailEnd/>
-              </a14:hiddenLine>
-            </a:ext>
-          </a:extLst>
-        </p:spPr>
-        <p:txBody>
-          <a:bodyPr/>
-          <a:lstStyle>
-            <a:lvl1pPr algn="ctr">
-              <a:defRPr sz="2400" b="1">
-                <a:solidFill>
-                  <a:srgbClr val="006600"/>
-                </a:solidFill>
-                <a:latin typeface="Trebuchet MS" charset="0"/>
-                <a:ea typeface="MS PGothic" charset="-128"/>
-              </a:defRPr>
-            </a:lvl1pPr>
-            <a:lvl2pPr marL="742950" indent="-285750" algn="ctr">
-              <a:defRPr sz="2400" b="1">
-                <a:solidFill>
-                  <a:srgbClr val="006600"/>
-                </a:solidFill>
-                <a:latin typeface="Trebuchet MS" charset="0"/>
-                <a:ea typeface="MS PGothic" charset="-128"/>
-              </a:defRPr>
-            </a:lvl2pPr>
-            <a:lvl3pPr marL="1143000" indent="-228600" algn="ctr">
-              <a:defRPr sz="2400" b="1">
-                <a:solidFill>
-                  <a:srgbClr val="006600"/>
-                </a:solidFill>
-                <a:latin typeface="Trebuchet MS" charset="0"/>
-                <a:ea typeface="MS PGothic" charset="-128"/>
-              </a:defRPr>
-            </a:lvl3pPr>
-            <a:lvl4pPr marL="1600200" indent="-228600" algn="ctr">
-              <a:defRPr sz="2400" b="1">
-                <a:solidFill>
-                  <a:srgbClr val="006600"/>
-                </a:solidFill>
-                <a:latin typeface="Trebuchet MS" charset="0"/>
-                <a:ea typeface="MS PGothic" charset="-128"/>
-              </a:defRPr>
-            </a:lvl4pPr>
-            <a:lvl5pPr marL="2057400" indent="-228600" algn="ctr">
-              <a:defRPr sz="2400" b="1">
-                <a:solidFill>
-                  <a:srgbClr val="006600"/>
-                </a:solidFill>
-                <a:latin typeface="Trebuchet MS" charset="0"/>
-                <a:ea typeface="MS PGothic" charset="-128"/>
-              </a:defRPr>
-            </a:lvl5pPr>
-            <a:lvl6pPr marL="2514600" indent="-228600" algn="ctr" eaLnBrk="0" fontAlgn="base" hangingPunct="0">
-              <a:spcBef>
-                <a:spcPct val="0"/>
-              </a:spcBef>
-              <a:spcAft>
-                <a:spcPct val="0"/>
-              </a:spcAft>
-              <a:defRPr sz="2400" b="1">
-                <a:solidFill>
-                  <a:srgbClr val="006600"/>
-                </a:solidFill>
-                <a:latin typeface="Trebuchet MS" charset="0"/>
-                <a:ea typeface="MS PGothic" charset="-128"/>
-              </a:defRPr>
-            </a:lvl6pPr>
-            <a:lvl7pPr marL="2971800" indent="-228600" algn="ctr" eaLnBrk="0" fontAlgn="base" hangingPunct="0">
-              <a:spcBef>
-                <a:spcPct val="0"/>
-              </a:spcBef>
-              <a:spcAft>
-                <a:spcPct val="0"/>
-              </a:spcAft>
-              <a:defRPr sz="2400" b="1">
-                <a:solidFill>
-                  <a:srgbClr val="006600"/>
-                </a:solidFill>
-                <a:latin typeface="Trebuchet MS" charset="0"/>
-                <a:ea typeface="MS PGothic" charset="-128"/>
-              </a:defRPr>
-            </a:lvl7pPr>
-            <a:lvl8pPr marL="3429000" indent="-228600" algn="ctr" eaLnBrk="0" fontAlgn="base" hangingPunct="0">
-              <a:spcBef>
-                <a:spcPct val="0"/>
-              </a:spcBef>
-              <a:spcAft>
-                <a:spcPct val="0"/>
-              </a:spcAft>
-              <a:defRPr sz="2400" b="1">
-                <a:solidFill>
-                  <a:srgbClr val="006600"/>
-                </a:solidFill>
-                <a:latin typeface="Trebuchet MS" charset="0"/>
-                <a:ea typeface="MS PGothic" charset="-128"/>
-              </a:defRPr>
-            </a:lvl8pPr>
-            <a:lvl9pPr marL="3886200" indent="-228600" algn="ctr" eaLnBrk="0" fontAlgn="base" hangingPunct="0">
-              <a:spcBef>
-                <a:spcPct val="0"/>
-              </a:spcBef>
-              <a:spcAft>
-                <a:spcPct val="0"/>
-              </a:spcAft>
-              <a:defRPr sz="2400" b="1">
-                <a:solidFill>
-                  <a:srgbClr val="006600"/>
-                </a:solidFill>
-                <a:latin typeface="Trebuchet MS" charset="0"/>
-                <a:ea typeface="MS PGothic" charset="-128"/>
-              </a:defRPr>
-            </a:lvl9pPr>
-          </a:lstStyle>
-          <a:p>
-            <a:pPr algn="r"/>
-            <a:fld id="{07873945-15D1-0D4D-A39F-AD56662E5318}" type="slidenum">
-              <a:rPr lang="en-GB" altLang="en-US" sz="1200" b="0">
-                <a:solidFill>
-                  <a:schemeClr val="tx1"/>
-                </a:solidFill>
-                <a:latin typeface="Times New Roman" charset="0"/>
-              </a:rPr>
-              <a:pPr algn="r"/>
-              <a:t>29</a:t>
-            </a:fld>
-            <a:endParaRPr lang="en-GB" altLang="en-US" sz="1200" b="0">
-              <a:solidFill>
-                <a:schemeClr val="tx1"/>
-              </a:solidFill>
-              <a:latin typeface="Times New Roman" charset="0"/>
-            </a:endParaRPr>
-          </a:p>
-        </p:txBody>
-      </p:sp>
-      <p:sp>
-        <p:nvSpPr>
-          <p:cNvPr id="77828" name="Rectangle 2"/>
-          <p:cNvSpPr>
-            <a:spLocks noGrp="1" noRot="1" noChangeAspect="1" noChangeArrowheads="1" noTextEdit="1"/>
-          </p:cNvSpPr>
-          <p:nvPr>
-            <p:ph type="sldImg"/>
-          </p:nvPr>
-        </p:nvSpPr>
-        <p:spPr>
-          <a:xfrm>
-            <a:off x="381000" y="685800"/>
-            <a:ext cx="6096000" cy="3429000"/>
-          </a:xfrm>
-          <a:solidFill>
-            <a:srgbClr val="FFFFFF"/>
-          </a:solidFill>
-          <a:ln/>
-        </p:spPr>
-      </p:sp>
-      <p:sp>
-        <p:nvSpPr>
-          <p:cNvPr id="77829" name="Rectangle 3"/>
-          <p:cNvSpPr>
-            <a:spLocks noGrp="1" noChangeArrowheads="1"/>
-          </p:cNvSpPr>
-          <p:nvPr>
-            <p:ph type="body" idx="1"/>
-          </p:nvPr>
-        </p:nvSpPr>
-        <p:spPr>
-          <a:xfrm>
-            <a:off x="685800" y="4343400"/>
-            <a:ext cx="5486400" cy="4114800"/>
-          </a:xfrm>
-          <a:noFill/>
-          <a:extLst>
-            <a:ext uri="{909E8E84-426E-40dd-AFC4-6F175D3DCCD1}">
-              <a14:hiddenFill xmlns:a14="http://schemas.microsoft.com/office/drawing/2010/main" xmlns="">
-                <a:solidFill>
-                  <a:srgbClr val="FFFFFF"/>
-                </a:solidFill>
-              </a14:hiddenFill>
-            </a:ext>
-            <a:ext uri="{91240B29-F687-4f45-9708-019B960494DF}">
-              <a14:hiddenLine xmlns:a14="http://schemas.microsoft.com/office/drawing/2010/main" xmlns="" w="9525">
-                <a:solidFill>
-                  <a:srgbClr val="000000"/>
-                </a:solidFill>
-                <a:miter lim="800000"/>
-                <a:headEnd/>
-                <a:tailEnd/>
-              </a14:hiddenLine>
-            </a:ext>
-            <a:ext uri="{AF507438-7753-43e0-B8FC-AC1667EBCBE1}">
-              <a14:hiddenEffects xmlns:a14="http://schemas.microsoft.com/office/drawing/2010/main" xmlns="">
-                <a:effectLst>
-                  <a:outerShdw dist="35921" dir="2700000" algn="ctr" rotWithShape="0">
-                    <a:srgbClr val="808080"/>
-                  </a:outerShdw>
-                </a:effectLst>
-              </a14:hiddenEffects>
-            </a:ext>
-            <a:ext uri="{53640926-AAD7-44d8-BBD7-CCE9431645EC}">
-              <a14:shadowObscured xmlns:a14="http://schemas.microsoft.com/office/drawing/2010/main" xmlns="" val="1"/>
-            </a:ext>
-          </a:extLst>
-        </p:spPr>
-        <p:txBody>
-          <a:bodyPr/>
-          <a:lstStyle/>
-          <a:p>
-            <a:r>
-              <a:rPr lang="en-US" altLang="en-US" sz="1600">
-                <a:latin typeface="Lucida Grande" charset="0"/>
-                <a:ea typeface="ＭＳ Ｐゴシック" charset="-128"/>
-                <a:sym typeface="Lucida Grande" charset="0"/>
-              </a:rPr>
-              <a:t>write method in BlueJ;</a:t>
-            </a:r>
-          </a:p>
-          <a:p>
-            <a:r>
-              <a:rPr lang="en-US" altLang="en-US" sz="1600">
-                <a:latin typeface="Lucida Grande" charset="0"/>
-                <a:ea typeface="ＭＳ Ｐゴシック" charset="-128"/>
-                <a:sym typeface="Lucida Grande" charset="0"/>
-              </a:rPr>
-              <a:t>first: do it wrong</a:t>
-            </a:r>
-          </a:p>
-        </p:txBody>
-      </p:sp>
-    </p:spTree>
-    <p:extLst>
-      <p:ext uri="{BB962C8B-B14F-4D97-AF65-F5344CB8AC3E}">
-        <p14:creationId xmlns:p14="http://schemas.microsoft.com/office/powerpoint/2010/main" val="1089921000"/>
-      </p:ext>
-    </p:extLst>
-  </p:cSld>
-  <p:clrMapOvr>
-    <a:masterClrMapping/>
-  </p:clrMapOvr>
-</p:notes>
-</file>
-
-<file path=ppt/notesSlides/notesSlide11.xml><?xml version="1.0" encoding="utf-8"?>
-<p:notes xmlns:a="http://schemas.openxmlformats.org/drawingml/2006/main" xmlns:r="http://schemas.openxmlformats.org/officeDocument/2006/relationships" xmlns:p="http://schemas.openxmlformats.org/presentationml/2006/main">
-  <p:cSld>
-    <p:spTree>
-      <p:nvGrpSpPr>
-        <p:cNvPr id="1" name=""/>
-        <p:cNvGrpSpPr/>
-        <p:nvPr/>
-      </p:nvGrpSpPr>
-      <p:grpSpPr>
-        <a:xfrm>
-          <a:off x="0" y="0"/>
-          <a:ext cx="0" cy="0"/>
-          <a:chOff x="0" y="0"/>
-          <a:chExt cx="0" cy="0"/>
-        </a:xfrm>
-      </p:grpSpPr>
-      <p:sp>
-        <p:nvSpPr>
-          <p:cNvPr id="83969" name="Rectangle 2"/>
-          <p:cNvSpPr>
-            <a:spLocks noGrp="1" noChangeArrowheads="1"/>
-          </p:cNvSpPr>
-          <p:nvPr>
-            <p:ph type="hdr" sz="quarter"/>
-          </p:nvPr>
-        </p:nvSpPr>
-        <p:spPr>
-          <a:noFill/>
-          <a:extLst>
-            <a:ext uri="{909E8E84-426E-40dd-AFC4-6F175D3DCCD1}">
-              <a14:hiddenFill xmlns:a14="http://schemas.microsoft.com/office/drawing/2010/main" xmlns="">
-                <a:solidFill>
-                  <a:srgbClr val="FFFFFF"/>
-                </a:solidFill>
-              </a14:hiddenFill>
-            </a:ext>
-            <a:ext uri="{91240B29-F687-4f45-9708-019B960494DF}">
-              <a14:hiddenLine xmlns:a14="http://schemas.microsoft.com/office/drawing/2010/main" xmlns="" w="9525">
-                <a:solidFill>
-                  <a:srgbClr val="000000"/>
-                </a:solidFill>
-                <a:miter lim="800000"/>
-                <a:headEnd/>
-                <a:tailEnd/>
-              </a14:hiddenLine>
-            </a:ext>
-          </a:extLst>
-        </p:spPr>
-        <p:txBody>
-          <a:bodyPr/>
-          <a:lstStyle>
-            <a:lvl1pPr algn="ctr">
-              <a:defRPr sz="2400" b="1">
-                <a:solidFill>
-                  <a:srgbClr val="006600"/>
-                </a:solidFill>
-                <a:latin typeface="Trebuchet MS" charset="0"/>
-                <a:ea typeface="MS PGothic" charset="-128"/>
-              </a:defRPr>
-            </a:lvl1pPr>
-            <a:lvl2pPr marL="742950" indent="-285750" algn="ctr">
-              <a:defRPr sz="2400" b="1">
-                <a:solidFill>
-                  <a:srgbClr val="006600"/>
-                </a:solidFill>
-                <a:latin typeface="Trebuchet MS" charset="0"/>
-                <a:ea typeface="MS PGothic" charset="-128"/>
-              </a:defRPr>
-            </a:lvl2pPr>
-            <a:lvl3pPr marL="1143000" indent="-228600" algn="ctr">
-              <a:defRPr sz="2400" b="1">
-                <a:solidFill>
-                  <a:srgbClr val="006600"/>
-                </a:solidFill>
-                <a:latin typeface="Trebuchet MS" charset="0"/>
-                <a:ea typeface="MS PGothic" charset="-128"/>
-              </a:defRPr>
-            </a:lvl3pPr>
-            <a:lvl4pPr marL="1600200" indent="-228600" algn="ctr">
-              <a:defRPr sz="2400" b="1">
-                <a:solidFill>
-                  <a:srgbClr val="006600"/>
-                </a:solidFill>
-                <a:latin typeface="Trebuchet MS" charset="0"/>
-                <a:ea typeface="MS PGothic" charset="-128"/>
-              </a:defRPr>
-            </a:lvl4pPr>
-            <a:lvl5pPr marL="2057400" indent="-228600" algn="ctr">
-              <a:defRPr sz="2400" b="1">
-                <a:solidFill>
-                  <a:srgbClr val="006600"/>
-                </a:solidFill>
-                <a:latin typeface="Trebuchet MS" charset="0"/>
-                <a:ea typeface="MS PGothic" charset="-128"/>
-              </a:defRPr>
-            </a:lvl5pPr>
-            <a:lvl6pPr marL="2514600" indent="-228600" algn="ctr" eaLnBrk="0" fontAlgn="base" hangingPunct="0">
-              <a:spcBef>
-                <a:spcPct val="0"/>
-              </a:spcBef>
-              <a:spcAft>
-                <a:spcPct val="0"/>
-              </a:spcAft>
-              <a:defRPr sz="2400" b="1">
-                <a:solidFill>
-                  <a:srgbClr val="006600"/>
-                </a:solidFill>
-                <a:latin typeface="Trebuchet MS" charset="0"/>
-                <a:ea typeface="MS PGothic" charset="-128"/>
-              </a:defRPr>
-            </a:lvl6pPr>
-            <a:lvl7pPr marL="2971800" indent="-228600" algn="ctr" eaLnBrk="0" fontAlgn="base" hangingPunct="0">
-              <a:spcBef>
-                <a:spcPct val="0"/>
-              </a:spcBef>
-              <a:spcAft>
-                <a:spcPct val="0"/>
-              </a:spcAft>
-              <a:defRPr sz="2400" b="1">
-                <a:solidFill>
-                  <a:srgbClr val="006600"/>
-                </a:solidFill>
-                <a:latin typeface="Trebuchet MS" charset="0"/>
-                <a:ea typeface="MS PGothic" charset="-128"/>
-              </a:defRPr>
-            </a:lvl7pPr>
-            <a:lvl8pPr marL="3429000" indent="-228600" algn="ctr" eaLnBrk="0" fontAlgn="base" hangingPunct="0">
-              <a:spcBef>
-                <a:spcPct val="0"/>
-              </a:spcBef>
-              <a:spcAft>
-                <a:spcPct val="0"/>
-              </a:spcAft>
-              <a:defRPr sz="2400" b="1">
-                <a:solidFill>
-                  <a:srgbClr val="006600"/>
-                </a:solidFill>
-                <a:latin typeface="Trebuchet MS" charset="0"/>
-                <a:ea typeface="MS PGothic" charset="-128"/>
-              </a:defRPr>
-            </a:lvl8pPr>
-            <a:lvl9pPr marL="3886200" indent="-228600" algn="ctr" eaLnBrk="0" fontAlgn="base" hangingPunct="0">
-              <a:spcBef>
-                <a:spcPct val="0"/>
-              </a:spcBef>
-              <a:spcAft>
-                <a:spcPct val="0"/>
-              </a:spcAft>
-              <a:defRPr sz="2400" b="1">
-                <a:solidFill>
-                  <a:srgbClr val="006600"/>
-                </a:solidFill>
-                <a:latin typeface="Trebuchet MS" charset="0"/>
-                <a:ea typeface="MS PGothic" charset="-128"/>
-              </a:defRPr>
-            </a:lvl9pPr>
-          </a:lstStyle>
-          <a:p>
-            <a:pPr algn="l"/>
-            <a:r>
-              <a:rPr lang="en-GB" altLang="en-US" sz="1200" b="0">
-                <a:solidFill>
-                  <a:schemeClr val="tx1"/>
-                </a:solidFill>
-                <a:latin typeface="Times New Roman" charset="0"/>
-              </a:rPr>
-              <a:t>Objects First with Java</a:t>
-            </a:r>
-          </a:p>
-        </p:txBody>
-      </p:sp>
-      <p:sp>
-        <p:nvSpPr>
-          <p:cNvPr id="83970" name="Rectangle 6"/>
-          <p:cNvSpPr>
-            <a:spLocks noGrp="1" noChangeArrowheads="1"/>
-          </p:cNvSpPr>
-          <p:nvPr>
-            <p:ph type="ftr" sz="quarter" idx="4"/>
-          </p:nvPr>
-        </p:nvSpPr>
-        <p:spPr>
-          <a:noFill/>
-          <a:extLst>
-            <a:ext uri="{909E8E84-426E-40dd-AFC4-6F175D3DCCD1}">
-              <a14:hiddenFill xmlns:a14="http://schemas.microsoft.com/office/drawing/2010/main" xmlns="">
-                <a:solidFill>
-                  <a:srgbClr val="FFFFFF"/>
-                </a:solidFill>
-              </a14:hiddenFill>
-            </a:ext>
-            <a:ext uri="{91240B29-F687-4f45-9708-019B960494DF}">
-              <a14:hiddenLine xmlns:a14="http://schemas.microsoft.com/office/drawing/2010/main" xmlns="" w="9525">
-                <a:solidFill>
-                  <a:srgbClr val="000000"/>
-                </a:solidFill>
-                <a:miter lim="800000"/>
-                <a:headEnd/>
-                <a:tailEnd/>
-              </a14:hiddenLine>
-            </a:ext>
-          </a:extLst>
-        </p:spPr>
-        <p:txBody>
-          <a:bodyPr/>
-          <a:lstStyle>
-            <a:lvl1pPr algn="ctr">
-              <a:defRPr sz="2400" b="1">
-                <a:solidFill>
-                  <a:srgbClr val="006600"/>
-                </a:solidFill>
-                <a:latin typeface="Trebuchet MS" charset="0"/>
-                <a:ea typeface="MS PGothic" charset="-128"/>
-              </a:defRPr>
-            </a:lvl1pPr>
-            <a:lvl2pPr marL="742950" indent="-285750" algn="ctr">
-              <a:defRPr sz="2400" b="1">
-                <a:solidFill>
-                  <a:srgbClr val="006600"/>
-                </a:solidFill>
-                <a:latin typeface="Trebuchet MS" charset="0"/>
-                <a:ea typeface="MS PGothic" charset="-128"/>
-              </a:defRPr>
-            </a:lvl2pPr>
-            <a:lvl3pPr marL="1143000" indent="-228600" algn="ctr">
-              <a:defRPr sz="2400" b="1">
-                <a:solidFill>
-                  <a:srgbClr val="006600"/>
-                </a:solidFill>
-                <a:latin typeface="Trebuchet MS" charset="0"/>
-                <a:ea typeface="MS PGothic" charset="-128"/>
-              </a:defRPr>
-            </a:lvl3pPr>
-            <a:lvl4pPr marL="1600200" indent="-228600" algn="ctr">
-              <a:defRPr sz="2400" b="1">
-                <a:solidFill>
-                  <a:srgbClr val="006600"/>
-                </a:solidFill>
-                <a:latin typeface="Trebuchet MS" charset="0"/>
-                <a:ea typeface="MS PGothic" charset="-128"/>
-              </a:defRPr>
-            </a:lvl4pPr>
-            <a:lvl5pPr marL="2057400" indent="-228600" algn="ctr">
-              <a:defRPr sz="2400" b="1">
-                <a:solidFill>
-                  <a:srgbClr val="006600"/>
-                </a:solidFill>
-                <a:latin typeface="Trebuchet MS" charset="0"/>
-                <a:ea typeface="MS PGothic" charset="-128"/>
-              </a:defRPr>
-            </a:lvl5pPr>
-            <a:lvl6pPr marL="2514600" indent="-228600" algn="ctr" eaLnBrk="0" fontAlgn="base" hangingPunct="0">
-              <a:spcBef>
-                <a:spcPct val="0"/>
-              </a:spcBef>
-              <a:spcAft>
-                <a:spcPct val="0"/>
-              </a:spcAft>
-              <a:defRPr sz="2400" b="1">
-                <a:solidFill>
-                  <a:srgbClr val="006600"/>
-                </a:solidFill>
-                <a:latin typeface="Trebuchet MS" charset="0"/>
-                <a:ea typeface="MS PGothic" charset="-128"/>
-              </a:defRPr>
-            </a:lvl6pPr>
-            <a:lvl7pPr marL="2971800" indent="-228600" algn="ctr" eaLnBrk="0" fontAlgn="base" hangingPunct="0">
-              <a:spcBef>
-                <a:spcPct val="0"/>
-              </a:spcBef>
-              <a:spcAft>
-                <a:spcPct val="0"/>
-              </a:spcAft>
-              <a:defRPr sz="2400" b="1">
-                <a:solidFill>
-                  <a:srgbClr val="006600"/>
-                </a:solidFill>
-                <a:latin typeface="Trebuchet MS" charset="0"/>
-                <a:ea typeface="MS PGothic" charset="-128"/>
-              </a:defRPr>
-            </a:lvl7pPr>
-            <a:lvl8pPr marL="3429000" indent="-228600" algn="ctr" eaLnBrk="0" fontAlgn="base" hangingPunct="0">
-              <a:spcBef>
-                <a:spcPct val="0"/>
-              </a:spcBef>
-              <a:spcAft>
-                <a:spcPct val="0"/>
-              </a:spcAft>
-              <a:defRPr sz="2400" b="1">
-                <a:solidFill>
-                  <a:srgbClr val="006600"/>
-                </a:solidFill>
-                <a:latin typeface="Trebuchet MS" charset="0"/>
-                <a:ea typeface="MS PGothic" charset="-128"/>
-              </a:defRPr>
-            </a:lvl8pPr>
-            <a:lvl9pPr marL="3886200" indent="-228600" algn="ctr" eaLnBrk="0" fontAlgn="base" hangingPunct="0">
-              <a:spcBef>
-                <a:spcPct val="0"/>
-              </a:spcBef>
-              <a:spcAft>
-                <a:spcPct val="0"/>
-              </a:spcAft>
-              <a:defRPr sz="2400" b="1">
-                <a:solidFill>
-                  <a:srgbClr val="006600"/>
-                </a:solidFill>
-                <a:latin typeface="Trebuchet MS" charset="0"/>
-                <a:ea typeface="MS PGothic" charset="-128"/>
-              </a:defRPr>
-            </a:lvl9pPr>
-          </a:lstStyle>
-          <a:p>
-            <a:pPr algn="l"/>
-            <a:r>
-              <a:rPr lang="en-GB" altLang="en-US" sz="1200" b="0">
-                <a:solidFill>
-                  <a:schemeClr val="tx1"/>
-                </a:solidFill>
-                <a:latin typeface="Times New Roman" charset="0"/>
-              </a:rPr>
-              <a:t>© David J. Barnes and Michael Kölling</a:t>
-            </a:r>
-          </a:p>
-        </p:txBody>
-      </p:sp>
-      <p:sp>
-        <p:nvSpPr>
-          <p:cNvPr id="83971" name="Rectangle 7"/>
-          <p:cNvSpPr>
-            <a:spLocks noGrp="1" noChangeArrowheads="1"/>
-          </p:cNvSpPr>
-          <p:nvPr>
-            <p:ph type="sldNum" sz="quarter" idx="5"/>
-          </p:nvPr>
-        </p:nvSpPr>
-        <p:spPr>
-          <a:noFill/>
-          <a:extLst>
-            <a:ext uri="{909E8E84-426E-40dd-AFC4-6F175D3DCCD1}">
-              <a14:hiddenFill xmlns:a14="http://schemas.microsoft.com/office/drawing/2010/main" xmlns="">
-                <a:solidFill>
-                  <a:srgbClr val="FFFFFF"/>
-                </a:solidFill>
-              </a14:hiddenFill>
-            </a:ext>
-            <a:ext uri="{91240B29-F687-4f45-9708-019B960494DF}">
-              <a14:hiddenLine xmlns:a14="http://schemas.microsoft.com/office/drawing/2010/main" xmlns="" w="9525">
-                <a:solidFill>
-                  <a:srgbClr val="000000"/>
-                </a:solidFill>
-                <a:miter lim="800000"/>
-                <a:headEnd/>
-                <a:tailEnd/>
-              </a14:hiddenLine>
-            </a:ext>
-          </a:extLst>
-        </p:spPr>
-        <p:txBody>
-          <a:bodyPr/>
-          <a:lstStyle>
-            <a:lvl1pPr algn="ctr">
-              <a:defRPr sz="2400" b="1">
-                <a:solidFill>
-                  <a:srgbClr val="006600"/>
-                </a:solidFill>
-                <a:latin typeface="Trebuchet MS" charset="0"/>
-                <a:ea typeface="MS PGothic" charset="-128"/>
-              </a:defRPr>
-            </a:lvl1pPr>
-            <a:lvl2pPr marL="742950" indent="-285750" algn="ctr">
-              <a:defRPr sz="2400" b="1">
-                <a:solidFill>
-                  <a:srgbClr val="006600"/>
-                </a:solidFill>
-                <a:latin typeface="Trebuchet MS" charset="0"/>
-                <a:ea typeface="MS PGothic" charset="-128"/>
-              </a:defRPr>
-            </a:lvl2pPr>
-            <a:lvl3pPr marL="1143000" indent="-228600" algn="ctr">
-              <a:defRPr sz="2400" b="1">
-                <a:solidFill>
-                  <a:srgbClr val="006600"/>
-                </a:solidFill>
-                <a:latin typeface="Trebuchet MS" charset="0"/>
-                <a:ea typeface="MS PGothic" charset="-128"/>
-              </a:defRPr>
-            </a:lvl3pPr>
-            <a:lvl4pPr marL="1600200" indent="-228600" algn="ctr">
-              <a:defRPr sz="2400" b="1">
-                <a:solidFill>
-                  <a:srgbClr val="006600"/>
-                </a:solidFill>
-                <a:latin typeface="Trebuchet MS" charset="0"/>
-                <a:ea typeface="MS PGothic" charset="-128"/>
-              </a:defRPr>
-            </a:lvl4pPr>
-            <a:lvl5pPr marL="2057400" indent="-228600" algn="ctr">
-              <a:defRPr sz="2400" b="1">
-                <a:solidFill>
-                  <a:srgbClr val="006600"/>
-                </a:solidFill>
-                <a:latin typeface="Trebuchet MS" charset="0"/>
-                <a:ea typeface="MS PGothic" charset="-128"/>
-              </a:defRPr>
-            </a:lvl5pPr>
-            <a:lvl6pPr marL="2514600" indent="-228600" algn="ctr" eaLnBrk="0" fontAlgn="base" hangingPunct="0">
-              <a:spcBef>
-                <a:spcPct val="0"/>
-              </a:spcBef>
-              <a:spcAft>
-                <a:spcPct val="0"/>
-              </a:spcAft>
-              <a:defRPr sz="2400" b="1">
-                <a:solidFill>
-                  <a:srgbClr val="006600"/>
-                </a:solidFill>
-                <a:latin typeface="Trebuchet MS" charset="0"/>
-                <a:ea typeface="MS PGothic" charset="-128"/>
-              </a:defRPr>
-            </a:lvl6pPr>
-            <a:lvl7pPr marL="2971800" indent="-228600" algn="ctr" eaLnBrk="0" fontAlgn="base" hangingPunct="0">
-              <a:spcBef>
-                <a:spcPct val="0"/>
-              </a:spcBef>
-              <a:spcAft>
-                <a:spcPct val="0"/>
-              </a:spcAft>
-              <a:defRPr sz="2400" b="1">
-                <a:solidFill>
-                  <a:srgbClr val="006600"/>
-                </a:solidFill>
-                <a:latin typeface="Trebuchet MS" charset="0"/>
-                <a:ea typeface="MS PGothic" charset="-128"/>
-              </a:defRPr>
-            </a:lvl7pPr>
-            <a:lvl8pPr marL="3429000" indent="-228600" algn="ctr" eaLnBrk="0" fontAlgn="base" hangingPunct="0">
-              <a:spcBef>
-                <a:spcPct val="0"/>
-              </a:spcBef>
-              <a:spcAft>
-                <a:spcPct val="0"/>
-              </a:spcAft>
-              <a:defRPr sz="2400" b="1">
-                <a:solidFill>
-                  <a:srgbClr val="006600"/>
-                </a:solidFill>
-                <a:latin typeface="Trebuchet MS" charset="0"/>
-                <a:ea typeface="MS PGothic" charset="-128"/>
-              </a:defRPr>
-            </a:lvl8pPr>
-            <a:lvl9pPr marL="3886200" indent="-228600" algn="ctr" eaLnBrk="0" fontAlgn="base" hangingPunct="0">
-              <a:spcBef>
-                <a:spcPct val="0"/>
-              </a:spcBef>
-              <a:spcAft>
-                <a:spcPct val="0"/>
-              </a:spcAft>
-              <a:defRPr sz="2400" b="1">
-                <a:solidFill>
-                  <a:srgbClr val="006600"/>
-                </a:solidFill>
-                <a:latin typeface="Trebuchet MS" charset="0"/>
-                <a:ea typeface="MS PGothic" charset="-128"/>
-              </a:defRPr>
-            </a:lvl9pPr>
-          </a:lstStyle>
-          <a:p>
-            <a:pPr algn="r"/>
-            <a:fld id="{74180958-73CC-0144-BCE8-529C91825BE5}" type="slidenum">
-              <a:rPr lang="en-GB" altLang="en-US" sz="1200" b="0">
-                <a:solidFill>
-                  <a:schemeClr val="tx1"/>
-                </a:solidFill>
-                <a:latin typeface="Times New Roman" charset="0"/>
-              </a:rPr>
-              <a:pPr algn="r"/>
-              <a:t>32</a:t>
-            </a:fld>
-            <a:endParaRPr lang="en-GB" altLang="en-US" sz="1200" b="0">
-              <a:solidFill>
-                <a:schemeClr val="tx1"/>
-              </a:solidFill>
-              <a:latin typeface="Times New Roman" charset="0"/>
-            </a:endParaRPr>
-          </a:p>
-        </p:txBody>
-      </p:sp>
-      <p:sp>
-        <p:nvSpPr>
-          <p:cNvPr id="83972" name="Rectangle 2"/>
-          <p:cNvSpPr>
-            <a:spLocks noGrp="1" noRot="1" noChangeAspect="1" noChangeArrowheads="1" noTextEdit="1"/>
-          </p:cNvSpPr>
-          <p:nvPr>
-            <p:ph type="sldImg"/>
-          </p:nvPr>
-        </p:nvSpPr>
-        <p:spPr>
-          <a:xfrm>
-            <a:off x="381000" y="685800"/>
-            <a:ext cx="6096000" cy="3429000"/>
-          </a:xfrm>
-          <a:ln/>
-        </p:spPr>
-      </p:sp>
-      <p:sp>
-        <p:nvSpPr>
-          <p:cNvPr id="61446" name="Rectangle 3"/>
-          <p:cNvSpPr>
-            <a:spLocks noGrp="1" noChangeArrowheads="1"/>
-          </p:cNvSpPr>
-          <p:nvPr>
-            <p:ph type="body" idx="1"/>
-          </p:nvPr>
-        </p:nvSpPr>
-        <p:spPr>
-          <a:extLst>
-            <a:ext uri="{FAA26D3D-D897-4be2-8F04-BA451C77F1D7}">
-              <ma14:placeholderFlag xmlns:ma14="http://schemas.microsoft.com/office/mac/drawingml/2011/main" xmlns="" val="1"/>
-            </a:ext>
-          </a:extLst>
-        </p:spPr>
-        <p:txBody>
-          <a:bodyPr/>
-          <a:lstStyle/>
-          <a:p>
-            <a:pPr>
-              <a:defRPr/>
-            </a:pPr>
-            <a:endParaRPr lang="en-GB">
-              <a:latin typeface="Times New Roman" charset="0"/>
-              <a:cs typeface="+mn-cs"/>
-            </a:endParaRPr>
-          </a:p>
-        </p:txBody>
-      </p:sp>
-    </p:spTree>
-    <p:extLst>
-      <p:ext uri="{BB962C8B-B14F-4D97-AF65-F5344CB8AC3E}">
-        <p14:creationId xmlns:p14="http://schemas.microsoft.com/office/powerpoint/2010/main" val="1268707341"/>
-      </p:ext>
-    </p:extLst>
-  </p:cSld>
-  <p:clrMapOvr>
-    <a:masterClrMapping/>
-  </p:clrMapOvr>
-</p:notes>
-</file>
-
 <file path=ppt/notesSlides/notesSlide2.xml><?xml version="1.0" encoding="utf-8"?>
 <p:notes xmlns:a="http://schemas.openxmlformats.org/drawingml/2006/main" xmlns:r="http://schemas.openxmlformats.org/officeDocument/2006/relationships" xmlns:p="http://schemas.openxmlformats.org/presentationml/2006/main">
   <p:cSld>
@@ -3668,571 +2516,6 @@
 </p:notes>
 </file>
 
-<file path=ppt/notesSlides/notesSlide9.xml><?xml version="1.0" encoding="utf-8"?>
-<p:notes xmlns:a="http://schemas.openxmlformats.org/drawingml/2006/main" xmlns:r="http://schemas.openxmlformats.org/officeDocument/2006/relationships" xmlns:p="http://schemas.openxmlformats.org/presentationml/2006/main">
-  <p:cSld>
-    <p:spTree>
-      <p:nvGrpSpPr>
-        <p:cNvPr id="1" name=""/>
-        <p:cNvGrpSpPr/>
-        <p:nvPr/>
-      </p:nvGrpSpPr>
-      <p:grpSpPr>
-        <a:xfrm>
-          <a:off x="0" y="0"/>
-          <a:ext cx="0" cy="0"/>
-          <a:chOff x="0" y="0"/>
-          <a:chExt cx="0" cy="0"/>
-        </a:xfrm>
-      </p:grpSpPr>
-      <p:sp>
-        <p:nvSpPr>
-          <p:cNvPr id="81921" name="Rectangle 2"/>
-          <p:cNvSpPr>
-            <a:spLocks noGrp="1" noChangeArrowheads="1"/>
-          </p:cNvSpPr>
-          <p:nvPr>
-            <p:ph type="hdr" sz="quarter"/>
-          </p:nvPr>
-        </p:nvSpPr>
-        <p:spPr>
-          <a:noFill/>
-          <a:extLst>
-            <a:ext uri="{909E8E84-426E-40dd-AFC4-6F175D3DCCD1}">
-              <a14:hiddenFill xmlns:a14="http://schemas.microsoft.com/office/drawing/2010/main" xmlns="">
-                <a:solidFill>
-                  <a:srgbClr val="FFFFFF"/>
-                </a:solidFill>
-              </a14:hiddenFill>
-            </a:ext>
-            <a:ext uri="{91240B29-F687-4f45-9708-019B960494DF}">
-              <a14:hiddenLine xmlns:a14="http://schemas.microsoft.com/office/drawing/2010/main" xmlns="" w="9525">
-                <a:solidFill>
-                  <a:srgbClr val="000000"/>
-                </a:solidFill>
-                <a:miter lim="800000"/>
-                <a:headEnd/>
-                <a:tailEnd/>
-              </a14:hiddenLine>
-            </a:ext>
-          </a:extLst>
-        </p:spPr>
-        <p:txBody>
-          <a:bodyPr/>
-          <a:lstStyle>
-            <a:lvl1pPr algn="ctr">
-              <a:defRPr sz="2400" b="1">
-                <a:solidFill>
-                  <a:srgbClr val="006600"/>
-                </a:solidFill>
-                <a:latin typeface="Trebuchet MS" charset="0"/>
-                <a:ea typeface="MS PGothic" charset="-128"/>
-              </a:defRPr>
-            </a:lvl1pPr>
-            <a:lvl2pPr marL="742950" indent="-285750" algn="ctr">
-              <a:defRPr sz="2400" b="1">
-                <a:solidFill>
-                  <a:srgbClr val="006600"/>
-                </a:solidFill>
-                <a:latin typeface="Trebuchet MS" charset="0"/>
-                <a:ea typeface="MS PGothic" charset="-128"/>
-              </a:defRPr>
-            </a:lvl2pPr>
-            <a:lvl3pPr marL="1143000" indent="-228600" algn="ctr">
-              <a:defRPr sz="2400" b="1">
-                <a:solidFill>
-                  <a:srgbClr val="006600"/>
-                </a:solidFill>
-                <a:latin typeface="Trebuchet MS" charset="0"/>
-                <a:ea typeface="MS PGothic" charset="-128"/>
-              </a:defRPr>
-            </a:lvl3pPr>
-            <a:lvl4pPr marL="1600200" indent="-228600" algn="ctr">
-              <a:defRPr sz="2400" b="1">
-                <a:solidFill>
-                  <a:srgbClr val="006600"/>
-                </a:solidFill>
-                <a:latin typeface="Trebuchet MS" charset="0"/>
-                <a:ea typeface="MS PGothic" charset="-128"/>
-              </a:defRPr>
-            </a:lvl4pPr>
-            <a:lvl5pPr marL="2057400" indent="-228600" algn="ctr">
-              <a:defRPr sz="2400" b="1">
-                <a:solidFill>
-                  <a:srgbClr val="006600"/>
-                </a:solidFill>
-                <a:latin typeface="Trebuchet MS" charset="0"/>
-                <a:ea typeface="MS PGothic" charset="-128"/>
-              </a:defRPr>
-            </a:lvl5pPr>
-            <a:lvl6pPr marL="2514600" indent="-228600" algn="ctr" eaLnBrk="0" fontAlgn="base" hangingPunct="0">
-              <a:spcBef>
-                <a:spcPct val="0"/>
-              </a:spcBef>
-              <a:spcAft>
-                <a:spcPct val="0"/>
-              </a:spcAft>
-              <a:defRPr sz="2400" b="1">
-                <a:solidFill>
-                  <a:srgbClr val="006600"/>
-                </a:solidFill>
-                <a:latin typeface="Trebuchet MS" charset="0"/>
-                <a:ea typeface="MS PGothic" charset="-128"/>
-              </a:defRPr>
-            </a:lvl6pPr>
-            <a:lvl7pPr marL="2971800" indent="-228600" algn="ctr" eaLnBrk="0" fontAlgn="base" hangingPunct="0">
-              <a:spcBef>
-                <a:spcPct val="0"/>
-              </a:spcBef>
-              <a:spcAft>
-                <a:spcPct val="0"/>
-              </a:spcAft>
-              <a:defRPr sz="2400" b="1">
-                <a:solidFill>
-                  <a:srgbClr val="006600"/>
-                </a:solidFill>
-                <a:latin typeface="Trebuchet MS" charset="0"/>
-                <a:ea typeface="MS PGothic" charset="-128"/>
-              </a:defRPr>
-            </a:lvl7pPr>
-            <a:lvl8pPr marL="3429000" indent="-228600" algn="ctr" eaLnBrk="0" fontAlgn="base" hangingPunct="0">
-              <a:spcBef>
-                <a:spcPct val="0"/>
-              </a:spcBef>
-              <a:spcAft>
-                <a:spcPct val="0"/>
-              </a:spcAft>
-              <a:defRPr sz="2400" b="1">
-                <a:solidFill>
-                  <a:srgbClr val="006600"/>
-                </a:solidFill>
-                <a:latin typeface="Trebuchet MS" charset="0"/>
-                <a:ea typeface="MS PGothic" charset="-128"/>
-              </a:defRPr>
-            </a:lvl8pPr>
-            <a:lvl9pPr marL="3886200" indent="-228600" algn="ctr" eaLnBrk="0" fontAlgn="base" hangingPunct="0">
-              <a:spcBef>
-                <a:spcPct val="0"/>
-              </a:spcBef>
-              <a:spcAft>
-                <a:spcPct val="0"/>
-              </a:spcAft>
-              <a:defRPr sz="2400" b="1">
-                <a:solidFill>
-                  <a:srgbClr val="006600"/>
-                </a:solidFill>
-                <a:latin typeface="Trebuchet MS" charset="0"/>
-                <a:ea typeface="MS PGothic" charset="-128"/>
-              </a:defRPr>
-            </a:lvl9pPr>
-          </a:lstStyle>
-          <a:p>
-            <a:pPr algn="l"/>
-            <a:r>
-              <a:rPr lang="en-GB" altLang="en-US" sz="1200" b="0">
-                <a:solidFill>
-                  <a:schemeClr val="tx1"/>
-                </a:solidFill>
-                <a:latin typeface="Times New Roman" charset="0"/>
-              </a:rPr>
-              <a:t>Objects First with Java</a:t>
-            </a:r>
-          </a:p>
-        </p:txBody>
-      </p:sp>
-      <p:sp>
-        <p:nvSpPr>
-          <p:cNvPr id="81922" name="Rectangle 6"/>
-          <p:cNvSpPr>
-            <a:spLocks noGrp="1" noChangeArrowheads="1"/>
-          </p:cNvSpPr>
-          <p:nvPr>
-            <p:ph type="ftr" sz="quarter" idx="4"/>
-          </p:nvPr>
-        </p:nvSpPr>
-        <p:spPr>
-          <a:noFill/>
-          <a:extLst>
-            <a:ext uri="{909E8E84-426E-40dd-AFC4-6F175D3DCCD1}">
-              <a14:hiddenFill xmlns:a14="http://schemas.microsoft.com/office/drawing/2010/main" xmlns="">
-                <a:solidFill>
-                  <a:srgbClr val="FFFFFF"/>
-                </a:solidFill>
-              </a14:hiddenFill>
-            </a:ext>
-            <a:ext uri="{91240B29-F687-4f45-9708-019B960494DF}">
-              <a14:hiddenLine xmlns:a14="http://schemas.microsoft.com/office/drawing/2010/main" xmlns="" w="9525">
-                <a:solidFill>
-                  <a:srgbClr val="000000"/>
-                </a:solidFill>
-                <a:miter lim="800000"/>
-                <a:headEnd/>
-                <a:tailEnd/>
-              </a14:hiddenLine>
-            </a:ext>
-          </a:extLst>
-        </p:spPr>
-        <p:txBody>
-          <a:bodyPr/>
-          <a:lstStyle>
-            <a:lvl1pPr algn="ctr">
-              <a:defRPr sz="2400" b="1">
-                <a:solidFill>
-                  <a:srgbClr val="006600"/>
-                </a:solidFill>
-                <a:latin typeface="Trebuchet MS" charset="0"/>
-                <a:ea typeface="MS PGothic" charset="-128"/>
-              </a:defRPr>
-            </a:lvl1pPr>
-            <a:lvl2pPr marL="742950" indent="-285750" algn="ctr">
-              <a:defRPr sz="2400" b="1">
-                <a:solidFill>
-                  <a:srgbClr val="006600"/>
-                </a:solidFill>
-                <a:latin typeface="Trebuchet MS" charset="0"/>
-                <a:ea typeface="MS PGothic" charset="-128"/>
-              </a:defRPr>
-            </a:lvl2pPr>
-            <a:lvl3pPr marL="1143000" indent="-228600" algn="ctr">
-              <a:defRPr sz="2400" b="1">
-                <a:solidFill>
-                  <a:srgbClr val="006600"/>
-                </a:solidFill>
-                <a:latin typeface="Trebuchet MS" charset="0"/>
-                <a:ea typeface="MS PGothic" charset="-128"/>
-              </a:defRPr>
-            </a:lvl3pPr>
-            <a:lvl4pPr marL="1600200" indent="-228600" algn="ctr">
-              <a:defRPr sz="2400" b="1">
-                <a:solidFill>
-                  <a:srgbClr val="006600"/>
-                </a:solidFill>
-                <a:latin typeface="Trebuchet MS" charset="0"/>
-                <a:ea typeface="MS PGothic" charset="-128"/>
-              </a:defRPr>
-            </a:lvl4pPr>
-            <a:lvl5pPr marL="2057400" indent="-228600" algn="ctr">
-              <a:defRPr sz="2400" b="1">
-                <a:solidFill>
-                  <a:srgbClr val="006600"/>
-                </a:solidFill>
-                <a:latin typeface="Trebuchet MS" charset="0"/>
-                <a:ea typeface="MS PGothic" charset="-128"/>
-              </a:defRPr>
-            </a:lvl5pPr>
-            <a:lvl6pPr marL="2514600" indent="-228600" algn="ctr" eaLnBrk="0" fontAlgn="base" hangingPunct="0">
-              <a:spcBef>
-                <a:spcPct val="0"/>
-              </a:spcBef>
-              <a:spcAft>
-                <a:spcPct val="0"/>
-              </a:spcAft>
-              <a:defRPr sz="2400" b="1">
-                <a:solidFill>
-                  <a:srgbClr val="006600"/>
-                </a:solidFill>
-                <a:latin typeface="Trebuchet MS" charset="0"/>
-                <a:ea typeface="MS PGothic" charset="-128"/>
-              </a:defRPr>
-            </a:lvl6pPr>
-            <a:lvl7pPr marL="2971800" indent="-228600" algn="ctr" eaLnBrk="0" fontAlgn="base" hangingPunct="0">
-              <a:spcBef>
-                <a:spcPct val="0"/>
-              </a:spcBef>
-              <a:spcAft>
-                <a:spcPct val="0"/>
-              </a:spcAft>
-              <a:defRPr sz="2400" b="1">
-                <a:solidFill>
-                  <a:srgbClr val="006600"/>
-                </a:solidFill>
-                <a:latin typeface="Trebuchet MS" charset="0"/>
-                <a:ea typeface="MS PGothic" charset="-128"/>
-              </a:defRPr>
-            </a:lvl7pPr>
-            <a:lvl8pPr marL="3429000" indent="-228600" algn="ctr" eaLnBrk="0" fontAlgn="base" hangingPunct="0">
-              <a:spcBef>
-                <a:spcPct val="0"/>
-              </a:spcBef>
-              <a:spcAft>
-                <a:spcPct val="0"/>
-              </a:spcAft>
-              <a:defRPr sz="2400" b="1">
-                <a:solidFill>
-                  <a:srgbClr val="006600"/>
-                </a:solidFill>
-                <a:latin typeface="Trebuchet MS" charset="0"/>
-                <a:ea typeface="MS PGothic" charset="-128"/>
-              </a:defRPr>
-            </a:lvl8pPr>
-            <a:lvl9pPr marL="3886200" indent="-228600" algn="ctr" eaLnBrk="0" fontAlgn="base" hangingPunct="0">
-              <a:spcBef>
-                <a:spcPct val="0"/>
-              </a:spcBef>
-              <a:spcAft>
-                <a:spcPct val="0"/>
-              </a:spcAft>
-              <a:defRPr sz="2400" b="1">
-                <a:solidFill>
-                  <a:srgbClr val="006600"/>
-                </a:solidFill>
-                <a:latin typeface="Trebuchet MS" charset="0"/>
-                <a:ea typeface="MS PGothic" charset="-128"/>
-              </a:defRPr>
-            </a:lvl9pPr>
-          </a:lstStyle>
-          <a:p>
-            <a:pPr algn="l"/>
-            <a:r>
-              <a:rPr lang="en-GB" altLang="en-US" sz="1200" b="0">
-                <a:solidFill>
-                  <a:schemeClr val="tx1"/>
-                </a:solidFill>
-                <a:latin typeface="Times New Roman" charset="0"/>
-              </a:rPr>
-              <a:t>© David J. Barnes and Michael Kölling</a:t>
-            </a:r>
-          </a:p>
-        </p:txBody>
-      </p:sp>
-      <p:sp>
-        <p:nvSpPr>
-          <p:cNvPr id="81923" name="Rectangle 7"/>
-          <p:cNvSpPr>
-            <a:spLocks noGrp="1" noChangeArrowheads="1"/>
-          </p:cNvSpPr>
-          <p:nvPr>
-            <p:ph type="sldNum" sz="quarter" idx="5"/>
-          </p:nvPr>
-        </p:nvSpPr>
-        <p:spPr>
-          <a:noFill/>
-          <a:extLst>
-            <a:ext uri="{909E8E84-426E-40dd-AFC4-6F175D3DCCD1}">
-              <a14:hiddenFill xmlns:a14="http://schemas.microsoft.com/office/drawing/2010/main" xmlns="">
-                <a:solidFill>
-                  <a:srgbClr val="FFFFFF"/>
-                </a:solidFill>
-              </a14:hiddenFill>
-            </a:ext>
-            <a:ext uri="{91240B29-F687-4f45-9708-019B960494DF}">
-              <a14:hiddenLine xmlns:a14="http://schemas.microsoft.com/office/drawing/2010/main" xmlns="" w="9525">
-                <a:solidFill>
-                  <a:srgbClr val="000000"/>
-                </a:solidFill>
-                <a:miter lim="800000"/>
-                <a:headEnd/>
-                <a:tailEnd/>
-              </a14:hiddenLine>
-            </a:ext>
-          </a:extLst>
-        </p:spPr>
-        <p:txBody>
-          <a:bodyPr/>
-          <a:lstStyle>
-            <a:lvl1pPr algn="ctr">
-              <a:defRPr sz="2400" b="1">
-                <a:solidFill>
-                  <a:srgbClr val="006600"/>
-                </a:solidFill>
-                <a:latin typeface="Trebuchet MS" charset="0"/>
-                <a:ea typeface="MS PGothic" charset="-128"/>
-              </a:defRPr>
-            </a:lvl1pPr>
-            <a:lvl2pPr marL="742950" indent="-285750" algn="ctr">
-              <a:defRPr sz="2400" b="1">
-                <a:solidFill>
-                  <a:srgbClr val="006600"/>
-                </a:solidFill>
-                <a:latin typeface="Trebuchet MS" charset="0"/>
-                <a:ea typeface="MS PGothic" charset="-128"/>
-              </a:defRPr>
-            </a:lvl2pPr>
-            <a:lvl3pPr marL="1143000" indent="-228600" algn="ctr">
-              <a:defRPr sz="2400" b="1">
-                <a:solidFill>
-                  <a:srgbClr val="006600"/>
-                </a:solidFill>
-                <a:latin typeface="Trebuchet MS" charset="0"/>
-                <a:ea typeface="MS PGothic" charset="-128"/>
-              </a:defRPr>
-            </a:lvl3pPr>
-            <a:lvl4pPr marL="1600200" indent="-228600" algn="ctr">
-              <a:defRPr sz="2400" b="1">
-                <a:solidFill>
-                  <a:srgbClr val="006600"/>
-                </a:solidFill>
-                <a:latin typeface="Trebuchet MS" charset="0"/>
-                <a:ea typeface="MS PGothic" charset="-128"/>
-              </a:defRPr>
-            </a:lvl4pPr>
-            <a:lvl5pPr marL="2057400" indent="-228600" algn="ctr">
-              <a:defRPr sz="2400" b="1">
-                <a:solidFill>
-                  <a:srgbClr val="006600"/>
-                </a:solidFill>
-                <a:latin typeface="Trebuchet MS" charset="0"/>
-                <a:ea typeface="MS PGothic" charset="-128"/>
-              </a:defRPr>
-            </a:lvl5pPr>
-            <a:lvl6pPr marL="2514600" indent="-228600" algn="ctr" eaLnBrk="0" fontAlgn="base" hangingPunct="0">
-              <a:spcBef>
-                <a:spcPct val="0"/>
-              </a:spcBef>
-              <a:spcAft>
-                <a:spcPct val="0"/>
-              </a:spcAft>
-              <a:defRPr sz="2400" b="1">
-                <a:solidFill>
-                  <a:srgbClr val="006600"/>
-                </a:solidFill>
-                <a:latin typeface="Trebuchet MS" charset="0"/>
-                <a:ea typeface="MS PGothic" charset="-128"/>
-              </a:defRPr>
-            </a:lvl6pPr>
-            <a:lvl7pPr marL="2971800" indent="-228600" algn="ctr" eaLnBrk="0" fontAlgn="base" hangingPunct="0">
-              <a:spcBef>
-                <a:spcPct val="0"/>
-              </a:spcBef>
-              <a:spcAft>
-                <a:spcPct val="0"/>
-              </a:spcAft>
-              <a:defRPr sz="2400" b="1">
-                <a:solidFill>
-                  <a:srgbClr val="006600"/>
-                </a:solidFill>
-                <a:latin typeface="Trebuchet MS" charset="0"/>
-                <a:ea typeface="MS PGothic" charset="-128"/>
-              </a:defRPr>
-            </a:lvl7pPr>
-            <a:lvl8pPr marL="3429000" indent="-228600" algn="ctr" eaLnBrk="0" fontAlgn="base" hangingPunct="0">
-              <a:spcBef>
-                <a:spcPct val="0"/>
-              </a:spcBef>
-              <a:spcAft>
-                <a:spcPct val="0"/>
-              </a:spcAft>
-              <a:defRPr sz="2400" b="1">
-                <a:solidFill>
-                  <a:srgbClr val="006600"/>
-                </a:solidFill>
-                <a:latin typeface="Trebuchet MS" charset="0"/>
-                <a:ea typeface="MS PGothic" charset="-128"/>
-              </a:defRPr>
-            </a:lvl8pPr>
-            <a:lvl9pPr marL="3886200" indent="-228600" algn="ctr" eaLnBrk="0" fontAlgn="base" hangingPunct="0">
-              <a:spcBef>
-                <a:spcPct val="0"/>
-              </a:spcBef>
-              <a:spcAft>
-                <a:spcPct val="0"/>
-              </a:spcAft>
-              <a:defRPr sz="2400" b="1">
-                <a:solidFill>
-                  <a:srgbClr val="006600"/>
-                </a:solidFill>
-                <a:latin typeface="Trebuchet MS" charset="0"/>
-                <a:ea typeface="MS PGothic" charset="-128"/>
-              </a:defRPr>
-            </a:lvl9pPr>
-          </a:lstStyle>
-          <a:p>
-            <a:pPr algn="r"/>
-            <a:fld id="{9A42CBBF-813F-C24A-9B84-B001A2F9FD36}" type="slidenum">
-              <a:rPr lang="en-GB" altLang="en-US" sz="1200" b="0">
-                <a:solidFill>
-                  <a:schemeClr val="tx1"/>
-                </a:solidFill>
-                <a:latin typeface="Times New Roman" charset="0"/>
-              </a:rPr>
-              <a:pPr algn="r"/>
-              <a:t>28</a:t>
-            </a:fld>
-            <a:endParaRPr lang="en-GB" altLang="en-US" sz="1200" b="0">
-              <a:solidFill>
-                <a:schemeClr val="tx1"/>
-              </a:solidFill>
-              <a:latin typeface="Times New Roman" charset="0"/>
-            </a:endParaRPr>
-          </a:p>
-        </p:txBody>
-      </p:sp>
-      <p:sp>
-        <p:nvSpPr>
-          <p:cNvPr id="81924" name="Rectangle 2"/>
-          <p:cNvSpPr>
-            <a:spLocks noGrp="1" noRot="1" noChangeAspect="1" noChangeArrowheads="1" noTextEdit="1"/>
-          </p:cNvSpPr>
-          <p:nvPr>
-            <p:ph type="sldImg"/>
-          </p:nvPr>
-        </p:nvSpPr>
-        <p:spPr>
-          <a:xfrm>
-            <a:off x="381000" y="685800"/>
-            <a:ext cx="6096000" cy="3429000"/>
-          </a:xfrm>
-          <a:solidFill>
-            <a:srgbClr val="FFFFFF"/>
-          </a:solidFill>
-          <a:ln/>
-        </p:spPr>
-      </p:sp>
-      <p:sp>
-        <p:nvSpPr>
-          <p:cNvPr id="60422" name="Rectangle 3"/>
-          <p:cNvSpPr>
-            <a:spLocks noGrp="1" noChangeArrowheads="1"/>
-          </p:cNvSpPr>
-          <p:nvPr>
-            <p:ph type="body" idx="1"/>
-          </p:nvPr>
-        </p:nvSpPr>
-        <p:spPr>
-          <a:solidFill>
-            <a:srgbClr val="FFFFFF"/>
-          </a:solidFill>
-          <a:ln>
-            <a:solidFill>
-              <a:srgbClr val="000000"/>
-            </a:solidFill>
-            <a:miter lim="800000"/>
-            <a:headEnd/>
-            <a:tailEnd/>
-          </a:ln>
-          <a:extLst>
-            <a:ext uri="{FAA26D3D-D897-4be2-8F04-BA451C77F1D7}">
-              <ma14:placeholderFlag xmlns:ma14="http://schemas.microsoft.com/office/mac/drawingml/2011/main" xmlns="" val="1"/>
-            </a:ext>
-          </a:extLst>
-        </p:spPr>
-        <p:txBody>
-          <a:bodyPr/>
-          <a:lstStyle/>
-          <a:p>
-            <a:pPr>
-              <a:defRPr/>
-            </a:pPr>
-            <a:endParaRPr lang="en-GB">
-              <a:latin typeface="Times New Roman" charset="0"/>
-              <a:cs typeface="+mn-cs"/>
-            </a:endParaRPr>
-          </a:p>
-        </p:txBody>
-      </p:sp>
-    </p:spTree>
-    <p:extLst>
-      <p:ext uri="{BB962C8B-B14F-4D97-AF65-F5344CB8AC3E}">
-        <p14:creationId xmlns:p14="http://schemas.microsoft.com/office/powerpoint/2010/main" val="266738090"/>
-      </p:ext>
-    </p:extLst>
-  </p:cSld>
-  <p:clrMapOvr>
-    <a:masterClrMapping/>
-  </p:clrMapOvr>
-</p:notes>
-</file>
-
 <file path=ppt/slideLayouts/slideLayout1.xml><?xml version="1.0" encoding="utf-8"?>
 <p:sldLayout xmlns:a="http://schemas.openxmlformats.org/drawingml/2006/main" xmlns:r="http://schemas.openxmlformats.org/officeDocument/2006/relationships" xmlns:p="http://schemas.openxmlformats.org/presentationml/2006/main" type="title" preserve="1">
   <p:cSld name="Title Slide">
@@ -4414,7 +2697,7 @@
           <a:p>
             <a:fld id="{C764DE79-268F-4C1A-8933-263129D2AF90}" type="datetimeFigureOut">
               <a:rPr lang="en-US" smtClean="0"/>
-              <a:t>9/25/25</a:t>
+              <a:t>9/28/25</a:t>
             </a:fld>
             <a:endParaRPr lang="en-US" dirty="0"/>
           </a:p>
@@ -4585,7 +2868,7 @@
           <a:p>
             <a:fld id="{C764DE79-268F-4C1A-8933-263129D2AF90}" type="datetimeFigureOut">
               <a:rPr lang="en-US" smtClean="0"/>
-              <a:t>9/25/25</a:t>
+              <a:t>9/28/25</a:t>
             </a:fld>
             <a:endParaRPr lang="en-US" dirty="0"/>
           </a:p>
@@ -4766,7 +3049,7 @@
           <a:p>
             <a:fld id="{C764DE79-268F-4C1A-8933-263129D2AF90}" type="datetimeFigureOut">
               <a:rPr lang="en-US" smtClean="0"/>
-              <a:t>9/25/25</a:t>
+              <a:t>9/28/25</a:t>
             </a:fld>
             <a:endParaRPr lang="en-US" dirty="0"/>
           </a:p>
@@ -5115,99 +3398,6 @@
 </file>
 
 <file path=ppt/slideLayouts/slideLayout14.xml><?xml version="1.0" encoding="utf-8"?>
-<p:sldLayout xmlns:a="http://schemas.openxmlformats.org/drawingml/2006/main" xmlns:r="http://schemas.openxmlformats.org/officeDocument/2006/relationships" xmlns:p="http://schemas.openxmlformats.org/presentationml/2006/main" type="tx">
-  <p:cSld name="Title and Box">
-    <p:spTree>
-      <p:nvGrpSpPr>
-        <p:cNvPr id="1" name=""/>
-        <p:cNvGrpSpPr/>
-        <p:nvPr/>
-      </p:nvGrpSpPr>
-      <p:grpSpPr>
-        <a:xfrm>
-          <a:off x="0" y="0"/>
-          <a:ext cx="0" cy="0"/>
-          <a:chOff x="0" y="0"/>
-          <a:chExt cx="0" cy="0"/>
-        </a:xfrm>
-      </p:grpSpPr>
-      <p:sp>
-        <p:nvSpPr>
-          <p:cNvPr id="33" name="Slide Number"/>
-          <p:cNvSpPr txBox="1">
-            <a:spLocks noGrp="1"/>
-          </p:cNvSpPr>
-          <p:nvPr>
-            <p:ph type="sldNum" sz="quarter" idx="2"/>
-          </p:nvPr>
-        </p:nvSpPr>
-        <p:spPr>
-          <a:xfrm>
-            <a:off x="11691066" y="6493542"/>
-            <a:ext cx="434734" cy="430885"/>
-          </a:xfrm>
-          <a:prstGeom prst="rect">
-            <a:avLst/>
-          </a:prstGeom>
-        </p:spPr>
-        <p:txBody>
-          <a:bodyPr/>
-          <a:lstStyle/>
-          <a:p>
-            <a:fld id="{86CB4B4D-7CA3-9044-876B-883B54F8677D}" type="slidenum">
-              <a:rPr lang="en-GB" smtClean="0"/>
-              <a:t>‹#›</a:t>
-            </a:fld>
-            <a:endParaRPr lang="en-GB"/>
-          </a:p>
-        </p:txBody>
-      </p:sp>
-      <p:sp>
-        <p:nvSpPr>
-          <p:cNvPr id="34" name="Title Text"/>
-          <p:cNvSpPr txBox="1">
-            <a:spLocks noGrp="1"/>
-          </p:cNvSpPr>
-          <p:nvPr>
-            <p:ph type="title"/>
-          </p:nvPr>
-        </p:nvSpPr>
-        <p:spPr>
-          <a:xfrm>
-            <a:off x="729736" y="395556"/>
-            <a:ext cx="10747254" cy="1143001"/>
-          </a:xfrm>
-          <a:prstGeom prst="rect">
-            <a:avLst/>
-          </a:prstGeom>
-        </p:spPr>
-        <p:txBody>
-          <a:bodyPr/>
-          <a:lstStyle/>
-          <a:p>
-            <a:r>
-              <a:rPr lang="en-GB"/>
-              <a:t>Click to edit Master title style</a:t>
-            </a:r>
-            <a:endParaRPr/>
-          </a:p>
-        </p:txBody>
-      </p:sp>
-    </p:spTree>
-    <p:extLst>
-      <p:ext uri="{BB962C8B-B14F-4D97-AF65-F5344CB8AC3E}">
-        <p14:creationId xmlns:p14="http://schemas.microsoft.com/office/powerpoint/2010/main" val="4225057962"/>
-      </p:ext>
-    </p:extLst>
-  </p:cSld>
-  <p:clrMapOvr>
-    <a:masterClrMapping/>
-  </p:clrMapOvr>
-  <p:transition spd="med"/>
-</p:sldLayout>
-</file>
-
-<file path=ppt/slideLayouts/slideLayout15.xml><?xml version="1.0" encoding="utf-8"?>
 <p:sldLayout xmlns:a="http://schemas.openxmlformats.org/drawingml/2006/main" xmlns:r="http://schemas.openxmlformats.org/officeDocument/2006/relationships" xmlns:p="http://schemas.openxmlformats.org/presentationml/2006/main" type="txAndChart">
   <p:cSld name="Title, Text and Chart">
     <p:spTree>
@@ -5497,7 +3687,7 @@
           <a:p>
             <a:fld id="{C764DE79-268F-4C1A-8933-263129D2AF90}" type="datetimeFigureOut">
               <a:rPr lang="en-US" smtClean="0"/>
-              <a:t>9/25/25</a:t>
+              <a:t>9/28/25</a:t>
             </a:fld>
             <a:endParaRPr lang="en-US" dirty="0"/>
           </a:p>
@@ -5869,7 +4059,7 @@
           <a:p>
             <a:fld id="{C764DE79-268F-4C1A-8933-263129D2AF90}" type="datetimeFigureOut">
               <a:rPr lang="en-US" smtClean="0"/>
-              <a:t>9/25/25</a:t>
+              <a:t>9/28/25</a:t>
             </a:fld>
             <a:endParaRPr lang="en-US" dirty="0"/>
           </a:p>
@@ -6169,7 +4359,7 @@
           <a:p>
             <a:fld id="{C764DE79-268F-4C1A-8933-263129D2AF90}" type="datetimeFigureOut">
               <a:rPr lang="en-US" smtClean="0"/>
-              <a:t>9/25/25</a:t>
+              <a:t>9/28/25</a:t>
             </a:fld>
             <a:endParaRPr lang="en-US" dirty="0"/>
           </a:p>
@@ -6716,7 +4906,7 @@
           <a:p>
             <a:fld id="{C764DE79-268F-4C1A-8933-263129D2AF90}" type="datetimeFigureOut">
               <a:rPr lang="en-US" smtClean="0"/>
-              <a:t>9/25/25</a:t>
+              <a:t>9/28/25</a:t>
             </a:fld>
             <a:endParaRPr lang="en-US" dirty="0"/>
           </a:p>
@@ -6922,7 +5112,7 @@
           <a:p>
             <a:fld id="{C764DE79-268F-4C1A-8933-263129D2AF90}" type="datetimeFigureOut">
               <a:rPr lang="en-US" smtClean="0"/>
-              <a:t>9/25/25</a:t>
+              <a:t>9/28/25</a:t>
             </a:fld>
             <a:endParaRPr lang="en-US" dirty="0"/>
           </a:p>
@@ -7134,7 +5324,7 @@
           <a:p>
             <a:fld id="{C764DE79-268F-4C1A-8933-263129D2AF90}" type="datetimeFigureOut">
               <a:rPr lang="en-US" smtClean="0"/>
-              <a:t>9/25/25</a:t>
+              <a:t>9/28/25</a:t>
             </a:fld>
             <a:endParaRPr lang="en-US" dirty="0"/>
           </a:p>
@@ -7411,7 +5601,7 @@
           <a:p>
             <a:fld id="{C764DE79-268F-4C1A-8933-263129D2AF90}" type="datetimeFigureOut">
               <a:rPr lang="en-US" smtClean="0"/>
-              <a:t>9/25/25</a:t>
+              <a:t>9/28/25</a:t>
             </a:fld>
             <a:endParaRPr lang="en-US" dirty="0"/>
           </a:p>
@@ -7669,7 +5859,7 @@
           <a:p>
             <a:fld id="{C764DE79-268F-4C1A-8933-263129D2AF90}" type="datetimeFigureOut">
               <a:rPr lang="en-US" smtClean="0"/>
-              <a:t>9/25/25</a:t>
+              <a:t>9/28/25</a:t>
             </a:fld>
             <a:endParaRPr lang="en-US" dirty="0"/>
           </a:p>
@@ -7888,7 +6078,7 @@
           <a:p>
             <a:fld id="{C764DE79-268F-4C1A-8933-263129D2AF90}" type="datetimeFigureOut">
               <a:rPr lang="en-US" smtClean="0"/>
-              <a:t>9/25/25</a:t>
+              <a:t>9/28/25</a:t>
             </a:fld>
             <a:endParaRPr lang="en-US" dirty="0"/>
           </a:p>
@@ -7994,8 +6184,7 @@
     <p:sldLayoutId id="2147483966" r:id="rId11"/>
     <p:sldLayoutId id="2147483967" r:id="rId12"/>
     <p:sldLayoutId id="2147483968" r:id="rId13"/>
-    <p:sldLayoutId id="2147483969" r:id="rId14"/>
-    <p:sldLayoutId id="2147483970" r:id="rId15"/>
+    <p:sldLayoutId id="2147483970" r:id="rId14"/>
   </p:sldLayoutIdLst>
   <p:hf sldNum="0" hdr="0" dt="0"/>
   <p:txStyles>
@@ -11062,7 +9251,7 @@
         </p:nvSpPr>
         <p:spPr>
           <a:xfrm>
-            <a:off x="3287688" y="4149080"/>
+            <a:off x="3575720" y="3595807"/>
             <a:ext cx="10225136" cy="1661993"/>
           </a:xfrm>
           <a:prstGeom prst="rect">
@@ -11669,9 +9858,9 @@
                                           </p:stCondLst>
                                         </p:cTn>
                                         <p:tgtEl>
-                                          <p:spTgt spid="3">
+                                          <p:spTgt spid="6">
                                             <p:txEl>
-                                              <p:pRg st="7" end="7"/>
+                                              <p:pRg st="0" end="0"/>
                                             </p:txEl>
                                           </p:spTgt>
                                         </p:tgtEl>
@@ -11687,6 +9876,297 @@
                                       <p:cBhvr additive="base">
                                         <p:cTn id="37" dur="500" fill="hold"/>
                                         <p:tgtEl>
+                                          <p:spTgt spid="6">
+                                            <p:txEl>
+                                              <p:pRg st="0" end="0"/>
+                                            </p:txEl>
+                                          </p:spTgt>
+                                        </p:tgtEl>
+                                        <p:attrNameLst>
+                                          <p:attrName>ppt_x</p:attrName>
+                                        </p:attrNameLst>
+                                      </p:cBhvr>
+                                      <p:tavLst>
+                                        <p:tav tm="0">
+                                          <p:val>
+                                            <p:strVal val="#ppt_x"/>
+                                          </p:val>
+                                        </p:tav>
+                                        <p:tav tm="100000">
+                                          <p:val>
+                                            <p:strVal val="#ppt_x"/>
+                                          </p:val>
+                                        </p:tav>
+                                      </p:tavLst>
+                                    </p:anim>
+                                    <p:anim calcmode="lin" valueType="num">
+                                      <p:cBhvr additive="base">
+                                        <p:cTn id="38" dur="500" fill="hold"/>
+                                        <p:tgtEl>
+                                          <p:spTgt spid="6">
+                                            <p:txEl>
+                                              <p:pRg st="0" end="0"/>
+                                            </p:txEl>
+                                          </p:spTgt>
+                                        </p:tgtEl>
+                                        <p:attrNameLst>
+                                          <p:attrName>ppt_y</p:attrName>
+                                        </p:attrNameLst>
+                                      </p:cBhvr>
+                                      <p:tavLst>
+                                        <p:tav tm="0">
+                                          <p:val>
+                                            <p:strVal val="1+#ppt_h/2"/>
+                                          </p:val>
+                                        </p:tav>
+                                        <p:tav tm="100000">
+                                          <p:val>
+                                            <p:strVal val="#ppt_y"/>
+                                          </p:val>
+                                        </p:tav>
+                                      </p:tavLst>
+                                    </p:anim>
+                                  </p:childTnLst>
+                                </p:cTn>
+                              </p:par>
+                            </p:childTnLst>
+                          </p:cTn>
+                        </p:par>
+                      </p:childTnLst>
+                    </p:cTn>
+                  </p:par>
+                  <p:par>
+                    <p:cTn id="39" fill="hold">
+                      <p:stCondLst>
+                        <p:cond delay="indefinite"/>
+                      </p:stCondLst>
+                      <p:childTnLst>
+                        <p:par>
+                          <p:cTn id="40" fill="hold">
+                            <p:stCondLst>
+                              <p:cond delay="0"/>
+                            </p:stCondLst>
+                            <p:childTnLst>
+                              <p:par>
+                                <p:cTn id="41" presetID="2" presetClass="entr" presetSubtype="4" fill="hold" nodeType="clickEffect">
+                                  <p:stCondLst>
+                                    <p:cond delay="0"/>
+                                  </p:stCondLst>
+                                  <p:childTnLst>
+                                    <p:set>
+                                      <p:cBhvr>
+                                        <p:cTn id="42" dur="1" fill="hold">
+                                          <p:stCondLst>
+                                            <p:cond delay="0"/>
+                                          </p:stCondLst>
+                                        </p:cTn>
+                                        <p:tgtEl>
+                                          <p:spTgt spid="6">
+                                            <p:txEl>
+                                              <p:pRg st="1" end="1"/>
+                                            </p:txEl>
+                                          </p:spTgt>
+                                        </p:tgtEl>
+                                        <p:attrNameLst>
+                                          <p:attrName>style.visibility</p:attrName>
+                                        </p:attrNameLst>
+                                      </p:cBhvr>
+                                      <p:to>
+                                        <p:strVal val="visible"/>
+                                      </p:to>
+                                    </p:set>
+                                    <p:anim calcmode="lin" valueType="num">
+                                      <p:cBhvr additive="base">
+                                        <p:cTn id="43" dur="500" fill="hold"/>
+                                        <p:tgtEl>
+                                          <p:spTgt spid="6">
+                                            <p:txEl>
+                                              <p:pRg st="1" end="1"/>
+                                            </p:txEl>
+                                          </p:spTgt>
+                                        </p:tgtEl>
+                                        <p:attrNameLst>
+                                          <p:attrName>ppt_x</p:attrName>
+                                        </p:attrNameLst>
+                                      </p:cBhvr>
+                                      <p:tavLst>
+                                        <p:tav tm="0">
+                                          <p:val>
+                                            <p:strVal val="#ppt_x"/>
+                                          </p:val>
+                                        </p:tav>
+                                        <p:tav tm="100000">
+                                          <p:val>
+                                            <p:strVal val="#ppt_x"/>
+                                          </p:val>
+                                        </p:tav>
+                                      </p:tavLst>
+                                    </p:anim>
+                                    <p:anim calcmode="lin" valueType="num">
+                                      <p:cBhvr additive="base">
+                                        <p:cTn id="44" dur="500" fill="hold"/>
+                                        <p:tgtEl>
+                                          <p:spTgt spid="6">
+                                            <p:txEl>
+                                              <p:pRg st="1" end="1"/>
+                                            </p:txEl>
+                                          </p:spTgt>
+                                        </p:tgtEl>
+                                        <p:attrNameLst>
+                                          <p:attrName>ppt_y</p:attrName>
+                                        </p:attrNameLst>
+                                      </p:cBhvr>
+                                      <p:tavLst>
+                                        <p:tav tm="0">
+                                          <p:val>
+                                            <p:strVal val="1+#ppt_h/2"/>
+                                          </p:val>
+                                        </p:tav>
+                                        <p:tav tm="100000">
+                                          <p:val>
+                                            <p:strVal val="#ppt_y"/>
+                                          </p:val>
+                                        </p:tav>
+                                      </p:tavLst>
+                                    </p:anim>
+                                  </p:childTnLst>
+                                </p:cTn>
+                              </p:par>
+                            </p:childTnLst>
+                          </p:cTn>
+                        </p:par>
+                      </p:childTnLst>
+                    </p:cTn>
+                  </p:par>
+                  <p:par>
+                    <p:cTn id="45" fill="hold">
+                      <p:stCondLst>
+                        <p:cond delay="indefinite"/>
+                      </p:stCondLst>
+                      <p:childTnLst>
+                        <p:par>
+                          <p:cTn id="46" fill="hold">
+                            <p:stCondLst>
+                              <p:cond delay="0"/>
+                            </p:stCondLst>
+                            <p:childTnLst>
+                              <p:par>
+                                <p:cTn id="47" presetID="2" presetClass="entr" presetSubtype="4" fill="hold" nodeType="clickEffect">
+                                  <p:stCondLst>
+                                    <p:cond delay="0"/>
+                                  </p:stCondLst>
+                                  <p:childTnLst>
+                                    <p:set>
+                                      <p:cBhvr>
+                                        <p:cTn id="48" dur="1" fill="hold">
+                                          <p:stCondLst>
+                                            <p:cond delay="0"/>
+                                          </p:stCondLst>
+                                        </p:cTn>
+                                        <p:tgtEl>
+                                          <p:spTgt spid="6">
+                                            <p:txEl>
+                                              <p:pRg st="2" end="2"/>
+                                            </p:txEl>
+                                          </p:spTgt>
+                                        </p:tgtEl>
+                                        <p:attrNameLst>
+                                          <p:attrName>style.visibility</p:attrName>
+                                        </p:attrNameLst>
+                                      </p:cBhvr>
+                                      <p:to>
+                                        <p:strVal val="visible"/>
+                                      </p:to>
+                                    </p:set>
+                                    <p:anim calcmode="lin" valueType="num">
+                                      <p:cBhvr additive="base">
+                                        <p:cTn id="49" dur="500" fill="hold"/>
+                                        <p:tgtEl>
+                                          <p:spTgt spid="6">
+                                            <p:txEl>
+                                              <p:pRg st="2" end="2"/>
+                                            </p:txEl>
+                                          </p:spTgt>
+                                        </p:tgtEl>
+                                        <p:attrNameLst>
+                                          <p:attrName>ppt_x</p:attrName>
+                                        </p:attrNameLst>
+                                      </p:cBhvr>
+                                      <p:tavLst>
+                                        <p:tav tm="0">
+                                          <p:val>
+                                            <p:strVal val="#ppt_x"/>
+                                          </p:val>
+                                        </p:tav>
+                                        <p:tav tm="100000">
+                                          <p:val>
+                                            <p:strVal val="#ppt_x"/>
+                                          </p:val>
+                                        </p:tav>
+                                      </p:tavLst>
+                                    </p:anim>
+                                    <p:anim calcmode="lin" valueType="num">
+                                      <p:cBhvr additive="base">
+                                        <p:cTn id="50" dur="500" fill="hold"/>
+                                        <p:tgtEl>
+                                          <p:spTgt spid="6">
+                                            <p:txEl>
+                                              <p:pRg st="2" end="2"/>
+                                            </p:txEl>
+                                          </p:spTgt>
+                                        </p:tgtEl>
+                                        <p:attrNameLst>
+                                          <p:attrName>ppt_y</p:attrName>
+                                        </p:attrNameLst>
+                                      </p:cBhvr>
+                                      <p:tavLst>
+                                        <p:tav tm="0">
+                                          <p:val>
+                                            <p:strVal val="1+#ppt_h/2"/>
+                                          </p:val>
+                                        </p:tav>
+                                        <p:tav tm="100000">
+                                          <p:val>
+                                            <p:strVal val="#ppt_y"/>
+                                          </p:val>
+                                        </p:tav>
+                                      </p:tavLst>
+                                    </p:anim>
+                                  </p:childTnLst>
+                                </p:cTn>
+                              </p:par>
+                            </p:childTnLst>
+                          </p:cTn>
+                        </p:par>
+                      </p:childTnLst>
+                    </p:cTn>
+                  </p:par>
+                  <p:par>
+                    <p:cTn id="51" fill="hold">
+                      <p:stCondLst>
+                        <p:cond delay="indefinite"/>
+                      </p:stCondLst>
+                      <p:childTnLst>
+                        <p:par>
+                          <p:cTn id="52" fill="hold">
+                            <p:stCondLst>
+                              <p:cond delay="0"/>
+                            </p:stCondLst>
+                            <p:childTnLst>
+                              <p:par>
+                                <p:cTn id="53" presetID="2" presetClass="entr" presetSubtype="4" fill="hold" nodeType="clickEffect">
+                                  <p:stCondLst>
+                                    <p:cond delay="0"/>
+                                  </p:stCondLst>
+                                  <p:childTnLst>
+                                    <p:set>
+                                      <p:cBhvr>
+                                        <p:cTn id="54" dur="1" fill="hold">
+                                          <p:stCondLst>
+                                            <p:cond delay="0"/>
+                                          </p:stCondLst>
+                                        </p:cTn>
+                                        <p:tgtEl>
                                           <p:spTgt spid="3">
                                             <p:txEl>
                                               <p:pRg st="7" end="7"/>
@@ -11694,6 +10174,24 @@
                                           </p:spTgt>
                                         </p:tgtEl>
                                         <p:attrNameLst>
+                                          <p:attrName>style.visibility</p:attrName>
+                                        </p:attrNameLst>
+                                      </p:cBhvr>
+                                      <p:to>
+                                        <p:strVal val="visible"/>
+                                      </p:to>
+                                    </p:set>
+                                    <p:anim calcmode="lin" valueType="num">
+                                      <p:cBhvr additive="base">
+                                        <p:cTn id="55" dur="500" fill="hold"/>
+                                        <p:tgtEl>
+                                          <p:spTgt spid="3">
+                                            <p:txEl>
+                                              <p:pRg st="7" end="7"/>
+                                            </p:txEl>
+                                          </p:spTgt>
+                                        </p:tgtEl>
+                                        <p:attrNameLst>
                                           <p:attrName>ppt_x</p:attrName>
                                         </p:attrNameLst>
                                       </p:cBhvr>
@@ -11712,7 +10210,7 @@
                                     </p:anim>
                                     <p:anim calcmode="lin" valueType="num">
                                       <p:cBhvr additive="base">
-                                        <p:cTn id="38" dur="500" fill="hold"/>
+                                        <p:cTn id="56" dur="500" fill="hold"/>
                                         <p:tgtEl>
                                           <p:spTgt spid="3">
                                             <p:txEl>
@@ -14216,15 +12714,15 @@
         </p:nvSpPr>
         <p:spPr>
           <a:xfrm>
-            <a:off x="1991544" y="7317431"/>
+            <a:off x="348444" y="5314657"/>
             <a:ext cx="2808312" cy="1256079"/>
           </a:xfrm>
           <a:prstGeom prst="accentBorderCallout1">
             <a:avLst>
               <a:gd name="adj1" fmla="val 18750"/>
               <a:gd name="adj2" fmla="val -8333"/>
-              <a:gd name="adj3" fmla="val -207363"/>
-              <a:gd name="adj4" fmla="val -12909"/>
+              <a:gd name="adj3" fmla="val -67454"/>
+              <a:gd name="adj4" fmla="val 33388"/>
             </a:avLst>
           </a:prstGeom>
           <a:solidFill>
@@ -14363,33 +12861,15 @@
                                   </p:childTnLst>
                                 </p:cTn>
                               </p:par>
-                            </p:childTnLst>
-                          </p:cTn>
-                        </p:par>
-                      </p:childTnLst>
-                    </p:cTn>
-                  </p:par>
-                  <p:par>
-                    <p:cTn id="9" fill="hold">
-                      <p:stCondLst>
-                        <p:cond delay="indefinite"/>
-                      </p:stCondLst>
-                      <p:childTnLst>
-                        <p:par>
-                          <p:cTn id="10" fill="hold">
-                            <p:stCondLst>
-                              <p:cond delay="0"/>
-                            </p:stCondLst>
-                            <p:childTnLst>
                               <p:par>
-                                <p:cTn id="11" presetID="2" presetClass="entr" presetSubtype="4" fill="hold" grpId="0" nodeType="clickEffect">
+                                <p:cTn id="9" presetID="2" presetClass="entr" presetSubtype="4" fill="hold" grpId="0" nodeType="withEffect">
                                   <p:stCondLst>
                                     <p:cond delay="0"/>
                                   </p:stCondLst>
                                   <p:childTnLst>
                                     <p:set>
                                       <p:cBhvr>
-                                        <p:cTn id="12" dur="1" fill="hold">
+                                        <p:cTn id="10" dur="1" fill="hold">
                                           <p:stCondLst>
                                             <p:cond delay="0"/>
                                           </p:stCondLst>
@@ -14407,7 +12887,7 @@
                                     </p:set>
                                     <p:anim calcmode="lin" valueType="num">
                                       <p:cBhvr additive="base">
-                                        <p:cTn id="13" dur="500" fill="hold"/>
+                                        <p:cTn id="11" dur="500" fill="hold"/>
                                         <p:tgtEl>
                                           <p:spTgt spid="4"/>
                                         </p:tgtEl>
@@ -14430,7 +12910,7 @@
                                     </p:anim>
                                     <p:anim calcmode="lin" valueType="num">
                                       <p:cBhvr additive="base">
-                                        <p:cTn id="14" dur="500" fill="hold"/>
+                                        <p:cTn id="12" dur="500" fill="hold"/>
                                         <p:tgtEl>
                                           <p:spTgt spid="4"/>
                                         </p:tgtEl>
@@ -18480,10 +16960,10 @@
       </p:sp>
       <p:pic>
         <p:nvPicPr>
-          <p:cNvPr id="7" name="Picture 6">
+          <p:cNvPr id="2" name="Picture 1">
             <a:extLst>
               <a:ext uri="{FF2B5EF4-FFF2-40B4-BE49-F238E27FC236}">
-                <a16:creationId xmlns:a16="http://schemas.microsoft.com/office/drawing/2014/main" id="{C78E3FC8-EA5F-3324-A362-1C224D8D6F0C}"/>
+                <a16:creationId xmlns:a16="http://schemas.microsoft.com/office/drawing/2014/main" id="{F508AC95-3D65-8B6B-AE02-BE33DAE2E921}"/>
               </a:ext>
             </a:extLst>
           </p:cNvPr>
@@ -18500,8 +16980,8 @@
         </p:blipFill>
         <p:spPr>
           <a:xfrm>
-            <a:off x="5159896" y="1724248"/>
-            <a:ext cx="6858000" cy="3937000"/>
+            <a:off x="5663952" y="1648073"/>
+            <a:ext cx="6413500" cy="4013200"/>
           </a:xfrm>
           <a:prstGeom prst="rect">
             <a:avLst/>
@@ -18557,7 +17037,7 @@
         <p:spPr>
           <a:xfrm>
             <a:off x="335360" y="2204859"/>
-            <a:ext cx="3326160" cy="4525963"/>
+            <a:ext cx="3326160" cy="2160245"/>
           </a:xfrm>
         </p:spPr>
         <p:txBody>
@@ -18699,352 +17179,6 @@
   <p:clrMapOvr>
     <a:masterClrMapping/>
   </p:clrMapOvr>
-</p:sld>
-</file>
-
-<file path=ppt/slides/slide26.xml><?xml version="1.0" encoding="utf-8"?>
-<p:sld xmlns:a="http://schemas.openxmlformats.org/drawingml/2006/main" xmlns:r="http://schemas.openxmlformats.org/officeDocument/2006/relationships" xmlns:p="http://schemas.openxmlformats.org/presentationml/2006/main">
-  <p:cSld>
-    <p:spTree>
-      <p:nvGrpSpPr>
-        <p:cNvPr id="1" name=""/>
-        <p:cNvGrpSpPr/>
-        <p:nvPr/>
-      </p:nvGrpSpPr>
-      <p:grpSpPr>
-        <a:xfrm>
-          <a:off x="0" y="0"/>
-          <a:ext cx="0" cy="0"/>
-          <a:chOff x="0" y="0"/>
-          <a:chExt cx="0" cy="0"/>
-        </a:xfrm>
-      </p:grpSpPr>
-      <p:sp>
-        <p:nvSpPr>
-          <p:cNvPr id="6" name="Title 5">
-            <a:extLst>
-              <a:ext uri="{FF2B5EF4-FFF2-40B4-BE49-F238E27FC236}">
-                <a16:creationId xmlns:a16="http://schemas.microsoft.com/office/drawing/2014/main" id="{0497BC0A-69EA-8943-B754-86476F97F05B}"/>
-              </a:ext>
-            </a:extLst>
-          </p:cNvPr>
-          <p:cNvSpPr>
-            <a:spLocks noGrp="1"/>
-          </p:cNvSpPr>
-          <p:nvPr>
-            <p:ph type="title"/>
-          </p:nvPr>
-        </p:nvSpPr>
-        <p:spPr/>
-        <p:txBody>
-          <a:bodyPr/>
-          <a:lstStyle/>
-          <a:p>
-            <a:r>
-              <a:rPr lang="en-US" dirty="0"/>
-              <a:t>Scope of Variables</a:t>
-            </a:r>
-          </a:p>
-        </p:txBody>
-      </p:sp>
-      <p:sp>
-        <p:nvSpPr>
-          <p:cNvPr id="5" name="Footer Placeholder 4">
-            <a:extLst>
-              <a:ext uri="{FF2B5EF4-FFF2-40B4-BE49-F238E27FC236}">
-                <a16:creationId xmlns:a16="http://schemas.microsoft.com/office/drawing/2014/main" id="{3DA14DAD-4B25-40D1-B0D4-D93D4C15D3E0}"/>
-              </a:ext>
-            </a:extLst>
-          </p:cNvPr>
-          <p:cNvSpPr>
-            <a:spLocks noGrp="1"/>
-          </p:cNvSpPr>
-          <p:nvPr>
-            <p:ph type="ftr" sz="quarter" idx="11"/>
-          </p:nvPr>
-        </p:nvSpPr>
-        <p:spPr/>
-        <p:txBody>
-          <a:bodyPr/>
-          <a:lstStyle/>
-          <a:p>
-            <a:endParaRPr lang="en-US" dirty="0"/>
-          </a:p>
-        </p:txBody>
-      </p:sp>
-      <p:pic>
-        <p:nvPicPr>
-          <p:cNvPr id="8" name="Picture 7">
-            <a:extLst>
-              <a:ext uri="{FF2B5EF4-FFF2-40B4-BE49-F238E27FC236}">
-                <a16:creationId xmlns:a16="http://schemas.microsoft.com/office/drawing/2014/main" id="{24900E19-5D43-883E-DED1-4771A2A0D682}"/>
-              </a:ext>
-            </a:extLst>
-          </p:cNvPr>
-          <p:cNvPicPr>
-            <a:picLocks noChangeAspect="1"/>
-          </p:cNvPicPr>
-          <p:nvPr/>
-        </p:nvPicPr>
-        <p:blipFill>
-          <a:blip r:embed="rId2"/>
-          <a:stretch>
-            <a:fillRect/>
-          </a:stretch>
-        </p:blipFill>
-        <p:spPr>
-          <a:xfrm>
-            <a:off x="2209800" y="1345917"/>
-            <a:ext cx="7772400" cy="5254180"/>
-          </a:xfrm>
-          <a:prstGeom prst="rect">
-            <a:avLst/>
-          </a:prstGeom>
-        </p:spPr>
-      </p:pic>
-    </p:spTree>
-    <p:extLst>
-      <p:ext uri="{BB962C8B-B14F-4D97-AF65-F5344CB8AC3E}">
-        <p14:creationId xmlns:p14="http://schemas.microsoft.com/office/powerpoint/2010/main" val="2931275903"/>
-      </p:ext>
-    </p:extLst>
-  </p:cSld>
-  <p:clrMapOvr>
-    <a:masterClrMapping/>
-  </p:clrMapOvr>
-</p:sld>
-</file>
-
-<file path=ppt/slides/slide27.xml><?xml version="1.0" encoding="utf-8"?>
-<p:sld xmlns:a="http://schemas.openxmlformats.org/drawingml/2006/main" xmlns:r="http://schemas.openxmlformats.org/officeDocument/2006/relationships" xmlns:p="http://schemas.openxmlformats.org/presentationml/2006/main">
-  <p:cSld>
-    <p:spTree>
-      <p:nvGrpSpPr>
-        <p:cNvPr id="1" name=""/>
-        <p:cNvGrpSpPr/>
-        <p:nvPr/>
-      </p:nvGrpSpPr>
-      <p:grpSpPr>
-        <a:xfrm>
-          <a:off x="0" y="0"/>
-          <a:ext cx="0" cy="0"/>
-          <a:chOff x="0" y="0"/>
-          <a:chExt cx="0" cy="0"/>
-        </a:xfrm>
-      </p:grpSpPr>
-      <p:sp>
-        <p:nvSpPr>
-          <p:cNvPr id="79873" name="Rectangle 4"/>
-          <p:cNvSpPr>
-            <a:spLocks noGrp="1" noChangeArrowheads="1"/>
-          </p:cNvSpPr>
-          <p:nvPr>
-            <p:ph type="title"/>
-          </p:nvPr>
-        </p:nvSpPr>
-        <p:spPr/>
-        <p:txBody>
-          <a:bodyPr/>
-          <a:lstStyle/>
-          <a:p>
-            <a:r>
-              <a:rPr lang="en-GB" altLang="en-US">
-                <a:ea typeface="MS PGothic" charset="-128"/>
-              </a:rPr>
-              <a:t>Scope highlighting</a:t>
-            </a:r>
-          </a:p>
-        </p:txBody>
-      </p:sp>
-      <p:pic>
-        <p:nvPicPr>
-          <p:cNvPr id="79874" name="Picture 5" descr="fig2-5"/>
-          <p:cNvPicPr>
-            <a:picLocks noChangeAspect="1" noChangeArrowheads="1"/>
-          </p:cNvPicPr>
-          <p:nvPr/>
-        </p:nvPicPr>
-        <p:blipFill>
-          <a:blip r:embed="rId2">
-            <a:extLst>
-              <a:ext uri="{28A0092B-C50C-407E-A947-70E740481C1C}">
-                <a14:useLocalDpi xmlns:a14="http://schemas.microsoft.com/office/drawing/2010/main" val="0"/>
-              </a:ext>
-            </a:extLst>
-          </a:blip>
-          <a:srcRect/>
-          <a:stretch>
-            <a:fillRect/>
-          </a:stretch>
-        </p:blipFill>
-        <p:spPr bwMode="auto">
-          <a:xfrm>
-            <a:off x="3250902" y="1628800"/>
-            <a:ext cx="5690196" cy="4895825"/>
-          </a:xfrm>
-          <a:prstGeom prst="rect">
-            <a:avLst/>
-          </a:prstGeom>
-          <a:noFill/>
-          <a:ln>
-            <a:noFill/>
-          </a:ln>
-          <a:extLst>
-            <a:ext uri="{909E8E84-426E-40dd-AFC4-6F175D3DCCD1}">
-              <a14:hiddenFill xmlns:a14="http://schemas.microsoft.com/office/drawing/2010/main" xmlns="">
-                <a:solidFill>
-                  <a:srgbClr val="FFFFFF"/>
-                </a:solidFill>
-              </a14:hiddenFill>
-            </a:ext>
-            <a:ext uri="{91240B29-F687-4f45-9708-019B960494DF}">
-              <a14:hiddenLine xmlns:a14="http://schemas.microsoft.com/office/drawing/2010/main" xmlns="" w="9525">
-                <a:solidFill>
-                  <a:srgbClr val="000000"/>
-                </a:solidFill>
-                <a:miter lim="800000"/>
-                <a:headEnd/>
-                <a:tailEnd/>
-              </a14:hiddenLine>
-            </a:ext>
-          </a:extLst>
-        </p:spPr>
-      </p:pic>
-    </p:spTree>
-  </p:cSld>
-  <p:clrMapOvr>
-    <a:masterClrMapping/>
-  </p:clrMapOvr>
-</p:sld>
-</file>
-
-<file path=ppt/slides/slide28.xml><?xml version="1.0" encoding="utf-8"?>
-<p:sld xmlns:a="http://schemas.openxmlformats.org/drawingml/2006/main" xmlns:r="http://schemas.openxmlformats.org/officeDocument/2006/relationships" xmlns:p="http://schemas.openxmlformats.org/presentationml/2006/main">
-  <p:cSld>
-    <p:spTree>
-      <p:nvGrpSpPr>
-        <p:cNvPr id="1" name=""/>
-        <p:cNvGrpSpPr/>
-        <p:nvPr/>
-      </p:nvGrpSpPr>
-      <p:grpSpPr>
-        <a:xfrm>
-          <a:off x="0" y="0"/>
-          <a:ext cx="0" cy="0"/>
-          <a:chOff x="0" y="0"/>
-          <a:chExt cx="0" cy="0"/>
-        </a:xfrm>
-      </p:grpSpPr>
-      <p:sp>
-        <p:nvSpPr>
-          <p:cNvPr id="80897" name="Rectangle 2"/>
-          <p:cNvSpPr>
-            <a:spLocks noGrp="1" noChangeArrowheads="1"/>
-          </p:cNvSpPr>
-          <p:nvPr>
-            <p:ph type="title"/>
-          </p:nvPr>
-        </p:nvSpPr>
-        <p:spPr/>
-        <p:txBody>
-          <a:bodyPr vert="horz" wrap="square" lIns="91440" tIns="91439" rIns="81279" bIns="91439" numCol="1" anchor="ctr" anchorCtr="0" compatLnSpc="1">
-            <a:prstTxWarp prst="textNoShape">
-              <a:avLst/>
-            </a:prstTxWarp>
-            <a:normAutofit/>
-          </a:bodyPr>
-          <a:lstStyle/>
-          <a:p>
-            <a:pPr eaLnBrk="1" hangingPunct="1"/>
-            <a:r>
-              <a:rPr lang="en-US" altLang="en-US">
-                <a:ea typeface="MS PGothic" charset="-128"/>
-              </a:rPr>
-              <a:t>Scope and lifetime</a:t>
-            </a:r>
-          </a:p>
-        </p:txBody>
-      </p:sp>
-      <p:sp>
-        <p:nvSpPr>
-          <p:cNvPr id="80898" name="Rectangle 3"/>
-          <p:cNvSpPr>
-            <a:spLocks noGrp="1" noChangeArrowheads="1"/>
-          </p:cNvSpPr>
-          <p:nvPr>
-            <p:ph idx="1"/>
-          </p:nvPr>
-        </p:nvSpPr>
-        <p:spPr/>
-        <p:txBody>
-          <a:bodyPr vert="horz" wrap="square" lIns="91440" tIns="91439" rIns="233680" bIns="91439" numCol="1" anchor="t" anchorCtr="0" compatLnSpc="1">
-            <a:prstTxWarp prst="textNoShape">
-              <a:avLst/>
-            </a:prstTxWarp>
-            <a:normAutofit/>
-          </a:bodyPr>
-          <a:lstStyle/>
-          <a:p>
-            <a:pPr marL="382588"/>
-            <a:r>
-              <a:rPr lang="en-US" altLang="en-US" dirty="0">
-                <a:ea typeface="MS PGothic" charset="-128"/>
-              </a:rPr>
-              <a:t>Each block defines a new scope.</a:t>
-            </a:r>
-          </a:p>
-          <a:p>
-            <a:pPr lvl="1" eaLnBrk="1" hangingPunct="1"/>
-            <a:r>
-              <a:rPr lang="en-US" altLang="en-US" dirty="0">
-                <a:ea typeface="MS PGothic" charset="-128"/>
-              </a:rPr>
-              <a:t>Class, method and statement.</a:t>
-            </a:r>
-          </a:p>
-          <a:p>
-            <a:pPr marL="382588"/>
-            <a:r>
-              <a:rPr lang="en-US" altLang="en-US" dirty="0">
-                <a:ea typeface="MS PGothic" charset="-128"/>
-              </a:rPr>
-              <a:t>Scopes may be nested:</a:t>
-            </a:r>
-          </a:p>
-          <a:p>
-            <a:pPr lvl="1" eaLnBrk="1" hangingPunct="1"/>
-            <a:r>
-              <a:rPr lang="en-US" altLang="en-US" dirty="0">
-                <a:ea typeface="MS PGothic" charset="-128"/>
-              </a:rPr>
-              <a:t>statement block inside another block inside a method body inside a class body.</a:t>
-            </a:r>
-          </a:p>
-          <a:p>
-            <a:pPr marL="382588"/>
-            <a:r>
-              <a:rPr lang="en-US" altLang="en-US" dirty="0">
-                <a:ea typeface="MS PGothic" charset="-128"/>
-              </a:rPr>
-              <a:t>Scope is static (textual).</a:t>
-            </a:r>
-          </a:p>
-          <a:p>
-            <a:pPr marL="382588"/>
-            <a:r>
-              <a:rPr lang="en-US" altLang="en-US" dirty="0">
-                <a:ea typeface="MS PGothic" charset="-128"/>
-              </a:rPr>
-              <a:t>Lifetime is dynamic (runtime).</a:t>
-            </a:r>
-          </a:p>
-        </p:txBody>
-      </p:sp>
-    </p:spTree>
-  </p:cSld>
-  <p:clrMapOvr>
-    <a:masterClrMapping/>
-  </p:clrMapOvr>
   <p:timing>
     <p:tnLst>
       <p:par>
@@ -19066,7 +17200,7 @@
                             </p:stCondLst>
                             <p:childTnLst>
                               <p:par>
-                                <p:cTn id="5" presetID="1" presetClass="entr" presetSubtype="0" fill="hold" grpId="0" nodeType="clickEffect">
+                                <p:cTn id="5" presetID="2" presetClass="entr" presetSubtype="4" fill="hold" grpId="0" nodeType="clickEffect">
                                   <p:stCondLst>
                                     <p:cond delay="0"/>
                                   </p:stCondLst>
@@ -19079,7 +17213,7 @@
                                           </p:stCondLst>
                                         </p:cTn>
                                         <p:tgtEl>
-                                          <p:spTgt spid="80898">
+                                          <p:spTgt spid="10">
                                             <p:txEl>
                                               <p:pRg st="0" end="0"/>
                                             </p:txEl>
@@ -19093,215 +17227,60 @@
                                         <p:strVal val="visible"/>
                                       </p:to>
                                     </p:set>
-                                  </p:childTnLst>
-                                </p:cTn>
-                              </p:par>
-                              <p:par>
-                                <p:cTn id="7" presetID="1" presetClass="entr" presetSubtype="0" fill="hold" grpId="0" nodeType="withEffect">
-                                  <p:stCondLst>
-                                    <p:cond delay="0"/>
-                                  </p:stCondLst>
-                                  <p:childTnLst>
-                                    <p:set>
-                                      <p:cBhvr>
-                                        <p:cTn id="8" dur="1" fill="hold">
-                                          <p:stCondLst>
-                                            <p:cond delay="0"/>
-                                          </p:stCondLst>
-                                        </p:cTn>
-                                        <p:tgtEl>
-                                          <p:spTgt spid="80898">
+                                    <p:anim calcmode="lin" valueType="num">
+                                      <p:cBhvr additive="base">
+                                        <p:cTn id="7" dur="500" fill="hold"/>
+                                        <p:tgtEl>
+                                          <p:spTgt spid="10">
                                             <p:txEl>
-                                              <p:pRg st="1" end="1"/>
+                                              <p:pRg st="0" end="0"/>
                                             </p:txEl>
                                           </p:spTgt>
                                         </p:tgtEl>
                                         <p:attrNameLst>
-                                          <p:attrName>style.visibility</p:attrName>
-                                        </p:attrNameLst>
-                                      </p:cBhvr>
-                                      <p:to>
-                                        <p:strVal val="visible"/>
-                                      </p:to>
-                                    </p:set>
-                                  </p:childTnLst>
-                                </p:cTn>
-                              </p:par>
-                            </p:childTnLst>
-                          </p:cTn>
-                        </p:par>
-                      </p:childTnLst>
-                    </p:cTn>
-                  </p:par>
-                  <p:par>
-                    <p:cTn id="9" fill="hold">
-                      <p:stCondLst>
-                        <p:cond delay="indefinite"/>
-                      </p:stCondLst>
-                      <p:childTnLst>
-                        <p:par>
-                          <p:cTn id="10" fill="hold">
-                            <p:stCondLst>
-                              <p:cond delay="0"/>
-                            </p:stCondLst>
-                            <p:childTnLst>
-                              <p:par>
-                                <p:cTn id="11" presetID="1" presetClass="entr" presetSubtype="0" fill="hold" grpId="0" nodeType="clickEffect">
-                                  <p:stCondLst>
-                                    <p:cond delay="0"/>
-                                  </p:stCondLst>
-                                  <p:childTnLst>
-                                    <p:set>
-                                      <p:cBhvr>
-                                        <p:cTn id="12" dur="1" fill="hold">
-                                          <p:stCondLst>
-                                            <p:cond delay="0"/>
-                                          </p:stCondLst>
-                                        </p:cTn>
-                                        <p:tgtEl>
-                                          <p:spTgt spid="80898">
+                                          <p:attrName>ppt_x</p:attrName>
+                                        </p:attrNameLst>
+                                      </p:cBhvr>
+                                      <p:tavLst>
+                                        <p:tav tm="0">
+                                          <p:val>
+                                            <p:strVal val="#ppt_x"/>
+                                          </p:val>
+                                        </p:tav>
+                                        <p:tav tm="100000">
+                                          <p:val>
+                                            <p:strVal val="#ppt_x"/>
+                                          </p:val>
+                                        </p:tav>
+                                      </p:tavLst>
+                                    </p:anim>
+                                    <p:anim calcmode="lin" valueType="num">
+                                      <p:cBhvr additive="base">
+                                        <p:cTn id="8" dur="500" fill="hold"/>
+                                        <p:tgtEl>
+                                          <p:spTgt spid="10">
                                             <p:txEl>
-                                              <p:pRg st="2" end="2"/>
+                                              <p:pRg st="0" end="0"/>
                                             </p:txEl>
                                           </p:spTgt>
                                         </p:tgtEl>
                                         <p:attrNameLst>
-                                          <p:attrName>style.visibility</p:attrName>
-                                        </p:attrNameLst>
-                                      </p:cBhvr>
-                                      <p:to>
-                                        <p:strVal val="visible"/>
-                                      </p:to>
-                                    </p:set>
-                                  </p:childTnLst>
-                                </p:cTn>
-                              </p:par>
-                              <p:par>
-                                <p:cTn id="13" presetID="1" presetClass="entr" presetSubtype="0" fill="hold" grpId="0" nodeType="withEffect">
-                                  <p:stCondLst>
-                                    <p:cond delay="0"/>
-                                  </p:stCondLst>
-                                  <p:childTnLst>
-                                    <p:set>
-                                      <p:cBhvr>
-                                        <p:cTn id="14" dur="1" fill="hold">
-                                          <p:stCondLst>
-                                            <p:cond delay="0"/>
-                                          </p:stCondLst>
-                                        </p:cTn>
-                                        <p:tgtEl>
-                                          <p:spTgt spid="80898">
-                                            <p:txEl>
-                                              <p:pRg st="3" end="3"/>
-                                            </p:txEl>
-                                          </p:spTgt>
-                                        </p:tgtEl>
-                                        <p:attrNameLst>
-                                          <p:attrName>style.visibility</p:attrName>
-                                        </p:attrNameLst>
-                                      </p:cBhvr>
-                                      <p:to>
-                                        <p:strVal val="visible"/>
-                                      </p:to>
-                                    </p:set>
-                                  </p:childTnLst>
-                                </p:cTn>
-                              </p:par>
-                            </p:childTnLst>
-                          </p:cTn>
-                        </p:par>
-                      </p:childTnLst>
-                    </p:cTn>
-                  </p:par>
-                  <p:par>
-                    <p:cTn id="15" fill="hold">
-                      <p:stCondLst>
-                        <p:cond delay="indefinite"/>
-                      </p:stCondLst>
-                      <p:childTnLst>
-                        <p:par>
-                          <p:cTn id="16" fill="hold">
-                            <p:stCondLst>
-                              <p:cond delay="0"/>
-                            </p:stCondLst>
-                            <p:childTnLst>
-                              <p:par>
-                                <p:cTn id="17" presetID="1" presetClass="entr" presetSubtype="0" fill="hold" grpId="0" nodeType="clickEffect">
-                                  <p:stCondLst>
-                                    <p:cond delay="0"/>
-                                  </p:stCondLst>
-                                  <p:childTnLst>
-                                    <p:set>
-                                      <p:cBhvr>
-                                        <p:cTn id="18" dur="1" fill="hold">
-                                          <p:stCondLst>
-                                            <p:cond delay="0"/>
-                                          </p:stCondLst>
-                                        </p:cTn>
-                                        <p:tgtEl>
-                                          <p:spTgt spid="80898">
-                                            <p:txEl>
-                                              <p:pRg st="4" end="4"/>
-                                            </p:txEl>
-                                          </p:spTgt>
-                                        </p:tgtEl>
-                                        <p:attrNameLst>
-                                          <p:attrName>style.visibility</p:attrName>
-                                        </p:attrNameLst>
-                                      </p:cBhvr>
-                                      <p:to>
-                                        <p:strVal val="visible"/>
-                                      </p:to>
-                                    </p:set>
-                                  </p:childTnLst>
-                                </p:cTn>
-                              </p:par>
-                            </p:childTnLst>
-                          </p:cTn>
-                        </p:par>
-                      </p:childTnLst>
-                    </p:cTn>
-                  </p:par>
-                  <p:par>
-                    <p:cTn id="19" fill="hold">
-                      <p:stCondLst>
-                        <p:cond delay="indefinite"/>
-                      </p:stCondLst>
-                      <p:childTnLst>
-                        <p:par>
-                          <p:cTn id="20" fill="hold">
-                            <p:stCondLst>
-                              <p:cond delay="0"/>
-                            </p:stCondLst>
-                            <p:childTnLst>
-                              <p:par>
-                                <p:cTn id="21" presetID="1" presetClass="entr" presetSubtype="0" fill="hold" grpId="0" nodeType="clickEffect">
-                                  <p:stCondLst>
-                                    <p:cond delay="0"/>
-                                  </p:stCondLst>
-                                  <p:childTnLst>
-                                    <p:set>
-                                      <p:cBhvr>
-                                        <p:cTn id="22" dur="1" fill="hold">
-                                          <p:stCondLst>
-                                            <p:cond delay="0"/>
-                                          </p:stCondLst>
-                                        </p:cTn>
-                                        <p:tgtEl>
-                                          <p:spTgt spid="80898">
-                                            <p:txEl>
-                                              <p:pRg st="5" end="5"/>
-                                            </p:txEl>
-                                          </p:spTgt>
-                                        </p:tgtEl>
-                                        <p:attrNameLst>
-                                          <p:attrName>style.visibility</p:attrName>
-                                        </p:attrNameLst>
-                                      </p:cBhvr>
-                                      <p:to>
-                                        <p:strVal val="visible"/>
-                                      </p:to>
-                                    </p:set>
+                                          <p:attrName>ppt_y</p:attrName>
+                                        </p:attrNameLst>
+                                      </p:cBhvr>
+                                      <p:tavLst>
+                                        <p:tav tm="0">
+                                          <p:val>
+                                            <p:strVal val="1+#ppt_h/2"/>
+                                          </p:val>
+                                        </p:tav>
+                                        <p:tav tm="100000">
+                                          <p:val>
+                                            <p:strVal val="#ppt_y"/>
+                                          </p:val>
+                                        </p:tav>
+                                      </p:tavLst>
+                                    </p:anim>
                                   </p:childTnLst>
                                 </p:cTn>
                               </p:par>
@@ -19333,18 +17312,24 @@
       </p:par>
     </p:tnLst>
     <p:bldLst>
-      <p:bldP spid="80898" grpId="0" build="p"/>
+      <p:bldP spid="10" grpId="0" build="p"/>
     </p:bldLst>
   </p:timing>
 </p:sld>
 </file>
 
-<file path=ppt/slides/slide29.xml><?xml version="1.0" encoding="utf-8"?>
+<file path=ppt/slides/slide26.xml><?xml version="1.0" encoding="utf-8"?>
 <p:sld xmlns:a="http://schemas.openxmlformats.org/drawingml/2006/main" xmlns:r="http://schemas.openxmlformats.org/officeDocument/2006/relationships" xmlns:p="http://schemas.openxmlformats.org/presentationml/2006/main">
   <p:cSld>
     <p:spTree>
       <p:nvGrpSpPr>
-        <p:cNvPr id="1" name=""/>
+        <p:cNvPr id="1" name="">
+          <a:extLst>
+            <a:ext uri="{FF2B5EF4-FFF2-40B4-BE49-F238E27FC236}">
+              <a16:creationId xmlns:a16="http://schemas.microsoft.com/office/drawing/2014/main" id="{04F94D03-749A-69EA-2B38-FAE12360B587}"/>
+            </a:ext>
+          </a:extLst>
+        </p:cNvPr>
         <p:cNvGrpSpPr/>
         <p:nvPr/>
       </p:nvGrpSpPr>
@@ -19358,9 +17343,15 @@
       </p:grpSpPr>
       <p:sp>
         <p:nvSpPr>
-          <p:cNvPr id="99330" name="Rectangle 2"/>
+          <p:cNvPr id="2" name="Title 1">
+            <a:extLst>
+              <a:ext uri="{FF2B5EF4-FFF2-40B4-BE49-F238E27FC236}">
+                <a16:creationId xmlns:a16="http://schemas.microsoft.com/office/drawing/2014/main" id="{DEFC8A0E-3DAD-6540-19D4-905730A8BBB5}"/>
+              </a:ext>
+            </a:extLst>
+          </p:cNvPr>
           <p:cNvSpPr>
-            <a:spLocks noGrp="1" noChangeArrowheads="1"/>
+            <a:spLocks noGrp="1"/>
           </p:cNvSpPr>
           <p:nvPr>
             <p:ph type="title"/>
@@ -19368,33 +17359,23 @@
         </p:nvSpPr>
         <p:spPr/>
         <p:txBody>
-          <a:bodyPr vert="horz" wrap="square" lIns="91440" tIns="91439" rIns="81279" bIns="91439" numCol="1" anchor="ctr" anchorCtr="0" compatLnSpc="1">
-            <a:prstTxWarp prst="textNoShape">
-              <a:avLst/>
-            </a:prstTxWarp>
-            <a:normAutofit/>
-          </a:bodyPr>
+          <a:bodyPr/>
           <a:lstStyle/>
           <a:p>
-            <a:pPr eaLnBrk="1" hangingPunct="1">
-              <a:defRPr/>
-            </a:pPr>
-            <a:r>
-              <a:rPr lang="en-US" dirty="0">
-                <a:ea typeface="+mj-ea"/>
-                <a:cs typeface="+mj-cs"/>
-              </a:rPr>
-              <a:t>To think about</a:t>
-            </a:r>
+            <a:r>
+              <a:rPr lang="en-IE"/>
+              <a:t>Topics list</a:t>
+            </a:r>
+            <a:endParaRPr lang="en-IE" dirty="0"/>
           </a:p>
         </p:txBody>
       </p:sp>
       <p:sp>
         <p:nvSpPr>
-          <p:cNvPr id="3" name="Text Placeholder 2">
+          <p:cNvPr id="5" name="Content Placeholder 4">
             <a:extLst>
               <a:ext uri="{FF2B5EF4-FFF2-40B4-BE49-F238E27FC236}">
-                <a16:creationId xmlns:a16="http://schemas.microsoft.com/office/drawing/2014/main" id="{E154C516-31C6-8219-05F9-CC7C5BE8D3E4}"/>
+                <a16:creationId xmlns:a16="http://schemas.microsoft.com/office/drawing/2014/main" id="{18BBB4CB-6AD9-8BCB-7511-F243E657AC59}"/>
               </a:ext>
             </a:extLst>
           </p:cNvPr>
@@ -19408,51 +17389,184 @@
         <p:spPr/>
         <p:txBody>
           <a:bodyPr>
-            <a:normAutofit/>
+            <a:normAutofit fontScale="70000" lnSpcReduction="20000"/>
           </a:bodyPr>
           <a:lstStyle/>
           <a:p>
-            <a:r>
-              <a:rPr lang="en-US" dirty="0">
-                <a:ea typeface="+mj-ea"/>
-                <a:cs typeface="+mj-cs"/>
-              </a:rPr>
-              <a:t>How could we write a method to ‘refund’ an excess balance?</a:t>
-            </a:r>
-          </a:p>
-          <a:p>
-            <a:pPr lvl="1"/>
-            <a:r>
-              <a:rPr lang="en-US" dirty="0">
-                <a:ea typeface="+mj-ea"/>
-                <a:cs typeface="+mj-cs"/>
-              </a:rPr>
-              <a:t>We need to return the value in balance.</a:t>
-            </a:r>
-          </a:p>
-          <a:p>
-            <a:pPr lvl="1"/>
-            <a:r>
-              <a:rPr lang="en-US" dirty="0">
-                <a:ea typeface="+mj-ea"/>
-                <a:cs typeface="+mj-cs"/>
-              </a:rPr>
-              <a:t>We need to set the balance to zero.</a:t>
-            </a:r>
-          </a:p>
-          <a:p>
-            <a:r>
-              <a:rPr lang="en-US" dirty="0">
-                <a:ea typeface="+mj-ea"/>
-                <a:cs typeface="+mj-cs"/>
-              </a:rPr>
-              <a:t>How can we do the first without losing the value in balance?</a:t>
-            </a:r>
-            <a:endParaRPr lang="en-GB" dirty="0"/>
+            <a:pPr marL="514350" indent="-514350">
+              <a:buFont typeface="+mj-lt"/>
+              <a:buAutoNum type="arabicPeriod"/>
+            </a:pPr>
+            <a:r>
+              <a:rPr lang="en-IE" dirty="0"/>
+              <a:t>Variables.</a:t>
+            </a:r>
+          </a:p>
+          <a:p>
+            <a:pPr marL="514350" indent="-514350">
+              <a:buFont typeface="+mj-lt"/>
+              <a:buAutoNum type="arabicPeriod"/>
+            </a:pPr>
+            <a:endParaRPr lang="en-IE" dirty="0"/>
+          </a:p>
+          <a:p>
+            <a:pPr marL="514350" indent="-514350">
+              <a:buFont typeface="+mj-lt"/>
+              <a:buAutoNum type="arabicPeriod"/>
+            </a:pPr>
+            <a:r>
+              <a:rPr lang="en-IE" dirty="0"/>
+              <a:t>Java Keywords, tokens</a:t>
+            </a:r>
+          </a:p>
+          <a:p>
+            <a:pPr marL="514350" indent="-514350">
+              <a:buFont typeface="+mj-lt"/>
+              <a:buAutoNum type="arabicPeriod"/>
+            </a:pPr>
+            <a:endParaRPr lang="en-IE" dirty="0"/>
+          </a:p>
+          <a:p>
+            <a:pPr marL="514350" indent="-514350">
+              <a:buFont typeface="+mj-lt"/>
+              <a:buAutoNum type="arabicPeriod"/>
+            </a:pPr>
+            <a:r>
+              <a:rPr lang="en-IE" dirty="0"/>
+              <a:t>Data Types.</a:t>
+            </a:r>
+          </a:p>
+          <a:p>
+            <a:pPr marL="514350" indent="-514350">
+              <a:buFont typeface="+mj-lt"/>
+              <a:buAutoNum type="arabicPeriod"/>
+            </a:pPr>
+            <a:endParaRPr lang="en-IE" dirty="0"/>
+          </a:p>
+          <a:p>
+            <a:pPr marL="514350" indent="-514350">
+              <a:buFont typeface="+mj-lt"/>
+              <a:buAutoNum type="arabicPeriod"/>
+            </a:pPr>
+            <a:endParaRPr lang="en-IE" dirty="0"/>
+          </a:p>
+          <a:p>
+            <a:pPr marL="514350" indent="-514350">
+              <a:buFont typeface="+mj-lt"/>
+              <a:buAutoNum type="arabicPeriod"/>
+            </a:pPr>
+            <a:r>
+              <a:rPr lang="en-IE" dirty="0"/>
+              <a:t>Java’s Primitive Data Types</a:t>
+            </a:r>
+          </a:p>
+          <a:p>
+            <a:pPr marL="971550" lvl="1" indent="-514350">
+              <a:buFont typeface="+mj-lt"/>
+              <a:buAutoNum type="arabicPeriod"/>
+            </a:pPr>
+            <a:r>
+              <a:rPr lang="en-IE" dirty="0"/>
+              <a:t>Whole numbers.</a:t>
+            </a:r>
+          </a:p>
+          <a:p>
+            <a:pPr marL="971550" lvl="1" indent="-514350">
+              <a:buFont typeface="+mj-lt"/>
+              <a:buAutoNum type="arabicPeriod"/>
+            </a:pPr>
+            <a:r>
+              <a:rPr lang="en-IE" dirty="0"/>
+              <a:t>Decimal numbers.</a:t>
+            </a:r>
+          </a:p>
+          <a:p>
+            <a:pPr marL="971550" lvl="1" indent="-514350">
+              <a:buFont typeface="+mj-lt"/>
+              <a:buAutoNum type="arabicPeriod"/>
+            </a:pPr>
+            <a:r>
+              <a:rPr lang="en-IE" dirty="0"/>
+              <a:t>Others.</a:t>
+            </a:r>
+          </a:p>
+          <a:p>
+            <a:pPr marL="514350" indent="-514350">
+              <a:buFont typeface="+mj-lt"/>
+              <a:buAutoNum type="arabicPeriod"/>
+            </a:pPr>
+            <a:endParaRPr lang="en-IE" dirty="0"/>
+          </a:p>
+          <a:p>
+            <a:pPr marL="514350" indent="-514350">
+              <a:buFont typeface="+mj-lt"/>
+              <a:buAutoNum type="arabicPeriod"/>
+            </a:pPr>
+            <a:r>
+              <a:rPr lang="en-IE" dirty="0"/>
+              <a:t>Arithmetic operators.</a:t>
+            </a:r>
+          </a:p>
+        </p:txBody>
+      </p:sp>
+      <p:sp>
+        <p:nvSpPr>
+          <p:cNvPr id="4" name="Rectangle 3">
+            <a:extLst>
+              <a:ext uri="{FF2B5EF4-FFF2-40B4-BE49-F238E27FC236}">
+                <a16:creationId xmlns:a16="http://schemas.microsoft.com/office/drawing/2014/main" id="{E0C083B6-BB08-AB84-AD99-15C4D8CEA08F}"/>
+              </a:ext>
+            </a:extLst>
+          </p:cNvPr>
+          <p:cNvSpPr/>
+          <p:nvPr/>
+        </p:nvSpPr>
+        <p:spPr>
+          <a:xfrm>
+            <a:off x="609600" y="5445224"/>
+            <a:ext cx="3326160" cy="576064"/>
+          </a:xfrm>
+          <a:prstGeom prst="rect">
+            <a:avLst/>
+          </a:prstGeom>
+          <a:noFill/>
+          <a:ln w="47625">
+            <a:solidFill>
+              <a:srgbClr val="FF0000"/>
+            </a:solidFill>
+          </a:ln>
+        </p:spPr>
+        <p:style>
+          <a:lnRef idx="2">
+            <a:schemeClr val="accent1">
+              <a:shade val="50000"/>
+            </a:schemeClr>
+          </a:lnRef>
+          <a:fillRef idx="1">
+            <a:schemeClr val="accent1"/>
+          </a:fillRef>
+          <a:effectRef idx="0">
+            <a:schemeClr val="accent1"/>
+          </a:effectRef>
+          <a:fontRef idx="minor">
+            <a:schemeClr val="lt1"/>
+          </a:fontRef>
+        </p:style>
+        <p:txBody>
+          <a:bodyPr rtlCol="0" anchor="ctr"/>
+          <a:lstStyle/>
+          <a:p>
+            <a:pPr algn="ctr"/>
+            <a:endParaRPr lang="en-IE"/>
           </a:p>
         </p:txBody>
       </p:sp>
     </p:spTree>
+    <p:extLst>
+      <p:ext uri="{BB962C8B-B14F-4D97-AF65-F5344CB8AC3E}">
+        <p14:creationId xmlns:p14="http://schemas.microsoft.com/office/powerpoint/2010/main" val="3012230802"/>
+      </p:ext>
+    </p:extLst>
   </p:cSld>
   <p:clrMapOvr>
     <a:masterClrMapping/>
@@ -19469,6 +17583,9 @@
                     <p:cTn id="3" fill="hold">
                       <p:stCondLst>
                         <p:cond delay="indefinite"/>
+                        <p:cond evt="onBegin" delay="0">
+                          <p:tn val="2"/>
+                        </p:cond>
                       </p:stCondLst>
                       <p:childTnLst>
                         <p:par>
@@ -19478,7 +17595,7 @@
                             </p:stCondLst>
                             <p:childTnLst>
                               <p:par>
-                                <p:cTn id="5" presetID="1" presetClass="entr" presetSubtype="0" fill="hold" nodeType="clickEffect">
+                                <p:cTn id="5" presetID="21" presetClass="entr" presetSubtype="1" fill="hold" grpId="0" nodeType="withEffect">
                                   <p:stCondLst>
                                     <p:cond delay="0"/>
                                   </p:stCondLst>
@@ -19491,11 +17608,7 @@
                                           </p:stCondLst>
                                         </p:cTn>
                                         <p:tgtEl>
-                                          <p:spTgt spid="3">
-                                            <p:txEl>
-                                              <p:pRg st="1" end="1"/>
-                                            </p:txEl>
-                                          </p:spTgt>
+                                          <p:spTgt spid="4"/>
                                         </p:tgtEl>
                                         <p:attrNameLst>
                                           <p:attrName>style.visibility</p:attrName>
@@ -19505,104 +17618,14 @@
                                         <p:strVal val="visible"/>
                                       </p:to>
                                     </p:set>
-                                  </p:childTnLst>
-                                </p:cTn>
-                              </p:par>
-                            </p:childTnLst>
-                          </p:cTn>
-                        </p:par>
-                      </p:childTnLst>
-                    </p:cTn>
-                  </p:par>
-                  <p:par>
-                    <p:cTn id="7" fill="hold">
-                      <p:stCondLst>
-                        <p:cond delay="indefinite"/>
-                      </p:stCondLst>
-                      <p:childTnLst>
-                        <p:par>
-                          <p:cTn id="8" fill="hold">
-                            <p:stCondLst>
-                              <p:cond delay="0"/>
-                            </p:stCondLst>
-                            <p:childTnLst>
-                              <p:par>
-                                <p:cTn id="9" presetID="1" presetClass="entr" presetSubtype="0" fill="hold" nodeType="clickEffect">
-                                  <p:stCondLst>
-                                    <p:cond delay="0"/>
-                                  </p:stCondLst>
-                                  <p:childTnLst>
-                                    <p:set>
+                                    <p:animEffect transition="in" filter="wheel(1)">
                                       <p:cBhvr>
-                                        <p:cTn id="10" dur="1" fill="hold">
-                                          <p:stCondLst>
-                                            <p:cond delay="0"/>
-                                          </p:stCondLst>
-                                        </p:cTn>
-                                        <p:tgtEl>
-                                          <p:spTgt spid="3">
-                                            <p:txEl>
-                                              <p:pRg st="2" end="2"/>
-                                            </p:txEl>
-                                          </p:spTgt>
-                                        </p:tgtEl>
-                                        <p:attrNameLst>
-                                          <p:attrName>style.visibility</p:attrName>
-                                        </p:attrNameLst>
-                                      </p:cBhvr>
-                                      <p:to>
-                                        <p:strVal val="visible"/>
-                                      </p:to>
-                                    </p:set>
-                                  </p:childTnLst>
-                                </p:cTn>
-                              </p:par>
-                            </p:childTnLst>
-                          </p:cTn>
-                        </p:par>
-                      </p:childTnLst>
-                    </p:cTn>
-                  </p:par>
-                  <p:par>
-                    <p:cTn id="11" fill="hold">
-                      <p:stCondLst>
-                        <p:cond delay="indefinite"/>
-                      </p:stCondLst>
-                      <p:childTnLst>
-                        <p:par>
-                          <p:cTn id="12" fill="hold">
-                            <p:stCondLst>
-                              <p:cond delay="0"/>
-                            </p:stCondLst>
-                            <p:childTnLst>
-                              <p:par>
-                                <p:cTn id="13" presetID="1" presetClass="entr" presetSubtype="0" fill="hold" nodeType="clickEffect">
-                                  <p:stCondLst>
-                                    <p:cond delay="0"/>
-                                  </p:stCondLst>
-                                  <p:childTnLst>
-                                    <p:set>
-                                      <p:cBhvr>
-                                        <p:cTn id="14" dur="1" fill="hold">
-                                          <p:stCondLst>
-                                            <p:cond delay="0"/>
-                                          </p:stCondLst>
-                                        </p:cTn>
-                                        <p:tgtEl>
-                                          <p:spTgt spid="3">
-                                            <p:txEl>
-                                              <p:pRg st="3" end="3"/>
-                                            </p:txEl>
-                                          </p:spTgt>
-                                        </p:tgtEl>
-                                        <p:attrNameLst>
-                                          <p:attrName>style.visibility</p:attrName>
-                                        </p:attrNameLst>
-                                      </p:cBhvr>
-                                      <p:to>
-                                        <p:strVal val="visible"/>
-                                      </p:to>
-                                    </p:set>
+                                        <p:cTn id="7" dur="2000"/>
+                                        <p:tgtEl>
+                                          <p:spTgt spid="4"/>
+                                        </p:tgtEl>
+                                      </p:cBhvr>
+                                    </p:animEffect>
                                   </p:childTnLst>
                                 </p:cTn>
                               </p:par>
@@ -19633,7 +17656,3429 @@
         </p:cTn>
       </p:par>
     </p:tnLst>
+    <p:bldLst>
+      <p:bldP spid="4" grpId="0" animBg="1"/>
+    </p:bldLst>
   </p:timing>
+</p:sld>
+</file>
+
+<file path=ppt/slides/slide27.xml><?xml version="1.0" encoding="utf-8"?>
+<p:sld xmlns:a="http://schemas.openxmlformats.org/drawingml/2006/main" xmlns:r="http://schemas.openxmlformats.org/officeDocument/2006/relationships" xmlns:p="http://schemas.openxmlformats.org/presentationml/2006/main">
+  <p:cSld>
+    <p:spTree>
+      <p:nvGrpSpPr>
+        <p:cNvPr id="1" name=""/>
+        <p:cNvGrpSpPr/>
+        <p:nvPr/>
+      </p:nvGrpSpPr>
+      <p:grpSpPr>
+        <a:xfrm>
+          <a:off x="0" y="0"/>
+          <a:ext cx="0" cy="0"/>
+          <a:chOff x="0" y="0"/>
+          <a:chExt cx="0" cy="0"/>
+        </a:xfrm>
+      </p:grpSpPr>
+      <p:sp>
+        <p:nvSpPr>
+          <p:cNvPr id="2" name="Title 1"/>
+          <p:cNvSpPr>
+            <a:spLocks noGrp="1"/>
+          </p:cNvSpPr>
+          <p:nvPr>
+            <p:ph type="title"/>
+          </p:nvPr>
+        </p:nvSpPr>
+        <p:spPr/>
+        <p:txBody>
+          <a:bodyPr/>
+          <a:lstStyle/>
+          <a:p>
+            <a:r>
+              <a:rPr lang="en-IE" dirty="0"/>
+              <a:t>Arithmetic Operators </a:t>
+            </a:r>
+          </a:p>
+        </p:txBody>
+      </p:sp>
+      <mc:AlternateContent xmlns:mc="http://schemas.openxmlformats.org/markup-compatibility/2006" xmlns:a14="http://schemas.microsoft.com/office/drawing/2010/main">
+        <mc:Choice Requires="a14">
+          <p:graphicFrame>
+            <p:nvGraphicFramePr>
+              <p:cNvPr id="3" name="Table 2">
+                <a:extLst>
+                  <a:ext uri="{FF2B5EF4-FFF2-40B4-BE49-F238E27FC236}">
+                    <a16:creationId xmlns:a16="http://schemas.microsoft.com/office/drawing/2014/main" id="{2E628E40-3168-D0C8-765E-F580E2893A59}"/>
+                  </a:ext>
+                </a:extLst>
+              </p:cNvPr>
+              <p:cNvGraphicFramePr>
+                <a:graphicFrameLocks noGrp="1"/>
+              </p:cNvGraphicFramePr>
+              <p:nvPr>
+                <p:extLst>
+                  <p:ext uri="{D42A27DB-BD31-4B8C-83A1-F6EECF244321}">
+                    <p14:modId xmlns:p14="http://schemas.microsoft.com/office/powerpoint/2010/main" val="659623651"/>
+                  </p:ext>
+                </p:extLst>
+              </p:nvPr>
+            </p:nvGraphicFramePr>
+            <p:xfrm>
+              <a:off x="767408" y="1412776"/>
+              <a:ext cx="11007516" cy="5212080"/>
+            </p:xfrm>
+            <a:graphic>
+              <a:graphicData uri="http://schemas.openxmlformats.org/drawingml/2006/table">
+                <a:tbl>
+                  <a:tblPr firstRow="1" bandRow="1">
+                    <a:tableStyleId>{5C22544A-7EE6-4342-B048-85BDC9FD1C3A}</a:tableStyleId>
+                  </a:tblPr>
+                  <a:tblGrid>
+                    <a:gridCol w="3669172">
+                      <a:extLst>
+                        <a:ext uri="{9D8B030D-6E8A-4147-A177-3AD203B41FA5}">
+                          <a16:colId xmlns:a16="http://schemas.microsoft.com/office/drawing/2014/main" val="2846493749"/>
+                        </a:ext>
+                      </a:extLst>
+                    </a:gridCol>
+                    <a:gridCol w="3669172">
+                      <a:extLst>
+                        <a:ext uri="{9D8B030D-6E8A-4147-A177-3AD203B41FA5}">
+                          <a16:colId xmlns:a16="http://schemas.microsoft.com/office/drawing/2014/main" val="4029540119"/>
+                        </a:ext>
+                      </a:extLst>
+                    </a:gridCol>
+                    <a:gridCol w="3669172">
+                      <a:extLst>
+                        <a:ext uri="{9D8B030D-6E8A-4147-A177-3AD203B41FA5}">
+                          <a16:colId xmlns:a16="http://schemas.microsoft.com/office/drawing/2014/main" val="4127282100"/>
+                        </a:ext>
+                      </a:extLst>
+                    </a:gridCol>
+                  </a:tblGrid>
+                  <a:tr h="476666">
+                    <a:tc>
+                      <a:txBody>
+                        <a:bodyPr/>
+                        <a:lstStyle/>
+                        <a:p>
+                          <a:pPr algn="ctr"/>
+                          <a:r>
+                            <a:rPr lang="en-IE" sz="2800" dirty="0"/>
+                            <a:t>Arithmetic</a:t>
+                          </a:r>
+                          <a:r>
+                            <a:rPr lang="en-IE" sz="2800" baseline="0" dirty="0"/>
+                            <a:t> Operator</a:t>
+                          </a:r>
+                          <a:endParaRPr lang="en-IE" sz="2800" dirty="0"/>
+                        </a:p>
+                      </a:txBody>
+                      <a:tcPr/>
+                    </a:tc>
+                    <a:tc>
+                      <a:txBody>
+                        <a:bodyPr/>
+                        <a:lstStyle/>
+                        <a:p>
+                          <a:pPr algn="ctr"/>
+                          <a:r>
+                            <a:rPr lang="en-IE" sz="2800" dirty="0"/>
+                            <a:t>Explanation</a:t>
+                          </a:r>
+                        </a:p>
+                      </a:txBody>
+                      <a:tcPr/>
+                    </a:tc>
+                    <a:tc>
+                      <a:txBody>
+                        <a:bodyPr/>
+                        <a:lstStyle/>
+                        <a:p>
+                          <a:pPr algn="ctr"/>
+                          <a:r>
+                            <a:rPr lang="en-IE" sz="2800" dirty="0"/>
+                            <a:t>Example(s)</a:t>
+                          </a:r>
+                        </a:p>
+                      </a:txBody>
+                      <a:tcPr/>
+                    </a:tc>
+                    <a:extLst>
+                      <a:ext uri="{0D108BD9-81ED-4DB2-BD59-A6C34878D82A}">
+                        <a16:rowId xmlns:a16="http://schemas.microsoft.com/office/drawing/2014/main" val="445721465"/>
+                      </a:ext>
+                    </a:extLst>
+                  </a:tr>
+                  <a:tr h="370840">
+                    <a:tc>
+                      <a:txBody>
+                        <a:bodyPr/>
+                        <a:lstStyle/>
+                        <a:p>
+                          <a:pPr algn="ctr"/>
+                          <a:r>
+                            <a:rPr lang="en-IE" sz="5400" dirty="0"/>
+                            <a:t>+</a:t>
+                          </a:r>
+                        </a:p>
+                      </a:txBody>
+                      <a:tcPr/>
+                    </a:tc>
+                    <a:tc>
+                      <a:txBody>
+                        <a:bodyPr/>
+                        <a:lstStyle/>
+                        <a:p>
+                          <a:pPr algn="l"/>
+                          <a:r>
+                            <a:rPr lang="en-IE" sz="2800" dirty="0"/>
+                            <a:t>Addition</a:t>
+                          </a:r>
+                        </a:p>
+                      </a:txBody>
+                      <a:tcPr anchor="ctr"/>
+                    </a:tc>
+                    <a:tc>
+                      <a:txBody>
+                        <a:bodyPr/>
+                        <a:lstStyle/>
+                        <a:p>
+                          <a:r>
+                            <a:rPr lang="en-IE" sz="2800" dirty="0"/>
+                            <a:t>6 + 2</a:t>
+                          </a:r>
+                        </a:p>
+                        <a:p>
+                          <a:r>
+                            <a:rPr lang="en-IE" sz="2800" dirty="0" err="1"/>
+                            <a:t>amountOwed</a:t>
+                          </a:r>
+                          <a:r>
+                            <a:rPr lang="en-IE" sz="2800" baseline="0" dirty="0"/>
+                            <a:t>  + 10</a:t>
+                          </a:r>
+                          <a:endParaRPr lang="en-IE" sz="2800" dirty="0"/>
+                        </a:p>
+                      </a:txBody>
+                      <a:tcPr/>
+                    </a:tc>
+                    <a:extLst>
+                      <a:ext uri="{0D108BD9-81ED-4DB2-BD59-A6C34878D82A}">
+                        <a16:rowId xmlns:a16="http://schemas.microsoft.com/office/drawing/2014/main" val="2849847360"/>
+                      </a:ext>
+                    </a:extLst>
+                  </a:tr>
+                  <a:tr h="370840">
+                    <a:tc>
+                      <a:txBody>
+                        <a:bodyPr/>
+                        <a:lstStyle/>
+                        <a:p>
+                          <a:pPr algn="ctr"/>
+                          <a:r>
+                            <a:rPr lang="en-IE" sz="5400" dirty="0"/>
+                            <a:t>- </a:t>
+                          </a:r>
+                        </a:p>
+                      </a:txBody>
+                      <a:tcPr/>
+                    </a:tc>
+                    <a:tc>
+                      <a:txBody>
+                        <a:bodyPr/>
+                        <a:lstStyle/>
+                        <a:p>
+                          <a:pPr algn="l"/>
+                          <a:r>
+                            <a:rPr lang="en-IE" sz="2800" dirty="0"/>
+                            <a:t>Subtraction</a:t>
+                          </a:r>
+                        </a:p>
+                      </a:txBody>
+                      <a:tcPr anchor="ctr"/>
+                    </a:tc>
+                    <a:tc>
+                      <a:txBody>
+                        <a:bodyPr/>
+                        <a:lstStyle/>
+                        <a:p>
+                          <a:r>
+                            <a:rPr lang="en-IE" sz="2800" dirty="0"/>
+                            <a:t>6 – 2</a:t>
+                          </a:r>
+                        </a:p>
+                        <a:p>
+                          <a:r>
+                            <a:rPr lang="en-IE" sz="2800" dirty="0" err="1"/>
+                            <a:t>amountOwed</a:t>
+                          </a:r>
+                          <a:r>
+                            <a:rPr lang="en-IE" sz="2800" dirty="0"/>
+                            <a:t>  – 10</a:t>
+                          </a:r>
+                        </a:p>
+                      </a:txBody>
+                      <a:tcPr/>
+                    </a:tc>
+                    <a:extLst>
+                      <a:ext uri="{0D108BD9-81ED-4DB2-BD59-A6C34878D82A}">
+                        <a16:rowId xmlns:a16="http://schemas.microsoft.com/office/drawing/2014/main" val="3916521978"/>
+                      </a:ext>
+                    </a:extLst>
+                  </a:tr>
+                  <a:tr h="370840">
+                    <a:tc>
+                      <a:txBody>
+                        <a:bodyPr/>
+                        <a:lstStyle/>
+                        <a:p>
+                          <a:pPr algn="ctr"/>
+                          <a:r>
+                            <a:rPr lang="en-IE" sz="5400" dirty="0"/>
+                            <a:t>*</a:t>
+                          </a:r>
+                        </a:p>
+                      </a:txBody>
+                      <a:tcPr/>
+                    </a:tc>
+                    <a:tc>
+                      <a:txBody>
+                        <a:bodyPr/>
+                        <a:lstStyle/>
+                        <a:p>
+                          <a:pPr algn="l"/>
+                          <a:r>
+                            <a:rPr lang="en-IE" sz="2800" dirty="0"/>
+                            <a:t>Multiplication</a:t>
+                          </a:r>
+                        </a:p>
+                      </a:txBody>
+                      <a:tcPr anchor="ctr"/>
+                    </a:tc>
+                    <a:tc>
+                      <a:txBody>
+                        <a:bodyPr/>
+                        <a:lstStyle/>
+                        <a:p>
+                          <a:r>
+                            <a:rPr lang="en-IE" sz="2800" dirty="0"/>
+                            <a:t>6 * 2</a:t>
+                          </a:r>
+                        </a:p>
+                        <a:p>
+                          <a:r>
+                            <a:rPr lang="en-IE" sz="2800" dirty="0" err="1"/>
+                            <a:t>amountOwed</a:t>
+                          </a:r>
+                          <a:r>
+                            <a:rPr lang="en-IE" sz="2800" dirty="0"/>
+                            <a:t> </a:t>
+                          </a:r>
+                          <a:r>
+                            <a:rPr lang="en-IE" sz="2800" baseline="0" dirty="0"/>
+                            <a:t> *</a:t>
+                          </a:r>
+                          <a:r>
+                            <a:rPr lang="en-IE" sz="2800" dirty="0"/>
+                            <a:t> 10</a:t>
+                          </a:r>
+                        </a:p>
+                      </a:txBody>
+                      <a:tcPr/>
+                    </a:tc>
+                    <a:extLst>
+                      <a:ext uri="{0D108BD9-81ED-4DB2-BD59-A6C34878D82A}">
+                        <a16:rowId xmlns:a16="http://schemas.microsoft.com/office/drawing/2014/main" val="388360200"/>
+                      </a:ext>
+                    </a:extLst>
+                  </a:tr>
+                  <a:tr h="370840">
+                    <a:tc>
+                      <a:txBody>
+                        <a:bodyPr/>
+                        <a:lstStyle/>
+                        <a:p>
+                          <a:pPr algn="ctr"/>
+                          <a:r>
+                            <a:rPr lang="en-IE" sz="5400" dirty="0"/>
+                            <a:t>/</a:t>
+                          </a:r>
+                        </a:p>
+                      </a:txBody>
+                      <a:tcPr/>
+                    </a:tc>
+                    <a:tc>
+                      <a:txBody>
+                        <a:bodyPr/>
+                        <a:lstStyle/>
+                        <a:p>
+                          <a:pPr algn="l"/>
+                          <a:r>
+                            <a:rPr lang="en-IE" sz="2800" dirty="0"/>
+                            <a:t>Division</a:t>
+                          </a:r>
+                        </a:p>
+                      </a:txBody>
+                      <a:tcPr anchor="ctr"/>
+                    </a:tc>
+                    <a:tc>
+                      <a:txBody>
+                        <a:bodyPr/>
+                        <a:lstStyle/>
+                        <a:p>
+                          <a:r>
+                            <a:rPr lang="en-IE" sz="2800" dirty="0"/>
+                            <a:t>6 / 2</a:t>
+                          </a:r>
+                        </a:p>
+                        <a:p>
+                          <a:r>
+                            <a:rPr lang="en-IE" sz="2800" dirty="0" err="1"/>
+                            <a:t>amountOwed</a:t>
+                          </a:r>
+                          <a:r>
+                            <a:rPr lang="en-IE" sz="2800" dirty="0"/>
+                            <a:t> </a:t>
+                          </a:r>
+                          <a:r>
+                            <a:rPr lang="en-IE" sz="2800" baseline="0" dirty="0"/>
+                            <a:t> / </a:t>
+                          </a:r>
+                          <a:r>
+                            <a:rPr lang="en-IE" sz="2800" dirty="0"/>
+                            <a:t>10</a:t>
+                          </a:r>
+                        </a:p>
+                      </a:txBody>
+                      <a:tcPr/>
+                    </a:tc>
+                    <a:extLst>
+                      <a:ext uri="{0D108BD9-81ED-4DB2-BD59-A6C34878D82A}">
+                        <a16:rowId xmlns:a16="http://schemas.microsoft.com/office/drawing/2014/main" val="3870166474"/>
+                      </a:ext>
+                    </a:extLst>
+                  </a:tr>
+                  <a:tr h="370840">
+                    <a:tc>
+                      <a:txBody>
+                        <a:bodyPr/>
+                        <a:lstStyle/>
+                        <a:p>
+                          <a:pPr marL="0" algn="ctr" defTabSz="914400" rtl="0" eaLnBrk="1" latinLnBrk="0" hangingPunct="1"/>
+                          <a:r>
+                            <a:rPr lang="en-US" sz="5400" kern="1200" dirty="0">
+                              <a:solidFill>
+                                <a:schemeClr val="dk1"/>
+                              </a:solidFill>
+                              <a:latin typeface="+mn-lt"/>
+                              <a:ea typeface="+mn-ea"/>
+                              <a:cs typeface="+mn-cs"/>
+                            </a:rPr>
+                            <a:t>%</a:t>
+                          </a:r>
+                        </a:p>
+                      </a:txBody>
+                      <a:tcPr/>
+                    </a:tc>
+                    <a:tc>
+                      <a:txBody>
+                        <a:bodyPr/>
+                        <a:lstStyle/>
+                        <a:p>
+                          <a:pPr marL="0" algn="l" defTabSz="914400" rtl="0" eaLnBrk="1" latinLnBrk="0" hangingPunct="1"/>
+                          <a:r>
+                            <a:rPr lang="en-US" sz="2800" kern="1200" dirty="0">
+                              <a:solidFill>
+                                <a:schemeClr val="dk1"/>
+                              </a:solidFill>
+                              <a:latin typeface="+mn-lt"/>
+                              <a:ea typeface="+mn-ea"/>
+                              <a:cs typeface="+mn-cs"/>
+                            </a:rPr>
+                            <a:t>Remainder</a:t>
+                          </a:r>
+                        </a:p>
+                      </a:txBody>
+                      <a:tcPr/>
+                    </a:tc>
+                    <a:tc>
+                      <a:txBody>
+                        <a:bodyPr/>
+                        <a:lstStyle/>
+                        <a:p>
+                          <a:pPr marL="0" algn="l" defTabSz="914400" rtl="0" eaLnBrk="1" latinLnBrk="0" hangingPunct="1"/>
+                          <a:r>
+                            <a:rPr lang="en-US" sz="2800" kern="1200" dirty="0">
+                              <a:solidFill>
+                                <a:schemeClr val="dk1"/>
+                              </a:solidFill>
+                              <a:latin typeface="+mn-lt"/>
+                              <a:ea typeface="+mn-ea"/>
+                              <a:cs typeface="+mn-cs"/>
+                            </a:rPr>
+                            <a:t>16 % 5  </a:t>
+                          </a:r>
+                          <a14:m>
+                            <m:oMath xmlns:m="http://schemas.openxmlformats.org/officeDocument/2006/math">
+                              <m:r>
+                                <a:rPr lang="en-US" sz="2800" i="1" kern="1200" dirty="0" smtClean="0">
+                                  <a:solidFill>
+                                    <a:schemeClr val="dk1"/>
+                                  </a:solidFill>
+                                  <a:latin typeface="Cambria Math" panose="02040503050406030204" pitchFamily="18" charset="0"/>
+                                  <a:ea typeface="Cambria Math" panose="02040503050406030204" pitchFamily="18" charset="0"/>
+                                  <a:cs typeface="+mn-cs"/>
+                                </a:rPr>
+                                <m:t>→</m:t>
+                              </m:r>
+                            </m:oMath>
+                          </a14:m>
+                          <a:r>
+                            <a:rPr lang="en-US" sz="2800" kern="1200" dirty="0">
+                              <a:solidFill>
+                                <a:schemeClr val="dk1"/>
+                              </a:solidFill>
+                              <a:latin typeface="+mn-lt"/>
+                              <a:ea typeface="+mn-ea"/>
+                              <a:cs typeface="+mn-cs"/>
+                            </a:rPr>
+                            <a:t>1</a:t>
+                          </a:r>
+                        </a:p>
+                      </a:txBody>
+                      <a:tcPr/>
+                    </a:tc>
+                    <a:extLst>
+                      <a:ext uri="{0D108BD9-81ED-4DB2-BD59-A6C34878D82A}">
+                        <a16:rowId xmlns:a16="http://schemas.microsoft.com/office/drawing/2014/main" val="2145348698"/>
+                      </a:ext>
+                    </a:extLst>
+                  </a:tr>
+                </a:tbl>
+              </a:graphicData>
+            </a:graphic>
+          </p:graphicFrame>
+        </mc:Choice>
+        <mc:Fallback xmlns="">
+          <p:graphicFrame>
+            <p:nvGraphicFramePr>
+              <p:cNvPr id="3" name="Table 2">
+                <a:extLst>
+                  <a:ext uri="{FF2B5EF4-FFF2-40B4-BE49-F238E27FC236}">
+                    <a16:creationId xmlns:a16="http://schemas.microsoft.com/office/drawing/2014/main" id="{2E628E40-3168-D0C8-765E-F580E2893A59}"/>
+                  </a:ext>
+                </a:extLst>
+              </p:cNvPr>
+              <p:cNvGraphicFramePr>
+                <a:graphicFrameLocks noGrp="1"/>
+              </p:cNvGraphicFramePr>
+              <p:nvPr>
+                <p:extLst>
+                  <p:ext uri="{D42A27DB-BD31-4B8C-83A1-F6EECF244321}">
+                    <p14:modId xmlns:p14="http://schemas.microsoft.com/office/powerpoint/2010/main" val="659623651"/>
+                  </p:ext>
+                </p:extLst>
+              </p:nvPr>
+            </p:nvGraphicFramePr>
+            <p:xfrm>
+              <a:off x="767408" y="1412776"/>
+              <a:ext cx="11007516" cy="5212080"/>
+            </p:xfrm>
+            <a:graphic>
+              <a:graphicData uri="http://schemas.openxmlformats.org/drawingml/2006/table">
+                <a:tbl>
+                  <a:tblPr firstRow="1" bandRow="1">
+                    <a:tableStyleId>{5C22544A-7EE6-4342-B048-85BDC9FD1C3A}</a:tableStyleId>
+                  </a:tblPr>
+                  <a:tblGrid>
+                    <a:gridCol w="3669172">
+                      <a:extLst>
+                        <a:ext uri="{9D8B030D-6E8A-4147-A177-3AD203B41FA5}">
+                          <a16:colId xmlns:a16="http://schemas.microsoft.com/office/drawing/2014/main" val="2846493749"/>
+                        </a:ext>
+                      </a:extLst>
+                    </a:gridCol>
+                    <a:gridCol w="3669172">
+                      <a:extLst>
+                        <a:ext uri="{9D8B030D-6E8A-4147-A177-3AD203B41FA5}">
+                          <a16:colId xmlns:a16="http://schemas.microsoft.com/office/drawing/2014/main" val="4029540119"/>
+                        </a:ext>
+                      </a:extLst>
+                    </a:gridCol>
+                    <a:gridCol w="3669172">
+                      <a:extLst>
+                        <a:ext uri="{9D8B030D-6E8A-4147-A177-3AD203B41FA5}">
+                          <a16:colId xmlns:a16="http://schemas.microsoft.com/office/drawing/2014/main" val="4127282100"/>
+                        </a:ext>
+                      </a:extLst>
+                    </a:gridCol>
+                  </a:tblGrid>
+                  <a:tr h="518160">
+                    <a:tc>
+                      <a:txBody>
+                        <a:bodyPr/>
+                        <a:lstStyle/>
+                        <a:p>
+                          <a:pPr algn="ctr"/>
+                          <a:r>
+                            <a:rPr lang="en-IE" sz="2800" dirty="0"/>
+                            <a:t>Arithmetic</a:t>
+                          </a:r>
+                          <a:r>
+                            <a:rPr lang="en-IE" sz="2800" baseline="0" dirty="0"/>
+                            <a:t> Operator</a:t>
+                          </a:r>
+                          <a:endParaRPr lang="en-IE" sz="2800" dirty="0"/>
+                        </a:p>
+                      </a:txBody>
+                      <a:tcPr/>
+                    </a:tc>
+                    <a:tc>
+                      <a:txBody>
+                        <a:bodyPr/>
+                        <a:lstStyle/>
+                        <a:p>
+                          <a:pPr algn="ctr"/>
+                          <a:r>
+                            <a:rPr lang="en-IE" sz="2800" dirty="0"/>
+                            <a:t>Explanation</a:t>
+                          </a:r>
+                        </a:p>
+                      </a:txBody>
+                      <a:tcPr/>
+                    </a:tc>
+                    <a:tc>
+                      <a:txBody>
+                        <a:bodyPr/>
+                        <a:lstStyle/>
+                        <a:p>
+                          <a:pPr algn="ctr"/>
+                          <a:r>
+                            <a:rPr lang="en-IE" sz="2800" dirty="0"/>
+                            <a:t>Example(s)</a:t>
+                          </a:r>
+                        </a:p>
+                      </a:txBody>
+                      <a:tcPr/>
+                    </a:tc>
+                    <a:extLst>
+                      <a:ext uri="{0D108BD9-81ED-4DB2-BD59-A6C34878D82A}">
+                        <a16:rowId xmlns:a16="http://schemas.microsoft.com/office/drawing/2014/main" val="445721465"/>
+                      </a:ext>
+                    </a:extLst>
+                  </a:tr>
+                  <a:tr h="944880">
+                    <a:tc>
+                      <a:txBody>
+                        <a:bodyPr/>
+                        <a:lstStyle/>
+                        <a:p>
+                          <a:pPr algn="ctr"/>
+                          <a:r>
+                            <a:rPr lang="en-IE" sz="5400" dirty="0"/>
+                            <a:t>+</a:t>
+                          </a:r>
+                        </a:p>
+                      </a:txBody>
+                      <a:tcPr/>
+                    </a:tc>
+                    <a:tc>
+                      <a:txBody>
+                        <a:bodyPr/>
+                        <a:lstStyle/>
+                        <a:p>
+                          <a:pPr algn="l"/>
+                          <a:r>
+                            <a:rPr lang="en-IE" sz="2800" dirty="0"/>
+                            <a:t>Addition</a:t>
+                          </a:r>
+                        </a:p>
+                      </a:txBody>
+                      <a:tcPr anchor="ctr"/>
+                    </a:tc>
+                    <a:tc>
+                      <a:txBody>
+                        <a:bodyPr/>
+                        <a:lstStyle/>
+                        <a:p>
+                          <a:r>
+                            <a:rPr lang="en-IE" sz="2800" dirty="0"/>
+                            <a:t>6 + 2</a:t>
+                          </a:r>
+                        </a:p>
+                        <a:p>
+                          <a:r>
+                            <a:rPr lang="en-IE" sz="2800" dirty="0" err="1"/>
+                            <a:t>amountOwed</a:t>
+                          </a:r>
+                          <a:r>
+                            <a:rPr lang="en-IE" sz="2800" baseline="0" dirty="0"/>
+                            <a:t>  + 10</a:t>
+                          </a:r>
+                          <a:endParaRPr lang="en-IE" sz="2800" dirty="0"/>
+                        </a:p>
+                      </a:txBody>
+                      <a:tcPr/>
+                    </a:tc>
+                    <a:extLst>
+                      <a:ext uri="{0D108BD9-81ED-4DB2-BD59-A6C34878D82A}">
+                        <a16:rowId xmlns:a16="http://schemas.microsoft.com/office/drawing/2014/main" val="2849847360"/>
+                      </a:ext>
+                    </a:extLst>
+                  </a:tr>
+                  <a:tr h="944880">
+                    <a:tc>
+                      <a:txBody>
+                        <a:bodyPr/>
+                        <a:lstStyle/>
+                        <a:p>
+                          <a:pPr algn="ctr"/>
+                          <a:r>
+                            <a:rPr lang="en-IE" sz="5400" dirty="0"/>
+                            <a:t>- </a:t>
+                          </a:r>
+                        </a:p>
+                      </a:txBody>
+                      <a:tcPr/>
+                    </a:tc>
+                    <a:tc>
+                      <a:txBody>
+                        <a:bodyPr/>
+                        <a:lstStyle/>
+                        <a:p>
+                          <a:pPr algn="l"/>
+                          <a:r>
+                            <a:rPr lang="en-IE" sz="2800" dirty="0"/>
+                            <a:t>Subtraction</a:t>
+                          </a:r>
+                        </a:p>
+                      </a:txBody>
+                      <a:tcPr anchor="ctr"/>
+                    </a:tc>
+                    <a:tc>
+                      <a:txBody>
+                        <a:bodyPr/>
+                        <a:lstStyle/>
+                        <a:p>
+                          <a:r>
+                            <a:rPr lang="en-IE" sz="2800" dirty="0"/>
+                            <a:t>6 – 2</a:t>
+                          </a:r>
+                        </a:p>
+                        <a:p>
+                          <a:r>
+                            <a:rPr lang="en-IE" sz="2800" dirty="0" err="1"/>
+                            <a:t>amountOwed</a:t>
+                          </a:r>
+                          <a:r>
+                            <a:rPr lang="en-IE" sz="2800" dirty="0"/>
+                            <a:t>  – 10</a:t>
+                          </a:r>
+                        </a:p>
+                      </a:txBody>
+                      <a:tcPr/>
+                    </a:tc>
+                    <a:extLst>
+                      <a:ext uri="{0D108BD9-81ED-4DB2-BD59-A6C34878D82A}">
+                        <a16:rowId xmlns:a16="http://schemas.microsoft.com/office/drawing/2014/main" val="3916521978"/>
+                      </a:ext>
+                    </a:extLst>
+                  </a:tr>
+                  <a:tr h="944880">
+                    <a:tc>
+                      <a:txBody>
+                        <a:bodyPr/>
+                        <a:lstStyle/>
+                        <a:p>
+                          <a:pPr algn="ctr"/>
+                          <a:r>
+                            <a:rPr lang="en-IE" sz="5400" dirty="0"/>
+                            <a:t>*</a:t>
+                          </a:r>
+                        </a:p>
+                      </a:txBody>
+                      <a:tcPr/>
+                    </a:tc>
+                    <a:tc>
+                      <a:txBody>
+                        <a:bodyPr/>
+                        <a:lstStyle/>
+                        <a:p>
+                          <a:pPr algn="l"/>
+                          <a:r>
+                            <a:rPr lang="en-IE" sz="2800" dirty="0"/>
+                            <a:t>Multiplication</a:t>
+                          </a:r>
+                        </a:p>
+                      </a:txBody>
+                      <a:tcPr anchor="ctr"/>
+                    </a:tc>
+                    <a:tc>
+                      <a:txBody>
+                        <a:bodyPr/>
+                        <a:lstStyle/>
+                        <a:p>
+                          <a:r>
+                            <a:rPr lang="en-IE" sz="2800" dirty="0"/>
+                            <a:t>6 * 2</a:t>
+                          </a:r>
+                        </a:p>
+                        <a:p>
+                          <a:r>
+                            <a:rPr lang="en-IE" sz="2800" dirty="0" err="1"/>
+                            <a:t>amountOwed</a:t>
+                          </a:r>
+                          <a:r>
+                            <a:rPr lang="en-IE" sz="2800" dirty="0"/>
+                            <a:t> </a:t>
+                          </a:r>
+                          <a:r>
+                            <a:rPr lang="en-IE" sz="2800" baseline="0" dirty="0"/>
+                            <a:t> *</a:t>
+                          </a:r>
+                          <a:r>
+                            <a:rPr lang="en-IE" sz="2800" dirty="0"/>
+                            <a:t> 10</a:t>
+                          </a:r>
+                        </a:p>
+                      </a:txBody>
+                      <a:tcPr/>
+                    </a:tc>
+                    <a:extLst>
+                      <a:ext uri="{0D108BD9-81ED-4DB2-BD59-A6C34878D82A}">
+                        <a16:rowId xmlns:a16="http://schemas.microsoft.com/office/drawing/2014/main" val="388360200"/>
+                      </a:ext>
+                    </a:extLst>
+                  </a:tr>
+                  <a:tr h="944880">
+                    <a:tc>
+                      <a:txBody>
+                        <a:bodyPr/>
+                        <a:lstStyle/>
+                        <a:p>
+                          <a:pPr algn="ctr"/>
+                          <a:r>
+                            <a:rPr lang="en-IE" sz="5400" dirty="0"/>
+                            <a:t>/</a:t>
+                          </a:r>
+                        </a:p>
+                      </a:txBody>
+                      <a:tcPr/>
+                    </a:tc>
+                    <a:tc>
+                      <a:txBody>
+                        <a:bodyPr/>
+                        <a:lstStyle/>
+                        <a:p>
+                          <a:pPr algn="l"/>
+                          <a:r>
+                            <a:rPr lang="en-IE" sz="2800" dirty="0"/>
+                            <a:t>Division</a:t>
+                          </a:r>
+                        </a:p>
+                      </a:txBody>
+                      <a:tcPr anchor="ctr"/>
+                    </a:tc>
+                    <a:tc>
+                      <a:txBody>
+                        <a:bodyPr/>
+                        <a:lstStyle/>
+                        <a:p>
+                          <a:r>
+                            <a:rPr lang="en-IE" sz="2800" dirty="0"/>
+                            <a:t>6 / 2</a:t>
+                          </a:r>
+                        </a:p>
+                        <a:p>
+                          <a:r>
+                            <a:rPr lang="en-IE" sz="2800" dirty="0" err="1"/>
+                            <a:t>amountOwed</a:t>
+                          </a:r>
+                          <a:r>
+                            <a:rPr lang="en-IE" sz="2800" dirty="0"/>
+                            <a:t> </a:t>
+                          </a:r>
+                          <a:r>
+                            <a:rPr lang="en-IE" sz="2800" baseline="0" dirty="0"/>
+                            <a:t> / </a:t>
+                          </a:r>
+                          <a:r>
+                            <a:rPr lang="en-IE" sz="2800" dirty="0"/>
+                            <a:t>10</a:t>
+                          </a:r>
+                        </a:p>
+                      </a:txBody>
+                      <a:tcPr/>
+                    </a:tc>
+                    <a:extLst>
+                      <a:ext uri="{0D108BD9-81ED-4DB2-BD59-A6C34878D82A}">
+                        <a16:rowId xmlns:a16="http://schemas.microsoft.com/office/drawing/2014/main" val="3870166474"/>
+                      </a:ext>
+                    </a:extLst>
+                  </a:tr>
+                  <a:tr h="914400">
+                    <a:tc>
+                      <a:txBody>
+                        <a:bodyPr/>
+                        <a:lstStyle/>
+                        <a:p>
+                          <a:pPr marL="0" algn="ctr" defTabSz="914400" rtl="0" eaLnBrk="1" latinLnBrk="0" hangingPunct="1"/>
+                          <a:r>
+                            <a:rPr lang="en-US" sz="5400" kern="1200" dirty="0">
+                              <a:solidFill>
+                                <a:schemeClr val="dk1"/>
+                              </a:solidFill>
+                              <a:latin typeface="+mn-lt"/>
+                              <a:ea typeface="+mn-ea"/>
+                              <a:cs typeface="+mn-cs"/>
+                            </a:rPr>
+                            <a:t>%</a:t>
+                          </a:r>
+                        </a:p>
+                      </a:txBody>
+                      <a:tcPr/>
+                    </a:tc>
+                    <a:tc>
+                      <a:txBody>
+                        <a:bodyPr/>
+                        <a:lstStyle/>
+                        <a:p>
+                          <a:pPr marL="0" algn="l" defTabSz="914400" rtl="0" eaLnBrk="1" latinLnBrk="0" hangingPunct="1"/>
+                          <a:r>
+                            <a:rPr lang="en-US" sz="2800" kern="1200" dirty="0">
+                              <a:solidFill>
+                                <a:schemeClr val="dk1"/>
+                              </a:solidFill>
+                              <a:latin typeface="+mn-lt"/>
+                              <a:ea typeface="+mn-ea"/>
+                              <a:cs typeface="+mn-cs"/>
+                            </a:rPr>
+                            <a:t>Remainder</a:t>
+                          </a:r>
+                        </a:p>
+                      </a:txBody>
+                      <a:tcPr/>
+                    </a:tc>
+                    <a:tc>
+                      <a:txBody>
+                        <a:bodyPr/>
+                        <a:lstStyle/>
+                        <a:p>
+                          <a:endParaRPr lang="en-US"/>
+                        </a:p>
+                      </a:txBody>
+                      <a:tcPr>
+                        <a:blipFill>
+                          <a:blip r:embed="rId2"/>
+                          <a:stretch>
+                            <a:fillRect l="-200692" t="-477778" r="-692" b="-41667"/>
+                          </a:stretch>
+                        </a:blipFill>
+                      </a:tcPr>
+                    </a:tc>
+                    <a:extLst>
+                      <a:ext uri="{0D108BD9-81ED-4DB2-BD59-A6C34878D82A}">
+                        <a16:rowId xmlns:a16="http://schemas.microsoft.com/office/drawing/2014/main" val="2145348698"/>
+                      </a:ext>
+                    </a:extLst>
+                  </a:tr>
+                </a:tbl>
+              </a:graphicData>
+            </a:graphic>
+          </p:graphicFrame>
+        </mc:Fallback>
+      </mc:AlternateContent>
+    </p:spTree>
+    <p:extLst>
+      <p:ext uri="{BB962C8B-B14F-4D97-AF65-F5344CB8AC3E}">
+        <p14:creationId xmlns:p14="http://schemas.microsoft.com/office/powerpoint/2010/main" val="185056312"/>
+      </p:ext>
+    </p:extLst>
+  </p:cSld>
+  <p:clrMapOvr>
+    <a:masterClrMapping/>
+  </p:clrMapOvr>
+</p:sld>
+</file>
+
+<file path=ppt/slides/slide28.xml><?xml version="1.0" encoding="utf-8"?>
+<p:sld xmlns:a="http://schemas.openxmlformats.org/drawingml/2006/main" xmlns:r="http://schemas.openxmlformats.org/officeDocument/2006/relationships" xmlns:p="http://schemas.openxmlformats.org/presentationml/2006/main">
+  <p:cSld>
+    <p:spTree>
+      <p:nvGrpSpPr>
+        <p:cNvPr id="1" name=""/>
+        <p:cNvGrpSpPr/>
+        <p:nvPr/>
+      </p:nvGrpSpPr>
+      <p:grpSpPr>
+        <a:xfrm>
+          <a:off x="0" y="0"/>
+          <a:ext cx="0" cy="0"/>
+          <a:chOff x="0" y="0"/>
+          <a:chExt cx="0" cy="0"/>
+        </a:xfrm>
+      </p:grpSpPr>
+      <p:sp>
+        <p:nvSpPr>
+          <p:cNvPr id="2" name="Title 1">
+            <a:extLst>
+              <a:ext uri="{FF2B5EF4-FFF2-40B4-BE49-F238E27FC236}">
+                <a16:creationId xmlns:a16="http://schemas.microsoft.com/office/drawing/2014/main" id="{5BCB363B-E1B5-4F30-1479-C74AD057AD9B}"/>
+              </a:ext>
+            </a:extLst>
+          </p:cNvPr>
+          <p:cNvSpPr>
+            <a:spLocks noGrp="1"/>
+          </p:cNvSpPr>
+          <p:nvPr>
+            <p:ph type="title"/>
+          </p:nvPr>
+        </p:nvSpPr>
+        <p:spPr/>
+        <p:txBody>
+          <a:bodyPr>
+            <a:normAutofit fontScale="90000"/>
+          </a:bodyPr>
+          <a:lstStyle/>
+          <a:p>
+            <a:r>
+              <a:rPr lang="en-US" dirty="0"/>
+              <a:t>Note on division ‘\’ – integer or ‘normal’ division</a:t>
+            </a:r>
+          </a:p>
+        </p:txBody>
+      </p:sp>
+      <p:sp>
+        <p:nvSpPr>
+          <p:cNvPr id="3" name="Content Placeholder 2">
+            <a:extLst>
+              <a:ext uri="{FF2B5EF4-FFF2-40B4-BE49-F238E27FC236}">
+                <a16:creationId xmlns:a16="http://schemas.microsoft.com/office/drawing/2014/main" id="{C754306A-B543-DBF9-D4E9-50917F4D7456}"/>
+              </a:ext>
+            </a:extLst>
+          </p:cNvPr>
+          <p:cNvSpPr>
+            <a:spLocks noGrp="1"/>
+          </p:cNvSpPr>
+          <p:nvPr>
+            <p:ph idx="1"/>
+          </p:nvPr>
+        </p:nvSpPr>
+        <p:spPr>
+          <a:xfrm>
+            <a:off x="609600" y="1600201"/>
+            <a:ext cx="10972800" cy="1143001"/>
+          </a:xfrm>
+          <a:ln w="41275">
+            <a:tailEnd type="triangle"/>
+          </a:ln>
+        </p:spPr>
+        <p:style>
+          <a:lnRef idx="1">
+            <a:schemeClr val="accent1"/>
+          </a:lnRef>
+          <a:fillRef idx="0">
+            <a:schemeClr val="accent1"/>
+          </a:fillRef>
+          <a:effectRef idx="0">
+            <a:schemeClr val="accent1"/>
+          </a:effectRef>
+          <a:fontRef idx="minor">
+            <a:schemeClr val="tx1"/>
+          </a:fontRef>
+        </p:style>
+        <p:txBody>
+          <a:bodyPr/>
+          <a:lstStyle/>
+          <a:p>
+            <a:pPr marL="0" indent="0">
+              <a:buNone/>
+            </a:pPr>
+            <a:r>
+              <a:rPr lang="en-US" dirty="0"/>
+              <a:t>When we use the ‘/’ operator , how it behaves depends on the type of the two operands : </a:t>
+            </a:r>
+          </a:p>
+          <a:p>
+            <a:pPr marL="0" indent="0">
+              <a:buNone/>
+            </a:pPr>
+            <a:endParaRPr lang="en-US" dirty="0"/>
+          </a:p>
+          <a:p>
+            <a:pPr marL="0" indent="0">
+              <a:buNone/>
+            </a:pPr>
+            <a:endParaRPr lang="en-US" dirty="0"/>
+          </a:p>
+        </p:txBody>
+      </p:sp>
+      <p:sp>
+        <p:nvSpPr>
+          <p:cNvPr id="7" name="Rectangle 6">
+            <a:extLst>
+              <a:ext uri="{FF2B5EF4-FFF2-40B4-BE49-F238E27FC236}">
+                <a16:creationId xmlns:a16="http://schemas.microsoft.com/office/drawing/2014/main" id="{345364DD-6506-67E1-E575-3F79605D62C6}"/>
+              </a:ext>
+            </a:extLst>
+          </p:cNvPr>
+          <p:cNvSpPr/>
+          <p:nvPr/>
+        </p:nvSpPr>
+        <p:spPr>
+          <a:xfrm>
+            <a:off x="407368" y="3685077"/>
+            <a:ext cx="1080120" cy="859444"/>
+          </a:xfrm>
+          <a:prstGeom prst="rect">
+            <a:avLst/>
+          </a:prstGeom>
+          <a:solidFill>
+            <a:srgbClr val="FFC000"/>
+          </a:solidFill>
+          <a:ln>
+            <a:solidFill>
+              <a:schemeClr val="accent1"/>
+            </a:solidFill>
+          </a:ln>
+        </p:spPr>
+        <p:style>
+          <a:lnRef idx="2">
+            <a:schemeClr val="accent1">
+              <a:shade val="15000"/>
+            </a:schemeClr>
+          </a:lnRef>
+          <a:fillRef idx="1">
+            <a:schemeClr val="accent1"/>
+          </a:fillRef>
+          <a:effectRef idx="0">
+            <a:schemeClr val="accent1"/>
+          </a:effectRef>
+          <a:fontRef idx="minor">
+            <a:schemeClr val="lt1"/>
+          </a:fontRef>
+        </p:style>
+        <p:txBody>
+          <a:bodyPr rtlCol="0" anchor="ctr"/>
+          <a:lstStyle/>
+          <a:p>
+            <a:pPr algn="ctr"/>
+            <a:r>
+              <a:rPr lang="en-US" sz="3600" dirty="0"/>
+              <a:t>x / y</a:t>
+            </a:r>
+          </a:p>
+        </p:txBody>
+      </p:sp>
+      <p:sp>
+        <p:nvSpPr>
+          <p:cNvPr id="8" name="Rectangle 7">
+            <a:extLst>
+              <a:ext uri="{FF2B5EF4-FFF2-40B4-BE49-F238E27FC236}">
+                <a16:creationId xmlns:a16="http://schemas.microsoft.com/office/drawing/2014/main" id="{03EE1A0A-23F1-3C06-AB66-FFD5F52021D3}"/>
+              </a:ext>
+            </a:extLst>
+          </p:cNvPr>
+          <p:cNvSpPr/>
+          <p:nvPr/>
+        </p:nvSpPr>
+        <p:spPr>
+          <a:xfrm>
+            <a:off x="2515934" y="3021901"/>
+            <a:ext cx="1080120" cy="859444"/>
+          </a:xfrm>
+          <a:prstGeom prst="rect">
+            <a:avLst/>
+          </a:prstGeom>
+          <a:ln>
+            <a:solidFill>
+              <a:schemeClr val="accent1"/>
+            </a:solidFill>
+          </a:ln>
+        </p:spPr>
+        <p:style>
+          <a:lnRef idx="2">
+            <a:schemeClr val="accent1">
+              <a:shade val="15000"/>
+            </a:schemeClr>
+          </a:lnRef>
+          <a:fillRef idx="1">
+            <a:schemeClr val="accent1"/>
+          </a:fillRef>
+          <a:effectRef idx="0">
+            <a:schemeClr val="accent1"/>
+          </a:effectRef>
+          <a:fontRef idx="minor">
+            <a:schemeClr val="lt1"/>
+          </a:fontRef>
+        </p:style>
+        <p:txBody>
+          <a:bodyPr rtlCol="0" anchor="ctr"/>
+          <a:lstStyle/>
+          <a:p>
+            <a:pPr algn="ctr"/>
+            <a:r>
+              <a:rPr lang="en-US" dirty="0"/>
+              <a:t>x and y are integers </a:t>
+            </a:r>
+          </a:p>
+        </p:txBody>
+      </p:sp>
+      <p:sp>
+        <p:nvSpPr>
+          <p:cNvPr id="9" name="Rectangle 8">
+            <a:extLst>
+              <a:ext uri="{FF2B5EF4-FFF2-40B4-BE49-F238E27FC236}">
+                <a16:creationId xmlns:a16="http://schemas.microsoft.com/office/drawing/2014/main" id="{890F9CE8-093E-F951-78C0-97D3D7DDDB53}"/>
+              </a:ext>
+            </a:extLst>
+          </p:cNvPr>
+          <p:cNvSpPr/>
+          <p:nvPr/>
+        </p:nvSpPr>
+        <p:spPr>
+          <a:xfrm>
+            <a:off x="4475796" y="2857497"/>
+            <a:ext cx="1318356" cy="1143001"/>
+          </a:xfrm>
+          <a:prstGeom prst="rect">
+            <a:avLst/>
+          </a:prstGeom>
+          <a:ln>
+            <a:solidFill>
+              <a:schemeClr val="accent1"/>
+            </a:solidFill>
+          </a:ln>
+        </p:spPr>
+        <p:style>
+          <a:lnRef idx="2">
+            <a:schemeClr val="accent1">
+              <a:shade val="15000"/>
+            </a:schemeClr>
+          </a:lnRef>
+          <a:fillRef idx="1">
+            <a:schemeClr val="accent1"/>
+          </a:fillRef>
+          <a:effectRef idx="0">
+            <a:schemeClr val="accent1"/>
+          </a:effectRef>
+          <a:fontRef idx="minor">
+            <a:schemeClr val="lt1"/>
+          </a:fontRef>
+        </p:style>
+        <p:txBody>
+          <a:bodyPr rtlCol="0" anchor="ctr"/>
+          <a:lstStyle/>
+          <a:p>
+            <a:pPr algn="ctr"/>
+            <a:r>
+              <a:rPr lang="en-US" dirty="0"/>
+              <a:t>x </a:t>
+            </a:r>
+            <a:r>
+              <a:rPr lang="en-US" dirty="0">
+                <a:sym typeface="Wingdings" pitchFamily="2" charset="2"/>
+              </a:rPr>
+              <a:t> 10</a:t>
+            </a:r>
+          </a:p>
+          <a:p>
+            <a:pPr algn="ctr"/>
+            <a:r>
+              <a:rPr lang="en-US" dirty="0">
+                <a:sym typeface="Wingdings" pitchFamily="2" charset="2"/>
+              </a:rPr>
+              <a:t>y  6  </a:t>
+            </a:r>
+            <a:endParaRPr lang="en-US" dirty="0"/>
+          </a:p>
+        </p:txBody>
+      </p:sp>
+      <p:sp>
+        <p:nvSpPr>
+          <p:cNvPr id="10" name="Rectangle 9">
+            <a:extLst>
+              <a:ext uri="{FF2B5EF4-FFF2-40B4-BE49-F238E27FC236}">
+                <a16:creationId xmlns:a16="http://schemas.microsoft.com/office/drawing/2014/main" id="{D4D500FD-42AE-1178-D1B8-A97195C5529D}"/>
+              </a:ext>
+            </a:extLst>
+          </p:cNvPr>
+          <p:cNvSpPr/>
+          <p:nvPr/>
+        </p:nvSpPr>
+        <p:spPr>
+          <a:xfrm>
+            <a:off x="6717497" y="2720579"/>
+            <a:ext cx="2412646" cy="1462087"/>
+          </a:xfrm>
+          <a:prstGeom prst="rect">
+            <a:avLst/>
+          </a:prstGeom>
+          <a:ln>
+            <a:solidFill>
+              <a:schemeClr val="accent1"/>
+            </a:solidFill>
+          </a:ln>
+        </p:spPr>
+        <p:style>
+          <a:lnRef idx="2">
+            <a:schemeClr val="accent1">
+              <a:shade val="15000"/>
+            </a:schemeClr>
+          </a:lnRef>
+          <a:fillRef idx="1">
+            <a:schemeClr val="accent1"/>
+          </a:fillRef>
+          <a:effectRef idx="0">
+            <a:schemeClr val="accent1"/>
+          </a:effectRef>
+          <a:fontRef idx="minor">
+            <a:schemeClr val="lt1"/>
+          </a:fontRef>
+        </p:style>
+        <p:txBody>
+          <a:bodyPr rtlCol="0" anchor="ctr"/>
+          <a:lstStyle/>
+          <a:p>
+            <a:pPr algn="ctr"/>
+            <a:r>
+              <a:rPr lang="en-US" sz="2800" dirty="0"/>
+              <a:t>x / y</a:t>
+            </a:r>
+            <a:endParaRPr lang="en-US" sz="2800" dirty="0">
+              <a:sym typeface="Wingdings" pitchFamily="2" charset="2"/>
+            </a:endParaRPr>
+          </a:p>
+          <a:p>
+            <a:pPr algn="ctr"/>
+            <a:r>
+              <a:rPr lang="en-US" sz="2800" dirty="0"/>
+              <a:t>10 / 6</a:t>
+            </a:r>
+            <a:endParaRPr lang="en-US" dirty="0">
+              <a:sym typeface="Wingdings" pitchFamily="2" charset="2"/>
+            </a:endParaRPr>
+          </a:p>
+          <a:p>
+            <a:pPr algn="ctr"/>
+            <a:endParaRPr lang="en-US" dirty="0">
+              <a:sym typeface="Wingdings" pitchFamily="2" charset="2"/>
+            </a:endParaRPr>
+          </a:p>
+        </p:txBody>
+      </p:sp>
+      <p:sp>
+        <p:nvSpPr>
+          <p:cNvPr id="11" name="Rectangle 10">
+            <a:extLst>
+              <a:ext uri="{FF2B5EF4-FFF2-40B4-BE49-F238E27FC236}">
+                <a16:creationId xmlns:a16="http://schemas.microsoft.com/office/drawing/2014/main" id="{A310995D-2665-0785-9C7D-9C986DEB4BF4}"/>
+              </a:ext>
+            </a:extLst>
+          </p:cNvPr>
+          <p:cNvSpPr/>
+          <p:nvPr/>
+        </p:nvSpPr>
+        <p:spPr>
+          <a:xfrm>
+            <a:off x="10200456" y="2731891"/>
+            <a:ext cx="1969368" cy="1462087"/>
+          </a:xfrm>
+          <a:prstGeom prst="rect">
+            <a:avLst/>
+          </a:prstGeom>
+          <a:solidFill>
+            <a:srgbClr val="FFC000"/>
+          </a:solidFill>
+          <a:ln>
+            <a:solidFill>
+              <a:schemeClr val="accent1"/>
+            </a:solidFill>
+          </a:ln>
+        </p:spPr>
+        <p:style>
+          <a:lnRef idx="2">
+            <a:schemeClr val="accent1">
+              <a:shade val="15000"/>
+            </a:schemeClr>
+          </a:lnRef>
+          <a:fillRef idx="1">
+            <a:schemeClr val="accent1"/>
+          </a:fillRef>
+          <a:effectRef idx="0">
+            <a:schemeClr val="accent1"/>
+          </a:effectRef>
+          <a:fontRef idx="minor">
+            <a:schemeClr val="lt1"/>
+          </a:fontRef>
+        </p:style>
+        <p:txBody>
+          <a:bodyPr rtlCol="0" anchor="ctr"/>
+          <a:lstStyle/>
+          <a:p>
+            <a:pPr algn="ctr"/>
+            <a:r>
+              <a:rPr lang="en-US" sz="2800" dirty="0">
+                <a:sym typeface="Wingdings" pitchFamily="2" charset="2"/>
+              </a:rPr>
+              <a:t>1</a:t>
+            </a:r>
+          </a:p>
+        </p:txBody>
+      </p:sp>
+      <p:cxnSp>
+        <p:nvCxnSpPr>
+          <p:cNvPr id="13" name="Straight Arrow Connector 12">
+            <a:extLst>
+              <a:ext uri="{FF2B5EF4-FFF2-40B4-BE49-F238E27FC236}">
+                <a16:creationId xmlns:a16="http://schemas.microsoft.com/office/drawing/2014/main" id="{00A573E2-9C95-6617-6BD1-9B6FF8B247A4}"/>
+              </a:ext>
+            </a:extLst>
+          </p:cNvPr>
+          <p:cNvCxnSpPr>
+            <a:stCxn id="7" idx="3"/>
+          </p:cNvCxnSpPr>
+          <p:nvPr/>
+        </p:nvCxnSpPr>
+        <p:spPr>
+          <a:xfrm flipV="1">
+            <a:off x="1487488" y="3428997"/>
+            <a:ext cx="1028446" cy="685802"/>
+          </a:xfrm>
+          <a:prstGeom prst="straightConnector1">
+            <a:avLst/>
+          </a:prstGeom>
+          <a:ln w="41275">
+            <a:tailEnd type="triangle"/>
+          </a:ln>
+        </p:spPr>
+        <p:style>
+          <a:lnRef idx="1">
+            <a:schemeClr val="accent1"/>
+          </a:lnRef>
+          <a:fillRef idx="0">
+            <a:schemeClr val="accent1"/>
+          </a:fillRef>
+          <a:effectRef idx="0">
+            <a:schemeClr val="accent1"/>
+          </a:effectRef>
+          <a:fontRef idx="minor">
+            <a:schemeClr val="tx1"/>
+          </a:fontRef>
+        </p:style>
+      </p:cxnSp>
+      <p:cxnSp>
+        <p:nvCxnSpPr>
+          <p:cNvPr id="15" name="Straight Arrow Connector 14">
+            <a:extLst>
+              <a:ext uri="{FF2B5EF4-FFF2-40B4-BE49-F238E27FC236}">
+                <a16:creationId xmlns:a16="http://schemas.microsoft.com/office/drawing/2014/main" id="{D2AF1EF4-8438-0CBB-82A9-DF1377EFFF3F}"/>
+              </a:ext>
+            </a:extLst>
+          </p:cNvPr>
+          <p:cNvCxnSpPr>
+            <a:cxnSpLocks/>
+            <a:endCxn id="9" idx="1"/>
+          </p:cNvCxnSpPr>
+          <p:nvPr/>
+        </p:nvCxnSpPr>
+        <p:spPr>
+          <a:xfrm>
+            <a:off x="3596054" y="3428997"/>
+            <a:ext cx="879742" cy="1"/>
+          </a:xfrm>
+          <a:prstGeom prst="straightConnector1">
+            <a:avLst/>
+          </a:prstGeom>
+          <a:ln w="41275">
+            <a:tailEnd type="triangle"/>
+          </a:ln>
+        </p:spPr>
+        <p:style>
+          <a:lnRef idx="1">
+            <a:schemeClr val="accent1"/>
+          </a:lnRef>
+          <a:fillRef idx="0">
+            <a:schemeClr val="accent1"/>
+          </a:fillRef>
+          <a:effectRef idx="0">
+            <a:schemeClr val="accent1"/>
+          </a:effectRef>
+          <a:fontRef idx="minor">
+            <a:schemeClr val="tx1"/>
+          </a:fontRef>
+        </p:style>
+      </p:cxnSp>
+      <p:cxnSp>
+        <p:nvCxnSpPr>
+          <p:cNvPr id="18" name="Straight Arrow Connector 17">
+            <a:extLst>
+              <a:ext uri="{FF2B5EF4-FFF2-40B4-BE49-F238E27FC236}">
+                <a16:creationId xmlns:a16="http://schemas.microsoft.com/office/drawing/2014/main" id="{4FEDC211-5E56-9A05-3A94-605339656DA5}"/>
+              </a:ext>
+            </a:extLst>
+          </p:cNvPr>
+          <p:cNvCxnSpPr>
+            <a:cxnSpLocks/>
+          </p:cNvCxnSpPr>
+          <p:nvPr/>
+        </p:nvCxnSpPr>
+        <p:spPr>
+          <a:xfrm>
+            <a:off x="5794152" y="3428997"/>
+            <a:ext cx="923345" cy="0"/>
+          </a:xfrm>
+          <a:prstGeom prst="straightConnector1">
+            <a:avLst/>
+          </a:prstGeom>
+          <a:ln w="41275">
+            <a:tailEnd type="triangle"/>
+          </a:ln>
+        </p:spPr>
+        <p:style>
+          <a:lnRef idx="1">
+            <a:schemeClr val="accent1"/>
+          </a:lnRef>
+          <a:fillRef idx="0">
+            <a:schemeClr val="accent1"/>
+          </a:fillRef>
+          <a:effectRef idx="0">
+            <a:schemeClr val="accent1"/>
+          </a:effectRef>
+          <a:fontRef idx="minor">
+            <a:schemeClr val="tx1"/>
+          </a:fontRef>
+        </p:style>
+      </p:cxnSp>
+      <p:cxnSp>
+        <p:nvCxnSpPr>
+          <p:cNvPr id="21" name="Straight Arrow Connector 20">
+            <a:extLst>
+              <a:ext uri="{FF2B5EF4-FFF2-40B4-BE49-F238E27FC236}">
+                <a16:creationId xmlns:a16="http://schemas.microsoft.com/office/drawing/2014/main" id="{8AD057B4-A1D2-FB55-8147-1BE9B907ABC0}"/>
+              </a:ext>
+            </a:extLst>
+          </p:cNvPr>
+          <p:cNvCxnSpPr>
+            <a:cxnSpLocks/>
+          </p:cNvCxnSpPr>
+          <p:nvPr/>
+        </p:nvCxnSpPr>
+        <p:spPr>
+          <a:xfrm>
+            <a:off x="9130143" y="3428997"/>
+            <a:ext cx="1070313" cy="0"/>
+          </a:xfrm>
+          <a:prstGeom prst="straightConnector1">
+            <a:avLst/>
+          </a:prstGeom>
+          <a:ln w="41275">
+            <a:tailEnd type="triangle"/>
+          </a:ln>
+        </p:spPr>
+        <p:style>
+          <a:lnRef idx="1">
+            <a:schemeClr val="accent1"/>
+          </a:lnRef>
+          <a:fillRef idx="0">
+            <a:schemeClr val="accent1"/>
+          </a:fillRef>
+          <a:effectRef idx="0">
+            <a:schemeClr val="accent1"/>
+          </a:effectRef>
+          <a:fontRef idx="minor">
+            <a:schemeClr val="tx1"/>
+          </a:fontRef>
+        </p:style>
+      </p:cxnSp>
+      <p:sp>
+        <p:nvSpPr>
+          <p:cNvPr id="23" name="Rectangle 22">
+            <a:extLst>
+              <a:ext uri="{FF2B5EF4-FFF2-40B4-BE49-F238E27FC236}">
+                <a16:creationId xmlns:a16="http://schemas.microsoft.com/office/drawing/2014/main" id="{CE29678A-8B62-0583-34FE-296554AE8A27}"/>
+              </a:ext>
+            </a:extLst>
+          </p:cNvPr>
+          <p:cNvSpPr/>
+          <p:nvPr/>
+        </p:nvSpPr>
+        <p:spPr>
+          <a:xfrm>
+            <a:off x="2515934" y="4964997"/>
+            <a:ext cx="1308850" cy="1172073"/>
+          </a:xfrm>
+          <a:prstGeom prst="rect">
+            <a:avLst/>
+          </a:prstGeom>
+          <a:solidFill>
+            <a:srgbClr val="00B050"/>
+          </a:solidFill>
+          <a:ln>
+            <a:solidFill>
+              <a:schemeClr val="accent1"/>
+            </a:solidFill>
+          </a:ln>
+        </p:spPr>
+        <p:style>
+          <a:lnRef idx="2">
+            <a:schemeClr val="accent1">
+              <a:shade val="15000"/>
+            </a:schemeClr>
+          </a:lnRef>
+          <a:fillRef idx="1">
+            <a:schemeClr val="accent1"/>
+          </a:fillRef>
+          <a:effectRef idx="0">
+            <a:schemeClr val="accent1"/>
+          </a:effectRef>
+          <a:fontRef idx="minor">
+            <a:schemeClr val="lt1"/>
+          </a:fontRef>
+        </p:style>
+        <p:txBody>
+          <a:bodyPr rtlCol="0" anchor="ctr"/>
+          <a:lstStyle/>
+          <a:p>
+            <a:pPr algn="ctr"/>
+            <a:r>
+              <a:rPr lang="en-US" dirty="0"/>
+              <a:t>Either x or y or bot are non-integers</a:t>
+            </a:r>
+          </a:p>
+        </p:txBody>
+      </p:sp>
+      <p:sp>
+        <p:nvSpPr>
+          <p:cNvPr id="24" name="Rectangle 23">
+            <a:extLst>
+              <a:ext uri="{FF2B5EF4-FFF2-40B4-BE49-F238E27FC236}">
+                <a16:creationId xmlns:a16="http://schemas.microsoft.com/office/drawing/2014/main" id="{513CAD2F-092E-57C3-7BBD-69088AD04EFD}"/>
+              </a:ext>
+            </a:extLst>
+          </p:cNvPr>
+          <p:cNvSpPr/>
+          <p:nvPr/>
+        </p:nvSpPr>
+        <p:spPr>
+          <a:xfrm>
+            <a:off x="4570739" y="4964996"/>
+            <a:ext cx="1318356" cy="1143001"/>
+          </a:xfrm>
+          <a:prstGeom prst="rect">
+            <a:avLst/>
+          </a:prstGeom>
+          <a:solidFill>
+            <a:srgbClr val="00B050"/>
+          </a:solidFill>
+          <a:ln>
+            <a:solidFill>
+              <a:schemeClr val="accent1"/>
+            </a:solidFill>
+          </a:ln>
+        </p:spPr>
+        <p:style>
+          <a:lnRef idx="2">
+            <a:schemeClr val="accent1">
+              <a:shade val="15000"/>
+            </a:schemeClr>
+          </a:lnRef>
+          <a:fillRef idx="1">
+            <a:schemeClr val="accent1"/>
+          </a:fillRef>
+          <a:effectRef idx="0">
+            <a:schemeClr val="accent1"/>
+          </a:effectRef>
+          <a:fontRef idx="minor">
+            <a:schemeClr val="lt1"/>
+          </a:fontRef>
+        </p:style>
+        <p:txBody>
+          <a:bodyPr rtlCol="0" anchor="ctr"/>
+          <a:lstStyle/>
+          <a:p>
+            <a:pPr algn="ctr"/>
+            <a:r>
+              <a:rPr lang="en-US" dirty="0"/>
+              <a:t>x </a:t>
+            </a:r>
+            <a:r>
+              <a:rPr lang="en-US" dirty="0">
+                <a:sym typeface="Wingdings" pitchFamily="2" charset="2"/>
+              </a:rPr>
+              <a:t> 10.0</a:t>
+            </a:r>
+          </a:p>
+          <a:p>
+            <a:pPr algn="ctr"/>
+            <a:r>
+              <a:rPr lang="en-US" dirty="0">
+                <a:sym typeface="Wingdings" pitchFamily="2" charset="2"/>
+              </a:rPr>
+              <a:t>y  6  </a:t>
+            </a:r>
+            <a:endParaRPr lang="en-US" dirty="0"/>
+          </a:p>
+        </p:txBody>
+      </p:sp>
+      <p:sp>
+        <p:nvSpPr>
+          <p:cNvPr id="25" name="Rectangle 24">
+            <a:extLst>
+              <a:ext uri="{FF2B5EF4-FFF2-40B4-BE49-F238E27FC236}">
+                <a16:creationId xmlns:a16="http://schemas.microsoft.com/office/drawing/2014/main" id="{7B484DB1-3BBE-EEF5-8631-9A58C532B6FB}"/>
+              </a:ext>
+            </a:extLst>
+          </p:cNvPr>
+          <p:cNvSpPr/>
+          <p:nvPr/>
+        </p:nvSpPr>
+        <p:spPr>
+          <a:xfrm>
+            <a:off x="6827295" y="4805452"/>
+            <a:ext cx="2412646" cy="1462087"/>
+          </a:xfrm>
+          <a:prstGeom prst="rect">
+            <a:avLst/>
+          </a:prstGeom>
+          <a:solidFill>
+            <a:srgbClr val="00B050"/>
+          </a:solidFill>
+          <a:ln>
+            <a:solidFill>
+              <a:srgbClr val="009C5C"/>
+            </a:solidFill>
+          </a:ln>
+        </p:spPr>
+        <p:style>
+          <a:lnRef idx="2">
+            <a:schemeClr val="accent1">
+              <a:shade val="15000"/>
+            </a:schemeClr>
+          </a:lnRef>
+          <a:fillRef idx="1">
+            <a:schemeClr val="accent1"/>
+          </a:fillRef>
+          <a:effectRef idx="0">
+            <a:schemeClr val="accent1"/>
+          </a:effectRef>
+          <a:fontRef idx="minor">
+            <a:schemeClr val="lt1"/>
+          </a:fontRef>
+        </p:style>
+        <p:txBody>
+          <a:bodyPr rtlCol="0" anchor="ctr"/>
+          <a:lstStyle/>
+          <a:p>
+            <a:pPr algn="ctr"/>
+            <a:r>
+              <a:rPr lang="en-US" sz="2800" dirty="0"/>
+              <a:t>x / y</a:t>
+            </a:r>
+            <a:endParaRPr lang="en-US" sz="2800" dirty="0">
+              <a:sym typeface="Wingdings" pitchFamily="2" charset="2"/>
+            </a:endParaRPr>
+          </a:p>
+          <a:p>
+            <a:pPr algn="ctr"/>
+            <a:r>
+              <a:rPr lang="en-US" sz="2800" dirty="0"/>
+              <a:t>10.0 / 6</a:t>
+            </a:r>
+            <a:endParaRPr lang="en-US" dirty="0">
+              <a:sym typeface="Wingdings" pitchFamily="2" charset="2"/>
+            </a:endParaRPr>
+          </a:p>
+        </p:txBody>
+      </p:sp>
+      <p:sp>
+        <p:nvSpPr>
+          <p:cNvPr id="26" name="Rectangle 25">
+            <a:extLst>
+              <a:ext uri="{FF2B5EF4-FFF2-40B4-BE49-F238E27FC236}">
+                <a16:creationId xmlns:a16="http://schemas.microsoft.com/office/drawing/2014/main" id="{BB63FFA4-3E94-E271-4CA1-0CB42A2CC370}"/>
+              </a:ext>
+            </a:extLst>
+          </p:cNvPr>
+          <p:cNvSpPr/>
+          <p:nvPr/>
+        </p:nvSpPr>
+        <p:spPr>
+          <a:xfrm>
+            <a:off x="10163977" y="4819989"/>
+            <a:ext cx="1969368" cy="1462087"/>
+          </a:xfrm>
+          <a:prstGeom prst="rect">
+            <a:avLst/>
+          </a:prstGeom>
+          <a:solidFill>
+            <a:srgbClr val="FFC000"/>
+          </a:solidFill>
+          <a:ln>
+            <a:solidFill>
+              <a:schemeClr val="accent1"/>
+            </a:solidFill>
+          </a:ln>
+        </p:spPr>
+        <p:style>
+          <a:lnRef idx="2">
+            <a:schemeClr val="accent1">
+              <a:shade val="15000"/>
+            </a:schemeClr>
+          </a:lnRef>
+          <a:fillRef idx="1">
+            <a:schemeClr val="accent1"/>
+          </a:fillRef>
+          <a:effectRef idx="0">
+            <a:schemeClr val="accent1"/>
+          </a:effectRef>
+          <a:fontRef idx="minor">
+            <a:schemeClr val="lt1"/>
+          </a:fontRef>
+        </p:style>
+        <p:txBody>
+          <a:bodyPr rtlCol="0" anchor="ctr"/>
+          <a:lstStyle/>
+          <a:p>
+            <a:pPr algn="ctr"/>
+            <a:r>
+              <a:rPr lang="en-US" sz="2800" dirty="0">
+                <a:sym typeface="Wingdings" pitchFamily="2" charset="2"/>
+              </a:rPr>
+              <a:t>1.666</a:t>
+            </a:r>
+          </a:p>
+        </p:txBody>
+      </p:sp>
+      <p:cxnSp>
+        <p:nvCxnSpPr>
+          <p:cNvPr id="27" name="Straight Arrow Connector 26">
+            <a:extLst>
+              <a:ext uri="{FF2B5EF4-FFF2-40B4-BE49-F238E27FC236}">
+                <a16:creationId xmlns:a16="http://schemas.microsoft.com/office/drawing/2014/main" id="{3E6C5B0C-6C76-A4B4-C512-1C3226D6DE99}"/>
+              </a:ext>
+            </a:extLst>
+          </p:cNvPr>
+          <p:cNvCxnSpPr>
+            <a:cxnSpLocks/>
+            <a:stCxn id="7" idx="3"/>
+          </p:cNvCxnSpPr>
+          <p:nvPr/>
+        </p:nvCxnSpPr>
+        <p:spPr>
+          <a:xfrm>
+            <a:off x="1487488" y="4114799"/>
+            <a:ext cx="1028446" cy="1257295"/>
+          </a:xfrm>
+          <a:prstGeom prst="straightConnector1">
+            <a:avLst/>
+          </a:prstGeom>
+          <a:ln w="41275">
+            <a:solidFill>
+              <a:srgbClr val="00B050"/>
+            </a:solidFill>
+            <a:tailEnd type="triangle"/>
+          </a:ln>
+        </p:spPr>
+        <p:style>
+          <a:lnRef idx="1">
+            <a:schemeClr val="accent1"/>
+          </a:lnRef>
+          <a:fillRef idx="0">
+            <a:schemeClr val="accent1"/>
+          </a:fillRef>
+          <a:effectRef idx="0">
+            <a:schemeClr val="accent1"/>
+          </a:effectRef>
+          <a:fontRef idx="minor">
+            <a:schemeClr val="tx1"/>
+          </a:fontRef>
+        </p:style>
+      </p:cxnSp>
+      <p:cxnSp>
+        <p:nvCxnSpPr>
+          <p:cNvPr id="28" name="Straight Arrow Connector 27">
+            <a:extLst>
+              <a:ext uri="{FF2B5EF4-FFF2-40B4-BE49-F238E27FC236}">
+                <a16:creationId xmlns:a16="http://schemas.microsoft.com/office/drawing/2014/main" id="{20256DCC-BFD8-D081-D864-A3C871D6B9BE}"/>
+              </a:ext>
+            </a:extLst>
+          </p:cNvPr>
+          <p:cNvCxnSpPr>
+            <a:cxnSpLocks/>
+          </p:cNvCxnSpPr>
+          <p:nvPr/>
+        </p:nvCxnSpPr>
+        <p:spPr>
+          <a:xfrm>
+            <a:off x="3690997" y="5457119"/>
+            <a:ext cx="879742" cy="1"/>
+          </a:xfrm>
+          <a:prstGeom prst="straightConnector1">
+            <a:avLst/>
+          </a:prstGeom>
+          <a:ln w="41275">
+            <a:solidFill>
+              <a:srgbClr val="00B050"/>
+            </a:solidFill>
+            <a:tailEnd type="triangle"/>
+          </a:ln>
+        </p:spPr>
+        <p:style>
+          <a:lnRef idx="1">
+            <a:schemeClr val="accent1"/>
+          </a:lnRef>
+          <a:fillRef idx="0">
+            <a:schemeClr val="accent1"/>
+          </a:fillRef>
+          <a:effectRef idx="0">
+            <a:schemeClr val="accent1"/>
+          </a:effectRef>
+          <a:fontRef idx="minor">
+            <a:schemeClr val="tx1"/>
+          </a:fontRef>
+        </p:style>
+      </p:cxnSp>
+      <p:cxnSp>
+        <p:nvCxnSpPr>
+          <p:cNvPr id="29" name="Straight Arrow Connector 28">
+            <a:extLst>
+              <a:ext uri="{FF2B5EF4-FFF2-40B4-BE49-F238E27FC236}">
+                <a16:creationId xmlns:a16="http://schemas.microsoft.com/office/drawing/2014/main" id="{F335F5D9-3536-8840-A056-49D410894477}"/>
+              </a:ext>
+            </a:extLst>
+          </p:cNvPr>
+          <p:cNvCxnSpPr>
+            <a:cxnSpLocks/>
+          </p:cNvCxnSpPr>
+          <p:nvPr/>
+        </p:nvCxnSpPr>
+        <p:spPr>
+          <a:xfrm>
+            <a:off x="5903950" y="5536495"/>
+            <a:ext cx="923345" cy="0"/>
+          </a:xfrm>
+          <a:prstGeom prst="straightConnector1">
+            <a:avLst/>
+          </a:prstGeom>
+          <a:ln w="41275">
+            <a:solidFill>
+              <a:srgbClr val="00B050"/>
+            </a:solidFill>
+            <a:tailEnd type="triangle"/>
+          </a:ln>
+        </p:spPr>
+        <p:style>
+          <a:lnRef idx="1">
+            <a:schemeClr val="accent1"/>
+          </a:lnRef>
+          <a:fillRef idx="0">
+            <a:schemeClr val="accent1"/>
+          </a:fillRef>
+          <a:effectRef idx="0">
+            <a:schemeClr val="accent1"/>
+          </a:effectRef>
+          <a:fontRef idx="minor">
+            <a:schemeClr val="tx1"/>
+          </a:fontRef>
+        </p:style>
+      </p:cxnSp>
+      <p:cxnSp>
+        <p:nvCxnSpPr>
+          <p:cNvPr id="30" name="Straight Arrow Connector 29">
+            <a:extLst>
+              <a:ext uri="{FF2B5EF4-FFF2-40B4-BE49-F238E27FC236}">
+                <a16:creationId xmlns:a16="http://schemas.microsoft.com/office/drawing/2014/main" id="{97EEF296-5500-4098-F8DD-D4D8891ADBB3}"/>
+              </a:ext>
+            </a:extLst>
+          </p:cNvPr>
+          <p:cNvCxnSpPr>
+            <a:cxnSpLocks/>
+          </p:cNvCxnSpPr>
+          <p:nvPr/>
+        </p:nvCxnSpPr>
+        <p:spPr>
+          <a:xfrm>
+            <a:off x="9130143" y="5372094"/>
+            <a:ext cx="1070313" cy="0"/>
+          </a:xfrm>
+          <a:prstGeom prst="straightConnector1">
+            <a:avLst/>
+          </a:prstGeom>
+          <a:ln w="41275">
+            <a:solidFill>
+              <a:srgbClr val="00B050"/>
+            </a:solidFill>
+            <a:tailEnd type="triangle"/>
+          </a:ln>
+        </p:spPr>
+        <p:style>
+          <a:lnRef idx="1">
+            <a:schemeClr val="accent1"/>
+          </a:lnRef>
+          <a:fillRef idx="0">
+            <a:schemeClr val="accent1"/>
+          </a:fillRef>
+          <a:effectRef idx="0">
+            <a:schemeClr val="accent1"/>
+          </a:effectRef>
+          <a:fontRef idx="minor">
+            <a:schemeClr val="tx1"/>
+          </a:fontRef>
+        </p:style>
+      </p:cxnSp>
+    </p:spTree>
+    <p:extLst>
+      <p:ext uri="{BB962C8B-B14F-4D97-AF65-F5344CB8AC3E}">
+        <p14:creationId xmlns:p14="http://schemas.microsoft.com/office/powerpoint/2010/main" val="2334857494"/>
+      </p:ext>
+    </p:extLst>
+  </p:cSld>
+  <p:clrMapOvr>
+    <a:masterClrMapping/>
+  </p:clrMapOvr>
+  <p:timing>
+    <p:tnLst>
+      <p:par>
+        <p:cTn id="1" dur="indefinite" restart="never" nodeType="tmRoot">
+          <p:childTnLst>
+            <p:seq concurrent="1" nextAc="seek">
+              <p:cTn id="2" dur="indefinite" nodeType="mainSeq">
+                <p:childTnLst>
+                  <p:par>
+                    <p:cTn id="3" fill="hold">
+                      <p:stCondLst>
+                        <p:cond delay="indefinite"/>
+                      </p:stCondLst>
+                      <p:childTnLst>
+                        <p:par>
+                          <p:cTn id="4" fill="hold">
+                            <p:stCondLst>
+                              <p:cond delay="0"/>
+                            </p:stCondLst>
+                            <p:childTnLst>
+                              <p:par>
+                                <p:cTn id="5" presetID="2" presetClass="entr" presetSubtype="4" fill="hold" nodeType="clickEffect">
+                                  <p:stCondLst>
+                                    <p:cond delay="0"/>
+                                  </p:stCondLst>
+                                  <p:childTnLst>
+                                    <p:set>
+                                      <p:cBhvr>
+                                        <p:cTn id="6" dur="1" fill="hold">
+                                          <p:stCondLst>
+                                            <p:cond delay="0"/>
+                                          </p:stCondLst>
+                                        </p:cTn>
+                                        <p:tgtEl>
+                                          <p:spTgt spid="13"/>
+                                        </p:tgtEl>
+                                        <p:attrNameLst>
+                                          <p:attrName>style.visibility</p:attrName>
+                                        </p:attrNameLst>
+                                      </p:cBhvr>
+                                      <p:to>
+                                        <p:strVal val="visible"/>
+                                      </p:to>
+                                    </p:set>
+                                    <p:anim calcmode="lin" valueType="num">
+                                      <p:cBhvr additive="base">
+                                        <p:cTn id="7" dur="500" fill="hold"/>
+                                        <p:tgtEl>
+                                          <p:spTgt spid="13"/>
+                                        </p:tgtEl>
+                                        <p:attrNameLst>
+                                          <p:attrName>ppt_x</p:attrName>
+                                        </p:attrNameLst>
+                                      </p:cBhvr>
+                                      <p:tavLst>
+                                        <p:tav tm="0">
+                                          <p:val>
+                                            <p:strVal val="#ppt_x"/>
+                                          </p:val>
+                                        </p:tav>
+                                        <p:tav tm="100000">
+                                          <p:val>
+                                            <p:strVal val="#ppt_x"/>
+                                          </p:val>
+                                        </p:tav>
+                                      </p:tavLst>
+                                    </p:anim>
+                                    <p:anim calcmode="lin" valueType="num">
+                                      <p:cBhvr additive="base">
+                                        <p:cTn id="8" dur="500" fill="hold"/>
+                                        <p:tgtEl>
+                                          <p:spTgt spid="13"/>
+                                        </p:tgtEl>
+                                        <p:attrNameLst>
+                                          <p:attrName>ppt_y</p:attrName>
+                                        </p:attrNameLst>
+                                      </p:cBhvr>
+                                      <p:tavLst>
+                                        <p:tav tm="0">
+                                          <p:val>
+                                            <p:strVal val="1+#ppt_h/2"/>
+                                          </p:val>
+                                        </p:tav>
+                                        <p:tav tm="100000">
+                                          <p:val>
+                                            <p:strVal val="#ppt_y"/>
+                                          </p:val>
+                                        </p:tav>
+                                      </p:tavLst>
+                                    </p:anim>
+                                  </p:childTnLst>
+                                </p:cTn>
+                              </p:par>
+                              <p:par>
+                                <p:cTn id="9" presetID="2" presetClass="entr" presetSubtype="4" fill="hold" grpId="0" nodeType="withEffect">
+                                  <p:stCondLst>
+                                    <p:cond delay="0"/>
+                                  </p:stCondLst>
+                                  <p:childTnLst>
+                                    <p:set>
+                                      <p:cBhvr>
+                                        <p:cTn id="10" dur="1" fill="hold">
+                                          <p:stCondLst>
+                                            <p:cond delay="0"/>
+                                          </p:stCondLst>
+                                        </p:cTn>
+                                        <p:tgtEl>
+                                          <p:spTgt spid="8"/>
+                                        </p:tgtEl>
+                                        <p:attrNameLst>
+                                          <p:attrName>style.visibility</p:attrName>
+                                        </p:attrNameLst>
+                                      </p:cBhvr>
+                                      <p:to>
+                                        <p:strVal val="visible"/>
+                                      </p:to>
+                                    </p:set>
+                                    <p:anim calcmode="lin" valueType="num">
+                                      <p:cBhvr additive="base">
+                                        <p:cTn id="11" dur="500" fill="hold"/>
+                                        <p:tgtEl>
+                                          <p:spTgt spid="8"/>
+                                        </p:tgtEl>
+                                        <p:attrNameLst>
+                                          <p:attrName>ppt_x</p:attrName>
+                                        </p:attrNameLst>
+                                      </p:cBhvr>
+                                      <p:tavLst>
+                                        <p:tav tm="0">
+                                          <p:val>
+                                            <p:strVal val="#ppt_x"/>
+                                          </p:val>
+                                        </p:tav>
+                                        <p:tav tm="100000">
+                                          <p:val>
+                                            <p:strVal val="#ppt_x"/>
+                                          </p:val>
+                                        </p:tav>
+                                      </p:tavLst>
+                                    </p:anim>
+                                    <p:anim calcmode="lin" valueType="num">
+                                      <p:cBhvr additive="base">
+                                        <p:cTn id="12" dur="500" fill="hold"/>
+                                        <p:tgtEl>
+                                          <p:spTgt spid="8"/>
+                                        </p:tgtEl>
+                                        <p:attrNameLst>
+                                          <p:attrName>ppt_y</p:attrName>
+                                        </p:attrNameLst>
+                                      </p:cBhvr>
+                                      <p:tavLst>
+                                        <p:tav tm="0">
+                                          <p:val>
+                                            <p:strVal val="1+#ppt_h/2"/>
+                                          </p:val>
+                                        </p:tav>
+                                        <p:tav tm="100000">
+                                          <p:val>
+                                            <p:strVal val="#ppt_y"/>
+                                          </p:val>
+                                        </p:tav>
+                                      </p:tavLst>
+                                    </p:anim>
+                                  </p:childTnLst>
+                                </p:cTn>
+                              </p:par>
+                            </p:childTnLst>
+                          </p:cTn>
+                        </p:par>
+                      </p:childTnLst>
+                    </p:cTn>
+                  </p:par>
+                  <p:par>
+                    <p:cTn id="13" fill="hold">
+                      <p:stCondLst>
+                        <p:cond delay="indefinite"/>
+                      </p:stCondLst>
+                      <p:childTnLst>
+                        <p:par>
+                          <p:cTn id="14" fill="hold">
+                            <p:stCondLst>
+                              <p:cond delay="0"/>
+                            </p:stCondLst>
+                            <p:childTnLst>
+                              <p:par>
+                                <p:cTn id="15" presetID="2" presetClass="entr" presetSubtype="4" fill="hold" nodeType="clickEffect">
+                                  <p:stCondLst>
+                                    <p:cond delay="0"/>
+                                  </p:stCondLst>
+                                  <p:childTnLst>
+                                    <p:set>
+                                      <p:cBhvr>
+                                        <p:cTn id="16" dur="1" fill="hold">
+                                          <p:stCondLst>
+                                            <p:cond delay="0"/>
+                                          </p:stCondLst>
+                                        </p:cTn>
+                                        <p:tgtEl>
+                                          <p:spTgt spid="15"/>
+                                        </p:tgtEl>
+                                        <p:attrNameLst>
+                                          <p:attrName>style.visibility</p:attrName>
+                                        </p:attrNameLst>
+                                      </p:cBhvr>
+                                      <p:to>
+                                        <p:strVal val="visible"/>
+                                      </p:to>
+                                    </p:set>
+                                    <p:anim calcmode="lin" valueType="num">
+                                      <p:cBhvr additive="base">
+                                        <p:cTn id="17" dur="500" fill="hold"/>
+                                        <p:tgtEl>
+                                          <p:spTgt spid="15"/>
+                                        </p:tgtEl>
+                                        <p:attrNameLst>
+                                          <p:attrName>ppt_x</p:attrName>
+                                        </p:attrNameLst>
+                                      </p:cBhvr>
+                                      <p:tavLst>
+                                        <p:tav tm="0">
+                                          <p:val>
+                                            <p:strVal val="#ppt_x"/>
+                                          </p:val>
+                                        </p:tav>
+                                        <p:tav tm="100000">
+                                          <p:val>
+                                            <p:strVal val="#ppt_x"/>
+                                          </p:val>
+                                        </p:tav>
+                                      </p:tavLst>
+                                    </p:anim>
+                                    <p:anim calcmode="lin" valueType="num">
+                                      <p:cBhvr additive="base">
+                                        <p:cTn id="18" dur="500" fill="hold"/>
+                                        <p:tgtEl>
+                                          <p:spTgt spid="15"/>
+                                        </p:tgtEl>
+                                        <p:attrNameLst>
+                                          <p:attrName>ppt_y</p:attrName>
+                                        </p:attrNameLst>
+                                      </p:cBhvr>
+                                      <p:tavLst>
+                                        <p:tav tm="0">
+                                          <p:val>
+                                            <p:strVal val="1+#ppt_h/2"/>
+                                          </p:val>
+                                        </p:tav>
+                                        <p:tav tm="100000">
+                                          <p:val>
+                                            <p:strVal val="#ppt_y"/>
+                                          </p:val>
+                                        </p:tav>
+                                      </p:tavLst>
+                                    </p:anim>
+                                  </p:childTnLst>
+                                </p:cTn>
+                              </p:par>
+                              <p:par>
+                                <p:cTn id="19" presetID="2" presetClass="entr" presetSubtype="4" fill="hold" grpId="0" nodeType="withEffect">
+                                  <p:stCondLst>
+                                    <p:cond delay="0"/>
+                                  </p:stCondLst>
+                                  <p:childTnLst>
+                                    <p:set>
+                                      <p:cBhvr>
+                                        <p:cTn id="20" dur="1" fill="hold">
+                                          <p:stCondLst>
+                                            <p:cond delay="0"/>
+                                          </p:stCondLst>
+                                        </p:cTn>
+                                        <p:tgtEl>
+                                          <p:spTgt spid="9"/>
+                                        </p:tgtEl>
+                                        <p:attrNameLst>
+                                          <p:attrName>style.visibility</p:attrName>
+                                        </p:attrNameLst>
+                                      </p:cBhvr>
+                                      <p:to>
+                                        <p:strVal val="visible"/>
+                                      </p:to>
+                                    </p:set>
+                                    <p:anim calcmode="lin" valueType="num">
+                                      <p:cBhvr additive="base">
+                                        <p:cTn id="21" dur="500" fill="hold"/>
+                                        <p:tgtEl>
+                                          <p:spTgt spid="9"/>
+                                        </p:tgtEl>
+                                        <p:attrNameLst>
+                                          <p:attrName>ppt_x</p:attrName>
+                                        </p:attrNameLst>
+                                      </p:cBhvr>
+                                      <p:tavLst>
+                                        <p:tav tm="0">
+                                          <p:val>
+                                            <p:strVal val="#ppt_x"/>
+                                          </p:val>
+                                        </p:tav>
+                                        <p:tav tm="100000">
+                                          <p:val>
+                                            <p:strVal val="#ppt_x"/>
+                                          </p:val>
+                                        </p:tav>
+                                      </p:tavLst>
+                                    </p:anim>
+                                    <p:anim calcmode="lin" valueType="num">
+                                      <p:cBhvr additive="base">
+                                        <p:cTn id="22" dur="500" fill="hold"/>
+                                        <p:tgtEl>
+                                          <p:spTgt spid="9"/>
+                                        </p:tgtEl>
+                                        <p:attrNameLst>
+                                          <p:attrName>ppt_y</p:attrName>
+                                        </p:attrNameLst>
+                                      </p:cBhvr>
+                                      <p:tavLst>
+                                        <p:tav tm="0">
+                                          <p:val>
+                                            <p:strVal val="1+#ppt_h/2"/>
+                                          </p:val>
+                                        </p:tav>
+                                        <p:tav tm="100000">
+                                          <p:val>
+                                            <p:strVal val="#ppt_y"/>
+                                          </p:val>
+                                        </p:tav>
+                                      </p:tavLst>
+                                    </p:anim>
+                                  </p:childTnLst>
+                                </p:cTn>
+                              </p:par>
+                            </p:childTnLst>
+                          </p:cTn>
+                        </p:par>
+                      </p:childTnLst>
+                    </p:cTn>
+                  </p:par>
+                  <p:par>
+                    <p:cTn id="23" fill="hold">
+                      <p:stCondLst>
+                        <p:cond delay="indefinite"/>
+                      </p:stCondLst>
+                      <p:childTnLst>
+                        <p:par>
+                          <p:cTn id="24" fill="hold">
+                            <p:stCondLst>
+                              <p:cond delay="0"/>
+                            </p:stCondLst>
+                            <p:childTnLst>
+                              <p:par>
+                                <p:cTn id="25" presetID="2" presetClass="entr" presetSubtype="4" fill="hold" nodeType="clickEffect">
+                                  <p:stCondLst>
+                                    <p:cond delay="0"/>
+                                  </p:stCondLst>
+                                  <p:childTnLst>
+                                    <p:set>
+                                      <p:cBhvr>
+                                        <p:cTn id="26" dur="1" fill="hold">
+                                          <p:stCondLst>
+                                            <p:cond delay="0"/>
+                                          </p:stCondLst>
+                                        </p:cTn>
+                                        <p:tgtEl>
+                                          <p:spTgt spid="18"/>
+                                        </p:tgtEl>
+                                        <p:attrNameLst>
+                                          <p:attrName>style.visibility</p:attrName>
+                                        </p:attrNameLst>
+                                      </p:cBhvr>
+                                      <p:to>
+                                        <p:strVal val="visible"/>
+                                      </p:to>
+                                    </p:set>
+                                    <p:anim calcmode="lin" valueType="num">
+                                      <p:cBhvr additive="base">
+                                        <p:cTn id="27" dur="500" fill="hold"/>
+                                        <p:tgtEl>
+                                          <p:spTgt spid="18"/>
+                                        </p:tgtEl>
+                                        <p:attrNameLst>
+                                          <p:attrName>ppt_x</p:attrName>
+                                        </p:attrNameLst>
+                                      </p:cBhvr>
+                                      <p:tavLst>
+                                        <p:tav tm="0">
+                                          <p:val>
+                                            <p:strVal val="#ppt_x"/>
+                                          </p:val>
+                                        </p:tav>
+                                        <p:tav tm="100000">
+                                          <p:val>
+                                            <p:strVal val="#ppt_x"/>
+                                          </p:val>
+                                        </p:tav>
+                                      </p:tavLst>
+                                    </p:anim>
+                                    <p:anim calcmode="lin" valueType="num">
+                                      <p:cBhvr additive="base">
+                                        <p:cTn id="28" dur="500" fill="hold"/>
+                                        <p:tgtEl>
+                                          <p:spTgt spid="18"/>
+                                        </p:tgtEl>
+                                        <p:attrNameLst>
+                                          <p:attrName>ppt_y</p:attrName>
+                                        </p:attrNameLst>
+                                      </p:cBhvr>
+                                      <p:tavLst>
+                                        <p:tav tm="0">
+                                          <p:val>
+                                            <p:strVal val="1+#ppt_h/2"/>
+                                          </p:val>
+                                        </p:tav>
+                                        <p:tav tm="100000">
+                                          <p:val>
+                                            <p:strVal val="#ppt_y"/>
+                                          </p:val>
+                                        </p:tav>
+                                      </p:tavLst>
+                                    </p:anim>
+                                  </p:childTnLst>
+                                </p:cTn>
+                              </p:par>
+                              <p:par>
+                                <p:cTn id="29" presetID="2" presetClass="entr" presetSubtype="4" fill="hold" grpId="0" nodeType="withEffect">
+                                  <p:stCondLst>
+                                    <p:cond delay="0"/>
+                                  </p:stCondLst>
+                                  <p:childTnLst>
+                                    <p:set>
+                                      <p:cBhvr>
+                                        <p:cTn id="30" dur="1" fill="hold">
+                                          <p:stCondLst>
+                                            <p:cond delay="0"/>
+                                          </p:stCondLst>
+                                        </p:cTn>
+                                        <p:tgtEl>
+                                          <p:spTgt spid="10"/>
+                                        </p:tgtEl>
+                                        <p:attrNameLst>
+                                          <p:attrName>style.visibility</p:attrName>
+                                        </p:attrNameLst>
+                                      </p:cBhvr>
+                                      <p:to>
+                                        <p:strVal val="visible"/>
+                                      </p:to>
+                                    </p:set>
+                                    <p:anim calcmode="lin" valueType="num">
+                                      <p:cBhvr additive="base">
+                                        <p:cTn id="31" dur="500" fill="hold"/>
+                                        <p:tgtEl>
+                                          <p:spTgt spid="10"/>
+                                        </p:tgtEl>
+                                        <p:attrNameLst>
+                                          <p:attrName>ppt_x</p:attrName>
+                                        </p:attrNameLst>
+                                      </p:cBhvr>
+                                      <p:tavLst>
+                                        <p:tav tm="0">
+                                          <p:val>
+                                            <p:strVal val="#ppt_x"/>
+                                          </p:val>
+                                        </p:tav>
+                                        <p:tav tm="100000">
+                                          <p:val>
+                                            <p:strVal val="#ppt_x"/>
+                                          </p:val>
+                                        </p:tav>
+                                      </p:tavLst>
+                                    </p:anim>
+                                    <p:anim calcmode="lin" valueType="num">
+                                      <p:cBhvr additive="base">
+                                        <p:cTn id="32" dur="500" fill="hold"/>
+                                        <p:tgtEl>
+                                          <p:spTgt spid="10"/>
+                                        </p:tgtEl>
+                                        <p:attrNameLst>
+                                          <p:attrName>ppt_y</p:attrName>
+                                        </p:attrNameLst>
+                                      </p:cBhvr>
+                                      <p:tavLst>
+                                        <p:tav tm="0">
+                                          <p:val>
+                                            <p:strVal val="1+#ppt_h/2"/>
+                                          </p:val>
+                                        </p:tav>
+                                        <p:tav tm="100000">
+                                          <p:val>
+                                            <p:strVal val="#ppt_y"/>
+                                          </p:val>
+                                        </p:tav>
+                                      </p:tavLst>
+                                    </p:anim>
+                                  </p:childTnLst>
+                                </p:cTn>
+                              </p:par>
+                            </p:childTnLst>
+                          </p:cTn>
+                        </p:par>
+                      </p:childTnLst>
+                    </p:cTn>
+                  </p:par>
+                  <p:par>
+                    <p:cTn id="33" fill="hold">
+                      <p:stCondLst>
+                        <p:cond delay="indefinite"/>
+                      </p:stCondLst>
+                      <p:childTnLst>
+                        <p:par>
+                          <p:cTn id="34" fill="hold">
+                            <p:stCondLst>
+                              <p:cond delay="0"/>
+                            </p:stCondLst>
+                            <p:childTnLst>
+                              <p:par>
+                                <p:cTn id="35" presetID="2" presetClass="entr" presetSubtype="4" fill="hold" nodeType="clickEffect">
+                                  <p:stCondLst>
+                                    <p:cond delay="0"/>
+                                  </p:stCondLst>
+                                  <p:childTnLst>
+                                    <p:set>
+                                      <p:cBhvr>
+                                        <p:cTn id="36" dur="1" fill="hold">
+                                          <p:stCondLst>
+                                            <p:cond delay="0"/>
+                                          </p:stCondLst>
+                                        </p:cTn>
+                                        <p:tgtEl>
+                                          <p:spTgt spid="21"/>
+                                        </p:tgtEl>
+                                        <p:attrNameLst>
+                                          <p:attrName>style.visibility</p:attrName>
+                                        </p:attrNameLst>
+                                      </p:cBhvr>
+                                      <p:to>
+                                        <p:strVal val="visible"/>
+                                      </p:to>
+                                    </p:set>
+                                    <p:anim calcmode="lin" valueType="num">
+                                      <p:cBhvr additive="base">
+                                        <p:cTn id="37" dur="500" fill="hold"/>
+                                        <p:tgtEl>
+                                          <p:spTgt spid="21"/>
+                                        </p:tgtEl>
+                                        <p:attrNameLst>
+                                          <p:attrName>ppt_x</p:attrName>
+                                        </p:attrNameLst>
+                                      </p:cBhvr>
+                                      <p:tavLst>
+                                        <p:tav tm="0">
+                                          <p:val>
+                                            <p:strVal val="#ppt_x"/>
+                                          </p:val>
+                                        </p:tav>
+                                        <p:tav tm="100000">
+                                          <p:val>
+                                            <p:strVal val="#ppt_x"/>
+                                          </p:val>
+                                        </p:tav>
+                                      </p:tavLst>
+                                    </p:anim>
+                                    <p:anim calcmode="lin" valueType="num">
+                                      <p:cBhvr additive="base">
+                                        <p:cTn id="38" dur="500" fill="hold"/>
+                                        <p:tgtEl>
+                                          <p:spTgt spid="21"/>
+                                        </p:tgtEl>
+                                        <p:attrNameLst>
+                                          <p:attrName>ppt_y</p:attrName>
+                                        </p:attrNameLst>
+                                      </p:cBhvr>
+                                      <p:tavLst>
+                                        <p:tav tm="0">
+                                          <p:val>
+                                            <p:strVal val="1+#ppt_h/2"/>
+                                          </p:val>
+                                        </p:tav>
+                                        <p:tav tm="100000">
+                                          <p:val>
+                                            <p:strVal val="#ppt_y"/>
+                                          </p:val>
+                                        </p:tav>
+                                      </p:tavLst>
+                                    </p:anim>
+                                  </p:childTnLst>
+                                </p:cTn>
+                              </p:par>
+                              <p:par>
+                                <p:cTn id="39" presetID="2" presetClass="entr" presetSubtype="4" fill="hold" grpId="0" nodeType="withEffect">
+                                  <p:stCondLst>
+                                    <p:cond delay="0"/>
+                                  </p:stCondLst>
+                                  <p:childTnLst>
+                                    <p:set>
+                                      <p:cBhvr>
+                                        <p:cTn id="40" dur="1" fill="hold">
+                                          <p:stCondLst>
+                                            <p:cond delay="0"/>
+                                          </p:stCondLst>
+                                        </p:cTn>
+                                        <p:tgtEl>
+                                          <p:spTgt spid="11"/>
+                                        </p:tgtEl>
+                                        <p:attrNameLst>
+                                          <p:attrName>style.visibility</p:attrName>
+                                        </p:attrNameLst>
+                                      </p:cBhvr>
+                                      <p:to>
+                                        <p:strVal val="visible"/>
+                                      </p:to>
+                                    </p:set>
+                                    <p:anim calcmode="lin" valueType="num">
+                                      <p:cBhvr additive="base">
+                                        <p:cTn id="41" dur="500" fill="hold"/>
+                                        <p:tgtEl>
+                                          <p:spTgt spid="11"/>
+                                        </p:tgtEl>
+                                        <p:attrNameLst>
+                                          <p:attrName>ppt_x</p:attrName>
+                                        </p:attrNameLst>
+                                      </p:cBhvr>
+                                      <p:tavLst>
+                                        <p:tav tm="0">
+                                          <p:val>
+                                            <p:strVal val="#ppt_x"/>
+                                          </p:val>
+                                        </p:tav>
+                                        <p:tav tm="100000">
+                                          <p:val>
+                                            <p:strVal val="#ppt_x"/>
+                                          </p:val>
+                                        </p:tav>
+                                      </p:tavLst>
+                                    </p:anim>
+                                    <p:anim calcmode="lin" valueType="num">
+                                      <p:cBhvr additive="base">
+                                        <p:cTn id="42" dur="500" fill="hold"/>
+                                        <p:tgtEl>
+                                          <p:spTgt spid="11"/>
+                                        </p:tgtEl>
+                                        <p:attrNameLst>
+                                          <p:attrName>ppt_y</p:attrName>
+                                        </p:attrNameLst>
+                                      </p:cBhvr>
+                                      <p:tavLst>
+                                        <p:tav tm="0">
+                                          <p:val>
+                                            <p:strVal val="1+#ppt_h/2"/>
+                                          </p:val>
+                                        </p:tav>
+                                        <p:tav tm="100000">
+                                          <p:val>
+                                            <p:strVal val="#ppt_y"/>
+                                          </p:val>
+                                        </p:tav>
+                                      </p:tavLst>
+                                    </p:anim>
+                                  </p:childTnLst>
+                                </p:cTn>
+                              </p:par>
+                            </p:childTnLst>
+                          </p:cTn>
+                        </p:par>
+                      </p:childTnLst>
+                    </p:cTn>
+                  </p:par>
+                  <p:par>
+                    <p:cTn id="43" fill="hold">
+                      <p:stCondLst>
+                        <p:cond delay="indefinite"/>
+                      </p:stCondLst>
+                      <p:childTnLst>
+                        <p:par>
+                          <p:cTn id="44" fill="hold">
+                            <p:stCondLst>
+                              <p:cond delay="0"/>
+                            </p:stCondLst>
+                            <p:childTnLst>
+                              <p:par>
+                                <p:cTn id="45" presetID="2" presetClass="entr" presetSubtype="4" fill="hold" nodeType="clickEffect">
+                                  <p:stCondLst>
+                                    <p:cond delay="0"/>
+                                  </p:stCondLst>
+                                  <p:childTnLst>
+                                    <p:set>
+                                      <p:cBhvr>
+                                        <p:cTn id="46" dur="1" fill="hold">
+                                          <p:stCondLst>
+                                            <p:cond delay="0"/>
+                                          </p:stCondLst>
+                                        </p:cTn>
+                                        <p:tgtEl>
+                                          <p:spTgt spid="27"/>
+                                        </p:tgtEl>
+                                        <p:attrNameLst>
+                                          <p:attrName>style.visibility</p:attrName>
+                                        </p:attrNameLst>
+                                      </p:cBhvr>
+                                      <p:to>
+                                        <p:strVal val="visible"/>
+                                      </p:to>
+                                    </p:set>
+                                    <p:anim calcmode="lin" valueType="num">
+                                      <p:cBhvr additive="base">
+                                        <p:cTn id="47" dur="500" fill="hold"/>
+                                        <p:tgtEl>
+                                          <p:spTgt spid="27"/>
+                                        </p:tgtEl>
+                                        <p:attrNameLst>
+                                          <p:attrName>ppt_x</p:attrName>
+                                        </p:attrNameLst>
+                                      </p:cBhvr>
+                                      <p:tavLst>
+                                        <p:tav tm="0">
+                                          <p:val>
+                                            <p:strVal val="#ppt_x"/>
+                                          </p:val>
+                                        </p:tav>
+                                        <p:tav tm="100000">
+                                          <p:val>
+                                            <p:strVal val="#ppt_x"/>
+                                          </p:val>
+                                        </p:tav>
+                                      </p:tavLst>
+                                    </p:anim>
+                                    <p:anim calcmode="lin" valueType="num">
+                                      <p:cBhvr additive="base">
+                                        <p:cTn id="48" dur="500" fill="hold"/>
+                                        <p:tgtEl>
+                                          <p:spTgt spid="27"/>
+                                        </p:tgtEl>
+                                        <p:attrNameLst>
+                                          <p:attrName>ppt_y</p:attrName>
+                                        </p:attrNameLst>
+                                      </p:cBhvr>
+                                      <p:tavLst>
+                                        <p:tav tm="0">
+                                          <p:val>
+                                            <p:strVal val="1+#ppt_h/2"/>
+                                          </p:val>
+                                        </p:tav>
+                                        <p:tav tm="100000">
+                                          <p:val>
+                                            <p:strVal val="#ppt_y"/>
+                                          </p:val>
+                                        </p:tav>
+                                      </p:tavLst>
+                                    </p:anim>
+                                  </p:childTnLst>
+                                </p:cTn>
+                              </p:par>
+                              <p:par>
+                                <p:cTn id="49" presetID="2" presetClass="entr" presetSubtype="4" fill="hold" grpId="0" nodeType="withEffect">
+                                  <p:stCondLst>
+                                    <p:cond delay="0"/>
+                                  </p:stCondLst>
+                                  <p:childTnLst>
+                                    <p:set>
+                                      <p:cBhvr>
+                                        <p:cTn id="50" dur="1" fill="hold">
+                                          <p:stCondLst>
+                                            <p:cond delay="0"/>
+                                          </p:stCondLst>
+                                        </p:cTn>
+                                        <p:tgtEl>
+                                          <p:spTgt spid="23"/>
+                                        </p:tgtEl>
+                                        <p:attrNameLst>
+                                          <p:attrName>style.visibility</p:attrName>
+                                        </p:attrNameLst>
+                                      </p:cBhvr>
+                                      <p:to>
+                                        <p:strVal val="visible"/>
+                                      </p:to>
+                                    </p:set>
+                                    <p:anim calcmode="lin" valueType="num">
+                                      <p:cBhvr additive="base">
+                                        <p:cTn id="51" dur="500" fill="hold"/>
+                                        <p:tgtEl>
+                                          <p:spTgt spid="23"/>
+                                        </p:tgtEl>
+                                        <p:attrNameLst>
+                                          <p:attrName>ppt_x</p:attrName>
+                                        </p:attrNameLst>
+                                      </p:cBhvr>
+                                      <p:tavLst>
+                                        <p:tav tm="0">
+                                          <p:val>
+                                            <p:strVal val="#ppt_x"/>
+                                          </p:val>
+                                        </p:tav>
+                                        <p:tav tm="100000">
+                                          <p:val>
+                                            <p:strVal val="#ppt_x"/>
+                                          </p:val>
+                                        </p:tav>
+                                      </p:tavLst>
+                                    </p:anim>
+                                    <p:anim calcmode="lin" valueType="num">
+                                      <p:cBhvr additive="base">
+                                        <p:cTn id="52" dur="500" fill="hold"/>
+                                        <p:tgtEl>
+                                          <p:spTgt spid="23"/>
+                                        </p:tgtEl>
+                                        <p:attrNameLst>
+                                          <p:attrName>ppt_y</p:attrName>
+                                        </p:attrNameLst>
+                                      </p:cBhvr>
+                                      <p:tavLst>
+                                        <p:tav tm="0">
+                                          <p:val>
+                                            <p:strVal val="1+#ppt_h/2"/>
+                                          </p:val>
+                                        </p:tav>
+                                        <p:tav tm="100000">
+                                          <p:val>
+                                            <p:strVal val="#ppt_y"/>
+                                          </p:val>
+                                        </p:tav>
+                                      </p:tavLst>
+                                    </p:anim>
+                                  </p:childTnLst>
+                                </p:cTn>
+                              </p:par>
+                            </p:childTnLst>
+                          </p:cTn>
+                        </p:par>
+                      </p:childTnLst>
+                    </p:cTn>
+                  </p:par>
+                  <p:par>
+                    <p:cTn id="53" fill="hold">
+                      <p:stCondLst>
+                        <p:cond delay="indefinite"/>
+                      </p:stCondLst>
+                      <p:childTnLst>
+                        <p:par>
+                          <p:cTn id="54" fill="hold">
+                            <p:stCondLst>
+                              <p:cond delay="0"/>
+                            </p:stCondLst>
+                            <p:childTnLst>
+                              <p:par>
+                                <p:cTn id="55" presetID="2" presetClass="entr" presetSubtype="4" fill="hold" nodeType="clickEffect">
+                                  <p:stCondLst>
+                                    <p:cond delay="0"/>
+                                  </p:stCondLst>
+                                  <p:childTnLst>
+                                    <p:set>
+                                      <p:cBhvr>
+                                        <p:cTn id="56" dur="1" fill="hold">
+                                          <p:stCondLst>
+                                            <p:cond delay="0"/>
+                                          </p:stCondLst>
+                                        </p:cTn>
+                                        <p:tgtEl>
+                                          <p:spTgt spid="28"/>
+                                        </p:tgtEl>
+                                        <p:attrNameLst>
+                                          <p:attrName>style.visibility</p:attrName>
+                                        </p:attrNameLst>
+                                      </p:cBhvr>
+                                      <p:to>
+                                        <p:strVal val="visible"/>
+                                      </p:to>
+                                    </p:set>
+                                    <p:anim calcmode="lin" valueType="num">
+                                      <p:cBhvr additive="base">
+                                        <p:cTn id="57" dur="500" fill="hold"/>
+                                        <p:tgtEl>
+                                          <p:spTgt spid="28"/>
+                                        </p:tgtEl>
+                                        <p:attrNameLst>
+                                          <p:attrName>ppt_x</p:attrName>
+                                        </p:attrNameLst>
+                                      </p:cBhvr>
+                                      <p:tavLst>
+                                        <p:tav tm="0">
+                                          <p:val>
+                                            <p:strVal val="#ppt_x"/>
+                                          </p:val>
+                                        </p:tav>
+                                        <p:tav tm="100000">
+                                          <p:val>
+                                            <p:strVal val="#ppt_x"/>
+                                          </p:val>
+                                        </p:tav>
+                                      </p:tavLst>
+                                    </p:anim>
+                                    <p:anim calcmode="lin" valueType="num">
+                                      <p:cBhvr additive="base">
+                                        <p:cTn id="58" dur="500" fill="hold"/>
+                                        <p:tgtEl>
+                                          <p:spTgt spid="28"/>
+                                        </p:tgtEl>
+                                        <p:attrNameLst>
+                                          <p:attrName>ppt_y</p:attrName>
+                                        </p:attrNameLst>
+                                      </p:cBhvr>
+                                      <p:tavLst>
+                                        <p:tav tm="0">
+                                          <p:val>
+                                            <p:strVal val="1+#ppt_h/2"/>
+                                          </p:val>
+                                        </p:tav>
+                                        <p:tav tm="100000">
+                                          <p:val>
+                                            <p:strVal val="#ppt_y"/>
+                                          </p:val>
+                                        </p:tav>
+                                      </p:tavLst>
+                                    </p:anim>
+                                  </p:childTnLst>
+                                </p:cTn>
+                              </p:par>
+                              <p:par>
+                                <p:cTn id="59" presetID="2" presetClass="entr" presetSubtype="4" fill="hold" grpId="0" nodeType="withEffect">
+                                  <p:stCondLst>
+                                    <p:cond delay="0"/>
+                                  </p:stCondLst>
+                                  <p:childTnLst>
+                                    <p:set>
+                                      <p:cBhvr>
+                                        <p:cTn id="60" dur="1" fill="hold">
+                                          <p:stCondLst>
+                                            <p:cond delay="0"/>
+                                          </p:stCondLst>
+                                        </p:cTn>
+                                        <p:tgtEl>
+                                          <p:spTgt spid="24"/>
+                                        </p:tgtEl>
+                                        <p:attrNameLst>
+                                          <p:attrName>style.visibility</p:attrName>
+                                        </p:attrNameLst>
+                                      </p:cBhvr>
+                                      <p:to>
+                                        <p:strVal val="visible"/>
+                                      </p:to>
+                                    </p:set>
+                                    <p:anim calcmode="lin" valueType="num">
+                                      <p:cBhvr additive="base">
+                                        <p:cTn id="61" dur="500" fill="hold"/>
+                                        <p:tgtEl>
+                                          <p:spTgt spid="24"/>
+                                        </p:tgtEl>
+                                        <p:attrNameLst>
+                                          <p:attrName>ppt_x</p:attrName>
+                                        </p:attrNameLst>
+                                      </p:cBhvr>
+                                      <p:tavLst>
+                                        <p:tav tm="0">
+                                          <p:val>
+                                            <p:strVal val="#ppt_x"/>
+                                          </p:val>
+                                        </p:tav>
+                                        <p:tav tm="100000">
+                                          <p:val>
+                                            <p:strVal val="#ppt_x"/>
+                                          </p:val>
+                                        </p:tav>
+                                      </p:tavLst>
+                                    </p:anim>
+                                    <p:anim calcmode="lin" valueType="num">
+                                      <p:cBhvr additive="base">
+                                        <p:cTn id="62" dur="500" fill="hold"/>
+                                        <p:tgtEl>
+                                          <p:spTgt spid="24"/>
+                                        </p:tgtEl>
+                                        <p:attrNameLst>
+                                          <p:attrName>ppt_y</p:attrName>
+                                        </p:attrNameLst>
+                                      </p:cBhvr>
+                                      <p:tavLst>
+                                        <p:tav tm="0">
+                                          <p:val>
+                                            <p:strVal val="1+#ppt_h/2"/>
+                                          </p:val>
+                                        </p:tav>
+                                        <p:tav tm="100000">
+                                          <p:val>
+                                            <p:strVal val="#ppt_y"/>
+                                          </p:val>
+                                        </p:tav>
+                                      </p:tavLst>
+                                    </p:anim>
+                                  </p:childTnLst>
+                                </p:cTn>
+                              </p:par>
+                            </p:childTnLst>
+                          </p:cTn>
+                        </p:par>
+                      </p:childTnLst>
+                    </p:cTn>
+                  </p:par>
+                  <p:par>
+                    <p:cTn id="63" fill="hold">
+                      <p:stCondLst>
+                        <p:cond delay="indefinite"/>
+                      </p:stCondLst>
+                      <p:childTnLst>
+                        <p:par>
+                          <p:cTn id="64" fill="hold">
+                            <p:stCondLst>
+                              <p:cond delay="0"/>
+                            </p:stCondLst>
+                            <p:childTnLst>
+                              <p:par>
+                                <p:cTn id="65" presetID="2" presetClass="entr" presetSubtype="4" fill="hold" nodeType="clickEffect">
+                                  <p:stCondLst>
+                                    <p:cond delay="0"/>
+                                  </p:stCondLst>
+                                  <p:childTnLst>
+                                    <p:set>
+                                      <p:cBhvr>
+                                        <p:cTn id="66" dur="1" fill="hold">
+                                          <p:stCondLst>
+                                            <p:cond delay="0"/>
+                                          </p:stCondLst>
+                                        </p:cTn>
+                                        <p:tgtEl>
+                                          <p:spTgt spid="29"/>
+                                        </p:tgtEl>
+                                        <p:attrNameLst>
+                                          <p:attrName>style.visibility</p:attrName>
+                                        </p:attrNameLst>
+                                      </p:cBhvr>
+                                      <p:to>
+                                        <p:strVal val="visible"/>
+                                      </p:to>
+                                    </p:set>
+                                    <p:anim calcmode="lin" valueType="num">
+                                      <p:cBhvr additive="base">
+                                        <p:cTn id="67" dur="500" fill="hold"/>
+                                        <p:tgtEl>
+                                          <p:spTgt spid="29"/>
+                                        </p:tgtEl>
+                                        <p:attrNameLst>
+                                          <p:attrName>ppt_x</p:attrName>
+                                        </p:attrNameLst>
+                                      </p:cBhvr>
+                                      <p:tavLst>
+                                        <p:tav tm="0">
+                                          <p:val>
+                                            <p:strVal val="#ppt_x"/>
+                                          </p:val>
+                                        </p:tav>
+                                        <p:tav tm="100000">
+                                          <p:val>
+                                            <p:strVal val="#ppt_x"/>
+                                          </p:val>
+                                        </p:tav>
+                                      </p:tavLst>
+                                    </p:anim>
+                                    <p:anim calcmode="lin" valueType="num">
+                                      <p:cBhvr additive="base">
+                                        <p:cTn id="68" dur="500" fill="hold"/>
+                                        <p:tgtEl>
+                                          <p:spTgt spid="29"/>
+                                        </p:tgtEl>
+                                        <p:attrNameLst>
+                                          <p:attrName>ppt_y</p:attrName>
+                                        </p:attrNameLst>
+                                      </p:cBhvr>
+                                      <p:tavLst>
+                                        <p:tav tm="0">
+                                          <p:val>
+                                            <p:strVal val="1+#ppt_h/2"/>
+                                          </p:val>
+                                        </p:tav>
+                                        <p:tav tm="100000">
+                                          <p:val>
+                                            <p:strVal val="#ppt_y"/>
+                                          </p:val>
+                                        </p:tav>
+                                      </p:tavLst>
+                                    </p:anim>
+                                  </p:childTnLst>
+                                </p:cTn>
+                              </p:par>
+                              <p:par>
+                                <p:cTn id="69" presetID="2" presetClass="entr" presetSubtype="4" fill="hold" grpId="0" nodeType="withEffect">
+                                  <p:stCondLst>
+                                    <p:cond delay="0"/>
+                                  </p:stCondLst>
+                                  <p:childTnLst>
+                                    <p:set>
+                                      <p:cBhvr>
+                                        <p:cTn id="70" dur="1" fill="hold">
+                                          <p:stCondLst>
+                                            <p:cond delay="0"/>
+                                          </p:stCondLst>
+                                        </p:cTn>
+                                        <p:tgtEl>
+                                          <p:spTgt spid="25"/>
+                                        </p:tgtEl>
+                                        <p:attrNameLst>
+                                          <p:attrName>style.visibility</p:attrName>
+                                        </p:attrNameLst>
+                                      </p:cBhvr>
+                                      <p:to>
+                                        <p:strVal val="visible"/>
+                                      </p:to>
+                                    </p:set>
+                                    <p:anim calcmode="lin" valueType="num">
+                                      <p:cBhvr additive="base">
+                                        <p:cTn id="71" dur="500" fill="hold"/>
+                                        <p:tgtEl>
+                                          <p:spTgt spid="25"/>
+                                        </p:tgtEl>
+                                        <p:attrNameLst>
+                                          <p:attrName>ppt_x</p:attrName>
+                                        </p:attrNameLst>
+                                      </p:cBhvr>
+                                      <p:tavLst>
+                                        <p:tav tm="0">
+                                          <p:val>
+                                            <p:strVal val="#ppt_x"/>
+                                          </p:val>
+                                        </p:tav>
+                                        <p:tav tm="100000">
+                                          <p:val>
+                                            <p:strVal val="#ppt_x"/>
+                                          </p:val>
+                                        </p:tav>
+                                      </p:tavLst>
+                                    </p:anim>
+                                    <p:anim calcmode="lin" valueType="num">
+                                      <p:cBhvr additive="base">
+                                        <p:cTn id="72" dur="500" fill="hold"/>
+                                        <p:tgtEl>
+                                          <p:spTgt spid="25"/>
+                                        </p:tgtEl>
+                                        <p:attrNameLst>
+                                          <p:attrName>ppt_y</p:attrName>
+                                        </p:attrNameLst>
+                                      </p:cBhvr>
+                                      <p:tavLst>
+                                        <p:tav tm="0">
+                                          <p:val>
+                                            <p:strVal val="1+#ppt_h/2"/>
+                                          </p:val>
+                                        </p:tav>
+                                        <p:tav tm="100000">
+                                          <p:val>
+                                            <p:strVal val="#ppt_y"/>
+                                          </p:val>
+                                        </p:tav>
+                                      </p:tavLst>
+                                    </p:anim>
+                                  </p:childTnLst>
+                                </p:cTn>
+                              </p:par>
+                            </p:childTnLst>
+                          </p:cTn>
+                        </p:par>
+                      </p:childTnLst>
+                    </p:cTn>
+                  </p:par>
+                  <p:par>
+                    <p:cTn id="73" fill="hold">
+                      <p:stCondLst>
+                        <p:cond delay="indefinite"/>
+                      </p:stCondLst>
+                      <p:childTnLst>
+                        <p:par>
+                          <p:cTn id="74" fill="hold">
+                            <p:stCondLst>
+                              <p:cond delay="0"/>
+                            </p:stCondLst>
+                            <p:childTnLst>
+                              <p:par>
+                                <p:cTn id="75" presetID="2" presetClass="entr" presetSubtype="4" fill="hold" nodeType="clickEffect">
+                                  <p:stCondLst>
+                                    <p:cond delay="0"/>
+                                  </p:stCondLst>
+                                  <p:childTnLst>
+                                    <p:set>
+                                      <p:cBhvr>
+                                        <p:cTn id="76" dur="1" fill="hold">
+                                          <p:stCondLst>
+                                            <p:cond delay="0"/>
+                                          </p:stCondLst>
+                                        </p:cTn>
+                                        <p:tgtEl>
+                                          <p:spTgt spid="30"/>
+                                        </p:tgtEl>
+                                        <p:attrNameLst>
+                                          <p:attrName>style.visibility</p:attrName>
+                                        </p:attrNameLst>
+                                      </p:cBhvr>
+                                      <p:to>
+                                        <p:strVal val="visible"/>
+                                      </p:to>
+                                    </p:set>
+                                    <p:anim calcmode="lin" valueType="num">
+                                      <p:cBhvr additive="base">
+                                        <p:cTn id="77" dur="500" fill="hold"/>
+                                        <p:tgtEl>
+                                          <p:spTgt spid="30"/>
+                                        </p:tgtEl>
+                                        <p:attrNameLst>
+                                          <p:attrName>ppt_x</p:attrName>
+                                        </p:attrNameLst>
+                                      </p:cBhvr>
+                                      <p:tavLst>
+                                        <p:tav tm="0">
+                                          <p:val>
+                                            <p:strVal val="#ppt_x"/>
+                                          </p:val>
+                                        </p:tav>
+                                        <p:tav tm="100000">
+                                          <p:val>
+                                            <p:strVal val="#ppt_x"/>
+                                          </p:val>
+                                        </p:tav>
+                                      </p:tavLst>
+                                    </p:anim>
+                                    <p:anim calcmode="lin" valueType="num">
+                                      <p:cBhvr additive="base">
+                                        <p:cTn id="78" dur="500" fill="hold"/>
+                                        <p:tgtEl>
+                                          <p:spTgt spid="30"/>
+                                        </p:tgtEl>
+                                        <p:attrNameLst>
+                                          <p:attrName>ppt_y</p:attrName>
+                                        </p:attrNameLst>
+                                      </p:cBhvr>
+                                      <p:tavLst>
+                                        <p:tav tm="0">
+                                          <p:val>
+                                            <p:strVal val="1+#ppt_h/2"/>
+                                          </p:val>
+                                        </p:tav>
+                                        <p:tav tm="100000">
+                                          <p:val>
+                                            <p:strVal val="#ppt_y"/>
+                                          </p:val>
+                                        </p:tav>
+                                      </p:tavLst>
+                                    </p:anim>
+                                  </p:childTnLst>
+                                </p:cTn>
+                              </p:par>
+                              <p:par>
+                                <p:cTn id="79" presetID="2" presetClass="entr" presetSubtype="4" fill="hold" grpId="0" nodeType="withEffect">
+                                  <p:stCondLst>
+                                    <p:cond delay="0"/>
+                                  </p:stCondLst>
+                                  <p:childTnLst>
+                                    <p:set>
+                                      <p:cBhvr>
+                                        <p:cTn id="80" dur="1" fill="hold">
+                                          <p:stCondLst>
+                                            <p:cond delay="0"/>
+                                          </p:stCondLst>
+                                        </p:cTn>
+                                        <p:tgtEl>
+                                          <p:spTgt spid="26"/>
+                                        </p:tgtEl>
+                                        <p:attrNameLst>
+                                          <p:attrName>style.visibility</p:attrName>
+                                        </p:attrNameLst>
+                                      </p:cBhvr>
+                                      <p:to>
+                                        <p:strVal val="visible"/>
+                                      </p:to>
+                                    </p:set>
+                                    <p:anim calcmode="lin" valueType="num">
+                                      <p:cBhvr additive="base">
+                                        <p:cTn id="81" dur="500" fill="hold"/>
+                                        <p:tgtEl>
+                                          <p:spTgt spid="26"/>
+                                        </p:tgtEl>
+                                        <p:attrNameLst>
+                                          <p:attrName>ppt_x</p:attrName>
+                                        </p:attrNameLst>
+                                      </p:cBhvr>
+                                      <p:tavLst>
+                                        <p:tav tm="0">
+                                          <p:val>
+                                            <p:strVal val="#ppt_x"/>
+                                          </p:val>
+                                        </p:tav>
+                                        <p:tav tm="100000">
+                                          <p:val>
+                                            <p:strVal val="#ppt_x"/>
+                                          </p:val>
+                                        </p:tav>
+                                      </p:tavLst>
+                                    </p:anim>
+                                    <p:anim calcmode="lin" valueType="num">
+                                      <p:cBhvr additive="base">
+                                        <p:cTn id="82" dur="500" fill="hold"/>
+                                        <p:tgtEl>
+                                          <p:spTgt spid="26"/>
+                                        </p:tgtEl>
+                                        <p:attrNameLst>
+                                          <p:attrName>ppt_y</p:attrName>
+                                        </p:attrNameLst>
+                                      </p:cBhvr>
+                                      <p:tavLst>
+                                        <p:tav tm="0">
+                                          <p:val>
+                                            <p:strVal val="1+#ppt_h/2"/>
+                                          </p:val>
+                                        </p:tav>
+                                        <p:tav tm="100000">
+                                          <p:val>
+                                            <p:strVal val="#ppt_y"/>
+                                          </p:val>
+                                        </p:tav>
+                                      </p:tavLst>
+                                    </p:anim>
+                                  </p:childTnLst>
+                                </p:cTn>
+                              </p:par>
+                            </p:childTnLst>
+                          </p:cTn>
+                        </p:par>
+                      </p:childTnLst>
+                    </p:cTn>
+                  </p:par>
+                </p:childTnLst>
+              </p:cTn>
+              <p:prevCondLst>
+                <p:cond evt="onPrev" delay="0">
+                  <p:tgtEl>
+                    <p:sldTgt/>
+                  </p:tgtEl>
+                </p:cond>
+              </p:prevCondLst>
+              <p:nextCondLst>
+                <p:cond evt="onNext" delay="0">
+                  <p:tgtEl>
+                    <p:sldTgt/>
+                  </p:tgtEl>
+                </p:cond>
+              </p:nextCondLst>
+            </p:seq>
+          </p:childTnLst>
+        </p:cTn>
+      </p:par>
+    </p:tnLst>
+    <p:bldLst>
+      <p:bldP spid="8" grpId="0" animBg="1"/>
+      <p:bldP spid="9" grpId="0" animBg="1"/>
+      <p:bldP spid="10" grpId="0" animBg="1"/>
+      <p:bldP spid="11" grpId="0" animBg="1"/>
+      <p:bldP spid="23" grpId="0" animBg="1"/>
+      <p:bldP spid="24" grpId="0" animBg="1"/>
+      <p:bldP spid="25" grpId="0" animBg="1"/>
+      <p:bldP spid="26" grpId="0" animBg="1"/>
+    </p:bldLst>
+  </p:timing>
+</p:sld>
+</file>
+
+<file path=ppt/slides/slide29.xml><?xml version="1.0" encoding="utf-8"?>
+<p:sld xmlns:a="http://schemas.openxmlformats.org/drawingml/2006/main" xmlns:r="http://schemas.openxmlformats.org/officeDocument/2006/relationships" xmlns:p="http://schemas.openxmlformats.org/presentationml/2006/main">
+  <p:cSld>
+    <p:spTree>
+      <p:nvGrpSpPr>
+        <p:cNvPr id="1" name=""/>
+        <p:cNvGrpSpPr/>
+        <p:nvPr/>
+      </p:nvGrpSpPr>
+      <p:grpSpPr>
+        <a:xfrm>
+          <a:off x="0" y="0"/>
+          <a:ext cx="0" cy="0"/>
+          <a:chOff x="0" y="0"/>
+          <a:chExt cx="0" cy="0"/>
+        </a:xfrm>
+      </p:grpSpPr>
+      <p:sp>
+        <p:nvSpPr>
+          <p:cNvPr id="2" name="Title 1"/>
+          <p:cNvSpPr>
+            <a:spLocks noGrp="1"/>
+          </p:cNvSpPr>
+          <p:nvPr>
+            <p:ph type="title"/>
+          </p:nvPr>
+        </p:nvSpPr>
+        <p:spPr/>
+        <p:txBody>
+          <a:bodyPr/>
+          <a:lstStyle/>
+          <a:p>
+            <a:r>
+              <a:rPr lang="en-IE" dirty="0"/>
+              <a:t>Questions?</a:t>
+            </a:r>
+          </a:p>
+        </p:txBody>
+      </p:sp>
+      <p:pic>
+        <p:nvPicPr>
+          <p:cNvPr id="3" name="Picture 2" descr="A green question mark in a circle&#10;&#10;AI-generated content may be incorrect.">
+            <a:extLst>
+              <a:ext uri="{FF2B5EF4-FFF2-40B4-BE49-F238E27FC236}">
+                <a16:creationId xmlns:a16="http://schemas.microsoft.com/office/drawing/2014/main" id="{4021528B-859B-0F0C-6479-D9428D88B2DF}"/>
+              </a:ext>
+            </a:extLst>
+          </p:cNvPr>
+          <p:cNvPicPr>
+            <a:picLocks noChangeAspect="1"/>
+          </p:cNvPicPr>
+          <p:nvPr/>
+        </p:nvPicPr>
+        <p:blipFill>
+          <a:blip r:embed="rId2">
+            <a:extLst>
+              <a:ext uri="{28A0092B-C50C-407E-A947-70E740481C1C}">
+                <a14:useLocalDpi xmlns:a14="http://schemas.microsoft.com/office/drawing/2010/main" val="0"/>
+              </a:ext>
+            </a:extLst>
+          </a:blip>
+          <a:stretch>
+            <a:fillRect/>
+          </a:stretch>
+        </p:blipFill>
+        <p:spPr>
+          <a:xfrm>
+            <a:off x="2971800" y="1325562"/>
+            <a:ext cx="5257800" cy="5257800"/>
+          </a:xfrm>
+          <a:prstGeom prst="rect">
+            <a:avLst/>
+          </a:prstGeom>
+        </p:spPr>
+      </p:pic>
+    </p:spTree>
+    <p:extLst>
+      <p:ext uri="{BB962C8B-B14F-4D97-AF65-F5344CB8AC3E}">
+        <p14:creationId xmlns:p14="http://schemas.microsoft.com/office/powerpoint/2010/main" val="815503280"/>
+      </p:ext>
+    </p:extLst>
+  </p:cSld>
+  <p:clrMapOvr>
+    <a:masterClrMapping/>
+  </p:clrMapOvr>
 </p:sld>
 </file>
 
@@ -19981,2615 +21426,6 @@
       <p:bldP spid="3" grpId="0" uiExpand="1" build="p"/>
     </p:bldLst>
   </p:timing>
-</p:sld>
-</file>
-
-<file path=ppt/slides/slide30.xml><?xml version="1.0" encoding="utf-8"?>
-<p:sld xmlns:a="http://schemas.openxmlformats.org/drawingml/2006/main" xmlns:r="http://schemas.openxmlformats.org/officeDocument/2006/relationships" xmlns:p="http://schemas.openxmlformats.org/presentationml/2006/main">
-  <p:cSld>
-    <p:spTree>
-      <p:nvGrpSpPr>
-        <p:cNvPr id="1" name=""/>
-        <p:cNvGrpSpPr/>
-        <p:nvPr/>
-      </p:nvGrpSpPr>
-      <p:grpSpPr>
-        <a:xfrm>
-          <a:off x="0" y="0"/>
-          <a:ext cx="0" cy="0"/>
-          <a:chOff x="0" y="0"/>
-          <a:chExt cx="0" cy="0"/>
-        </a:xfrm>
-      </p:grpSpPr>
-      <p:sp>
-        <p:nvSpPr>
-          <p:cNvPr id="2" name="Title 1"/>
-          <p:cNvSpPr>
-            <a:spLocks noGrp="1"/>
-          </p:cNvSpPr>
-          <p:nvPr>
-            <p:ph type="title"/>
-          </p:nvPr>
-        </p:nvSpPr>
-        <p:spPr/>
-        <p:txBody>
-          <a:bodyPr/>
-          <a:lstStyle/>
-          <a:p>
-            <a:r>
-              <a:rPr lang="en-US" dirty="0"/>
-              <a:t>Unsuccessful attempt</a:t>
-            </a:r>
-          </a:p>
-        </p:txBody>
-      </p:sp>
-      <p:sp>
-        <p:nvSpPr>
-          <p:cNvPr id="5" name="Text Box 3"/>
-          <p:cNvSpPr txBox="1">
-            <a:spLocks noChangeArrowheads="1"/>
-          </p:cNvSpPr>
-          <p:nvPr/>
-        </p:nvSpPr>
-        <p:spPr bwMode="auto">
-          <a:xfrm>
-            <a:off x="3071664" y="1984654"/>
-            <a:ext cx="6628738" cy="3108543"/>
-          </a:xfrm>
-          <a:prstGeom prst="rect">
-            <a:avLst/>
-          </a:prstGeom>
-          <a:noFill/>
-          <a:ln>
-            <a:noFill/>
-          </a:ln>
-          <a:extLst>
-            <a:ext uri="{909E8E84-426E-40dd-AFC4-6F175D3DCCD1}">
-              <a14:hiddenFill xmlns:a14="http://schemas.microsoft.com/office/drawing/2010/main" xmlns="">
-                <a:solidFill>
-                  <a:srgbClr val="FFFFFF"/>
-                </a:solidFill>
-              </a14:hiddenFill>
-            </a:ext>
-            <a:ext uri="{91240B29-F687-4f45-9708-019B960494DF}">
-              <a14:hiddenLine xmlns:a14="http://schemas.microsoft.com/office/drawing/2010/main" xmlns="" w="9525">
-                <a:solidFill>
-                  <a:srgbClr val="000000"/>
-                </a:solidFill>
-                <a:miter lim="800000"/>
-                <a:headEnd/>
-                <a:tailEnd/>
-              </a14:hiddenLine>
-            </a:ext>
-          </a:extLst>
-        </p:spPr>
-        <p:txBody>
-          <a:bodyPr wrap="none">
-            <a:spAutoFit/>
-          </a:bodyPr>
-          <a:lstStyle>
-            <a:lvl1pPr>
-              <a:spcBef>
-                <a:spcPct val="20000"/>
-              </a:spcBef>
-              <a:buClr>
-                <a:srgbClr val="264D8B"/>
-              </a:buClr>
-              <a:buFont typeface="Times" charset="0"/>
-              <a:buChar char="•"/>
-              <a:defRPr sz="3200">
-                <a:solidFill>
-                  <a:srgbClr val="1A3170"/>
-                </a:solidFill>
-                <a:latin typeface="Trebuchet MS" charset="0"/>
-                <a:ea typeface="MS PGothic" charset="-128"/>
-              </a:defRPr>
-            </a:lvl1pPr>
-            <a:lvl2pPr marL="742950" indent="-285750">
-              <a:spcBef>
-                <a:spcPct val="20000"/>
-              </a:spcBef>
-              <a:buClr>
-                <a:srgbClr val="264D8B"/>
-              </a:buClr>
-              <a:buChar char="–"/>
-              <a:defRPr sz="2800">
-                <a:solidFill>
-                  <a:srgbClr val="1A3170"/>
-                </a:solidFill>
-                <a:latin typeface="Trebuchet MS" charset="0"/>
-                <a:ea typeface="MS PGothic" charset="-128"/>
-              </a:defRPr>
-            </a:lvl2pPr>
-            <a:lvl3pPr marL="1143000" indent="-228600">
-              <a:spcBef>
-                <a:spcPct val="20000"/>
-              </a:spcBef>
-              <a:buClr>
-                <a:srgbClr val="264D8B"/>
-              </a:buClr>
-              <a:buChar char="•"/>
-              <a:defRPr sz="2400">
-                <a:solidFill>
-                  <a:srgbClr val="1A3170"/>
-                </a:solidFill>
-                <a:latin typeface="Trebuchet MS" charset="0"/>
-                <a:ea typeface="MS PGothic" charset="-128"/>
-              </a:defRPr>
-            </a:lvl3pPr>
-            <a:lvl4pPr marL="1600200" indent="-228600">
-              <a:spcBef>
-                <a:spcPct val="20000"/>
-              </a:spcBef>
-              <a:buClr>
-                <a:srgbClr val="264D8B"/>
-              </a:buClr>
-              <a:buChar char="–"/>
-              <a:defRPr sz="2000">
-                <a:solidFill>
-                  <a:srgbClr val="1A3170"/>
-                </a:solidFill>
-                <a:latin typeface="Trebuchet MS" charset="0"/>
-                <a:ea typeface="MS PGothic" charset="-128"/>
-              </a:defRPr>
-            </a:lvl4pPr>
-            <a:lvl5pPr marL="2057400" indent="-228600">
-              <a:spcBef>
-                <a:spcPct val="20000"/>
-              </a:spcBef>
-              <a:buClr>
-                <a:srgbClr val="264D8B"/>
-              </a:buClr>
-              <a:buChar char="»"/>
-              <a:defRPr sz="2000">
-                <a:solidFill>
-                  <a:srgbClr val="1A3170"/>
-                </a:solidFill>
-                <a:latin typeface="Trebuchet MS" charset="0"/>
-                <a:ea typeface="MS PGothic" charset="-128"/>
-              </a:defRPr>
-            </a:lvl5pPr>
-            <a:lvl6pPr marL="2514600" indent="-228600" eaLnBrk="0" fontAlgn="base" hangingPunct="0">
-              <a:spcBef>
-                <a:spcPct val="20000"/>
-              </a:spcBef>
-              <a:spcAft>
-                <a:spcPct val="0"/>
-              </a:spcAft>
-              <a:buClr>
-                <a:srgbClr val="264D8B"/>
-              </a:buClr>
-              <a:buChar char="»"/>
-              <a:defRPr sz="2000">
-                <a:solidFill>
-                  <a:srgbClr val="1A3170"/>
-                </a:solidFill>
-                <a:latin typeface="Trebuchet MS" charset="0"/>
-                <a:ea typeface="MS PGothic" charset="-128"/>
-              </a:defRPr>
-            </a:lvl6pPr>
-            <a:lvl7pPr marL="2971800" indent="-228600" eaLnBrk="0" fontAlgn="base" hangingPunct="0">
-              <a:spcBef>
-                <a:spcPct val="20000"/>
-              </a:spcBef>
-              <a:spcAft>
-                <a:spcPct val="0"/>
-              </a:spcAft>
-              <a:buClr>
-                <a:srgbClr val="264D8B"/>
-              </a:buClr>
-              <a:buChar char="»"/>
-              <a:defRPr sz="2000">
-                <a:solidFill>
-                  <a:srgbClr val="1A3170"/>
-                </a:solidFill>
-                <a:latin typeface="Trebuchet MS" charset="0"/>
-                <a:ea typeface="MS PGothic" charset="-128"/>
-              </a:defRPr>
-            </a:lvl7pPr>
-            <a:lvl8pPr marL="3429000" indent="-228600" eaLnBrk="0" fontAlgn="base" hangingPunct="0">
-              <a:spcBef>
-                <a:spcPct val="20000"/>
-              </a:spcBef>
-              <a:spcAft>
-                <a:spcPct val="0"/>
-              </a:spcAft>
-              <a:buClr>
-                <a:srgbClr val="264D8B"/>
-              </a:buClr>
-              <a:buChar char="»"/>
-              <a:defRPr sz="2000">
-                <a:solidFill>
-                  <a:srgbClr val="1A3170"/>
-                </a:solidFill>
-                <a:latin typeface="Trebuchet MS" charset="0"/>
-                <a:ea typeface="MS PGothic" charset="-128"/>
-              </a:defRPr>
-            </a:lvl8pPr>
-            <a:lvl9pPr marL="3886200" indent="-228600" eaLnBrk="0" fontAlgn="base" hangingPunct="0">
-              <a:spcBef>
-                <a:spcPct val="20000"/>
-              </a:spcBef>
-              <a:spcAft>
-                <a:spcPct val="0"/>
-              </a:spcAft>
-              <a:buClr>
-                <a:srgbClr val="264D8B"/>
-              </a:buClr>
-              <a:buChar char="»"/>
-              <a:defRPr sz="2000">
-                <a:solidFill>
-                  <a:srgbClr val="1A3170"/>
-                </a:solidFill>
-                <a:latin typeface="Trebuchet MS" charset="0"/>
-                <a:ea typeface="MS PGothic" charset="-128"/>
-              </a:defRPr>
-            </a:lvl9pPr>
-          </a:lstStyle>
-          <a:p>
-            <a:pPr eaLnBrk="1" hangingPunct="1">
-              <a:spcBef>
-                <a:spcPct val="0"/>
-              </a:spcBef>
-              <a:buClrTx/>
-              <a:buFontTx/>
-              <a:buNone/>
-            </a:pPr>
-            <a:r>
-              <a:rPr lang="en-US" altLang="en-US" sz="2800" dirty="0">
-                <a:solidFill>
-                  <a:schemeClr val="tx1"/>
-                </a:solidFill>
-                <a:latin typeface="Courier New" charset="0"/>
-              </a:rPr>
-              <a:t>public </a:t>
-            </a:r>
-            <a:r>
-              <a:rPr lang="en-US" altLang="en-US" sz="2800" dirty="0" err="1">
-                <a:solidFill>
-                  <a:schemeClr val="tx1"/>
-                </a:solidFill>
-                <a:latin typeface="Courier New" charset="0"/>
-              </a:rPr>
-              <a:t>int</a:t>
-            </a:r>
-            <a:r>
-              <a:rPr lang="en-US" altLang="en-US" sz="2800" dirty="0">
-                <a:solidFill>
-                  <a:schemeClr val="tx1"/>
-                </a:solidFill>
-                <a:latin typeface="Courier New" charset="0"/>
-              </a:rPr>
-              <a:t> </a:t>
-            </a:r>
-            <a:r>
-              <a:rPr lang="en-US" altLang="en-US" sz="2800" dirty="0" err="1">
-                <a:solidFill>
-                  <a:schemeClr val="tx1"/>
-                </a:solidFill>
-                <a:latin typeface="Courier New" charset="0"/>
-              </a:rPr>
-              <a:t>refundBalance</a:t>
-            </a:r>
-            <a:r>
-              <a:rPr lang="en-US" altLang="en-US" sz="2800" dirty="0">
-                <a:solidFill>
-                  <a:schemeClr val="tx1"/>
-                </a:solidFill>
-                <a:latin typeface="Courier New" charset="0"/>
-              </a:rPr>
-              <a:t>()</a:t>
-            </a:r>
-          </a:p>
-          <a:p>
-            <a:pPr eaLnBrk="1" hangingPunct="1">
-              <a:spcBef>
-                <a:spcPct val="0"/>
-              </a:spcBef>
-              <a:buClrTx/>
-              <a:buFontTx/>
-              <a:buNone/>
-            </a:pPr>
-            <a:r>
-              <a:rPr lang="en-US" altLang="en-US" sz="2800" dirty="0">
-                <a:solidFill>
-                  <a:schemeClr val="tx1"/>
-                </a:solidFill>
-                <a:latin typeface="Courier New" charset="0"/>
-              </a:rPr>
-              <a:t>{</a:t>
-            </a:r>
-          </a:p>
-          <a:p>
-            <a:pPr eaLnBrk="1" hangingPunct="1">
-              <a:spcBef>
-                <a:spcPct val="0"/>
-              </a:spcBef>
-              <a:buClrTx/>
-              <a:buFontTx/>
-              <a:buNone/>
-            </a:pPr>
-            <a:r>
-              <a:rPr lang="en-US" altLang="en-US" sz="2800" dirty="0">
-                <a:solidFill>
-                  <a:schemeClr val="tx1"/>
-                </a:solidFill>
-                <a:latin typeface="Courier New" charset="0"/>
-              </a:rPr>
-              <a:t>    // Return the amount left.</a:t>
-            </a:r>
-          </a:p>
-          <a:p>
-            <a:pPr eaLnBrk="1" hangingPunct="1">
-              <a:spcBef>
-                <a:spcPct val="0"/>
-              </a:spcBef>
-              <a:buClrTx/>
-              <a:buFontTx/>
-              <a:buNone/>
-            </a:pPr>
-            <a:r>
-              <a:rPr lang="en-US" altLang="en-US" sz="2800" dirty="0">
-                <a:solidFill>
-                  <a:schemeClr val="tx1"/>
-                </a:solidFill>
-                <a:latin typeface="Courier New" charset="0"/>
-              </a:rPr>
-              <a:t>    return balance;</a:t>
-            </a:r>
-          </a:p>
-          <a:p>
-            <a:pPr eaLnBrk="1" hangingPunct="1">
-              <a:spcBef>
-                <a:spcPct val="0"/>
-              </a:spcBef>
-              <a:buClrTx/>
-              <a:buFontTx/>
-              <a:buNone/>
-            </a:pPr>
-            <a:r>
-              <a:rPr lang="en-US" altLang="en-US" sz="2800" dirty="0">
-                <a:solidFill>
-                  <a:schemeClr val="tx1"/>
-                </a:solidFill>
-                <a:latin typeface="Courier New" charset="0"/>
-              </a:rPr>
-              <a:t>    // Clear the balance.</a:t>
-            </a:r>
-          </a:p>
-          <a:p>
-            <a:pPr eaLnBrk="1" hangingPunct="1">
-              <a:spcBef>
-                <a:spcPct val="0"/>
-              </a:spcBef>
-              <a:buClrTx/>
-              <a:buFontTx/>
-              <a:buNone/>
-            </a:pPr>
-            <a:r>
-              <a:rPr lang="en-US" altLang="en-US" sz="2800" dirty="0">
-                <a:solidFill>
-                  <a:schemeClr val="tx1"/>
-                </a:solidFill>
-                <a:latin typeface="Courier New" charset="0"/>
-              </a:rPr>
-              <a:t>    balance = 0;</a:t>
-            </a:r>
-          </a:p>
-          <a:p>
-            <a:pPr eaLnBrk="1" hangingPunct="1">
-              <a:spcBef>
-                <a:spcPct val="0"/>
-              </a:spcBef>
-              <a:buClrTx/>
-              <a:buFontTx/>
-              <a:buNone/>
-            </a:pPr>
-            <a:r>
-              <a:rPr lang="en-US" altLang="en-US" sz="2800" dirty="0">
-                <a:solidFill>
-                  <a:schemeClr val="tx1"/>
-                </a:solidFill>
-                <a:latin typeface="Courier New" charset="0"/>
-              </a:rPr>
-              <a:t>} </a:t>
-            </a:r>
-          </a:p>
-        </p:txBody>
-      </p:sp>
-      <p:sp>
-        <p:nvSpPr>
-          <p:cNvPr id="6" name="TextBox 5"/>
-          <p:cNvSpPr txBox="1"/>
-          <p:nvPr/>
-        </p:nvSpPr>
-        <p:spPr>
-          <a:xfrm>
-            <a:off x="695400" y="5475547"/>
-            <a:ext cx="9371733" cy="830997"/>
-          </a:xfrm>
-          <a:prstGeom prst="rect">
-            <a:avLst/>
-          </a:prstGeom>
-          <a:gradFill>
-            <a:gsLst>
-              <a:gs pos="0">
-                <a:schemeClr val="accent6">
-                  <a:tint val="50000"/>
-                  <a:satMod val="300000"/>
-                </a:schemeClr>
-              </a:gs>
-              <a:gs pos="35000">
-                <a:schemeClr val="accent6">
-                  <a:tint val="37000"/>
-                  <a:satMod val="300000"/>
-                </a:schemeClr>
-              </a:gs>
-              <a:gs pos="100000">
-                <a:schemeClr val="accent6">
-                  <a:tint val="15000"/>
-                  <a:satMod val="350000"/>
-                </a:schemeClr>
-              </a:gs>
-            </a:gsLst>
-            <a:lin ang="16200000" scaled="1"/>
-          </a:gradFill>
-        </p:spPr>
-        <p:txBody>
-          <a:bodyPr wrap="none" rtlCol="0">
-            <a:spAutoFit/>
-          </a:bodyPr>
-          <a:lstStyle/>
-          <a:p>
-            <a:r>
-              <a:rPr lang="en-US" sz="2400" dirty="0">
-                <a:solidFill>
-                  <a:srgbClr val="0070C0"/>
-                </a:solidFill>
-              </a:rPr>
-              <a:t>It looks logical, but the language does not allow it. </a:t>
-            </a:r>
-          </a:p>
-          <a:p>
-            <a:r>
-              <a:rPr lang="en-US" sz="2400" dirty="0">
-                <a:solidFill>
-                  <a:srgbClr val="0070C0"/>
-                </a:solidFill>
-              </a:rPr>
-              <a:t>A method will terminate immediately after executing a return statement! </a:t>
-            </a:r>
-          </a:p>
-        </p:txBody>
-      </p:sp>
-    </p:spTree>
-    <p:extLst>
-      <p:ext uri="{BB962C8B-B14F-4D97-AF65-F5344CB8AC3E}">
-        <p14:creationId xmlns:p14="http://schemas.microsoft.com/office/powerpoint/2010/main" val="1105692568"/>
-      </p:ext>
-    </p:extLst>
-  </p:cSld>
-  <p:clrMapOvr>
-    <a:masterClrMapping/>
-  </p:clrMapOvr>
-  <p:timing>
-    <p:tnLst>
-      <p:par>
-        <p:cTn id="1" dur="indefinite" restart="never" nodeType="tmRoot">
-          <p:childTnLst>
-            <p:seq concurrent="1" nextAc="seek">
-              <p:cTn id="2" dur="indefinite" nodeType="mainSeq">
-                <p:childTnLst>
-                  <p:par>
-                    <p:cTn id="3" fill="hold">
-                      <p:stCondLst>
-                        <p:cond delay="indefinite"/>
-                      </p:stCondLst>
-                      <p:childTnLst>
-                        <p:par>
-                          <p:cTn id="4" fill="hold">
-                            <p:stCondLst>
-                              <p:cond delay="0"/>
-                            </p:stCondLst>
-                            <p:childTnLst>
-                              <p:par>
-                                <p:cTn id="5" presetID="2" presetClass="entr" presetSubtype="4" fill="hold" grpId="0" nodeType="clickEffect">
-                                  <p:stCondLst>
-                                    <p:cond delay="0"/>
-                                  </p:stCondLst>
-                                  <p:childTnLst>
-                                    <p:set>
-                                      <p:cBhvr>
-                                        <p:cTn id="6" dur="1" fill="hold">
-                                          <p:stCondLst>
-                                            <p:cond delay="0"/>
-                                          </p:stCondLst>
-                                        </p:cTn>
-                                        <p:tgtEl>
-                                          <p:spTgt spid="6"/>
-                                        </p:tgtEl>
-                                        <p:attrNameLst>
-                                          <p:attrName>style.visibility</p:attrName>
-                                        </p:attrNameLst>
-                                      </p:cBhvr>
-                                      <p:to>
-                                        <p:strVal val="visible"/>
-                                      </p:to>
-                                    </p:set>
-                                    <p:anim calcmode="lin" valueType="num">
-                                      <p:cBhvr additive="base">
-                                        <p:cTn id="7" dur="500" fill="hold"/>
-                                        <p:tgtEl>
-                                          <p:spTgt spid="6"/>
-                                        </p:tgtEl>
-                                        <p:attrNameLst>
-                                          <p:attrName>ppt_x</p:attrName>
-                                        </p:attrNameLst>
-                                      </p:cBhvr>
-                                      <p:tavLst>
-                                        <p:tav tm="0">
-                                          <p:val>
-                                            <p:strVal val="#ppt_x"/>
-                                          </p:val>
-                                        </p:tav>
-                                        <p:tav tm="100000">
-                                          <p:val>
-                                            <p:strVal val="#ppt_x"/>
-                                          </p:val>
-                                        </p:tav>
-                                      </p:tavLst>
-                                    </p:anim>
-                                    <p:anim calcmode="lin" valueType="num">
-                                      <p:cBhvr additive="base">
-                                        <p:cTn id="8" dur="500" fill="hold"/>
-                                        <p:tgtEl>
-                                          <p:spTgt spid="6"/>
-                                        </p:tgtEl>
-                                        <p:attrNameLst>
-                                          <p:attrName>ppt_y</p:attrName>
-                                        </p:attrNameLst>
-                                      </p:cBhvr>
-                                      <p:tavLst>
-                                        <p:tav tm="0">
-                                          <p:val>
-                                            <p:strVal val="1+#ppt_h/2"/>
-                                          </p:val>
-                                        </p:tav>
-                                        <p:tav tm="100000">
-                                          <p:val>
-                                            <p:strVal val="#ppt_y"/>
-                                          </p:val>
-                                        </p:tav>
-                                      </p:tavLst>
-                                    </p:anim>
-                                  </p:childTnLst>
-                                </p:cTn>
-                              </p:par>
-                            </p:childTnLst>
-                          </p:cTn>
-                        </p:par>
-                      </p:childTnLst>
-                    </p:cTn>
-                  </p:par>
-                </p:childTnLst>
-              </p:cTn>
-              <p:prevCondLst>
-                <p:cond evt="onPrev" delay="0">
-                  <p:tgtEl>
-                    <p:sldTgt/>
-                  </p:tgtEl>
-                </p:cond>
-              </p:prevCondLst>
-              <p:nextCondLst>
-                <p:cond evt="onNext" delay="0">
-                  <p:tgtEl>
-                    <p:sldTgt/>
-                  </p:tgtEl>
-                </p:cond>
-              </p:nextCondLst>
-            </p:seq>
-          </p:childTnLst>
-        </p:cTn>
-      </p:par>
-    </p:tnLst>
-    <p:bldLst>
-      <p:bldP spid="6" grpId="0" animBg="1"/>
-    </p:bldLst>
-  </p:timing>
-</p:sld>
-</file>
-
-<file path=ppt/slides/slide31.xml><?xml version="1.0" encoding="utf-8"?>
-<p:sld xmlns:a="http://schemas.openxmlformats.org/drawingml/2006/main" xmlns:r="http://schemas.openxmlformats.org/officeDocument/2006/relationships" xmlns:p="http://schemas.openxmlformats.org/presentationml/2006/main">
-  <p:cSld>
-    <p:spTree>
-      <p:nvGrpSpPr>
-        <p:cNvPr id="1" name=""/>
-        <p:cNvGrpSpPr/>
-        <p:nvPr/>
-      </p:nvGrpSpPr>
-      <p:grpSpPr>
-        <a:xfrm>
-          <a:off x="0" y="0"/>
-          <a:ext cx="0" cy="0"/>
-          <a:chOff x="0" y="0"/>
-          <a:chExt cx="0" cy="0"/>
-        </a:xfrm>
-      </p:grpSpPr>
-      <p:sp>
-        <p:nvSpPr>
-          <p:cNvPr id="78849" name="Rectangle 2"/>
-          <p:cNvSpPr>
-            <a:spLocks noGrp="1" noChangeArrowheads="1"/>
-          </p:cNvSpPr>
-          <p:nvPr>
-            <p:ph type="title"/>
-          </p:nvPr>
-        </p:nvSpPr>
-        <p:spPr/>
-        <p:txBody>
-          <a:bodyPr/>
-          <a:lstStyle/>
-          <a:p>
-            <a:r>
-              <a:rPr lang="en-GB" altLang="en-US">
-                <a:ea typeface="MS PGothic" charset="-128"/>
-              </a:rPr>
-              <a:t>Local variables</a:t>
-            </a:r>
-          </a:p>
-        </p:txBody>
-      </p:sp>
-      <p:sp>
-        <p:nvSpPr>
-          <p:cNvPr id="78850" name="Rectangle 3"/>
-          <p:cNvSpPr>
-            <a:spLocks noGrp="1" noChangeArrowheads="1"/>
-          </p:cNvSpPr>
-          <p:nvPr>
-            <p:ph idx="1"/>
-          </p:nvPr>
-        </p:nvSpPr>
-        <p:spPr/>
-        <p:txBody>
-          <a:bodyPr>
-            <a:normAutofit/>
-          </a:bodyPr>
-          <a:lstStyle/>
-          <a:p>
-            <a:pPr eaLnBrk="1" hangingPunct="1">
-              <a:lnSpc>
-                <a:spcPct val="90000"/>
-              </a:lnSpc>
-            </a:pPr>
-            <a:r>
-              <a:rPr lang="en-US" altLang="en-US" sz="3600" dirty="0">
-                <a:ea typeface="MS PGothic" charset="-128"/>
-              </a:rPr>
-              <a:t>Methods can define their own, </a:t>
-            </a:r>
-            <a:r>
-              <a:rPr lang="en-US" altLang="en-US" sz="3600" i="1" dirty="0">
-                <a:ea typeface="MS PGothic" charset="-128"/>
-              </a:rPr>
-              <a:t>local</a:t>
-            </a:r>
-            <a:r>
-              <a:rPr lang="en-US" altLang="en-US" sz="3600" dirty="0">
-                <a:ea typeface="MS PGothic" charset="-128"/>
-              </a:rPr>
-              <a:t> variables:</a:t>
-            </a:r>
-          </a:p>
-          <a:p>
-            <a:pPr lvl="1" eaLnBrk="1" hangingPunct="1">
-              <a:lnSpc>
-                <a:spcPct val="90000"/>
-              </a:lnSpc>
-            </a:pPr>
-            <a:r>
-              <a:rPr lang="en-US" altLang="en-US" sz="3200" dirty="0">
-                <a:ea typeface="MS PGothic" charset="-128"/>
-              </a:rPr>
-              <a:t>Short lived, like parameters.</a:t>
-            </a:r>
-          </a:p>
-          <a:p>
-            <a:pPr lvl="1" eaLnBrk="1" hangingPunct="1">
-              <a:lnSpc>
-                <a:spcPct val="90000"/>
-              </a:lnSpc>
-            </a:pPr>
-            <a:r>
-              <a:rPr lang="en-US" altLang="en-US" sz="3200" dirty="0">
-                <a:ea typeface="MS PGothic" charset="-128"/>
-              </a:rPr>
-              <a:t>The method sets their values – unlike parameters, they do not receive external values.</a:t>
-            </a:r>
-          </a:p>
-          <a:p>
-            <a:pPr lvl="1" eaLnBrk="1" hangingPunct="1">
-              <a:lnSpc>
-                <a:spcPct val="90000"/>
-              </a:lnSpc>
-            </a:pPr>
-            <a:r>
-              <a:rPr lang="en-US" altLang="en-US" sz="3200" dirty="0">
-                <a:ea typeface="MS PGothic" charset="-128"/>
-              </a:rPr>
-              <a:t>Used for </a:t>
-            </a:r>
-            <a:r>
-              <a:rPr lang="ja-JP" altLang="en-US" sz="3200">
-                <a:ea typeface="MS PGothic" charset="-128"/>
-              </a:rPr>
-              <a:t>‘</a:t>
-            </a:r>
-            <a:r>
-              <a:rPr lang="en-US" altLang="ja-JP" sz="3200" dirty="0">
-                <a:ea typeface="MS PGothic" charset="-128"/>
-              </a:rPr>
-              <a:t>temporary</a:t>
-            </a:r>
-            <a:r>
-              <a:rPr lang="ja-JP" altLang="en-US" sz="3200">
-                <a:ea typeface="MS PGothic" charset="-128"/>
-              </a:rPr>
-              <a:t>’</a:t>
-            </a:r>
-            <a:r>
-              <a:rPr lang="en-US" altLang="ja-JP" sz="3200" dirty="0">
-                <a:ea typeface="MS PGothic" charset="-128"/>
-              </a:rPr>
-              <a:t> calculation and storage.</a:t>
-            </a:r>
-          </a:p>
-          <a:p>
-            <a:pPr lvl="1" eaLnBrk="1" hangingPunct="1">
-              <a:lnSpc>
-                <a:spcPct val="90000"/>
-              </a:lnSpc>
-            </a:pPr>
-            <a:r>
-              <a:rPr lang="en-US" altLang="en-US" sz="3200" dirty="0">
-                <a:ea typeface="MS PGothic" charset="-128"/>
-              </a:rPr>
-              <a:t>They exist only as long as the method is being executed.</a:t>
-            </a:r>
-          </a:p>
-          <a:p>
-            <a:pPr lvl="1" eaLnBrk="1" hangingPunct="1">
-              <a:lnSpc>
-                <a:spcPct val="90000"/>
-              </a:lnSpc>
-            </a:pPr>
-            <a:r>
-              <a:rPr lang="en-US" altLang="en-US" sz="3200" dirty="0">
-                <a:ea typeface="MS PGothic" charset="-128"/>
-              </a:rPr>
-              <a:t>They are only accessible from within the method.</a:t>
-            </a:r>
-          </a:p>
-          <a:p>
-            <a:pPr lvl="1" eaLnBrk="1" hangingPunct="1">
-              <a:lnSpc>
-                <a:spcPct val="90000"/>
-              </a:lnSpc>
-            </a:pPr>
-            <a:r>
-              <a:rPr lang="en-US" altLang="en-US" sz="3200" dirty="0">
-                <a:ea typeface="MS PGothic" charset="-128"/>
-              </a:rPr>
-              <a:t>They are defined within a particular </a:t>
-            </a:r>
-            <a:r>
-              <a:rPr lang="en-US" altLang="en-US" sz="3200" i="1" dirty="0">
-                <a:ea typeface="MS PGothic" charset="-128"/>
-              </a:rPr>
-              <a:t>scope</a:t>
-            </a:r>
-            <a:r>
-              <a:rPr lang="en-US" altLang="en-US" sz="3200" dirty="0">
-                <a:ea typeface="MS PGothic" charset="-128"/>
-              </a:rPr>
-              <a:t>.</a:t>
-            </a:r>
-          </a:p>
-          <a:p>
-            <a:endParaRPr lang="en-GB" altLang="en-US" sz="5400" dirty="0">
-              <a:ea typeface="MS PGothic" charset="-128"/>
-            </a:endParaRPr>
-          </a:p>
-        </p:txBody>
-      </p:sp>
-    </p:spTree>
-  </p:cSld>
-  <p:clrMapOvr>
-    <a:masterClrMapping/>
-  </p:clrMapOvr>
-</p:sld>
-</file>
-
-<file path=ppt/slides/slide32.xml><?xml version="1.0" encoding="utf-8"?>
-<p:sld xmlns:a="http://schemas.openxmlformats.org/drawingml/2006/main" xmlns:r="http://schemas.openxmlformats.org/officeDocument/2006/relationships" xmlns:p="http://schemas.openxmlformats.org/presentationml/2006/main">
-  <p:cSld>
-    <p:spTree>
-      <p:nvGrpSpPr>
-        <p:cNvPr id="1" name=""/>
-        <p:cNvGrpSpPr/>
-        <p:nvPr/>
-      </p:nvGrpSpPr>
-      <p:grpSpPr>
-        <a:xfrm>
-          <a:off x="0" y="0"/>
-          <a:ext cx="0" cy="0"/>
-          <a:chOff x="0" y="0"/>
-          <a:chExt cx="0" cy="0"/>
-        </a:xfrm>
-      </p:grpSpPr>
-      <p:sp>
-        <p:nvSpPr>
-          <p:cNvPr id="26626" name="Rectangle 2"/>
-          <p:cNvSpPr>
-            <a:spLocks noGrp="1" noChangeArrowheads="1"/>
-          </p:cNvSpPr>
-          <p:nvPr>
-            <p:ph type="title"/>
-          </p:nvPr>
-        </p:nvSpPr>
-        <p:spPr/>
-        <p:txBody>
-          <a:bodyPr/>
-          <a:lstStyle/>
-          <a:p>
-            <a:pPr eaLnBrk="1" hangingPunct="1">
-              <a:defRPr/>
-            </a:pPr>
-            <a:r>
-              <a:rPr lang="en-US">
-                <a:ea typeface="+mj-ea"/>
-                <a:cs typeface="+mj-cs"/>
-              </a:rPr>
-              <a:t>Local variables</a:t>
-            </a:r>
-          </a:p>
-        </p:txBody>
-      </p:sp>
-      <p:sp>
-        <p:nvSpPr>
-          <p:cNvPr id="82947" name="Text Box 3"/>
-          <p:cNvSpPr txBox="1">
-            <a:spLocks noChangeArrowheads="1"/>
-          </p:cNvSpPr>
-          <p:nvPr/>
-        </p:nvSpPr>
-        <p:spPr bwMode="auto">
-          <a:xfrm>
-            <a:off x="4648200" y="2638428"/>
-            <a:ext cx="6413935" cy="3108543"/>
-          </a:xfrm>
-          <a:prstGeom prst="rect">
-            <a:avLst/>
-          </a:prstGeom>
-          <a:noFill/>
-          <a:ln>
-            <a:noFill/>
-          </a:ln>
-          <a:extLst>
-            <a:ext uri="{909E8E84-426E-40dd-AFC4-6F175D3DCCD1}">
-              <a14:hiddenFill xmlns:a14="http://schemas.microsoft.com/office/drawing/2010/main" xmlns="">
-                <a:solidFill>
-                  <a:srgbClr val="FFFFFF"/>
-                </a:solidFill>
-              </a14:hiddenFill>
-            </a:ext>
-            <a:ext uri="{91240B29-F687-4f45-9708-019B960494DF}">
-              <a14:hiddenLine xmlns:a14="http://schemas.microsoft.com/office/drawing/2010/main" xmlns="" w="9525">
-                <a:solidFill>
-                  <a:srgbClr val="000000"/>
-                </a:solidFill>
-                <a:miter lim="800000"/>
-                <a:headEnd/>
-                <a:tailEnd/>
-              </a14:hiddenLine>
-            </a:ext>
-          </a:extLst>
-        </p:spPr>
-        <p:txBody>
-          <a:bodyPr wrap="none">
-            <a:spAutoFit/>
-          </a:bodyPr>
-          <a:lstStyle>
-            <a:lvl1pPr>
-              <a:spcBef>
-                <a:spcPct val="20000"/>
-              </a:spcBef>
-              <a:buClr>
-                <a:srgbClr val="264D8B"/>
-              </a:buClr>
-              <a:buFont typeface="Times" charset="0"/>
-              <a:buChar char="•"/>
-              <a:defRPr sz="3200">
-                <a:solidFill>
-                  <a:srgbClr val="1A3170"/>
-                </a:solidFill>
-                <a:latin typeface="Trebuchet MS" charset="0"/>
-                <a:ea typeface="MS PGothic" charset="-128"/>
-              </a:defRPr>
-            </a:lvl1pPr>
-            <a:lvl2pPr marL="742950" indent="-285750">
-              <a:spcBef>
-                <a:spcPct val="20000"/>
-              </a:spcBef>
-              <a:buClr>
-                <a:srgbClr val="264D8B"/>
-              </a:buClr>
-              <a:buChar char="–"/>
-              <a:defRPr sz="2800">
-                <a:solidFill>
-                  <a:srgbClr val="1A3170"/>
-                </a:solidFill>
-                <a:latin typeface="Trebuchet MS" charset="0"/>
-                <a:ea typeface="MS PGothic" charset="-128"/>
-              </a:defRPr>
-            </a:lvl2pPr>
-            <a:lvl3pPr marL="1143000" indent="-228600">
-              <a:spcBef>
-                <a:spcPct val="20000"/>
-              </a:spcBef>
-              <a:buClr>
-                <a:srgbClr val="264D8B"/>
-              </a:buClr>
-              <a:buChar char="•"/>
-              <a:defRPr sz="2400">
-                <a:solidFill>
-                  <a:srgbClr val="1A3170"/>
-                </a:solidFill>
-                <a:latin typeface="Trebuchet MS" charset="0"/>
-                <a:ea typeface="MS PGothic" charset="-128"/>
-              </a:defRPr>
-            </a:lvl3pPr>
-            <a:lvl4pPr marL="1600200" indent="-228600">
-              <a:spcBef>
-                <a:spcPct val="20000"/>
-              </a:spcBef>
-              <a:buClr>
-                <a:srgbClr val="264D8B"/>
-              </a:buClr>
-              <a:buChar char="–"/>
-              <a:defRPr sz="2000">
-                <a:solidFill>
-                  <a:srgbClr val="1A3170"/>
-                </a:solidFill>
-                <a:latin typeface="Trebuchet MS" charset="0"/>
-                <a:ea typeface="MS PGothic" charset="-128"/>
-              </a:defRPr>
-            </a:lvl4pPr>
-            <a:lvl5pPr marL="2057400" indent="-228600">
-              <a:spcBef>
-                <a:spcPct val="20000"/>
-              </a:spcBef>
-              <a:buClr>
-                <a:srgbClr val="264D8B"/>
-              </a:buClr>
-              <a:buChar char="»"/>
-              <a:defRPr sz="2000">
-                <a:solidFill>
-                  <a:srgbClr val="1A3170"/>
-                </a:solidFill>
-                <a:latin typeface="Trebuchet MS" charset="0"/>
-                <a:ea typeface="MS PGothic" charset="-128"/>
-              </a:defRPr>
-            </a:lvl5pPr>
-            <a:lvl6pPr marL="2514600" indent="-228600" eaLnBrk="0" fontAlgn="base" hangingPunct="0">
-              <a:spcBef>
-                <a:spcPct val="20000"/>
-              </a:spcBef>
-              <a:spcAft>
-                <a:spcPct val="0"/>
-              </a:spcAft>
-              <a:buClr>
-                <a:srgbClr val="264D8B"/>
-              </a:buClr>
-              <a:buChar char="»"/>
-              <a:defRPr sz="2000">
-                <a:solidFill>
-                  <a:srgbClr val="1A3170"/>
-                </a:solidFill>
-                <a:latin typeface="Trebuchet MS" charset="0"/>
-                <a:ea typeface="MS PGothic" charset="-128"/>
-              </a:defRPr>
-            </a:lvl6pPr>
-            <a:lvl7pPr marL="2971800" indent="-228600" eaLnBrk="0" fontAlgn="base" hangingPunct="0">
-              <a:spcBef>
-                <a:spcPct val="20000"/>
-              </a:spcBef>
-              <a:spcAft>
-                <a:spcPct val="0"/>
-              </a:spcAft>
-              <a:buClr>
-                <a:srgbClr val="264D8B"/>
-              </a:buClr>
-              <a:buChar char="»"/>
-              <a:defRPr sz="2000">
-                <a:solidFill>
-                  <a:srgbClr val="1A3170"/>
-                </a:solidFill>
-                <a:latin typeface="Trebuchet MS" charset="0"/>
-                <a:ea typeface="MS PGothic" charset="-128"/>
-              </a:defRPr>
-            </a:lvl7pPr>
-            <a:lvl8pPr marL="3429000" indent="-228600" eaLnBrk="0" fontAlgn="base" hangingPunct="0">
-              <a:spcBef>
-                <a:spcPct val="20000"/>
-              </a:spcBef>
-              <a:spcAft>
-                <a:spcPct val="0"/>
-              </a:spcAft>
-              <a:buClr>
-                <a:srgbClr val="264D8B"/>
-              </a:buClr>
-              <a:buChar char="»"/>
-              <a:defRPr sz="2000">
-                <a:solidFill>
-                  <a:srgbClr val="1A3170"/>
-                </a:solidFill>
-                <a:latin typeface="Trebuchet MS" charset="0"/>
-                <a:ea typeface="MS PGothic" charset="-128"/>
-              </a:defRPr>
-            </a:lvl8pPr>
-            <a:lvl9pPr marL="3886200" indent="-228600" eaLnBrk="0" fontAlgn="base" hangingPunct="0">
-              <a:spcBef>
-                <a:spcPct val="20000"/>
-              </a:spcBef>
-              <a:spcAft>
-                <a:spcPct val="0"/>
-              </a:spcAft>
-              <a:buClr>
-                <a:srgbClr val="264D8B"/>
-              </a:buClr>
-              <a:buChar char="»"/>
-              <a:defRPr sz="2000">
-                <a:solidFill>
-                  <a:srgbClr val="1A3170"/>
-                </a:solidFill>
-                <a:latin typeface="Trebuchet MS" charset="0"/>
-                <a:ea typeface="MS PGothic" charset="-128"/>
-              </a:defRPr>
-            </a:lvl9pPr>
-          </a:lstStyle>
-          <a:p>
-            <a:pPr eaLnBrk="1" hangingPunct="1">
-              <a:spcBef>
-                <a:spcPct val="0"/>
-              </a:spcBef>
-              <a:buClrTx/>
-              <a:buFontTx/>
-              <a:buNone/>
-            </a:pPr>
-            <a:r>
-              <a:rPr lang="en-US" altLang="en-US" sz="2800" dirty="0">
-                <a:solidFill>
-                  <a:schemeClr val="tx1"/>
-                </a:solidFill>
-                <a:latin typeface="Courier New" charset="0"/>
-              </a:rPr>
-              <a:t>public int </a:t>
-            </a:r>
-            <a:r>
-              <a:rPr lang="en-US" altLang="en-US" sz="2800" dirty="0" err="1">
-                <a:solidFill>
-                  <a:schemeClr val="tx1"/>
-                </a:solidFill>
-                <a:latin typeface="Courier New" charset="0"/>
-              </a:rPr>
-              <a:t>refundBalance</a:t>
-            </a:r>
-            <a:r>
-              <a:rPr lang="en-US" altLang="en-US" sz="2800" dirty="0">
-                <a:solidFill>
-                  <a:schemeClr val="tx1"/>
-                </a:solidFill>
-                <a:latin typeface="Courier New" charset="0"/>
-              </a:rPr>
-              <a:t>()</a:t>
-            </a:r>
-          </a:p>
-          <a:p>
-            <a:pPr eaLnBrk="1" hangingPunct="1">
-              <a:spcBef>
-                <a:spcPct val="0"/>
-              </a:spcBef>
-              <a:buClrTx/>
-              <a:buFontTx/>
-              <a:buNone/>
-            </a:pPr>
-            <a:r>
-              <a:rPr lang="en-US" altLang="en-US" sz="2800" dirty="0">
-                <a:solidFill>
-                  <a:schemeClr val="tx1"/>
-                </a:solidFill>
-                <a:latin typeface="Courier New" charset="0"/>
-              </a:rPr>
-              <a:t>{</a:t>
-            </a:r>
-          </a:p>
-          <a:p>
-            <a:pPr eaLnBrk="1" hangingPunct="1">
-              <a:spcBef>
-                <a:spcPct val="0"/>
-              </a:spcBef>
-              <a:buClrTx/>
-              <a:buFontTx/>
-              <a:buNone/>
-            </a:pPr>
-            <a:r>
-              <a:rPr lang="en-US" altLang="en-US" sz="2800" dirty="0">
-                <a:solidFill>
-                  <a:schemeClr val="tx1"/>
-                </a:solidFill>
-                <a:latin typeface="Courier New" charset="0"/>
-              </a:rPr>
-              <a:t>    </a:t>
-            </a:r>
-            <a:r>
-              <a:rPr lang="en-US" altLang="en-US" sz="2800" dirty="0" err="1">
-                <a:solidFill>
-                  <a:schemeClr val="tx1"/>
-                </a:solidFill>
-                <a:latin typeface="Courier New" charset="0"/>
-              </a:rPr>
-              <a:t>int</a:t>
-            </a:r>
-            <a:r>
-              <a:rPr lang="en-US" altLang="en-US" sz="2800" dirty="0">
-                <a:solidFill>
-                  <a:schemeClr val="tx1"/>
-                </a:solidFill>
-                <a:latin typeface="Courier New" charset="0"/>
-              </a:rPr>
-              <a:t> </a:t>
-            </a:r>
-            <a:r>
-              <a:rPr lang="en-US" altLang="en-US" sz="2800" dirty="0" err="1">
-                <a:solidFill>
-                  <a:schemeClr val="tx1"/>
-                </a:solidFill>
-                <a:latin typeface="Courier New" charset="0"/>
-              </a:rPr>
-              <a:t>amountToRefund</a:t>
-            </a:r>
-            <a:r>
-              <a:rPr lang="en-US" altLang="en-US" sz="2800" dirty="0">
-                <a:solidFill>
-                  <a:schemeClr val="tx1"/>
-                </a:solidFill>
-                <a:latin typeface="Courier New" charset="0"/>
-              </a:rPr>
-              <a:t>;</a:t>
-            </a:r>
-          </a:p>
-          <a:p>
-            <a:pPr eaLnBrk="1" hangingPunct="1">
-              <a:spcBef>
-                <a:spcPct val="0"/>
-              </a:spcBef>
-              <a:buClrTx/>
-              <a:buFontTx/>
-              <a:buNone/>
-            </a:pPr>
-            <a:r>
-              <a:rPr lang="en-US" altLang="en-US" sz="2800" dirty="0">
-                <a:solidFill>
-                  <a:schemeClr val="tx1"/>
-                </a:solidFill>
-                <a:latin typeface="Courier New" charset="0"/>
-              </a:rPr>
-              <a:t>    </a:t>
-            </a:r>
-            <a:r>
-              <a:rPr lang="en-US" altLang="en-US" sz="2800" dirty="0" err="1">
-                <a:solidFill>
-                  <a:schemeClr val="tx1"/>
-                </a:solidFill>
-                <a:latin typeface="Courier New" charset="0"/>
-              </a:rPr>
-              <a:t>amountToRefund</a:t>
-            </a:r>
-            <a:r>
-              <a:rPr lang="en-US" altLang="en-US" sz="2800" dirty="0">
-                <a:solidFill>
-                  <a:schemeClr val="tx1"/>
-                </a:solidFill>
-                <a:latin typeface="Courier New" charset="0"/>
-              </a:rPr>
-              <a:t> = balance;</a:t>
-            </a:r>
-          </a:p>
-          <a:p>
-            <a:pPr eaLnBrk="1" hangingPunct="1">
-              <a:spcBef>
-                <a:spcPct val="0"/>
-              </a:spcBef>
-              <a:buClrTx/>
-              <a:buFontTx/>
-              <a:buNone/>
-            </a:pPr>
-            <a:r>
-              <a:rPr lang="en-US" altLang="en-US" sz="2800" dirty="0">
-                <a:solidFill>
-                  <a:schemeClr val="tx1"/>
-                </a:solidFill>
-                <a:latin typeface="Courier New" charset="0"/>
-              </a:rPr>
-              <a:t>    balance = 0;</a:t>
-            </a:r>
-          </a:p>
-          <a:p>
-            <a:pPr eaLnBrk="1" hangingPunct="1">
-              <a:spcBef>
-                <a:spcPct val="0"/>
-              </a:spcBef>
-              <a:buClrTx/>
-              <a:buFontTx/>
-              <a:buNone/>
-            </a:pPr>
-            <a:r>
-              <a:rPr lang="en-US" altLang="en-US" sz="2800" dirty="0">
-                <a:solidFill>
-                  <a:schemeClr val="tx1"/>
-                </a:solidFill>
-                <a:latin typeface="Courier New" charset="0"/>
-              </a:rPr>
-              <a:t>    return </a:t>
-            </a:r>
-            <a:r>
-              <a:rPr lang="en-US" altLang="en-US" sz="2800" dirty="0" err="1">
-                <a:solidFill>
-                  <a:schemeClr val="tx1"/>
-                </a:solidFill>
-                <a:latin typeface="Courier New" charset="0"/>
-              </a:rPr>
-              <a:t>amountToRefund</a:t>
-            </a:r>
-            <a:r>
-              <a:rPr lang="en-US" altLang="en-US" sz="2800" dirty="0">
-                <a:solidFill>
-                  <a:schemeClr val="tx1"/>
-                </a:solidFill>
-                <a:latin typeface="Courier New" charset="0"/>
-              </a:rPr>
-              <a:t>;</a:t>
-            </a:r>
-          </a:p>
-          <a:p>
-            <a:pPr eaLnBrk="1" hangingPunct="1">
-              <a:spcBef>
-                <a:spcPct val="0"/>
-              </a:spcBef>
-              <a:buClrTx/>
-              <a:buFontTx/>
-              <a:buNone/>
-            </a:pPr>
-            <a:r>
-              <a:rPr lang="en-US" altLang="en-US" sz="2800" dirty="0">
-                <a:solidFill>
-                  <a:schemeClr val="tx1"/>
-                </a:solidFill>
-                <a:latin typeface="Courier New" charset="0"/>
-              </a:rPr>
-              <a:t>} </a:t>
-            </a:r>
-          </a:p>
-        </p:txBody>
-      </p:sp>
-      <p:sp>
-        <p:nvSpPr>
-          <p:cNvPr id="82948" name="Text Box 4"/>
-          <p:cNvSpPr txBox="1">
-            <a:spLocks noChangeArrowheads="1"/>
-          </p:cNvSpPr>
-          <p:nvPr/>
-        </p:nvSpPr>
-        <p:spPr bwMode="auto">
-          <a:xfrm>
-            <a:off x="1575434" y="3095382"/>
-            <a:ext cx="2680542" cy="523220"/>
-          </a:xfrm>
-          <a:prstGeom prst="rect">
-            <a:avLst/>
-          </a:prstGeom>
-          <a:noFill/>
-          <a:ln>
-            <a:noFill/>
-          </a:ln>
-          <a:extLst>
-            <a:ext uri="{909E8E84-426E-40dd-AFC4-6F175D3DCCD1}">
-              <a14:hiddenFill xmlns:a14="http://schemas.microsoft.com/office/drawing/2010/main" xmlns="">
-                <a:solidFill>
-                  <a:srgbClr val="FFFFFF"/>
-                </a:solidFill>
-              </a14:hiddenFill>
-            </a:ext>
-            <a:ext uri="{91240B29-F687-4f45-9708-019B960494DF}">
-              <a14:hiddenLine xmlns:a14="http://schemas.microsoft.com/office/drawing/2010/main" xmlns="" w="9525">
-                <a:solidFill>
-                  <a:srgbClr val="000000"/>
-                </a:solidFill>
-                <a:miter lim="800000"/>
-                <a:headEnd/>
-                <a:tailEnd/>
-              </a14:hiddenLine>
-            </a:ext>
-          </a:extLst>
-        </p:spPr>
-        <p:txBody>
-          <a:bodyPr wrap="none">
-            <a:spAutoFit/>
-          </a:bodyPr>
-          <a:lstStyle>
-            <a:lvl1pPr>
-              <a:spcBef>
-                <a:spcPct val="20000"/>
-              </a:spcBef>
-              <a:buClr>
-                <a:srgbClr val="264D8B"/>
-              </a:buClr>
-              <a:buFont typeface="Times" charset="0"/>
-              <a:buChar char="•"/>
-              <a:defRPr sz="3200">
-                <a:solidFill>
-                  <a:srgbClr val="1A3170"/>
-                </a:solidFill>
-                <a:latin typeface="Trebuchet MS" charset="0"/>
-                <a:ea typeface="MS PGothic" charset="-128"/>
-              </a:defRPr>
-            </a:lvl1pPr>
-            <a:lvl2pPr marL="742950" indent="-285750">
-              <a:spcBef>
-                <a:spcPct val="20000"/>
-              </a:spcBef>
-              <a:buClr>
-                <a:srgbClr val="264D8B"/>
-              </a:buClr>
-              <a:buChar char="–"/>
-              <a:defRPr sz="2800">
-                <a:solidFill>
-                  <a:srgbClr val="1A3170"/>
-                </a:solidFill>
-                <a:latin typeface="Trebuchet MS" charset="0"/>
-                <a:ea typeface="MS PGothic" charset="-128"/>
-              </a:defRPr>
-            </a:lvl2pPr>
-            <a:lvl3pPr marL="1143000" indent="-228600">
-              <a:spcBef>
-                <a:spcPct val="20000"/>
-              </a:spcBef>
-              <a:buClr>
-                <a:srgbClr val="264D8B"/>
-              </a:buClr>
-              <a:buChar char="•"/>
-              <a:defRPr sz="2400">
-                <a:solidFill>
-                  <a:srgbClr val="1A3170"/>
-                </a:solidFill>
-                <a:latin typeface="Trebuchet MS" charset="0"/>
-                <a:ea typeface="MS PGothic" charset="-128"/>
-              </a:defRPr>
-            </a:lvl3pPr>
-            <a:lvl4pPr marL="1600200" indent="-228600">
-              <a:spcBef>
-                <a:spcPct val="20000"/>
-              </a:spcBef>
-              <a:buClr>
-                <a:srgbClr val="264D8B"/>
-              </a:buClr>
-              <a:buChar char="–"/>
-              <a:defRPr sz="2000">
-                <a:solidFill>
-                  <a:srgbClr val="1A3170"/>
-                </a:solidFill>
-                <a:latin typeface="Trebuchet MS" charset="0"/>
-                <a:ea typeface="MS PGothic" charset="-128"/>
-              </a:defRPr>
-            </a:lvl4pPr>
-            <a:lvl5pPr marL="2057400" indent="-228600">
-              <a:spcBef>
-                <a:spcPct val="20000"/>
-              </a:spcBef>
-              <a:buClr>
-                <a:srgbClr val="264D8B"/>
-              </a:buClr>
-              <a:buChar char="»"/>
-              <a:defRPr sz="2000">
-                <a:solidFill>
-                  <a:srgbClr val="1A3170"/>
-                </a:solidFill>
-                <a:latin typeface="Trebuchet MS" charset="0"/>
-                <a:ea typeface="MS PGothic" charset="-128"/>
-              </a:defRPr>
-            </a:lvl5pPr>
-            <a:lvl6pPr marL="2514600" indent="-228600" eaLnBrk="0" fontAlgn="base" hangingPunct="0">
-              <a:spcBef>
-                <a:spcPct val="20000"/>
-              </a:spcBef>
-              <a:spcAft>
-                <a:spcPct val="0"/>
-              </a:spcAft>
-              <a:buClr>
-                <a:srgbClr val="264D8B"/>
-              </a:buClr>
-              <a:buChar char="»"/>
-              <a:defRPr sz="2000">
-                <a:solidFill>
-                  <a:srgbClr val="1A3170"/>
-                </a:solidFill>
-                <a:latin typeface="Trebuchet MS" charset="0"/>
-                <a:ea typeface="MS PGothic" charset="-128"/>
-              </a:defRPr>
-            </a:lvl6pPr>
-            <a:lvl7pPr marL="2971800" indent="-228600" eaLnBrk="0" fontAlgn="base" hangingPunct="0">
-              <a:spcBef>
-                <a:spcPct val="20000"/>
-              </a:spcBef>
-              <a:spcAft>
-                <a:spcPct val="0"/>
-              </a:spcAft>
-              <a:buClr>
-                <a:srgbClr val="264D8B"/>
-              </a:buClr>
-              <a:buChar char="»"/>
-              <a:defRPr sz="2000">
-                <a:solidFill>
-                  <a:srgbClr val="1A3170"/>
-                </a:solidFill>
-                <a:latin typeface="Trebuchet MS" charset="0"/>
-                <a:ea typeface="MS PGothic" charset="-128"/>
-              </a:defRPr>
-            </a:lvl7pPr>
-            <a:lvl8pPr marL="3429000" indent="-228600" eaLnBrk="0" fontAlgn="base" hangingPunct="0">
-              <a:spcBef>
-                <a:spcPct val="20000"/>
-              </a:spcBef>
-              <a:spcAft>
-                <a:spcPct val="0"/>
-              </a:spcAft>
-              <a:buClr>
-                <a:srgbClr val="264D8B"/>
-              </a:buClr>
-              <a:buChar char="»"/>
-              <a:defRPr sz="2000">
-                <a:solidFill>
-                  <a:srgbClr val="1A3170"/>
-                </a:solidFill>
-                <a:latin typeface="Trebuchet MS" charset="0"/>
-                <a:ea typeface="MS PGothic" charset="-128"/>
-              </a:defRPr>
-            </a:lvl8pPr>
-            <a:lvl9pPr marL="3886200" indent="-228600" eaLnBrk="0" fontAlgn="base" hangingPunct="0">
-              <a:spcBef>
-                <a:spcPct val="20000"/>
-              </a:spcBef>
-              <a:spcAft>
-                <a:spcPct val="0"/>
-              </a:spcAft>
-              <a:buClr>
-                <a:srgbClr val="264D8B"/>
-              </a:buClr>
-              <a:buChar char="»"/>
-              <a:defRPr sz="2000">
-                <a:solidFill>
-                  <a:srgbClr val="1A3170"/>
-                </a:solidFill>
-                <a:latin typeface="Trebuchet MS" charset="0"/>
-                <a:ea typeface="MS PGothic" charset="-128"/>
-              </a:defRPr>
-            </a:lvl9pPr>
-          </a:lstStyle>
-          <a:p>
-            <a:pPr eaLnBrk="1" hangingPunct="1">
-              <a:spcBef>
-                <a:spcPct val="0"/>
-              </a:spcBef>
-              <a:buClrTx/>
-              <a:buFontTx/>
-              <a:buNone/>
-            </a:pPr>
-            <a:r>
-              <a:rPr lang="en-US" altLang="en-US" sz="2800" b="0" dirty="0">
-                <a:solidFill>
-                  <a:srgbClr val="A57133"/>
-                </a:solidFill>
-              </a:rPr>
-              <a:t>A local variable</a:t>
-            </a:r>
-          </a:p>
-        </p:txBody>
-      </p:sp>
-      <p:sp>
-        <p:nvSpPr>
-          <p:cNvPr id="82950" name="AutoShape 6"/>
-          <p:cNvSpPr>
-            <a:spLocks noChangeArrowheads="1"/>
-          </p:cNvSpPr>
-          <p:nvPr/>
-        </p:nvSpPr>
-        <p:spPr bwMode="auto">
-          <a:xfrm>
-            <a:off x="1243553" y="3789040"/>
-            <a:ext cx="2209800" cy="2362200"/>
-          </a:xfrm>
-          <a:prstGeom prst="irregularSeal1">
-            <a:avLst/>
-          </a:prstGeom>
-          <a:solidFill>
-            <a:schemeClr val="bg1"/>
-          </a:solidFill>
-          <a:ln w="9525">
-            <a:solidFill>
-              <a:schemeClr val="tx1"/>
-            </a:solidFill>
-            <a:miter lim="800000"/>
-            <a:headEnd/>
-            <a:tailEnd/>
-          </a:ln>
-        </p:spPr>
-        <p:txBody>
-          <a:bodyPr wrap="none" anchor="ctr"/>
-          <a:lstStyle>
-            <a:lvl1pPr algn="ctr">
-              <a:defRPr sz="2400" b="1">
-                <a:solidFill>
-                  <a:srgbClr val="006600"/>
-                </a:solidFill>
-                <a:latin typeface="Trebuchet MS" charset="0"/>
-                <a:ea typeface="MS PGothic" charset="-128"/>
-              </a:defRPr>
-            </a:lvl1pPr>
-            <a:lvl2pPr marL="742950" indent="-285750" algn="ctr">
-              <a:defRPr sz="2400" b="1">
-                <a:solidFill>
-                  <a:srgbClr val="006600"/>
-                </a:solidFill>
-                <a:latin typeface="Trebuchet MS" charset="0"/>
-                <a:ea typeface="MS PGothic" charset="-128"/>
-              </a:defRPr>
-            </a:lvl2pPr>
-            <a:lvl3pPr marL="1143000" indent="-228600" algn="ctr">
-              <a:defRPr sz="2400" b="1">
-                <a:solidFill>
-                  <a:srgbClr val="006600"/>
-                </a:solidFill>
-                <a:latin typeface="Trebuchet MS" charset="0"/>
-                <a:ea typeface="MS PGothic" charset="-128"/>
-              </a:defRPr>
-            </a:lvl3pPr>
-            <a:lvl4pPr marL="1600200" indent="-228600" algn="ctr">
-              <a:defRPr sz="2400" b="1">
-                <a:solidFill>
-                  <a:srgbClr val="006600"/>
-                </a:solidFill>
-                <a:latin typeface="Trebuchet MS" charset="0"/>
-                <a:ea typeface="MS PGothic" charset="-128"/>
-              </a:defRPr>
-            </a:lvl4pPr>
-            <a:lvl5pPr marL="2057400" indent="-228600" algn="ctr">
-              <a:defRPr sz="2400" b="1">
-                <a:solidFill>
-                  <a:srgbClr val="006600"/>
-                </a:solidFill>
-                <a:latin typeface="Trebuchet MS" charset="0"/>
-                <a:ea typeface="MS PGothic" charset="-128"/>
-              </a:defRPr>
-            </a:lvl5pPr>
-            <a:lvl6pPr marL="2514600" indent="-228600" algn="ctr" eaLnBrk="0" fontAlgn="base" hangingPunct="0">
-              <a:spcBef>
-                <a:spcPct val="0"/>
-              </a:spcBef>
-              <a:spcAft>
-                <a:spcPct val="0"/>
-              </a:spcAft>
-              <a:defRPr sz="2400" b="1">
-                <a:solidFill>
-                  <a:srgbClr val="006600"/>
-                </a:solidFill>
-                <a:latin typeface="Trebuchet MS" charset="0"/>
-                <a:ea typeface="MS PGothic" charset="-128"/>
-              </a:defRPr>
-            </a:lvl6pPr>
-            <a:lvl7pPr marL="2971800" indent="-228600" algn="ctr" eaLnBrk="0" fontAlgn="base" hangingPunct="0">
-              <a:spcBef>
-                <a:spcPct val="0"/>
-              </a:spcBef>
-              <a:spcAft>
-                <a:spcPct val="0"/>
-              </a:spcAft>
-              <a:defRPr sz="2400" b="1">
-                <a:solidFill>
-                  <a:srgbClr val="006600"/>
-                </a:solidFill>
-                <a:latin typeface="Trebuchet MS" charset="0"/>
-                <a:ea typeface="MS PGothic" charset="-128"/>
-              </a:defRPr>
-            </a:lvl7pPr>
-            <a:lvl8pPr marL="3429000" indent="-228600" algn="ctr" eaLnBrk="0" fontAlgn="base" hangingPunct="0">
-              <a:spcBef>
-                <a:spcPct val="0"/>
-              </a:spcBef>
-              <a:spcAft>
-                <a:spcPct val="0"/>
-              </a:spcAft>
-              <a:defRPr sz="2400" b="1">
-                <a:solidFill>
-                  <a:srgbClr val="006600"/>
-                </a:solidFill>
-                <a:latin typeface="Trebuchet MS" charset="0"/>
-                <a:ea typeface="MS PGothic" charset="-128"/>
-              </a:defRPr>
-            </a:lvl8pPr>
-            <a:lvl9pPr marL="3886200" indent="-228600" algn="ctr" eaLnBrk="0" fontAlgn="base" hangingPunct="0">
-              <a:spcBef>
-                <a:spcPct val="0"/>
-              </a:spcBef>
-              <a:spcAft>
-                <a:spcPct val="0"/>
-              </a:spcAft>
-              <a:defRPr sz="2400" b="1">
-                <a:solidFill>
-                  <a:srgbClr val="006600"/>
-                </a:solidFill>
-                <a:latin typeface="Trebuchet MS" charset="0"/>
-                <a:ea typeface="MS PGothic" charset="-128"/>
-              </a:defRPr>
-            </a:lvl9pPr>
-          </a:lstStyle>
-          <a:p>
-            <a:endParaRPr lang="en-GB" altLang="en-US"/>
-          </a:p>
-        </p:txBody>
-      </p:sp>
-      <p:sp>
-        <p:nvSpPr>
-          <p:cNvPr id="82951" name="Text Box 7"/>
-          <p:cNvSpPr txBox="1">
-            <a:spLocks noChangeArrowheads="1"/>
-          </p:cNvSpPr>
-          <p:nvPr/>
-        </p:nvSpPr>
-        <p:spPr bwMode="auto">
-          <a:xfrm>
-            <a:off x="1703512" y="4509120"/>
-            <a:ext cx="1532792" cy="707886"/>
-          </a:xfrm>
-          <a:prstGeom prst="rect">
-            <a:avLst/>
-          </a:prstGeom>
-          <a:noFill/>
-          <a:ln>
-            <a:noFill/>
-          </a:ln>
-          <a:extLst>
-            <a:ext uri="{909E8E84-426E-40dd-AFC4-6F175D3DCCD1}">
-              <a14:hiddenFill xmlns:a14="http://schemas.microsoft.com/office/drawing/2010/main" xmlns="">
-                <a:solidFill>
-                  <a:srgbClr val="FFFFFF"/>
-                </a:solidFill>
-              </a14:hiddenFill>
-            </a:ext>
-            <a:ext uri="{91240B29-F687-4f45-9708-019B960494DF}">
-              <a14:hiddenLine xmlns:a14="http://schemas.microsoft.com/office/drawing/2010/main" xmlns="" w="9525">
-                <a:solidFill>
-                  <a:srgbClr val="000000"/>
-                </a:solidFill>
-                <a:miter lim="800000"/>
-                <a:headEnd/>
-                <a:tailEnd/>
-              </a14:hiddenLine>
-            </a:ext>
-          </a:extLst>
-        </p:spPr>
-        <p:txBody>
-          <a:bodyPr wrap="none">
-            <a:spAutoFit/>
-          </a:bodyPr>
-          <a:lstStyle>
-            <a:lvl1pPr>
-              <a:spcBef>
-                <a:spcPct val="20000"/>
-              </a:spcBef>
-              <a:buClr>
-                <a:srgbClr val="264D8B"/>
-              </a:buClr>
-              <a:buFont typeface="Times" charset="0"/>
-              <a:buChar char="•"/>
-              <a:defRPr sz="3200">
-                <a:solidFill>
-                  <a:srgbClr val="1A3170"/>
-                </a:solidFill>
-                <a:latin typeface="Trebuchet MS" charset="0"/>
-                <a:ea typeface="MS PGothic" charset="-128"/>
-              </a:defRPr>
-            </a:lvl1pPr>
-            <a:lvl2pPr marL="742950" indent="-285750">
-              <a:spcBef>
-                <a:spcPct val="20000"/>
-              </a:spcBef>
-              <a:buClr>
-                <a:srgbClr val="264D8B"/>
-              </a:buClr>
-              <a:buChar char="–"/>
-              <a:defRPr sz="2800">
-                <a:solidFill>
-                  <a:srgbClr val="1A3170"/>
-                </a:solidFill>
-                <a:latin typeface="Trebuchet MS" charset="0"/>
-                <a:ea typeface="MS PGothic" charset="-128"/>
-              </a:defRPr>
-            </a:lvl2pPr>
-            <a:lvl3pPr marL="1143000" indent="-228600">
-              <a:spcBef>
-                <a:spcPct val="20000"/>
-              </a:spcBef>
-              <a:buClr>
-                <a:srgbClr val="264D8B"/>
-              </a:buClr>
-              <a:buChar char="•"/>
-              <a:defRPr sz="2400">
-                <a:solidFill>
-                  <a:srgbClr val="1A3170"/>
-                </a:solidFill>
-                <a:latin typeface="Trebuchet MS" charset="0"/>
-                <a:ea typeface="MS PGothic" charset="-128"/>
-              </a:defRPr>
-            </a:lvl3pPr>
-            <a:lvl4pPr marL="1600200" indent="-228600">
-              <a:spcBef>
-                <a:spcPct val="20000"/>
-              </a:spcBef>
-              <a:buClr>
-                <a:srgbClr val="264D8B"/>
-              </a:buClr>
-              <a:buChar char="–"/>
-              <a:defRPr sz="2000">
-                <a:solidFill>
-                  <a:srgbClr val="1A3170"/>
-                </a:solidFill>
-                <a:latin typeface="Trebuchet MS" charset="0"/>
-                <a:ea typeface="MS PGothic" charset="-128"/>
-              </a:defRPr>
-            </a:lvl4pPr>
-            <a:lvl5pPr marL="2057400" indent="-228600">
-              <a:spcBef>
-                <a:spcPct val="20000"/>
-              </a:spcBef>
-              <a:buClr>
-                <a:srgbClr val="264D8B"/>
-              </a:buClr>
-              <a:buChar char="»"/>
-              <a:defRPr sz="2000">
-                <a:solidFill>
-                  <a:srgbClr val="1A3170"/>
-                </a:solidFill>
-                <a:latin typeface="Trebuchet MS" charset="0"/>
-                <a:ea typeface="MS PGothic" charset="-128"/>
-              </a:defRPr>
-            </a:lvl5pPr>
-            <a:lvl6pPr marL="2514600" indent="-228600" eaLnBrk="0" fontAlgn="base" hangingPunct="0">
-              <a:spcBef>
-                <a:spcPct val="20000"/>
-              </a:spcBef>
-              <a:spcAft>
-                <a:spcPct val="0"/>
-              </a:spcAft>
-              <a:buClr>
-                <a:srgbClr val="264D8B"/>
-              </a:buClr>
-              <a:buChar char="»"/>
-              <a:defRPr sz="2000">
-                <a:solidFill>
-                  <a:srgbClr val="1A3170"/>
-                </a:solidFill>
-                <a:latin typeface="Trebuchet MS" charset="0"/>
-                <a:ea typeface="MS PGothic" charset="-128"/>
-              </a:defRPr>
-            </a:lvl6pPr>
-            <a:lvl7pPr marL="2971800" indent="-228600" eaLnBrk="0" fontAlgn="base" hangingPunct="0">
-              <a:spcBef>
-                <a:spcPct val="20000"/>
-              </a:spcBef>
-              <a:spcAft>
-                <a:spcPct val="0"/>
-              </a:spcAft>
-              <a:buClr>
-                <a:srgbClr val="264D8B"/>
-              </a:buClr>
-              <a:buChar char="»"/>
-              <a:defRPr sz="2000">
-                <a:solidFill>
-                  <a:srgbClr val="1A3170"/>
-                </a:solidFill>
-                <a:latin typeface="Trebuchet MS" charset="0"/>
-                <a:ea typeface="MS PGothic" charset="-128"/>
-              </a:defRPr>
-            </a:lvl7pPr>
-            <a:lvl8pPr marL="3429000" indent="-228600" eaLnBrk="0" fontAlgn="base" hangingPunct="0">
-              <a:spcBef>
-                <a:spcPct val="20000"/>
-              </a:spcBef>
-              <a:spcAft>
-                <a:spcPct val="0"/>
-              </a:spcAft>
-              <a:buClr>
-                <a:srgbClr val="264D8B"/>
-              </a:buClr>
-              <a:buChar char="»"/>
-              <a:defRPr sz="2000">
-                <a:solidFill>
-                  <a:srgbClr val="1A3170"/>
-                </a:solidFill>
-                <a:latin typeface="Trebuchet MS" charset="0"/>
-                <a:ea typeface="MS PGothic" charset="-128"/>
-              </a:defRPr>
-            </a:lvl8pPr>
-            <a:lvl9pPr marL="3886200" indent="-228600" eaLnBrk="0" fontAlgn="base" hangingPunct="0">
-              <a:spcBef>
-                <a:spcPct val="20000"/>
-              </a:spcBef>
-              <a:spcAft>
-                <a:spcPct val="0"/>
-              </a:spcAft>
-              <a:buClr>
-                <a:srgbClr val="264D8B"/>
-              </a:buClr>
-              <a:buChar char="»"/>
-              <a:defRPr sz="2000">
-                <a:solidFill>
-                  <a:srgbClr val="1A3170"/>
-                </a:solidFill>
-                <a:latin typeface="Trebuchet MS" charset="0"/>
-                <a:ea typeface="MS PGothic" charset="-128"/>
-              </a:defRPr>
-            </a:lvl9pPr>
-          </a:lstStyle>
-          <a:p>
-            <a:pPr eaLnBrk="1" hangingPunct="1">
-              <a:spcBef>
-                <a:spcPct val="0"/>
-              </a:spcBef>
-              <a:buClrTx/>
-              <a:buFontTx/>
-              <a:buNone/>
-            </a:pPr>
-            <a:r>
-              <a:rPr lang="en-US" altLang="en-US" sz="2000" b="0" dirty="0">
-                <a:solidFill>
-                  <a:srgbClr val="A57133"/>
-                </a:solidFill>
-              </a:rPr>
-              <a:t>No visibility</a:t>
-            </a:r>
-          </a:p>
-          <a:p>
-            <a:pPr eaLnBrk="1" hangingPunct="1">
-              <a:spcBef>
-                <a:spcPct val="0"/>
-              </a:spcBef>
-              <a:buClrTx/>
-              <a:buFontTx/>
-              <a:buNone/>
-            </a:pPr>
-            <a:r>
-              <a:rPr lang="en-US" altLang="en-US" sz="2000" b="0" dirty="0">
-                <a:solidFill>
-                  <a:srgbClr val="A57133"/>
-                </a:solidFill>
-              </a:rPr>
-              <a:t>modifier</a:t>
-            </a:r>
-          </a:p>
-        </p:txBody>
-      </p:sp>
-      <p:sp>
-        <p:nvSpPr>
-          <p:cNvPr id="82952" name="Line 8"/>
-          <p:cNvSpPr>
-            <a:spLocks noChangeShapeType="1"/>
-          </p:cNvSpPr>
-          <p:nvPr/>
-        </p:nvSpPr>
-        <p:spPr bwMode="auto">
-          <a:xfrm>
-            <a:off x="3863752" y="3717032"/>
-            <a:ext cx="1584176" cy="0"/>
-          </a:xfrm>
-          <a:prstGeom prst="line">
-            <a:avLst/>
-          </a:prstGeom>
-          <a:noFill/>
-          <a:ln w="38100">
-            <a:solidFill>
-              <a:schemeClr val="accent1">
-                <a:lumMod val="50000"/>
-              </a:schemeClr>
-            </a:solidFill>
-            <a:round/>
-            <a:headEnd/>
-            <a:tailEnd type="triangle" w="med" len="med"/>
-          </a:ln>
-          <a:extLst>
-            <a:ext uri="{909E8E84-426E-40dd-AFC4-6F175D3DCCD1}">
-              <a14:hiddenFill xmlns:a14="http://schemas.microsoft.com/office/drawing/2010/main" xmlns="">
-                <a:noFill/>
-              </a14:hiddenFill>
-            </a:ext>
-          </a:extLst>
-        </p:spPr>
-        <p:txBody>
-          <a:bodyPr/>
-          <a:lstStyle/>
-          <a:p>
-            <a:endParaRPr lang="en-US"/>
-          </a:p>
-        </p:txBody>
-      </p:sp>
-    </p:spTree>
-  </p:cSld>
-  <p:clrMapOvr>
-    <a:masterClrMapping/>
-  </p:clrMapOvr>
-  <p:transition spd="med"/>
-</p:sld>
-</file>
-
-<file path=ppt/slides/slide33.xml><?xml version="1.0" encoding="utf-8"?>
-<p:sld xmlns:a="http://schemas.openxmlformats.org/drawingml/2006/main" xmlns:r="http://schemas.openxmlformats.org/officeDocument/2006/relationships" xmlns:p="http://schemas.openxmlformats.org/presentationml/2006/main">
-  <p:cSld>
-    <p:spTree>
-      <p:nvGrpSpPr>
-        <p:cNvPr id="1" name=""/>
-        <p:cNvGrpSpPr/>
-        <p:nvPr/>
-      </p:nvGrpSpPr>
-      <p:grpSpPr>
-        <a:xfrm>
-          <a:off x="0" y="0"/>
-          <a:ext cx="0" cy="0"/>
-          <a:chOff x="0" y="0"/>
-          <a:chExt cx="0" cy="0"/>
-        </a:xfrm>
-      </p:grpSpPr>
-      <p:sp>
-        <p:nvSpPr>
-          <p:cNvPr id="84993" name="Rectangle 2"/>
-          <p:cNvSpPr>
-            <a:spLocks noGrp="1" noChangeArrowheads="1"/>
-          </p:cNvSpPr>
-          <p:nvPr>
-            <p:ph type="title"/>
-          </p:nvPr>
-        </p:nvSpPr>
-        <p:spPr/>
-        <p:txBody>
-          <a:bodyPr/>
-          <a:lstStyle/>
-          <a:p>
-            <a:r>
-              <a:rPr lang="en-GB" altLang="en-US" dirty="0">
-                <a:ea typeface="MS PGothic" charset="-128"/>
-              </a:rPr>
-              <a:t>Scope and lifetime</a:t>
-            </a:r>
-          </a:p>
-        </p:txBody>
-      </p:sp>
-      <p:sp>
-        <p:nvSpPr>
-          <p:cNvPr id="84994" name="Rectangle 3"/>
-          <p:cNvSpPr>
-            <a:spLocks noGrp="1" noChangeArrowheads="1"/>
-          </p:cNvSpPr>
-          <p:nvPr>
-            <p:ph idx="1"/>
-          </p:nvPr>
-        </p:nvSpPr>
-        <p:spPr/>
-        <p:txBody>
-          <a:bodyPr>
-            <a:normAutofit/>
-          </a:bodyPr>
-          <a:lstStyle/>
-          <a:p>
-            <a:pPr>
-              <a:lnSpc>
-                <a:spcPct val="90000"/>
-              </a:lnSpc>
-            </a:pPr>
-            <a:r>
-              <a:rPr lang="en-GB" altLang="en-US" dirty="0">
-                <a:ea typeface="MS PGothic" charset="-128"/>
-              </a:rPr>
-              <a:t>The scope of a field is its whole class.</a:t>
-            </a:r>
-          </a:p>
-          <a:p>
-            <a:pPr>
-              <a:lnSpc>
-                <a:spcPct val="90000"/>
-              </a:lnSpc>
-            </a:pPr>
-            <a:r>
-              <a:rPr lang="en-GB" altLang="en-US" dirty="0">
-                <a:ea typeface="MS PGothic" charset="-128"/>
-              </a:rPr>
-              <a:t>The lifetime of a field is the lifetime of its containing object.</a:t>
-            </a:r>
-          </a:p>
-          <a:p>
-            <a:pPr eaLnBrk="1" hangingPunct="1">
-              <a:lnSpc>
-                <a:spcPct val="90000"/>
-              </a:lnSpc>
-            </a:pPr>
-            <a:r>
-              <a:rPr lang="en-US" altLang="en-US" dirty="0">
-                <a:ea typeface="MS PGothic" charset="-128"/>
-              </a:rPr>
-              <a:t>The scope of a local variable is the block in which it is declared.</a:t>
-            </a:r>
-          </a:p>
-          <a:p>
-            <a:pPr eaLnBrk="1" hangingPunct="1">
-              <a:lnSpc>
-                <a:spcPct val="90000"/>
-              </a:lnSpc>
-            </a:pPr>
-            <a:r>
-              <a:rPr lang="en-US" altLang="en-US" dirty="0">
-                <a:ea typeface="MS PGothic" charset="-128"/>
-              </a:rPr>
-              <a:t>The lifetime of a local variable is the time of execution of the block in which it is declared.</a:t>
-            </a:r>
-          </a:p>
-        </p:txBody>
-      </p:sp>
-    </p:spTree>
-  </p:cSld>
-  <p:clrMapOvr>
-    <a:masterClrMapping/>
-  </p:clrMapOvr>
-  <p:timing>
-    <p:tnLst>
-      <p:par>
-        <p:cTn id="1" dur="indefinite" restart="never" nodeType="tmRoot">
-          <p:childTnLst>
-            <p:seq concurrent="1" nextAc="seek">
-              <p:cTn id="2" dur="indefinite" nodeType="mainSeq">
-                <p:childTnLst>
-                  <p:par>
-                    <p:cTn id="3" fill="hold">
-                      <p:stCondLst>
-                        <p:cond delay="indefinite"/>
-                      </p:stCondLst>
-                      <p:childTnLst>
-                        <p:par>
-                          <p:cTn id="4" fill="hold">
-                            <p:stCondLst>
-                              <p:cond delay="0"/>
-                            </p:stCondLst>
-                            <p:childTnLst>
-                              <p:par>
-                                <p:cTn id="5" presetID="2" presetClass="entr" presetSubtype="4" fill="hold" grpId="0" nodeType="clickEffect">
-                                  <p:stCondLst>
-                                    <p:cond delay="0"/>
-                                  </p:stCondLst>
-                                  <p:childTnLst>
-                                    <p:set>
-                                      <p:cBhvr>
-                                        <p:cTn id="6" dur="1" fill="hold">
-                                          <p:stCondLst>
-                                            <p:cond delay="0"/>
-                                          </p:stCondLst>
-                                        </p:cTn>
-                                        <p:tgtEl>
-                                          <p:spTgt spid="84994">
-                                            <p:txEl>
-                                              <p:pRg st="0" end="0"/>
-                                            </p:txEl>
-                                          </p:spTgt>
-                                        </p:tgtEl>
-                                        <p:attrNameLst>
-                                          <p:attrName>style.visibility</p:attrName>
-                                        </p:attrNameLst>
-                                      </p:cBhvr>
-                                      <p:to>
-                                        <p:strVal val="visible"/>
-                                      </p:to>
-                                    </p:set>
-                                    <p:anim calcmode="lin" valueType="num">
-                                      <p:cBhvr additive="base">
-                                        <p:cTn id="7" dur="500" fill="hold"/>
-                                        <p:tgtEl>
-                                          <p:spTgt spid="84994">
-                                            <p:txEl>
-                                              <p:pRg st="0" end="0"/>
-                                            </p:txEl>
-                                          </p:spTgt>
-                                        </p:tgtEl>
-                                        <p:attrNameLst>
-                                          <p:attrName>ppt_x</p:attrName>
-                                        </p:attrNameLst>
-                                      </p:cBhvr>
-                                      <p:tavLst>
-                                        <p:tav tm="0">
-                                          <p:val>
-                                            <p:strVal val="#ppt_x"/>
-                                          </p:val>
-                                        </p:tav>
-                                        <p:tav tm="100000">
-                                          <p:val>
-                                            <p:strVal val="#ppt_x"/>
-                                          </p:val>
-                                        </p:tav>
-                                      </p:tavLst>
-                                    </p:anim>
-                                    <p:anim calcmode="lin" valueType="num">
-                                      <p:cBhvr additive="base">
-                                        <p:cTn id="8" dur="500" fill="hold"/>
-                                        <p:tgtEl>
-                                          <p:spTgt spid="84994">
-                                            <p:txEl>
-                                              <p:pRg st="0" end="0"/>
-                                            </p:txEl>
-                                          </p:spTgt>
-                                        </p:tgtEl>
-                                        <p:attrNameLst>
-                                          <p:attrName>ppt_y</p:attrName>
-                                        </p:attrNameLst>
-                                      </p:cBhvr>
-                                      <p:tavLst>
-                                        <p:tav tm="0">
-                                          <p:val>
-                                            <p:strVal val="1+#ppt_h/2"/>
-                                          </p:val>
-                                        </p:tav>
-                                        <p:tav tm="100000">
-                                          <p:val>
-                                            <p:strVal val="#ppt_y"/>
-                                          </p:val>
-                                        </p:tav>
-                                      </p:tavLst>
-                                    </p:anim>
-                                  </p:childTnLst>
-                                </p:cTn>
-                              </p:par>
-                            </p:childTnLst>
-                          </p:cTn>
-                        </p:par>
-                      </p:childTnLst>
-                    </p:cTn>
-                  </p:par>
-                  <p:par>
-                    <p:cTn id="9" fill="hold">
-                      <p:stCondLst>
-                        <p:cond delay="indefinite"/>
-                      </p:stCondLst>
-                      <p:childTnLst>
-                        <p:par>
-                          <p:cTn id="10" fill="hold">
-                            <p:stCondLst>
-                              <p:cond delay="0"/>
-                            </p:stCondLst>
-                            <p:childTnLst>
-                              <p:par>
-                                <p:cTn id="11" presetID="2" presetClass="entr" presetSubtype="4" fill="hold" grpId="0" nodeType="clickEffect">
-                                  <p:stCondLst>
-                                    <p:cond delay="0"/>
-                                  </p:stCondLst>
-                                  <p:childTnLst>
-                                    <p:set>
-                                      <p:cBhvr>
-                                        <p:cTn id="12" dur="1" fill="hold">
-                                          <p:stCondLst>
-                                            <p:cond delay="0"/>
-                                          </p:stCondLst>
-                                        </p:cTn>
-                                        <p:tgtEl>
-                                          <p:spTgt spid="84994">
-                                            <p:txEl>
-                                              <p:pRg st="1" end="1"/>
-                                            </p:txEl>
-                                          </p:spTgt>
-                                        </p:tgtEl>
-                                        <p:attrNameLst>
-                                          <p:attrName>style.visibility</p:attrName>
-                                        </p:attrNameLst>
-                                      </p:cBhvr>
-                                      <p:to>
-                                        <p:strVal val="visible"/>
-                                      </p:to>
-                                    </p:set>
-                                    <p:anim calcmode="lin" valueType="num">
-                                      <p:cBhvr additive="base">
-                                        <p:cTn id="13" dur="500" fill="hold"/>
-                                        <p:tgtEl>
-                                          <p:spTgt spid="84994">
-                                            <p:txEl>
-                                              <p:pRg st="1" end="1"/>
-                                            </p:txEl>
-                                          </p:spTgt>
-                                        </p:tgtEl>
-                                        <p:attrNameLst>
-                                          <p:attrName>ppt_x</p:attrName>
-                                        </p:attrNameLst>
-                                      </p:cBhvr>
-                                      <p:tavLst>
-                                        <p:tav tm="0">
-                                          <p:val>
-                                            <p:strVal val="#ppt_x"/>
-                                          </p:val>
-                                        </p:tav>
-                                        <p:tav tm="100000">
-                                          <p:val>
-                                            <p:strVal val="#ppt_x"/>
-                                          </p:val>
-                                        </p:tav>
-                                      </p:tavLst>
-                                    </p:anim>
-                                    <p:anim calcmode="lin" valueType="num">
-                                      <p:cBhvr additive="base">
-                                        <p:cTn id="14" dur="500" fill="hold"/>
-                                        <p:tgtEl>
-                                          <p:spTgt spid="84994">
-                                            <p:txEl>
-                                              <p:pRg st="1" end="1"/>
-                                            </p:txEl>
-                                          </p:spTgt>
-                                        </p:tgtEl>
-                                        <p:attrNameLst>
-                                          <p:attrName>ppt_y</p:attrName>
-                                        </p:attrNameLst>
-                                      </p:cBhvr>
-                                      <p:tavLst>
-                                        <p:tav tm="0">
-                                          <p:val>
-                                            <p:strVal val="1+#ppt_h/2"/>
-                                          </p:val>
-                                        </p:tav>
-                                        <p:tav tm="100000">
-                                          <p:val>
-                                            <p:strVal val="#ppt_y"/>
-                                          </p:val>
-                                        </p:tav>
-                                      </p:tavLst>
-                                    </p:anim>
-                                  </p:childTnLst>
-                                </p:cTn>
-                              </p:par>
-                            </p:childTnLst>
-                          </p:cTn>
-                        </p:par>
-                      </p:childTnLst>
-                    </p:cTn>
-                  </p:par>
-                  <p:par>
-                    <p:cTn id="15" fill="hold">
-                      <p:stCondLst>
-                        <p:cond delay="indefinite"/>
-                      </p:stCondLst>
-                      <p:childTnLst>
-                        <p:par>
-                          <p:cTn id="16" fill="hold">
-                            <p:stCondLst>
-                              <p:cond delay="0"/>
-                            </p:stCondLst>
-                            <p:childTnLst>
-                              <p:par>
-                                <p:cTn id="17" presetID="2" presetClass="entr" presetSubtype="4" fill="hold" grpId="0" nodeType="clickEffect">
-                                  <p:stCondLst>
-                                    <p:cond delay="0"/>
-                                  </p:stCondLst>
-                                  <p:childTnLst>
-                                    <p:set>
-                                      <p:cBhvr>
-                                        <p:cTn id="18" dur="1" fill="hold">
-                                          <p:stCondLst>
-                                            <p:cond delay="0"/>
-                                          </p:stCondLst>
-                                        </p:cTn>
-                                        <p:tgtEl>
-                                          <p:spTgt spid="84994">
-                                            <p:txEl>
-                                              <p:pRg st="2" end="2"/>
-                                            </p:txEl>
-                                          </p:spTgt>
-                                        </p:tgtEl>
-                                        <p:attrNameLst>
-                                          <p:attrName>style.visibility</p:attrName>
-                                        </p:attrNameLst>
-                                      </p:cBhvr>
-                                      <p:to>
-                                        <p:strVal val="visible"/>
-                                      </p:to>
-                                    </p:set>
-                                    <p:anim calcmode="lin" valueType="num">
-                                      <p:cBhvr additive="base">
-                                        <p:cTn id="19" dur="500" fill="hold"/>
-                                        <p:tgtEl>
-                                          <p:spTgt spid="84994">
-                                            <p:txEl>
-                                              <p:pRg st="2" end="2"/>
-                                            </p:txEl>
-                                          </p:spTgt>
-                                        </p:tgtEl>
-                                        <p:attrNameLst>
-                                          <p:attrName>ppt_x</p:attrName>
-                                        </p:attrNameLst>
-                                      </p:cBhvr>
-                                      <p:tavLst>
-                                        <p:tav tm="0">
-                                          <p:val>
-                                            <p:strVal val="#ppt_x"/>
-                                          </p:val>
-                                        </p:tav>
-                                        <p:tav tm="100000">
-                                          <p:val>
-                                            <p:strVal val="#ppt_x"/>
-                                          </p:val>
-                                        </p:tav>
-                                      </p:tavLst>
-                                    </p:anim>
-                                    <p:anim calcmode="lin" valueType="num">
-                                      <p:cBhvr additive="base">
-                                        <p:cTn id="20" dur="500" fill="hold"/>
-                                        <p:tgtEl>
-                                          <p:spTgt spid="84994">
-                                            <p:txEl>
-                                              <p:pRg st="2" end="2"/>
-                                            </p:txEl>
-                                          </p:spTgt>
-                                        </p:tgtEl>
-                                        <p:attrNameLst>
-                                          <p:attrName>ppt_y</p:attrName>
-                                        </p:attrNameLst>
-                                      </p:cBhvr>
-                                      <p:tavLst>
-                                        <p:tav tm="0">
-                                          <p:val>
-                                            <p:strVal val="1+#ppt_h/2"/>
-                                          </p:val>
-                                        </p:tav>
-                                        <p:tav tm="100000">
-                                          <p:val>
-                                            <p:strVal val="#ppt_y"/>
-                                          </p:val>
-                                        </p:tav>
-                                      </p:tavLst>
-                                    </p:anim>
-                                  </p:childTnLst>
-                                </p:cTn>
-                              </p:par>
-                            </p:childTnLst>
-                          </p:cTn>
-                        </p:par>
-                      </p:childTnLst>
-                    </p:cTn>
-                  </p:par>
-                  <p:par>
-                    <p:cTn id="21" fill="hold">
-                      <p:stCondLst>
-                        <p:cond delay="indefinite"/>
-                      </p:stCondLst>
-                      <p:childTnLst>
-                        <p:par>
-                          <p:cTn id="22" fill="hold">
-                            <p:stCondLst>
-                              <p:cond delay="0"/>
-                            </p:stCondLst>
-                            <p:childTnLst>
-                              <p:par>
-                                <p:cTn id="23" presetID="2" presetClass="entr" presetSubtype="4" fill="hold" grpId="0" nodeType="clickEffect">
-                                  <p:stCondLst>
-                                    <p:cond delay="0"/>
-                                  </p:stCondLst>
-                                  <p:childTnLst>
-                                    <p:set>
-                                      <p:cBhvr>
-                                        <p:cTn id="24" dur="1" fill="hold">
-                                          <p:stCondLst>
-                                            <p:cond delay="0"/>
-                                          </p:stCondLst>
-                                        </p:cTn>
-                                        <p:tgtEl>
-                                          <p:spTgt spid="84994">
-                                            <p:txEl>
-                                              <p:pRg st="3" end="3"/>
-                                            </p:txEl>
-                                          </p:spTgt>
-                                        </p:tgtEl>
-                                        <p:attrNameLst>
-                                          <p:attrName>style.visibility</p:attrName>
-                                        </p:attrNameLst>
-                                      </p:cBhvr>
-                                      <p:to>
-                                        <p:strVal val="visible"/>
-                                      </p:to>
-                                    </p:set>
-                                    <p:anim calcmode="lin" valueType="num">
-                                      <p:cBhvr additive="base">
-                                        <p:cTn id="25" dur="500" fill="hold"/>
-                                        <p:tgtEl>
-                                          <p:spTgt spid="84994">
-                                            <p:txEl>
-                                              <p:pRg st="3" end="3"/>
-                                            </p:txEl>
-                                          </p:spTgt>
-                                        </p:tgtEl>
-                                        <p:attrNameLst>
-                                          <p:attrName>ppt_x</p:attrName>
-                                        </p:attrNameLst>
-                                      </p:cBhvr>
-                                      <p:tavLst>
-                                        <p:tav tm="0">
-                                          <p:val>
-                                            <p:strVal val="#ppt_x"/>
-                                          </p:val>
-                                        </p:tav>
-                                        <p:tav tm="100000">
-                                          <p:val>
-                                            <p:strVal val="#ppt_x"/>
-                                          </p:val>
-                                        </p:tav>
-                                      </p:tavLst>
-                                    </p:anim>
-                                    <p:anim calcmode="lin" valueType="num">
-                                      <p:cBhvr additive="base">
-                                        <p:cTn id="26" dur="500" fill="hold"/>
-                                        <p:tgtEl>
-                                          <p:spTgt spid="84994">
-                                            <p:txEl>
-                                              <p:pRg st="3" end="3"/>
-                                            </p:txEl>
-                                          </p:spTgt>
-                                        </p:tgtEl>
-                                        <p:attrNameLst>
-                                          <p:attrName>ppt_y</p:attrName>
-                                        </p:attrNameLst>
-                                      </p:cBhvr>
-                                      <p:tavLst>
-                                        <p:tav tm="0">
-                                          <p:val>
-                                            <p:strVal val="1+#ppt_h/2"/>
-                                          </p:val>
-                                        </p:tav>
-                                        <p:tav tm="100000">
-                                          <p:val>
-                                            <p:strVal val="#ppt_y"/>
-                                          </p:val>
-                                        </p:tav>
-                                      </p:tavLst>
-                                    </p:anim>
-                                  </p:childTnLst>
-                                </p:cTn>
-                              </p:par>
-                            </p:childTnLst>
-                          </p:cTn>
-                        </p:par>
-                      </p:childTnLst>
-                    </p:cTn>
-                  </p:par>
-                </p:childTnLst>
-              </p:cTn>
-              <p:prevCondLst>
-                <p:cond evt="onPrev" delay="0">
-                  <p:tgtEl>
-                    <p:sldTgt/>
-                  </p:tgtEl>
-                </p:cond>
-              </p:prevCondLst>
-              <p:nextCondLst>
-                <p:cond evt="onNext" delay="0">
-                  <p:tgtEl>
-                    <p:sldTgt/>
-                  </p:tgtEl>
-                </p:cond>
-              </p:nextCondLst>
-            </p:seq>
-          </p:childTnLst>
-        </p:cTn>
-      </p:par>
-    </p:tnLst>
-    <p:bldLst>
-      <p:bldP spid="84994" grpId="0" build="p"/>
-    </p:bldLst>
-  </p:timing>
-</p:sld>
-</file>
-
-<file path=ppt/slides/slide34.xml><?xml version="1.0" encoding="utf-8"?>
-<p:sld xmlns:a="http://schemas.openxmlformats.org/drawingml/2006/main" xmlns:r="http://schemas.openxmlformats.org/officeDocument/2006/relationships" xmlns:p="http://schemas.openxmlformats.org/presentationml/2006/main">
-  <p:cSld>
-    <p:spTree>
-      <p:nvGrpSpPr>
-        <p:cNvPr id="1" name=""/>
-        <p:cNvGrpSpPr/>
-        <p:nvPr/>
-      </p:nvGrpSpPr>
-      <p:grpSpPr>
-        <a:xfrm>
-          <a:off x="0" y="0"/>
-          <a:ext cx="0" cy="0"/>
-          <a:chOff x="0" y="0"/>
-          <a:chExt cx="0" cy="0"/>
-        </a:xfrm>
-      </p:grpSpPr>
-      <p:sp>
-        <p:nvSpPr>
-          <p:cNvPr id="2" name="Title 1"/>
-          <p:cNvSpPr>
-            <a:spLocks noGrp="1"/>
-          </p:cNvSpPr>
-          <p:nvPr>
-            <p:ph type="title"/>
-          </p:nvPr>
-        </p:nvSpPr>
-        <p:spPr/>
-        <p:txBody>
-          <a:bodyPr/>
-          <a:lstStyle/>
-          <a:p>
-            <a:r>
-              <a:rPr lang="en-IE" dirty="0"/>
-              <a:t>Questions?</a:t>
-            </a:r>
-          </a:p>
-        </p:txBody>
-      </p:sp>
-      <p:pic>
-        <p:nvPicPr>
-          <p:cNvPr id="3" name="Picture 2" descr="A green question mark in a circle&#10;&#10;AI-generated content may be incorrect.">
-            <a:extLst>
-              <a:ext uri="{FF2B5EF4-FFF2-40B4-BE49-F238E27FC236}">
-                <a16:creationId xmlns:a16="http://schemas.microsoft.com/office/drawing/2014/main" id="{4021528B-859B-0F0C-6479-D9428D88B2DF}"/>
-              </a:ext>
-            </a:extLst>
-          </p:cNvPr>
-          <p:cNvPicPr>
-            <a:picLocks noChangeAspect="1"/>
-          </p:cNvPicPr>
-          <p:nvPr/>
-        </p:nvPicPr>
-        <p:blipFill>
-          <a:blip r:embed="rId2">
-            <a:extLst>
-              <a:ext uri="{28A0092B-C50C-407E-A947-70E740481C1C}">
-                <a14:useLocalDpi xmlns:a14="http://schemas.microsoft.com/office/drawing/2010/main" val="0"/>
-              </a:ext>
-            </a:extLst>
-          </a:blip>
-          <a:stretch>
-            <a:fillRect/>
-          </a:stretch>
-        </p:blipFill>
-        <p:spPr>
-          <a:xfrm>
-            <a:off x="2971800" y="1325562"/>
-            <a:ext cx="5257800" cy="5257800"/>
-          </a:xfrm>
-          <a:prstGeom prst="rect">
-            <a:avLst/>
-          </a:prstGeom>
-        </p:spPr>
-      </p:pic>
-    </p:spTree>
-    <p:extLst>
-      <p:ext uri="{BB962C8B-B14F-4D97-AF65-F5344CB8AC3E}">
-        <p14:creationId xmlns:p14="http://schemas.microsoft.com/office/powerpoint/2010/main" val="815503280"/>
-      </p:ext>
-    </p:extLst>
-  </p:cSld>
-  <p:clrMapOvr>
-    <a:masterClrMapping/>
-  </p:clrMapOvr>
 </p:sld>
 </file>
 

--- a/topic03-dataTypes-variables-and-expressions/unit-1/talk-1/a-data-types.pptx
+++ b/topic03-dataTypes-variables-and-expressions/unit-1/talk-1/a-data-types.pptx
@@ -5,10 +5,10 @@
     <p:sldMasterId id="2147483955" r:id="rId1"/>
   </p:sldMasterIdLst>
   <p:notesMasterIdLst>
-    <p:notesMasterId r:id="rId31"/>
+    <p:notesMasterId r:id="rId33"/>
   </p:notesMasterIdLst>
   <p:handoutMasterIdLst>
-    <p:handoutMasterId r:id="rId32"/>
+    <p:handoutMasterId r:id="rId34"/>
   </p:handoutMasterIdLst>
   <p:sldIdLst>
     <p:sldId id="256" r:id="rId2"/>
@@ -36,10 +36,12 @@
     <p:sldId id="278" r:id="rId24"/>
     <p:sldId id="368" r:id="rId25"/>
     <p:sldId id="369" r:id="rId26"/>
-    <p:sldId id="371" r:id="rId27"/>
-    <p:sldId id="307" r:id="rId28"/>
-    <p:sldId id="372" r:id="rId29"/>
-    <p:sldId id="347" r:id="rId30"/>
+    <p:sldId id="373" r:id="rId27"/>
+    <p:sldId id="279" r:id="rId28"/>
+    <p:sldId id="371" r:id="rId29"/>
+    <p:sldId id="307" r:id="rId30"/>
+    <p:sldId id="372" r:id="rId31"/>
+    <p:sldId id="347" r:id="rId32"/>
   </p:sldIdLst>
   <p:sldSz cx="12192000" cy="6858000"/>
   <p:notesSz cx="6858000" cy="9144000"/>
@@ -509,14 +511,14 @@
           </a:ln>
           <a:extLst>
             <a:ext uri="{909E8E84-426E-40dd-AFC4-6F175D3DCCD1}">
-              <a14:hiddenFill xmlns:a14="http://schemas.microsoft.com/office/drawing/2010/main" xmlns="">
+              <a14:hiddenFill xmlns="" xmlns:a14="http://schemas.microsoft.com/office/drawing/2010/main">
                 <a:solidFill>
                   <a:srgbClr val="FFFFFF"/>
                 </a:solidFill>
               </a14:hiddenFill>
             </a:ext>
             <a:ext uri="{FAA26D3D-D897-4be2-8F04-BA451C77F1D7}">
-              <ma14:placeholderFlag xmlns:ma14="http://schemas.microsoft.com/office/mac/drawingml/2011/main" xmlns="" val="1"/>
+              <ma14:placeholderFlag xmlns="" xmlns:ma14="http://schemas.microsoft.com/office/mac/drawingml/2011/main" val="1"/>
             </a:ext>
           </a:extLst>
         </p:spPr>
@@ -860,14 +862,14 @@
           <a:noFill/>
           <a:extLst>
             <a:ext uri="{909E8E84-426E-40dd-AFC4-6F175D3DCCD1}">
-              <a14:hiddenFill xmlns:a14="http://schemas.microsoft.com/office/drawing/2010/main" xmlns="">
+              <a14:hiddenFill xmlns="" xmlns:a14="http://schemas.microsoft.com/office/drawing/2010/main">
                 <a:solidFill>
                   <a:srgbClr val="FFFFFF"/>
                 </a:solidFill>
               </a14:hiddenFill>
             </a:ext>
             <a:ext uri="{91240B29-F687-4f45-9708-019B960494DF}">
-              <a14:hiddenLine xmlns:a14="http://schemas.microsoft.com/office/drawing/2010/main" xmlns="" w="9525">
+              <a14:hiddenLine xmlns="" xmlns:a14="http://schemas.microsoft.com/office/drawing/2010/main" w="9525">
                 <a:solidFill>
                   <a:srgbClr val="000000"/>
                 </a:solidFill>
@@ -1015,14 +1017,14 @@
           <a:noFill/>
           <a:extLst>
             <a:ext uri="{909E8E84-426E-40dd-AFC4-6F175D3DCCD1}">
-              <a14:hiddenFill xmlns:a14="http://schemas.microsoft.com/office/drawing/2010/main" xmlns="">
+              <a14:hiddenFill xmlns="" xmlns:a14="http://schemas.microsoft.com/office/drawing/2010/main">
                 <a:solidFill>
                   <a:srgbClr val="FFFFFF"/>
                 </a:solidFill>
               </a14:hiddenFill>
             </a:ext>
             <a:ext uri="{91240B29-F687-4f45-9708-019B960494DF}">
-              <a14:hiddenLine xmlns:a14="http://schemas.microsoft.com/office/drawing/2010/main" xmlns="" w="9525">
+              <a14:hiddenLine xmlns="" xmlns:a14="http://schemas.microsoft.com/office/drawing/2010/main" w="9525">
                 <a:solidFill>
                   <a:srgbClr val="000000"/>
                 </a:solidFill>
@@ -1170,14 +1172,14 @@
           <a:noFill/>
           <a:extLst>
             <a:ext uri="{909E8E84-426E-40dd-AFC4-6F175D3DCCD1}">
-              <a14:hiddenFill xmlns:a14="http://schemas.microsoft.com/office/drawing/2010/main" xmlns="">
+              <a14:hiddenFill xmlns="" xmlns:a14="http://schemas.microsoft.com/office/drawing/2010/main">
                 <a:solidFill>
                   <a:srgbClr val="FFFFFF"/>
                 </a:solidFill>
               </a14:hiddenFill>
             </a:ext>
             <a:ext uri="{91240B29-F687-4f45-9708-019B960494DF}">
-              <a14:hiddenLine xmlns:a14="http://schemas.microsoft.com/office/drawing/2010/main" xmlns="" w="9525">
+              <a14:hiddenLine xmlns="" xmlns:a14="http://schemas.microsoft.com/office/drawing/2010/main" w="9525">
                 <a:solidFill>
                   <a:srgbClr val="000000"/>
                 </a:solidFill>
@@ -1349,7 +1351,7 @@
         <p:spPr>
           <a:extLst>
             <a:ext uri="{FAA26D3D-D897-4be2-8F04-BA451C77F1D7}">
-              <ma14:placeholderFlag xmlns:ma14="http://schemas.microsoft.com/office/mac/drawingml/2011/main" xmlns="" val="1"/>
+              <ma14:placeholderFlag xmlns="" xmlns:ma14="http://schemas.microsoft.com/office/mac/drawingml/2011/main" val="1"/>
             </a:ext>
           </a:extLst>
         </p:spPr>
@@ -1514,14 +1516,14 @@
           <a:noFill/>
           <a:extLst>
             <a:ext uri="{909E8E84-426E-40dd-AFC4-6F175D3DCCD1}">
-              <a14:hiddenFill xmlns:a14="http://schemas.microsoft.com/office/drawing/2010/main" xmlns="">
+              <a14:hiddenFill xmlns="" xmlns:a14="http://schemas.microsoft.com/office/drawing/2010/main">
                 <a:solidFill>
                   <a:srgbClr val="FFFFFF"/>
                 </a:solidFill>
               </a14:hiddenFill>
             </a:ext>
             <a:ext uri="{91240B29-F687-4f45-9708-019B960494DF}">
-              <a14:hiddenLine xmlns:a14="http://schemas.microsoft.com/office/drawing/2010/main" xmlns="" w="9525">
+              <a14:hiddenLine xmlns="" xmlns:a14="http://schemas.microsoft.com/office/drawing/2010/main" w="9525">
                 <a:solidFill>
                   <a:srgbClr val="000000"/>
                 </a:solidFill>
@@ -1669,14 +1671,14 @@
           <a:noFill/>
           <a:extLst>
             <a:ext uri="{909E8E84-426E-40dd-AFC4-6F175D3DCCD1}">
-              <a14:hiddenFill xmlns:a14="http://schemas.microsoft.com/office/drawing/2010/main" xmlns="">
+              <a14:hiddenFill xmlns="" xmlns:a14="http://schemas.microsoft.com/office/drawing/2010/main">
                 <a:solidFill>
                   <a:srgbClr val="FFFFFF"/>
                 </a:solidFill>
               </a14:hiddenFill>
             </a:ext>
             <a:ext uri="{91240B29-F687-4f45-9708-019B960494DF}">
-              <a14:hiddenLine xmlns:a14="http://schemas.microsoft.com/office/drawing/2010/main" xmlns="" w="9525">
+              <a14:hiddenLine xmlns="" xmlns:a14="http://schemas.microsoft.com/office/drawing/2010/main" w="9525">
                 <a:solidFill>
                   <a:srgbClr val="000000"/>
                 </a:solidFill>
@@ -1824,14 +1826,14 @@
           <a:noFill/>
           <a:extLst>
             <a:ext uri="{909E8E84-426E-40dd-AFC4-6F175D3DCCD1}">
-              <a14:hiddenFill xmlns:a14="http://schemas.microsoft.com/office/drawing/2010/main" xmlns="">
+              <a14:hiddenFill xmlns="" xmlns:a14="http://schemas.microsoft.com/office/drawing/2010/main">
                 <a:solidFill>
                   <a:srgbClr val="FFFFFF"/>
                 </a:solidFill>
               </a14:hiddenFill>
             </a:ext>
             <a:ext uri="{91240B29-F687-4f45-9708-019B960494DF}">
-              <a14:hiddenLine xmlns:a14="http://schemas.microsoft.com/office/drawing/2010/main" xmlns="" w="9525">
+              <a14:hiddenLine xmlns="" xmlns:a14="http://schemas.microsoft.com/office/drawing/2010/main" w="9525">
                 <a:solidFill>
                   <a:srgbClr val="000000"/>
                 </a:solidFill>
@@ -2003,7 +2005,7 @@
         <p:spPr>
           <a:extLst>
             <a:ext uri="{FAA26D3D-D897-4be2-8F04-BA451C77F1D7}">
-              <ma14:placeholderFlag xmlns:ma14="http://schemas.microsoft.com/office/mac/drawingml/2011/main" xmlns="" val="1"/>
+              <ma14:placeholderFlag xmlns="" xmlns:ma14="http://schemas.microsoft.com/office/mac/drawingml/2011/main" val="1"/>
             </a:ext>
           </a:extLst>
         </p:spPr>
@@ -2507,6 +2509,99 @@
     <p:extLst>
       <p:ext uri="{BB962C8B-B14F-4D97-AF65-F5344CB8AC3E}">
         <p14:creationId xmlns:p14="http://schemas.microsoft.com/office/powerpoint/2010/main" val="684736897"/>
+      </p:ext>
+    </p:extLst>
+  </p:cSld>
+  <p:clrMapOvr>
+    <a:masterClrMapping/>
+  </p:clrMapOvr>
+</p:notes>
+</file>
+
+<file path=ppt/notesSlides/notesSlide9.xml><?xml version="1.0" encoding="utf-8"?>
+<p:notes xmlns:a="http://schemas.openxmlformats.org/drawingml/2006/main" xmlns:r="http://schemas.openxmlformats.org/officeDocument/2006/relationships" xmlns:p="http://schemas.openxmlformats.org/presentationml/2006/main">
+  <p:cSld>
+    <p:spTree>
+      <p:nvGrpSpPr>
+        <p:cNvPr id="1" name=""/>
+        <p:cNvGrpSpPr/>
+        <p:nvPr/>
+      </p:nvGrpSpPr>
+      <p:grpSpPr>
+        <a:xfrm>
+          <a:off x="0" y="0"/>
+          <a:ext cx="0" cy="0"/>
+          <a:chOff x="0" y="0"/>
+          <a:chExt cx="0" cy="0"/>
+        </a:xfrm>
+      </p:grpSpPr>
+      <p:sp>
+        <p:nvSpPr>
+          <p:cNvPr id="7" name="Rectangle 7"/>
+          <p:cNvSpPr>
+            <a:spLocks noGrp="1" noChangeArrowheads="1"/>
+          </p:cNvSpPr>
+          <p:nvPr>
+            <p:ph type="sldNum" sz="quarter" idx="5"/>
+          </p:nvPr>
+        </p:nvSpPr>
+        <p:spPr>
+          <a:ln/>
+        </p:spPr>
+        <p:txBody>
+          <a:bodyPr/>
+          <a:lstStyle/>
+          <a:p>
+            <a:fld id="{2DDBB281-C514-8742-9D24-3A3D1BD36245}" type="slidenum">
+              <a:rPr lang="en-US"/>
+              <a:pPr/>
+              <a:t>27</a:t>
+            </a:fld>
+            <a:endParaRPr lang="en-US"/>
+          </a:p>
+        </p:txBody>
+      </p:sp>
+      <p:sp>
+        <p:nvSpPr>
+          <p:cNvPr id="43010" name="Rectangle 2"/>
+          <p:cNvSpPr>
+            <a:spLocks noGrp="1" noRot="1" noChangeAspect="1" noChangeArrowheads="1" noTextEdit="1"/>
+          </p:cNvSpPr>
+          <p:nvPr>
+            <p:ph type="sldImg"/>
+          </p:nvPr>
+        </p:nvSpPr>
+        <p:spPr>
+          <a:xfrm>
+            <a:off x="381000" y="685800"/>
+            <a:ext cx="6096000" cy="3429000"/>
+          </a:xfrm>
+          <a:ln/>
+        </p:spPr>
+      </p:sp>
+      <p:sp>
+        <p:nvSpPr>
+          <p:cNvPr id="43011" name="Rectangle 3"/>
+          <p:cNvSpPr>
+            <a:spLocks noGrp="1" noChangeArrowheads="1"/>
+          </p:cNvSpPr>
+          <p:nvPr>
+            <p:ph type="body" idx="1"/>
+          </p:nvPr>
+        </p:nvSpPr>
+        <p:spPr/>
+        <p:txBody>
+          <a:bodyPr/>
+          <a:lstStyle/>
+          <a:p>
+            <a:endParaRPr lang="en-US"/>
+          </a:p>
+        </p:txBody>
+      </p:sp>
+    </p:spTree>
+    <p:extLst>
+      <p:ext uri="{BB962C8B-B14F-4D97-AF65-F5344CB8AC3E}">
+        <p14:creationId xmlns:p14="http://schemas.microsoft.com/office/powerpoint/2010/main" val="1646701114"/>
       </p:ext>
     </p:extLst>
   </p:cSld>
@@ -2697,7 +2792,7 @@
           <a:p>
             <a:fld id="{C764DE79-268F-4C1A-8933-263129D2AF90}" type="datetimeFigureOut">
               <a:rPr lang="en-US" smtClean="0"/>
-              <a:t>9/28/25</a:t>
+              <a:t>10/1/25</a:t>
             </a:fld>
             <a:endParaRPr lang="en-US" dirty="0"/>
           </a:p>
@@ -2868,7 +2963,7 @@
           <a:p>
             <a:fld id="{C764DE79-268F-4C1A-8933-263129D2AF90}" type="datetimeFigureOut">
               <a:rPr lang="en-US" smtClean="0"/>
-              <a:t>9/28/25</a:t>
+              <a:t>10/1/25</a:t>
             </a:fld>
             <a:endParaRPr lang="en-US" dirty="0"/>
           </a:p>
@@ -3049,7 +3144,7 @@
           <a:p>
             <a:fld id="{C764DE79-268F-4C1A-8933-263129D2AF90}" type="datetimeFigureOut">
               <a:rPr lang="en-US" smtClean="0"/>
-              <a:t>9/28/25</a:t>
+              <a:t>10/1/25</a:t>
             </a:fld>
             <a:endParaRPr lang="en-US" dirty="0"/>
           </a:p>
@@ -3687,7 +3782,7 @@
           <a:p>
             <a:fld id="{C764DE79-268F-4C1A-8933-263129D2AF90}" type="datetimeFigureOut">
               <a:rPr lang="en-US" smtClean="0"/>
-              <a:t>9/28/25</a:t>
+              <a:t>10/1/25</a:t>
             </a:fld>
             <a:endParaRPr lang="en-US" dirty="0"/>
           </a:p>
@@ -4059,7 +4154,7 @@
           <a:p>
             <a:fld id="{C764DE79-268F-4C1A-8933-263129D2AF90}" type="datetimeFigureOut">
               <a:rPr lang="en-US" smtClean="0"/>
-              <a:t>9/28/25</a:t>
+              <a:t>10/1/25</a:t>
             </a:fld>
             <a:endParaRPr lang="en-US" dirty="0"/>
           </a:p>
@@ -4359,7 +4454,7 @@
           <a:p>
             <a:fld id="{C764DE79-268F-4C1A-8933-263129D2AF90}" type="datetimeFigureOut">
               <a:rPr lang="en-US" smtClean="0"/>
-              <a:t>9/28/25</a:t>
+              <a:t>10/1/25</a:t>
             </a:fld>
             <a:endParaRPr lang="en-US" dirty="0"/>
           </a:p>
@@ -4906,7 +5001,7 @@
           <a:p>
             <a:fld id="{C764DE79-268F-4C1A-8933-263129D2AF90}" type="datetimeFigureOut">
               <a:rPr lang="en-US" smtClean="0"/>
-              <a:t>9/28/25</a:t>
+              <a:t>10/1/25</a:t>
             </a:fld>
             <a:endParaRPr lang="en-US" dirty="0"/>
           </a:p>
@@ -5112,7 +5207,7 @@
           <a:p>
             <a:fld id="{C764DE79-268F-4C1A-8933-263129D2AF90}" type="datetimeFigureOut">
               <a:rPr lang="en-US" smtClean="0"/>
-              <a:t>9/28/25</a:t>
+              <a:t>10/1/25</a:t>
             </a:fld>
             <a:endParaRPr lang="en-US" dirty="0"/>
           </a:p>
@@ -5324,7 +5419,7 @@
           <a:p>
             <a:fld id="{C764DE79-268F-4C1A-8933-263129D2AF90}" type="datetimeFigureOut">
               <a:rPr lang="en-US" smtClean="0"/>
-              <a:t>9/28/25</a:t>
+              <a:t>10/1/25</a:t>
             </a:fld>
             <a:endParaRPr lang="en-US" dirty="0"/>
           </a:p>
@@ -5601,7 +5696,7 @@
           <a:p>
             <a:fld id="{C764DE79-268F-4C1A-8933-263129D2AF90}" type="datetimeFigureOut">
               <a:rPr lang="en-US" smtClean="0"/>
-              <a:t>9/28/25</a:t>
+              <a:t>10/1/25</a:t>
             </a:fld>
             <a:endParaRPr lang="en-US" dirty="0"/>
           </a:p>
@@ -5859,7 +5954,7 @@
           <a:p>
             <a:fld id="{C764DE79-268F-4C1A-8933-263129D2AF90}" type="datetimeFigureOut">
               <a:rPr lang="en-US" smtClean="0"/>
-              <a:t>9/28/25</a:t>
+              <a:t>10/1/25</a:t>
             </a:fld>
             <a:endParaRPr lang="en-US" dirty="0"/>
           </a:p>
@@ -6078,7 +6173,7 @@
           <a:p>
             <a:fld id="{C764DE79-268F-4C1A-8933-263129D2AF90}" type="datetimeFigureOut">
               <a:rPr lang="en-US" smtClean="0"/>
-              <a:t>9/28/25</a:t>
+              <a:t>10/1/25</a:t>
             </a:fld>
             <a:endParaRPr lang="en-US" dirty="0"/>
           </a:p>
@@ -6546,14 +6641,14 @@
           </a:ln>
           <a:extLst>
             <a:ext uri="{909E8E84-426E-40dd-AFC4-6F175D3DCCD1}">
-              <a14:hiddenFill xmlns:a14="http://schemas.microsoft.com/office/drawing/2010/main" xmlns="">
+              <a14:hiddenFill xmlns="" xmlns:a14="http://schemas.microsoft.com/office/drawing/2010/main">
                 <a:solidFill>
                   <a:srgbClr val="FFFFFF"/>
                 </a:solidFill>
               </a14:hiddenFill>
             </a:ext>
             <a:ext uri="{91240B29-F687-4f45-9708-019B960494DF}">
-              <a14:hiddenLine xmlns:a14="http://schemas.microsoft.com/office/drawing/2010/main" xmlns="" w="9525">
+              <a14:hiddenLine xmlns="" xmlns:a14="http://schemas.microsoft.com/office/drawing/2010/main" w="9525">
                 <a:solidFill>
                   <a:srgbClr val="000000"/>
                 </a:solidFill>
@@ -17326,6 +17421,1655 @@
         <p:cNvPr id="1" name="">
           <a:extLst>
             <a:ext uri="{FF2B5EF4-FFF2-40B4-BE49-F238E27FC236}">
+              <a16:creationId xmlns:a16="http://schemas.microsoft.com/office/drawing/2014/main" id="{A0D077DE-E7DD-6444-798C-7E63BF4BA3D3}"/>
+            </a:ext>
+          </a:extLst>
+        </p:cNvPr>
+        <p:cNvGrpSpPr/>
+        <p:nvPr/>
+      </p:nvGrpSpPr>
+      <p:grpSpPr>
+        <a:xfrm>
+          <a:off x="0" y="0"/>
+          <a:ext cx="0" cy="0"/>
+          <a:chOff x="0" y="0"/>
+          <a:chExt cx="0" cy="0"/>
+        </a:xfrm>
+      </p:grpSpPr>
+      <p:sp>
+        <p:nvSpPr>
+          <p:cNvPr id="2" name="Title 1">
+            <a:extLst>
+              <a:ext uri="{FF2B5EF4-FFF2-40B4-BE49-F238E27FC236}">
+                <a16:creationId xmlns:a16="http://schemas.microsoft.com/office/drawing/2014/main" id="{6B19C3C8-B1E1-49D9-3602-274237F81055}"/>
+              </a:ext>
+            </a:extLst>
+          </p:cNvPr>
+          <p:cNvSpPr>
+            <a:spLocks noGrp="1"/>
+          </p:cNvSpPr>
+          <p:nvPr>
+            <p:ph type="title"/>
+          </p:nvPr>
+        </p:nvSpPr>
+        <p:spPr/>
+        <p:txBody>
+          <a:bodyPr/>
+          <a:lstStyle/>
+          <a:p>
+            <a:r>
+              <a:rPr lang="en-IE"/>
+              <a:t>Topics list</a:t>
+            </a:r>
+            <a:endParaRPr lang="en-IE" dirty="0"/>
+          </a:p>
+        </p:txBody>
+      </p:sp>
+      <p:sp>
+        <p:nvSpPr>
+          <p:cNvPr id="5" name="Content Placeholder 4">
+            <a:extLst>
+              <a:ext uri="{FF2B5EF4-FFF2-40B4-BE49-F238E27FC236}">
+                <a16:creationId xmlns:a16="http://schemas.microsoft.com/office/drawing/2014/main" id="{EC3FAC64-F396-4275-C25B-32C453D80F88}"/>
+              </a:ext>
+            </a:extLst>
+          </p:cNvPr>
+          <p:cNvSpPr>
+            <a:spLocks noGrp="1"/>
+          </p:cNvSpPr>
+          <p:nvPr>
+            <p:ph idx="1"/>
+          </p:nvPr>
+        </p:nvSpPr>
+        <p:spPr/>
+        <p:txBody>
+          <a:bodyPr>
+            <a:normAutofit fontScale="70000" lnSpcReduction="20000"/>
+          </a:bodyPr>
+          <a:lstStyle/>
+          <a:p>
+            <a:pPr marL="514350" indent="-514350">
+              <a:buFont typeface="+mj-lt"/>
+              <a:buAutoNum type="arabicPeriod"/>
+            </a:pPr>
+            <a:r>
+              <a:rPr lang="en-IE" dirty="0"/>
+              <a:t>Variables.</a:t>
+            </a:r>
+          </a:p>
+          <a:p>
+            <a:pPr marL="514350" indent="-514350">
+              <a:buFont typeface="+mj-lt"/>
+              <a:buAutoNum type="arabicPeriod"/>
+            </a:pPr>
+            <a:endParaRPr lang="en-IE" dirty="0"/>
+          </a:p>
+          <a:p>
+            <a:pPr marL="514350" indent="-514350">
+              <a:buFont typeface="+mj-lt"/>
+              <a:buAutoNum type="arabicPeriod"/>
+            </a:pPr>
+            <a:r>
+              <a:rPr lang="en-IE" dirty="0"/>
+              <a:t>Java Keywords, tokens</a:t>
+            </a:r>
+          </a:p>
+          <a:p>
+            <a:pPr marL="514350" indent="-514350">
+              <a:buFont typeface="+mj-lt"/>
+              <a:buAutoNum type="arabicPeriod"/>
+            </a:pPr>
+            <a:endParaRPr lang="en-IE" dirty="0"/>
+          </a:p>
+          <a:p>
+            <a:pPr marL="514350" indent="-514350">
+              <a:buFont typeface="+mj-lt"/>
+              <a:buAutoNum type="arabicPeriod"/>
+            </a:pPr>
+            <a:r>
+              <a:rPr lang="en-IE" dirty="0"/>
+              <a:t>Data Types.</a:t>
+            </a:r>
+          </a:p>
+          <a:p>
+            <a:pPr marL="514350" indent="-514350">
+              <a:buFont typeface="+mj-lt"/>
+              <a:buAutoNum type="arabicPeriod"/>
+            </a:pPr>
+            <a:endParaRPr lang="en-IE" dirty="0"/>
+          </a:p>
+          <a:p>
+            <a:pPr marL="514350" indent="-514350">
+              <a:buFont typeface="+mj-lt"/>
+              <a:buAutoNum type="arabicPeriod"/>
+            </a:pPr>
+            <a:endParaRPr lang="en-IE" dirty="0"/>
+          </a:p>
+          <a:p>
+            <a:pPr marL="514350" indent="-514350">
+              <a:buFont typeface="+mj-lt"/>
+              <a:buAutoNum type="arabicPeriod"/>
+            </a:pPr>
+            <a:r>
+              <a:rPr lang="en-IE" dirty="0"/>
+              <a:t>Java’s Primitive Data Types</a:t>
+            </a:r>
+          </a:p>
+          <a:p>
+            <a:pPr marL="971550" lvl="1" indent="-514350">
+              <a:buFont typeface="+mj-lt"/>
+              <a:buAutoNum type="arabicPeriod"/>
+            </a:pPr>
+            <a:r>
+              <a:rPr lang="en-IE" dirty="0"/>
+              <a:t>Whole numbers.</a:t>
+            </a:r>
+          </a:p>
+          <a:p>
+            <a:pPr marL="971550" lvl="1" indent="-514350">
+              <a:buFont typeface="+mj-lt"/>
+              <a:buAutoNum type="arabicPeriod"/>
+            </a:pPr>
+            <a:r>
+              <a:rPr lang="en-IE" dirty="0"/>
+              <a:t>Decimal numbers.</a:t>
+            </a:r>
+          </a:p>
+          <a:p>
+            <a:pPr marL="971550" lvl="1" indent="-514350">
+              <a:buFont typeface="+mj-lt"/>
+              <a:buAutoNum type="arabicPeriod"/>
+            </a:pPr>
+            <a:r>
+              <a:rPr lang="en-IE" dirty="0"/>
+              <a:t>Others.</a:t>
+            </a:r>
+          </a:p>
+          <a:p>
+            <a:pPr marL="514350" indent="-514350">
+              <a:buFont typeface="+mj-lt"/>
+              <a:buAutoNum type="arabicPeriod"/>
+            </a:pPr>
+            <a:endParaRPr lang="en-IE" dirty="0"/>
+          </a:p>
+          <a:p>
+            <a:pPr marL="514350" indent="-514350">
+              <a:buFont typeface="+mj-lt"/>
+              <a:buAutoNum type="arabicPeriod"/>
+            </a:pPr>
+            <a:r>
+              <a:rPr lang="en-IE" dirty="0"/>
+              <a:t>Arithmetic operators.</a:t>
+            </a:r>
+          </a:p>
+        </p:txBody>
+      </p:sp>
+      <p:sp>
+        <p:nvSpPr>
+          <p:cNvPr id="4" name="Rectangle 3">
+            <a:extLst>
+              <a:ext uri="{FF2B5EF4-FFF2-40B4-BE49-F238E27FC236}">
+                <a16:creationId xmlns:a16="http://schemas.microsoft.com/office/drawing/2014/main" id="{6E188FD5-6984-F35F-9644-97A439C7C546}"/>
+              </a:ext>
+            </a:extLst>
+          </p:cNvPr>
+          <p:cNvSpPr/>
+          <p:nvPr/>
+        </p:nvSpPr>
+        <p:spPr>
+          <a:xfrm>
+            <a:off x="1055440" y="4293096"/>
+            <a:ext cx="3240360" cy="964703"/>
+          </a:xfrm>
+          <a:prstGeom prst="rect">
+            <a:avLst/>
+          </a:prstGeom>
+          <a:noFill/>
+          <a:ln w="47625">
+            <a:solidFill>
+              <a:srgbClr val="FF0000"/>
+            </a:solidFill>
+          </a:ln>
+        </p:spPr>
+        <p:style>
+          <a:lnRef idx="2">
+            <a:schemeClr val="accent1">
+              <a:shade val="50000"/>
+            </a:schemeClr>
+          </a:lnRef>
+          <a:fillRef idx="1">
+            <a:schemeClr val="accent1"/>
+          </a:fillRef>
+          <a:effectRef idx="0">
+            <a:schemeClr val="accent1"/>
+          </a:effectRef>
+          <a:fontRef idx="minor">
+            <a:schemeClr val="lt1"/>
+          </a:fontRef>
+        </p:style>
+        <p:txBody>
+          <a:bodyPr rtlCol="0" anchor="ctr"/>
+          <a:lstStyle/>
+          <a:p>
+            <a:pPr algn="ctr"/>
+            <a:endParaRPr lang="en-IE"/>
+          </a:p>
+        </p:txBody>
+      </p:sp>
+      <p:sp>
+        <p:nvSpPr>
+          <p:cNvPr id="3" name="Left Arrow 2">
+            <a:extLst>
+              <a:ext uri="{FF2B5EF4-FFF2-40B4-BE49-F238E27FC236}">
+                <a16:creationId xmlns:a16="http://schemas.microsoft.com/office/drawing/2014/main" id="{6F24353F-2838-F5D9-16BA-D48AB34B0F54}"/>
+              </a:ext>
+            </a:extLst>
+          </p:cNvPr>
+          <p:cNvSpPr/>
+          <p:nvPr/>
+        </p:nvSpPr>
+        <p:spPr>
+          <a:xfrm>
+            <a:off x="4511824" y="4972572"/>
+            <a:ext cx="2057400" cy="228600"/>
+          </a:xfrm>
+          <a:prstGeom prst="leftArrow">
+            <a:avLst/>
+          </a:prstGeom>
+        </p:spPr>
+        <p:style>
+          <a:lnRef idx="2">
+            <a:schemeClr val="accent2">
+              <a:shade val="50000"/>
+            </a:schemeClr>
+          </a:lnRef>
+          <a:fillRef idx="1">
+            <a:schemeClr val="accent2"/>
+          </a:fillRef>
+          <a:effectRef idx="0">
+            <a:schemeClr val="accent2"/>
+          </a:effectRef>
+          <a:fontRef idx="minor">
+            <a:schemeClr val="lt1"/>
+          </a:fontRef>
+        </p:style>
+        <p:txBody>
+          <a:bodyPr rtlCol="0" anchor="ctr"/>
+          <a:lstStyle/>
+          <a:p>
+            <a:pPr algn="ctr"/>
+            <a:endParaRPr lang="en-GB"/>
+          </a:p>
+        </p:txBody>
+      </p:sp>
+    </p:spTree>
+    <p:extLst>
+      <p:ext uri="{BB962C8B-B14F-4D97-AF65-F5344CB8AC3E}">
+        <p14:creationId xmlns:p14="http://schemas.microsoft.com/office/powerpoint/2010/main" val="3049901928"/>
+      </p:ext>
+    </p:extLst>
+  </p:cSld>
+  <p:clrMapOvr>
+    <a:masterClrMapping/>
+  </p:clrMapOvr>
+  <p:timing>
+    <p:tnLst>
+      <p:par>
+        <p:cTn id="1" dur="indefinite" restart="never" nodeType="tmRoot">
+          <p:childTnLst>
+            <p:seq concurrent="1" nextAc="seek">
+              <p:cTn id="2" dur="indefinite" nodeType="mainSeq">
+                <p:childTnLst>
+                  <p:par>
+                    <p:cTn id="3" fill="hold">
+                      <p:stCondLst>
+                        <p:cond delay="indefinite"/>
+                        <p:cond evt="onBegin" delay="0">
+                          <p:tn val="2"/>
+                        </p:cond>
+                      </p:stCondLst>
+                      <p:childTnLst>
+                        <p:par>
+                          <p:cTn id="4" fill="hold">
+                            <p:stCondLst>
+                              <p:cond delay="0"/>
+                            </p:stCondLst>
+                            <p:childTnLst>
+                              <p:par>
+                                <p:cTn id="5" presetID="21" presetClass="entr" presetSubtype="1" fill="hold" grpId="0" nodeType="withEffect">
+                                  <p:stCondLst>
+                                    <p:cond delay="0"/>
+                                  </p:stCondLst>
+                                  <p:childTnLst>
+                                    <p:set>
+                                      <p:cBhvr>
+                                        <p:cTn id="6" dur="1" fill="hold">
+                                          <p:stCondLst>
+                                            <p:cond delay="0"/>
+                                          </p:stCondLst>
+                                        </p:cTn>
+                                        <p:tgtEl>
+                                          <p:spTgt spid="4"/>
+                                        </p:tgtEl>
+                                        <p:attrNameLst>
+                                          <p:attrName>style.visibility</p:attrName>
+                                        </p:attrNameLst>
+                                      </p:cBhvr>
+                                      <p:to>
+                                        <p:strVal val="visible"/>
+                                      </p:to>
+                                    </p:set>
+                                    <p:animEffect transition="in" filter="wheel(1)">
+                                      <p:cBhvr>
+                                        <p:cTn id="7" dur="2000"/>
+                                        <p:tgtEl>
+                                          <p:spTgt spid="4"/>
+                                        </p:tgtEl>
+                                      </p:cBhvr>
+                                    </p:animEffect>
+                                  </p:childTnLst>
+                                </p:cTn>
+                              </p:par>
+                              <p:par>
+                                <p:cTn id="8" presetID="55" presetClass="entr" presetSubtype="0" fill="hold" grpId="0" nodeType="withEffect">
+                                  <p:stCondLst>
+                                    <p:cond delay="0"/>
+                                  </p:stCondLst>
+                                  <p:childTnLst>
+                                    <p:set>
+                                      <p:cBhvr>
+                                        <p:cTn id="9" dur="1" fill="hold">
+                                          <p:stCondLst>
+                                            <p:cond delay="0"/>
+                                          </p:stCondLst>
+                                        </p:cTn>
+                                        <p:tgtEl>
+                                          <p:spTgt spid="3"/>
+                                        </p:tgtEl>
+                                        <p:attrNameLst>
+                                          <p:attrName>style.visibility</p:attrName>
+                                        </p:attrNameLst>
+                                      </p:cBhvr>
+                                      <p:to>
+                                        <p:strVal val="visible"/>
+                                      </p:to>
+                                    </p:set>
+                                    <p:anim calcmode="lin" valueType="num">
+                                      <p:cBhvr>
+                                        <p:cTn id="10" dur="1000" fill="hold"/>
+                                        <p:tgtEl>
+                                          <p:spTgt spid="3"/>
+                                        </p:tgtEl>
+                                        <p:attrNameLst>
+                                          <p:attrName>ppt_w</p:attrName>
+                                        </p:attrNameLst>
+                                      </p:cBhvr>
+                                      <p:tavLst>
+                                        <p:tav tm="0">
+                                          <p:val>
+                                            <p:strVal val="#ppt_w*0.70"/>
+                                          </p:val>
+                                        </p:tav>
+                                        <p:tav tm="100000">
+                                          <p:val>
+                                            <p:strVal val="#ppt_w"/>
+                                          </p:val>
+                                        </p:tav>
+                                      </p:tavLst>
+                                    </p:anim>
+                                    <p:anim calcmode="lin" valueType="num">
+                                      <p:cBhvr>
+                                        <p:cTn id="11" dur="1000" fill="hold"/>
+                                        <p:tgtEl>
+                                          <p:spTgt spid="3"/>
+                                        </p:tgtEl>
+                                        <p:attrNameLst>
+                                          <p:attrName>ppt_h</p:attrName>
+                                        </p:attrNameLst>
+                                      </p:cBhvr>
+                                      <p:tavLst>
+                                        <p:tav tm="0">
+                                          <p:val>
+                                            <p:strVal val="#ppt_h"/>
+                                          </p:val>
+                                        </p:tav>
+                                        <p:tav tm="100000">
+                                          <p:val>
+                                            <p:strVal val="#ppt_h"/>
+                                          </p:val>
+                                        </p:tav>
+                                      </p:tavLst>
+                                    </p:anim>
+                                    <p:animEffect transition="in" filter="fade">
+                                      <p:cBhvr>
+                                        <p:cTn id="12" dur="1000"/>
+                                        <p:tgtEl>
+                                          <p:spTgt spid="3"/>
+                                        </p:tgtEl>
+                                      </p:cBhvr>
+                                    </p:animEffect>
+                                  </p:childTnLst>
+                                </p:cTn>
+                              </p:par>
+                            </p:childTnLst>
+                          </p:cTn>
+                        </p:par>
+                      </p:childTnLst>
+                    </p:cTn>
+                  </p:par>
+                </p:childTnLst>
+              </p:cTn>
+              <p:prevCondLst>
+                <p:cond evt="onPrev" delay="0">
+                  <p:tgtEl>
+                    <p:sldTgt/>
+                  </p:tgtEl>
+                </p:cond>
+              </p:prevCondLst>
+              <p:nextCondLst>
+                <p:cond evt="onNext" delay="0">
+                  <p:tgtEl>
+                    <p:sldTgt/>
+                  </p:tgtEl>
+                </p:cond>
+              </p:nextCondLst>
+            </p:seq>
+          </p:childTnLst>
+        </p:cTn>
+      </p:par>
+    </p:tnLst>
+    <p:bldLst>
+      <p:bldP spid="4" grpId="0" animBg="1"/>
+      <p:bldP spid="3" grpId="0" animBg="1"/>
+    </p:bldLst>
+  </p:timing>
+</p:sld>
+</file>
+
+<file path=ppt/slides/slide27.xml><?xml version="1.0" encoding="utf-8"?>
+<p:sld xmlns:a="http://schemas.openxmlformats.org/drawingml/2006/main" xmlns:r="http://schemas.openxmlformats.org/officeDocument/2006/relationships" xmlns:p="http://schemas.openxmlformats.org/presentationml/2006/main">
+  <p:cSld>
+    <p:spTree>
+      <p:nvGrpSpPr>
+        <p:cNvPr id="1" name=""/>
+        <p:cNvGrpSpPr/>
+        <p:nvPr/>
+      </p:nvGrpSpPr>
+      <p:grpSpPr>
+        <a:xfrm>
+          <a:off x="0" y="0"/>
+          <a:ext cx="0" cy="0"/>
+          <a:chOff x="0" y="0"/>
+          <a:chExt cx="0" cy="0"/>
+        </a:xfrm>
+      </p:grpSpPr>
+      <p:sp>
+        <p:nvSpPr>
+          <p:cNvPr id="36866" name="Rectangle 2"/>
+          <p:cNvSpPr>
+            <a:spLocks noGrp="1" noChangeArrowheads="1"/>
+          </p:cNvSpPr>
+          <p:nvPr>
+            <p:ph type="title"/>
+          </p:nvPr>
+        </p:nvSpPr>
+        <p:spPr/>
+        <p:txBody>
+          <a:bodyPr/>
+          <a:lstStyle/>
+          <a:p>
+            <a:r>
+              <a:rPr lang="en-US" dirty="0"/>
+              <a:t>Java’s Primitive Data Types (others)</a:t>
+            </a:r>
+          </a:p>
+        </p:txBody>
+      </p:sp>
+      <p:sp>
+        <p:nvSpPr>
+          <p:cNvPr id="36867" name="Rectangle 3"/>
+          <p:cNvSpPr>
+            <a:spLocks noGrp="1" noChangeArrowheads="1"/>
+          </p:cNvSpPr>
+          <p:nvPr>
+            <p:ph idx="1"/>
+          </p:nvPr>
+        </p:nvSpPr>
+        <p:spPr/>
+        <p:txBody>
+          <a:bodyPr>
+            <a:normAutofit/>
+          </a:bodyPr>
+          <a:lstStyle/>
+          <a:p>
+            <a:pPr marL="457200" lvl="1" indent="0">
+              <a:buNone/>
+            </a:pPr>
+            <a:endParaRPr lang="en-US" dirty="0"/>
+          </a:p>
+          <a:p>
+            <a:pPr>
+              <a:lnSpc>
+                <a:spcPct val="80000"/>
+              </a:lnSpc>
+            </a:pPr>
+            <a:endParaRPr lang="en-US" sz="2800" dirty="0"/>
+          </a:p>
+          <a:p>
+            <a:pPr>
+              <a:lnSpc>
+                <a:spcPct val="80000"/>
+              </a:lnSpc>
+            </a:pPr>
+            <a:endParaRPr lang="en-US" sz="2800" dirty="0"/>
+          </a:p>
+          <a:p>
+            <a:pPr>
+              <a:lnSpc>
+                <a:spcPct val="80000"/>
+              </a:lnSpc>
+            </a:pPr>
+            <a:endParaRPr lang="en-US" sz="2800" dirty="0"/>
+          </a:p>
+          <a:p>
+            <a:pPr>
+              <a:lnSpc>
+                <a:spcPct val="80000"/>
+              </a:lnSpc>
+            </a:pPr>
+            <a:endParaRPr lang="en-US" sz="2800" dirty="0"/>
+          </a:p>
+          <a:p>
+            <a:pPr>
+              <a:lnSpc>
+                <a:spcPct val="80000"/>
+              </a:lnSpc>
+            </a:pPr>
+            <a:endParaRPr lang="en-US" sz="2800" dirty="0"/>
+          </a:p>
+          <a:p>
+            <a:pPr>
+              <a:lnSpc>
+                <a:spcPct val="80000"/>
+              </a:lnSpc>
+            </a:pPr>
+            <a:endParaRPr lang="en-US" sz="2800" dirty="0"/>
+          </a:p>
+          <a:p>
+            <a:pPr>
+              <a:lnSpc>
+                <a:spcPct val="80000"/>
+              </a:lnSpc>
+            </a:pPr>
+            <a:endParaRPr lang="en-US" sz="2800" dirty="0"/>
+          </a:p>
+          <a:p>
+            <a:pPr>
+              <a:lnSpc>
+                <a:spcPct val="80000"/>
+              </a:lnSpc>
+            </a:pPr>
+            <a:r>
+              <a:rPr lang="en-US" sz="2800" dirty="0"/>
+              <a:t>We will go into more detail on these two data types in later lectures.</a:t>
+            </a:r>
+          </a:p>
+        </p:txBody>
+      </p:sp>
+      <p:graphicFrame>
+        <p:nvGraphicFramePr>
+          <p:cNvPr id="4" name="Table 3"/>
+          <p:cNvGraphicFramePr>
+            <a:graphicFrameLocks noGrp="1"/>
+          </p:cNvGraphicFramePr>
+          <p:nvPr/>
+        </p:nvGraphicFramePr>
+        <p:xfrm>
+          <a:off x="609600" y="1828800"/>
+          <a:ext cx="11049001" cy="2560320"/>
+        </p:xfrm>
+        <a:graphic>
+          <a:graphicData uri="http://schemas.openxmlformats.org/drawingml/2006/table">
+            <a:tbl>
+              <a:tblPr firstRow="1" bandRow="1">
+                <a:tableStyleId>{5C22544A-7EE6-4342-B048-85BDC9FD1C3A}</a:tableStyleId>
+              </a:tblPr>
+              <a:tblGrid>
+                <a:gridCol w="1371600">
+                  <a:extLst>
+                    <a:ext uri="{9D8B030D-6E8A-4147-A177-3AD203B41FA5}">
+                      <a16:colId xmlns:a16="http://schemas.microsoft.com/office/drawing/2014/main" val="20000"/>
+                    </a:ext>
+                  </a:extLst>
+                </a:gridCol>
+                <a:gridCol w="1066800">
+                  <a:extLst>
+                    <a:ext uri="{9D8B030D-6E8A-4147-A177-3AD203B41FA5}">
+                      <a16:colId xmlns:a16="http://schemas.microsoft.com/office/drawing/2014/main" val="20001"/>
+                    </a:ext>
+                  </a:extLst>
+                </a:gridCol>
+                <a:gridCol w="1371600">
+                  <a:extLst>
+                    <a:ext uri="{9D8B030D-6E8A-4147-A177-3AD203B41FA5}">
+                      <a16:colId xmlns:a16="http://schemas.microsoft.com/office/drawing/2014/main" val="20002"/>
+                    </a:ext>
+                  </a:extLst>
+                </a:gridCol>
+                <a:gridCol w="1676400">
+                  <a:extLst>
+                    <a:ext uri="{9D8B030D-6E8A-4147-A177-3AD203B41FA5}">
+                      <a16:colId xmlns:a16="http://schemas.microsoft.com/office/drawing/2014/main" val="20003"/>
+                    </a:ext>
+                  </a:extLst>
+                </a:gridCol>
+                <a:gridCol w="5562601">
+                  <a:extLst>
+                    <a:ext uri="{9D8B030D-6E8A-4147-A177-3AD203B41FA5}">
+                      <a16:colId xmlns:a16="http://schemas.microsoft.com/office/drawing/2014/main" val="20004"/>
+                    </a:ext>
+                  </a:extLst>
+                </a:gridCol>
+              </a:tblGrid>
+              <a:tr h="609600">
+                <a:tc>
+                  <a:txBody>
+                    <a:bodyPr/>
+                    <a:lstStyle/>
+                    <a:p>
+                      <a:r>
+                        <a:rPr lang="en-IE" dirty="0"/>
+                        <a:t>Type</a:t>
+                      </a:r>
+                    </a:p>
+                  </a:txBody>
+                  <a:tcPr>
+                    <a:lnL w="12700" cap="flat" cmpd="sng" algn="ctr">
+                      <a:solidFill>
+                        <a:schemeClr val="tx1"/>
+                      </a:solidFill>
+                      <a:prstDash val="solid"/>
+                      <a:round/>
+                      <a:headEnd type="none" w="med" len="med"/>
+                      <a:tailEnd type="none" w="med" len="med"/>
+                    </a:lnL>
+                    <a:lnR w="12700" cap="flat" cmpd="sng" algn="ctr">
+                      <a:solidFill>
+                        <a:schemeClr val="tx1"/>
+                      </a:solidFill>
+                      <a:prstDash val="solid"/>
+                      <a:round/>
+                      <a:headEnd type="none" w="med" len="med"/>
+                      <a:tailEnd type="none" w="med" len="med"/>
+                    </a:lnR>
+                    <a:lnT w="12700" cap="flat" cmpd="sng" algn="ctr">
+                      <a:solidFill>
+                        <a:schemeClr val="tx1"/>
+                      </a:solidFill>
+                      <a:prstDash val="solid"/>
+                      <a:round/>
+                      <a:headEnd type="none" w="med" len="med"/>
+                      <a:tailEnd type="none" w="med" len="med"/>
+                    </a:lnT>
+                    <a:lnB w="12700" cap="flat" cmpd="sng" algn="ctr">
+                      <a:solidFill>
+                        <a:schemeClr val="tx1"/>
+                      </a:solidFill>
+                      <a:prstDash val="solid"/>
+                      <a:round/>
+                      <a:headEnd type="none" w="med" len="med"/>
+                      <a:tailEnd type="none" w="med" len="med"/>
+                    </a:lnB>
+                  </a:tcPr>
+                </a:tc>
+                <a:tc>
+                  <a:txBody>
+                    <a:bodyPr/>
+                    <a:lstStyle/>
+                    <a:p>
+                      <a:r>
+                        <a:rPr lang="en-IE" dirty="0"/>
+                        <a:t>Byte-size</a:t>
+                      </a:r>
+                    </a:p>
+                  </a:txBody>
+                  <a:tcPr>
+                    <a:lnL w="12700" cap="flat" cmpd="sng" algn="ctr">
+                      <a:solidFill>
+                        <a:schemeClr val="tx1"/>
+                      </a:solidFill>
+                      <a:prstDash val="solid"/>
+                      <a:round/>
+                      <a:headEnd type="none" w="med" len="med"/>
+                      <a:tailEnd type="none" w="med" len="med"/>
+                    </a:lnL>
+                    <a:lnR w="12700" cap="flat" cmpd="sng" algn="ctr">
+                      <a:solidFill>
+                        <a:schemeClr val="tx1"/>
+                      </a:solidFill>
+                      <a:prstDash val="solid"/>
+                      <a:round/>
+                      <a:headEnd type="none" w="med" len="med"/>
+                      <a:tailEnd type="none" w="med" len="med"/>
+                    </a:lnR>
+                    <a:lnT w="12700" cap="flat" cmpd="sng" algn="ctr">
+                      <a:solidFill>
+                        <a:schemeClr val="tx1"/>
+                      </a:solidFill>
+                      <a:prstDash val="solid"/>
+                      <a:round/>
+                      <a:headEnd type="none" w="med" len="med"/>
+                      <a:tailEnd type="none" w="med" len="med"/>
+                    </a:lnT>
+                    <a:lnB w="12700" cap="flat" cmpd="sng" algn="ctr">
+                      <a:solidFill>
+                        <a:schemeClr val="tx1"/>
+                      </a:solidFill>
+                      <a:prstDash val="solid"/>
+                      <a:round/>
+                      <a:headEnd type="none" w="med" len="med"/>
+                      <a:tailEnd type="none" w="med" len="med"/>
+                    </a:lnB>
+                  </a:tcPr>
+                </a:tc>
+                <a:tc>
+                  <a:txBody>
+                    <a:bodyPr/>
+                    <a:lstStyle/>
+                    <a:p>
+                      <a:r>
+                        <a:rPr lang="en-IE" dirty="0"/>
+                        <a:t>Minimum value</a:t>
+                      </a:r>
+                      <a:r>
+                        <a:rPr lang="en-IE" baseline="0" dirty="0"/>
+                        <a:t> (inclusive)</a:t>
+                      </a:r>
+                      <a:endParaRPr lang="en-IE" dirty="0"/>
+                    </a:p>
+                  </a:txBody>
+                  <a:tcPr>
+                    <a:lnL w="12700" cap="flat" cmpd="sng" algn="ctr">
+                      <a:solidFill>
+                        <a:schemeClr val="tx1"/>
+                      </a:solidFill>
+                      <a:prstDash val="solid"/>
+                      <a:round/>
+                      <a:headEnd type="none" w="med" len="med"/>
+                      <a:tailEnd type="none" w="med" len="med"/>
+                    </a:lnL>
+                    <a:lnR w="12700" cap="flat" cmpd="sng" algn="ctr">
+                      <a:solidFill>
+                        <a:schemeClr val="tx1"/>
+                      </a:solidFill>
+                      <a:prstDash val="solid"/>
+                      <a:round/>
+                      <a:headEnd type="none" w="med" len="med"/>
+                      <a:tailEnd type="none" w="med" len="med"/>
+                    </a:lnR>
+                    <a:lnT w="12700" cap="flat" cmpd="sng" algn="ctr">
+                      <a:solidFill>
+                        <a:schemeClr val="tx1"/>
+                      </a:solidFill>
+                      <a:prstDash val="solid"/>
+                      <a:round/>
+                      <a:headEnd type="none" w="med" len="med"/>
+                      <a:tailEnd type="none" w="med" len="med"/>
+                    </a:lnT>
+                    <a:lnB w="12700" cap="flat" cmpd="sng" algn="ctr">
+                      <a:solidFill>
+                        <a:schemeClr val="tx1"/>
+                      </a:solidFill>
+                      <a:prstDash val="solid"/>
+                      <a:round/>
+                      <a:headEnd type="none" w="med" len="med"/>
+                      <a:tailEnd type="none" w="med" len="med"/>
+                    </a:lnB>
+                  </a:tcPr>
+                </a:tc>
+                <a:tc>
+                  <a:txBody>
+                    <a:bodyPr/>
+                    <a:lstStyle/>
+                    <a:p>
+                      <a:r>
+                        <a:rPr lang="en-IE" dirty="0"/>
+                        <a:t>Maximum value </a:t>
+                      </a:r>
+                      <a:r>
+                        <a:rPr lang="en-IE" baseline="0" dirty="0"/>
+                        <a:t>(inclusive)</a:t>
+                      </a:r>
+                      <a:endParaRPr lang="en-IE" dirty="0"/>
+                    </a:p>
+                  </a:txBody>
+                  <a:tcPr>
+                    <a:lnL w="12700" cap="flat" cmpd="sng" algn="ctr">
+                      <a:solidFill>
+                        <a:schemeClr val="tx1"/>
+                      </a:solidFill>
+                      <a:prstDash val="solid"/>
+                      <a:round/>
+                      <a:headEnd type="none" w="med" len="med"/>
+                      <a:tailEnd type="none" w="med" len="med"/>
+                    </a:lnL>
+                    <a:lnR w="12700" cap="flat" cmpd="sng" algn="ctr">
+                      <a:solidFill>
+                        <a:schemeClr val="tx1"/>
+                      </a:solidFill>
+                      <a:prstDash val="solid"/>
+                      <a:round/>
+                      <a:headEnd type="none" w="med" len="med"/>
+                      <a:tailEnd type="none" w="med" len="med"/>
+                    </a:lnR>
+                    <a:lnT w="12700" cap="flat" cmpd="sng" algn="ctr">
+                      <a:solidFill>
+                        <a:schemeClr val="tx1"/>
+                      </a:solidFill>
+                      <a:prstDash val="solid"/>
+                      <a:round/>
+                      <a:headEnd type="none" w="med" len="med"/>
+                      <a:tailEnd type="none" w="med" len="med"/>
+                    </a:lnT>
+                    <a:lnB w="12700" cap="flat" cmpd="sng" algn="ctr">
+                      <a:solidFill>
+                        <a:schemeClr val="tx1"/>
+                      </a:solidFill>
+                      <a:prstDash val="solid"/>
+                      <a:round/>
+                      <a:headEnd type="none" w="med" len="med"/>
+                      <a:tailEnd type="none" w="med" len="med"/>
+                    </a:lnB>
+                  </a:tcPr>
+                </a:tc>
+                <a:tc>
+                  <a:txBody>
+                    <a:bodyPr/>
+                    <a:lstStyle/>
+                    <a:p>
+                      <a:r>
+                        <a:rPr lang="en-IE" dirty="0"/>
+                        <a:t>Typical Use</a:t>
+                      </a:r>
+                    </a:p>
+                  </a:txBody>
+                  <a:tcPr>
+                    <a:lnL w="12700" cap="flat" cmpd="sng" algn="ctr">
+                      <a:solidFill>
+                        <a:schemeClr val="tx1"/>
+                      </a:solidFill>
+                      <a:prstDash val="solid"/>
+                      <a:round/>
+                      <a:headEnd type="none" w="med" len="med"/>
+                      <a:tailEnd type="none" w="med" len="med"/>
+                    </a:lnL>
+                    <a:lnR w="12700" cap="flat" cmpd="sng" algn="ctr">
+                      <a:solidFill>
+                        <a:schemeClr val="tx1"/>
+                      </a:solidFill>
+                      <a:prstDash val="solid"/>
+                      <a:round/>
+                      <a:headEnd type="none" w="med" len="med"/>
+                      <a:tailEnd type="none" w="med" len="med"/>
+                    </a:lnR>
+                    <a:lnT w="12700" cap="flat" cmpd="sng" algn="ctr">
+                      <a:solidFill>
+                        <a:schemeClr val="tx1"/>
+                      </a:solidFill>
+                      <a:prstDash val="solid"/>
+                      <a:round/>
+                      <a:headEnd type="none" w="med" len="med"/>
+                      <a:tailEnd type="none" w="med" len="med"/>
+                    </a:lnT>
+                    <a:lnB w="12700" cap="flat" cmpd="sng" algn="ctr">
+                      <a:solidFill>
+                        <a:schemeClr val="tx1"/>
+                      </a:solidFill>
+                      <a:prstDash val="solid"/>
+                      <a:round/>
+                      <a:headEnd type="none" w="med" len="med"/>
+                      <a:tailEnd type="none" w="med" len="med"/>
+                    </a:lnB>
+                  </a:tcPr>
+                </a:tc>
+                <a:extLst>
+                  <a:ext uri="{0D108BD9-81ED-4DB2-BD59-A6C34878D82A}">
+                    <a16:rowId xmlns:a16="http://schemas.microsoft.com/office/drawing/2014/main" val="10000"/>
+                  </a:ext>
+                </a:extLst>
+              </a:tr>
+              <a:tr h="589280">
+                <a:tc>
+                  <a:txBody>
+                    <a:bodyPr/>
+                    <a:lstStyle/>
+                    <a:p>
+                      <a:r>
+                        <a:rPr lang="en-IE" sz="2400" dirty="0">
+                          <a:solidFill>
+                            <a:srgbClr val="FF0000"/>
+                          </a:solidFill>
+                        </a:rPr>
+                        <a:t>char</a:t>
+                      </a:r>
+                    </a:p>
+                  </a:txBody>
+                  <a:tcPr>
+                    <a:lnL w="12700" cap="flat" cmpd="sng" algn="ctr">
+                      <a:solidFill>
+                        <a:schemeClr val="tx1"/>
+                      </a:solidFill>
+                      <a:prstDash val="solid"/>
+                      <a:round/>
+                      <a:headEnd type="none" w="med" len="med"/>
+                      <a:tailEnd type="none" w="med" len="med"/>
+                    </a:lnL>
+                    <a:lnR w="12700" cap="flat" cmpd="sng" algn="ctr">
+                      <a:solidFill>
+                        <a:schemeClr val="tx1"/>
+                      </a:solidFill>
+                      <a:prstDash val="solid"/>
+                      <a:round/>
+                      <a:headEnd type="none" w="med" len="med"/>
+                      <a:tailEnd type="none" w="med" len="med"/>
+                    </a:lnR>
+                    <a:lnT w="12700" cap="flat" cmpd="sng" algn="ctr">
+                      <a:solidFill>
+                        <a:schemeClr val="tx1"/>
+                      </a:solidFill>
+                      <a:prstDash val="solid"/>
+                      <a:round/>
+                      <a:headEnd type="none" w="med" len="med"/>
+                      <a:tailEnd type="none" w="med" len="med"/>
+                    </a:lnT>
+                    <a:lnB w="12700" cap="flat" cmpd="sng" algn="ctr">
+                      <a:solidFill>
+                        <a:schemeClr val="tx1"/>
+                      </a:solidFill>
+                      <a:prstDash val="solid"/>
+                      <a:round/>
+                      <a:headEnd type="none" w="med" len="med"/>
+                      <a:tailEnd type="none" w="med" len="med"/>
+                    </a:lnB>
+                  </a:tcPr>
+                </a:tc>
+                <a:tc>
+                  <a:txBody>
+                    <a:bodyPr/>
+                    <a:lstStyle/>
+                    <a:p>
+                      <a:pPr algn="ctr"/>
+                      <a:r>
+                        <a:rPr lang="en-IE" sz="2400" dirty="0"/>
+                        <a:t>16-bit</a:t>
+                      </a:r>
+                    </a:p>
+                  </a:txBody>
+                  <a:tcPr>
+                    <a:lnL w="12700" cap="flat" cmpd="sng" algn="ctr">
+                      <a:solidFill>
+                        <a:schemeClr val="tx1"/>
+                      </a:solidFill>
+                      <a:prstDash val="solid"/>
+                      <a:round/>
+                      <a:headEnd type="none" w="med" len="med"/>
+                      <a:tailEnd type="none" w="med" len="med"/>
+                    </a:lnL>
+                    <a:lnR w="12700" cap="flat" cmpd="sng" algn="ctr">
+                      <a:solidFill>
+                        <a:schemeClr val="tx1"/>
+                      </a:solidFill>
+                      <a:prstDash val="solid"/>
+                      <a:round/>
+                      <a:headEnd type="none" w="med" len="med"/>
+                      <a:tailEnd type="none" w="med" len="med"/>
+                    </a:lnR>
+                    <a:lnT w="12700" cap="flat" cmpd="sng" algn="ctr">
+                      <a:solidFill>
+                        <a:schemeClr val="tx1"/>
+                      </a:solidFill>
+                      <a:prstDash val="solid"/>
+                      <a:round/>
+                      <a:headEnd type="none" w="med" len="med"/>
+                      <a:tailEnd type="none" w="med" len="med"/>
+                    </a:lnT>
+                    <a:lnB w="12700" cap="flat" cmpd="sng" algn="ctr">
+                      <a:solidFill>
+                        <a:schemeClr val="tx1"/>
+                      </a:solidFill>
+                      <a:prstDash val="solid"/>
+                      <a:round/>
+                      <a:headEnd type="none" w="med" len="med"/>
+                      <a:tailEnd type="none" w="med" len="med"/>
+                    </a:lnB>
+                  </a:tcPr>
+                </a:tc>
+                <a:tc>
+                  <a:txBody>
+                    <a:bodyPr/>
+                    <a:lstStyle/>
+                    <a:p>
+                      <a:pPr marL="0" algn="l" defTabSz="914400" rtl="0" eaLnBrk="1" latinLnBrk="0" hangingPunct="1"/>
+                      <a:r>
+                        <a:rPr lang="en-IE" sz="2400" kern="1200" dirty="0">
+                          <a:solidFill>
+                            <a:schemeClr val="dk1"/>
+                          </a:solidFill>
+                          <a:latin typeface="+mn-lt"/>
+                          <a:ea typeface="+mn-ea"/>
+                          <a:cs typeface="+mn-cs"/>
+                        </a:rPr>
+                        <a:t>'\u0000'</a:t>
+                      </a:r>
+                    </a:p>
+                    <a:p>
+                      <a:pPr marL="0" algn="l" defTabSz="914400" rtl="0" eaLnBrk="1" latinLnBrk="0" hangingPunct="1"/>
+                      <a:r>
+                        <a:rPr lang="en-IE" sz="2400" kern="1200" dirty="0">
+                          <a:solidFill>
+                            <a:schemeClr val="dk1"/>
+                          </a:solidFill>
+                          <a:latin typeface="+mn-lt"/>
+                          <a:ea typeface="+mn-ea"/>
+                          <a:cs typeface="+mn-cs"/>
+                        </a:rPr>
+                        <a:t>(or 0) </a:t>
+                      </a:r>
+                    </a:p>
+                  </a:txBody>
+                  <a:tcPr>
+                    <a:lnL w="12700" cap="flat" cmpd="sng" algn="ctr">
+                      <a:solidFill>
+                        <a:schemeClr val="tx1"/>
+                      </a:solidFill>
+                      <a:prstDash val="solid"/>
+                      <a:round/>
+                      <a:headEnd type="none" w="med" len="med"/>
+                      <a:tailEnd type="none" w="med" len="med"/>
+                    </a:lnL>
+                    <a:lnR w="12700" cap="flat" cmpd="sng" algn="ctr">
+                      <a:solidFill>
+                        <a:schemeClr val="tx1"/>
+                      </a:solidFill>
+                      <a:prstDash val="solid"/>
+                      <a:round/>
+                      <a:headEnd type="none" w="med" len="med"/>
+                      <a:tailEnd type="none" w="med" len="med"/>
+                    </a:lnR>
+                    <a:lnT w="12700" cap="flat" cmpd="sng" algn="ctr">
+                      <a:solidFill>
+                        <a:schemeClr val="tx1"/>
+                      </a:solidFill>
+                      <a:prstDash val="solid"/>
+                      <a:round/>
+                      <a:headEnd type="none" w="med" len="med"/>
+                      <a:tailEnd type="none" w="med" len="med"/>
+                    </a:lnT>
+                    <a:lnB w="12700" cap="flat" cmpd="sng" algn="ctr">
+                      <a:solidFill>
+                        <a:schemeClr val="tx1"/>
+                      </a:solidFill>
+                      <a:prstDash val="solid"/>
+                      <a:round/>
+                      <a:headEnd type="none" w="med" len="med"/>
+                      <a:tailEnd type="none" w="med" len="med"/>
+                    </a:lnB>
+                  </a:tcPr>
+                </a:tc>
+                <a:tc>
+                  <a:txBody>
+                    <a:bodyPr/>
+                    <a:lstStyle/>
+                    <a:p>
+                      <a:pPr marL="0" algn="l" defTabSz="914400" rtl="0" eaLnBrk="1" latinLnBrk="0" hangingPunct="1"/>
+                      <a:r>
+                        <a:rPr lang="en-IE" sz="2400" kern="1200" dirty="0">
+                          <a:solidFill>
+                            <a:schemeClr val="dk1"/>
+                          </a:solidFill>
+                          <a:latin typeface="+mn-lt"/>
+                          <a:ea typeface="+mn-ea"/>
+                          <a:cs typeface="+mn-cs"/>
+                        </a:rPr>
+                        <a:t>'\</a:t>
+                      </a:r>
+                      <a:r>
+                        <a:rPr lang="en-IE" sz="2400" kern="1200" dirty="0" err="1">
+                          <a:solidFill>
+                            <a:schemeClr val="dk1"/>
+                          </a:solidFill>
+                          <a:latin typeface="+mn-lt"/>
+                          <a:ea typeface="+mn-ea"/>
+                          <a:cs typeface="+mn-cs"/>
+                        </a:rPr>
+                        <a:t>uffff</a:t>
+                      </a:r>
+                      <a:r>
+                        <a:rPr lang="en-IE" sz="2400" kern="1200" dirty="0">
+                          <a:solidFill>
+                            <a:schemeClr val="dk1"/>
+                          </a:solidFill>
+                          <a:latin typeface="+mn-lt"/>
+                          <a:ea typeface="+mn-ea"/>
+                          <a:cs typeface="+mn-cs"/>
+                        </a:rPr>
+                        <a:t>' </a:t>
+                      </a:r>
+                    </a:p>
+                    <a:p>
+                      <a:pPr marL="0" algn="l" defTabSz="914400" rtl="0" eaLnBrk="1" latinLnBrk="0" hangingPunct="1"/>
+                      <a:r>
+                        <a:rPr lang="en-IE" sz="2400" kern="1200" dirty="0">
+                          <a:solidFill>
+                            <a:schemeClr val="dk1"/>
+                          </a:solidFill>
+                          <a:latin typeface="+mn-lt"/>
+                          <a:ea typeface="+mn-ea"/>
+                          <a:cs typeface="+mn-cs"/>
+                        </a:rPr>
+                        <a:t>(or 65,535)</a:t>
+                      </a:r>
+                    </a:p>
+                  </a:txBody>
+                  <a:tcPr>
+                    <a:lnL w="12700" cap="flat" cmpd="sng" algn="ctr">
+                      <a:solidFill>
+                        <a:schemeClr val="tx1"/>
+                      </a:solidFill>
+                      <a:prstDash val="solid"/>
+                      <a:round/>
+                      <a:headEnd type="none" w="med" len="med"/>
+                      <a:tailEnd type="none" w="med" len="med"/>
+                    </a:lnL>
+                    <a:lnR w="12700" cap="flat" cmpd="sng" algn="ctr">
+                      <a:solidFill>
+                        <a:schemeClr val="tx1"/>
+                      </a:solidFill>
+                      <a:prstDash val="solid"/>
+                      <a:round/>
+                      <a:headEnd type="none" w="med" len="med"/>
+                      <a:tailEnd type="none" w="med" len="med"/>
+                    </a:lnR>
+                    <a:lnT w="12700" cap="flat" cmpd="sng" algn="ctr">
+                      <a:solidFill>
+                        <a:schemeClr val="tx1"/>
+                      </a:solidFill>
+                      <a:prstDash val="solid"/>
+                      <a:round/>
+                      <a:headEnd type="none" w="med" len="med"/>
+                      <a:tailEnd type="none" w="med" len="med"/>
+                    </a:lnT>
+                    <a:lnB w="12700" cap="flat" cmpd="sng" algn="ctr">
+                      <a:solidFill>
+                        <a:schemeClr val="tx1"/>
+                      </a:solidFill>
+                      <a:prstDash val="solid"/>
+                      <a:round/>
+                      <a:headEnd type="none" w="med" len="med"/>
+                      <a:tailEnd type="none" w="med" len="med"/>
+                    </a:lnB>
+                  </a:tcPr>
+                </a:tc>
+                <a:tc>
+                  <a:txBody>
+                    <a:bodyPr/>
+                    <a:lstStyle/>
+                    <a:p>
+                      <a:pPr marL="0" algn="l" defTabSz="914400" rtl="0" eaLnBrk="1" latinLnBrk="0" hangingPunct="1"/>
+                      <a:r>
+                        <a:rPr lang="en-IE" sz="2400" kern="1200" dirty="0">
+                          <a:solidFill>
+                            <a:schemeClr val="dk1"/>
+                          </a:solidFill>
+                          <a:latin typeface="+mn-lt"/>
+                          <a:ea typeface="+mn-ea"/>
+                          <a:cs typeface="+mn-cs"/>
+                        </a:rPr>
+                        <a:t>Represents a Unicode character.</a:t>
+                      </a:r>
+                    </a:p>
+                  </a:txBody>
+                  <a:tcPr>
+                    <a:lnL w="12700" cap="flat" cmpd="sng" algn="ctr">
+                      <a:solidFill>
+                        <a:schemeClr val="tx1"/>
+                      </a:solidFill>
+                      <a:prstDash val="solid"/>
+                      <a:round/>
+                      <a:headEnd type="none" w="med" len="med"/>
+                      <a:tailEnd type="none" w="med" len="med"/>
+                    </a:lnL>
+                    <a:lnR w="12700" cap="flat" cmpd="sng" algn="ctr">
+                      <a:solidFill>
+                        <a:schemeClr val="tx1"/>
+                      </a:solidFill>
+                      <a:prstDash val="solid"/>
+                      <a:round/>
+                      <a:headEnd type="none" w="med" len="med"/>
+                      <a:tailEnd type="none" w="med" len="med"/>
+                    </a:lnR>
+                    <a:lnT w="12700" cap="flat" cmpd="sng" algn="ctr">
+                      <a:solidFill>
+                        <a:schemeClr val="tx1"/>
+                      </a:solidFill>
+                      <a:prstDash val="solid"/>
+                      <a:round/>
+                      <a:headEnd type="none" w="med" len="med"/>
+                      <a:tailEnd type="none" w="med" len="med"/>
+                    </a:lnT>
+                    <a:lnB w="12700" cap="flat" cmpd="sng" algn="ctr">
+                      <a:solidFill>
+                        <a:schemeClr val="tx1"/>
+                      </a:solidFill>
+                      <a:prstDash val="solid"/>
+                      <a:round/>
+                      <a:headEnd type="none" w="med" len="med"/>
+                      <a:tailEnd type="none" w="med" len="med"/>
+                    </a:lnB>
+                  </a:tcPr>
+                </a:tc>
+                <a:extLst>
+                  <a:ext uri="{0D108BD9-81ED-4DB2-BD59-A6C34878D82A}">
+                    <a16:rowId xmlns:a16="http://schemas.microsoft.com/office/drawing/2014/main" val="10001"/>
+                  </a:ext>
+                </a:extLst>
+              </a:tr>
+              <a:tr h="589280">
+                <a:tc>
+                  <a:txBody>
+                    <a:bodyPr/>
+                    <a:lstStyle/>
+                    <a:p>
+                      <a:endParaRPr lang="en-IE" sz="2400" dirty="0">
+                        <a:solidFill>
+                          <a:srgbClr val="FF0000"/>
+                        </a:solidFill>
+                      </a:endParaRPr>
+                    </a:p>
+                    <a:p>
+                      <a:r>
+                        <a:rPr lang="en-IE" sz="2400" dirty="0" err="1">
+                          <a:solidFill>
+                            <a:srgbClr val="FF0000"/>
+                          </a:solidFill>
+                        </a:rPr>
+                        <a:t>boolean</a:t>
+                      </a:r>
+                      <a:endParaRPr lang="en-IE" sz="2400" dirty="0">
+                        <a:solidFill>
+                          <a:srgbClr val="FF0000"/>
+                        </a:solidFill>
+                      </a:endParaRPr>
+                    </a:p>
+                  </a:txBody>
+                  <a:tcPr>
+                    <a:lnL w="12700" cap="flat" cmpd="sng" algn="ctr">
+                      <a:solidFill>
+                        <a:schemeClr val="tx1"/>
+                      </a:solidFill>
+                      <a:prstDash val="solid"/>
+                      <a:round/>
+                      <a:headEnd type="none" w="med" len="med"/>
+                      <a:tailEnd type="none" w="med" len="med"/>
+                    </a:lnL>
+                    <a:lnR w="12700" cap="flat" cmpd="sng" algn="ctr">
+                      <a:solidFill>
+                        <a:schemeClr val="tx1"/>
+                      </a:solidFill>
+                      <a:prstDash val="solid"/>
+                      <a:round/>
+                      <a:headEnd type="none" w="med" len="med"/>
+                      <a:tailEnd type="none" w="med" len="med"/>
+                    </a:lnR>
+                    <a:lnT w="12700" cap="flat" cmpd="sng" algn="ctr">
+                      <a:solidFill>
+                        <a:schemeClr val="tx1"/>
+                      </a:solidFill>
+                      <a:prstDash val="solid"/>
+                      <a:round/>
+                      <a:headEnd type="none" w="med" len="med"/>
+                      <a:tailEnd type="none" w="med" len="med"/>
+                    </a:lnT>
+                    <a:lnB w="12700" cap="flat" cmpd="sng" algn="ctr">
+                      <a:solidFill>
+                        <a:schemeClr val="tx1"/>
+                      </a:solidFill>
+                      <a:prstDash val="solid"/>
+                      <a:round/>
+                      <a:headEnd type="none" w="med" len="med"/>
+                      <a:tailEnd type="none" w="med" len="med"/>
+                    </a:lnB>
+                  </a:tcPr>
+                </a:tc>
+                <a:tc>
+                  <a:txBody>
+                    <a:bodyPr/>
+                    <a:lstStyle/>
+                    <a:p>
+                      <a:pPr algn="ctr"/>
+                      <a:endParaRPr lang="en-IE" sz="2400" dirty="0"/>
+                    </a:p>
+                    <a:p>
+                      <a:pPr algn="ctr"/>
+                      <a:r>
+                        <a:rPr lang="en-IE" sz="2400" dirty="0"/>
+                        <a:t>1-bit</a:t>
+                      </a:r>
+                    </a:p>
+                  </a:txBody>
+                  <a:tcPr>
+                    <a:lnL w="12700" cap="flat" cmpd="sng" algn="ctr">
+                      <a:solidFill>
+                        <a:schemeClr val="tx1"/>
+                      </a:solidFill>
+                      <a:prstDash val="solid"/>
+                      <a:round/>
+                      <a:headEnd type="none" w="med" len="med"/>
+                      <a:tailEnd type="none" w="med" len="med"/>
+                    </a:lnL>
+                    <a:lnR w="12700" cap="flat" cmpd="sng" algn="ctr">
+                      <a:solidFill>
+                        <a:schemeClr val="tx1"/>
+                      </a:solidFill>
+                      <a:prstDash val="solid"/>
+                      <a:round/>
+                      <a:headEnd type="none" w="med" len="med"/>
+                      <a:tailEnd type="none" w="med" len="med"/>
+                    </a:lnR>
+                    <a:lnT w="12700" cap="flat" cmpd="sng" algn="ctr">
+                      <a:solidFill>
+                        <a:schemeClr val="tx1"/>
+                      </a:solidFill>
+                      <a:prstDash val="solid"/>
+                      <a:round/>
+                      <a:headEnd type="none" w="med" len="med"/>
+                      <a:tailEnd type="none" w="med" len="med"/>
+                    </a:lnT>
+                    <a:lnB w="12700" cap="flat" cmpd="sng" algn="ctr">
+                      <a:solidFill>
+                        <a:schemeClr val="tx1"/>
+                      </a:solidFill>
+                      <a:prstDash val="solid"/>
+                      <a:round/>
+                      <a:headEnd type="none" w="med" len="med"/>
+                      <a:tailEnd type="none" w="med" len="med"/>
+                    </a:lnB>
+                  </a:tcPr>
+                </a:tc>
+                <a:tc gridSpan="2">
+                  <a:txBody>
+                    <a:bodyPr/>
+                    <a:lstStyle/>
+                    <a:p>
+                      <a:pPr marL="0" algn="ctr" defTabSz="914400" rtl="0" eaLnBrk="1" latinLnBrk="0" hangingPunct="1"/>
+                      <a:endParaRPr lang="en-IE" sz="2400" kern="1200" dirty="0">
+                        <a:solidFill>
+                          <a:schemeClr val="dk1"/>
+                        </a:solidFill>
+                        <a:latin typeface="+mn-lt"/>
+                        <a:ea typeface="+mn-ea"/>
+                        <a:cs typeface="+mn-cs"/>
+                      </a:endParaRPr>
+                    </a:p>
+                    <a:p>
+                      <a:pPr marL="0" algn="ctr" defTabSz="914400" rtl="0" eaLnBrk="1" latinLnBrk="0" hangingPunct="1"/>
+                      <a:r>
+                        <a:rPr lang="en-IE" sz="2400" kern="1200" dirty="0">
+                          <a:solidFill>
+                            <a:schemeClr val="dk1"/>
+                          </a:solidFill>
+                          <a:latin typeface="+mn-lt"/>
+                          <a:ea typeface="+mn-ea"/>
+                          <a:cs typeface="+mn-cs"/>
+                        </a:rPr>
+                        <a:t>n/a</a:t>
+                      </a:r>
+                    </a:p>
+                  </a:txBody>
+                  <a:tcPr>
+                    <a:lnL w="12700" cap="flat" cmpd="sng" algn="ctr">
+                      <a:solidFill>
+                        <a:schemeClr val="tx1"/>
+                      </a:solidFill>
+                      <a:prstDash val="solid"/>
+                      <a:round/>
+                      <a:headEnd type="none" w="med" len="med"/>
+                      <a:tailEnd type="none" w="med" len="med"/>
+                    </a:lnL>
+                    <a:lnR w="12700" cap="flat" cmpd="sng" algn="ctr">
+                      <a:solidFill>
+                        <a:schemeClr val="tx1"/>
+                      </a:solidFill>
+                      <a:prstDash val="solid"/>
+                      <a:round/>
+                      <a:headEnd type="none" w="med" len="med"/>
+                      <a:tailEnd type="none" w="med" len="med"/>
+                    </a:lnR>
+                    <a:lnT w="12700" cap="flat" cmpd="sng" algn="ctr">
+                      <a:solidFill>
+                        <a:schemeClr val="tx1"/>
+                      </a:solidFill>
+                      <a:prstDash val="solid"/>
+                      <a:round/>
+                      <a:headEnd type="none" w="med" len="med"/>
+                      <a:tailEnd type="none" w="med" len="med"/>
+                    </a:lnT>
+                    <a:lnB w="12700" cap="flat" cmpd="sng" algn="ctr">
+                      <a:solidFill>
+                        <a:schemeClr val="tx1"/>
+                      </a:solidFill>
+                      <a:prstDash val="solid"/>
+                      <a:round/>
+                      <a:headEnd type="none" w="med" len="med"/>
+                      <a:tailEnd type="none" w="med" len="med"/>
+                    </a:lnB>
+                  </a:tcPr>
+                </a:tc>
+                <a:tc hMerge="1">
+                  <a:txBody>
+                    <a:bodyPr/>
+                    <a:lstStyle/>
+                    <a:p>
+                      <a:pPr marL="0" algn="l" defTabSz="914400" rtl="0" eaLnBrk="1" latinLnBrk="0" hangingPunct="1"/>
+                      <a:endParaRPr lang="en-IE" sz="3200" kern="1200" dirty="0">
+                        <a:solidFill>
+                          <a:schemeClr val="dk1"/>
+                        </a:solidFill>
+                        <a:latin typeface="+mn-lt"/>
+                        <a:ea typeface="+mn-ea"/>
+                        <a:cs typeface="+mn-cs"/>
+                      </a:endParaRPr>
+                    </a:p>
+                  </a:txBody>
+                  <a:tcPr/>
+                </a:tc>
+                <a:tc>
+                  <a:txBody>
+                    <a:bodyPr/>
+                    <a:lstStyle/>
+                    <a:p>
+                      <a:pPr marL="0" algn="l" defTabSz="914400" rtl="0" eaLnBrk="1" latinLnBrk="0" hangingPunct="1"/>
+                      <a:r>
+                        <a:rPr lang="en-IE" sz="2400" kern="1200" dirty="0">
+                          <a:solidFill>
+                            <a:schemeClr val="dk1"/>
+                          </a:solidFill>
+                          <a:latin typeface="+mn-lt"/>
+                          <a:ea typeface="+mn-ea"/>
+                          <a:cs typeface="+mn-cs"/>
+                        </a:rPr>
+                        <a:t>Holds either </a:t>
+                      </a:r>
+                      <a:r>
+                        <a:rPr lang="en-IE" sz="2400" b="1" kern="1200" dirty="0">
+                          <a:solidFill>
+                            <a:schemeClr val="dk1"/>
+                          </a:solidFill>
+                          <a:latin typeface="+mn-lt"/>
+                          <a:ea typeface="+mn-ea"/>
+                          <a:cs typeface="+mn-cs"/>
+                        </a:rPr>
+                        <a:t>true</a:t>
+                      </a:r>
+                      <a:r>
+                        <a:rPr lang="en-IE" sz="2400" kern="1200" dirty="0">
+                          <a:solidFill>
+                            <a:schemeClr val="dk1"/>
+                          </a:solidFill>
+                          <a:latin typeface="+mn-lt"/>
+                          <a:ea typeface="+mn-ea"/>
+                          <a:cs typeface="+mn-cs"/>
+                        </a:rPr>
+                        <a:t> or </a:t>
+                      </a:r>
+                      <a:r>
+                        <a:rPr lang="en-IE" sz="2400" b="1" kern="1200" dirty="0">
+                          <a:solidFill>
+                            <a:schemeClr val="dk1"/>
+                          </a:solidFill>
+                          <a:latin typeface="+mn-lt"/>
+                          <a:ea typeface="+mn-ea"/>
+                          <a:cs typeface="+mn-cs"/>
+                        </a:rPr>
+                        <a:t>false</a:t>
+                      </a:r>
+                      <a:r>
+                        <a:rPr lang="en-IE" sz="2400" kern="1200" dirty="0">
+                          <a:solidFill>
+                            <a:schemeClr val="dk1"/>
+                          </a:solidFill>
+                          <a:latin typeface="+mn-lt"/>
+                          <a:ea typeface="+mn-ea"/>
+                          <a:cs typeface="+mn-cs"/>
+                        </a:rPr>
+                        <a:t> </a:t>
+                      </a:r>
+                      <a:br>
+                        <a:rPr lang="en-IE" sz="2400" kern="1200" dirty="0">
+                          <a:solidFill>
+                            <a:schemeClr val="dk1"/>
+                          </a:solidFill>
+                          <a:latin typeface="+mn-lt"/>
+                          <a:ea typeface="+mn-ea"/>
+                          <a:cs typeface="+mn-cs"/>
+                        </a:rPr>
+                      </a:br>
+                      <a:r>
+                        <a:rPr lang="en-IE" sz="2400" kern="1200" dirty="0">
+                          <a:solidFill>
+                            <a:schemeClr val="dk1"/>
+                          </a:solidFill>
+                          <a:latin typeface="+mn-lt"/>
+                          <a:ea typeface="+mn-ea"/>
+                          <a:cs typeface="+mn-cs"/>
+                        </a:rPr>
+                        <a:t>and is typically used as a flag.</a:t>
+                      </a:r>
+                    </a:p>
+                  </a:txBody>
+                  <a:tcPr>
+                    <a:lnL w="12700" cap="flat" cmpd="sng" algn="ctr">
+                      <a:solidFill>
+                        <a:schemeClr val="tx1"/>
+                      </a:solidFill>
+                      <a:prstDash val="solid"/>
+                      <a:round/>
+                      <a:headEnd type="none" w="med" len="med"/>
+                      <a:tailEnd type="none" w="med" len="med"/>
+                    </a:lnL>
+                    <a:lnR w="12700" cap="flat" cmpd="sng" algn="ctr">
+                      <a:solidFill>
+                        <a:schemeClr val="tx1"/>
+                      </a:solidFill>
+                      <a:prstDash val="solid"/>
+                      <a:round/>
+                      <a:headEnd type="none" w="med" len="med"/>
+                      <a:tailEnd type="none" w="med" len="med"/>
+                    </a:lnR>
+                    <a:lnT w="12700" cap="flat" cmpd="sng" algn="ctr">
+                      <a:solidFill>
+                        <a:schemeClr val="tx1"/>
+                      </a:solidFill>
+                      <a:prstDash val="solid"/>
+                      <a:round/>
+                      <a:headEnd type="none" w="med" len="med"/>
+                      <a:tailEnd type="none" w="med" len="med"/>
+                    </a:lnT>
+                    <a:lnB w="12700" cap="flat" cmpd="sng" algn="ctr">
+                      <a:solidFill>
+                        <a:schemeClr val="tx1"/>
+                      </a:solidFill>
+                      <a:prstDash val="solid"/>
+                      <a:round/>
+                      <a:headEnd type="none" w="med" len="med"/>
+                      <a:tailEnd type="none" w="med" len="med"/>
+                    </a:lnB>
+                  </a:tcPr>
+                </a:tc>
+                <a:extLst>
+                  <a:ext uri="{0D108BD9-81ED-4DB2-BD59-A6C34878D82A}">
+                    <a16:rowId xmlns:a16="http://schemas.microsoft.com/office/drawing/2014/main" val="10002"/>
+                  </a:ext>
+                </a:extLst>
+              </a:tr>
+            </a:tbl>
+          </a:graphicData>
+        </a:graphic>
+      </p:graphicFrame>
+      <p:sp>
+        <p:nvSpPr>
+          <p:cNvPr id="2" name="Rectangle 1"/>
+          <p:cNvSpPr/>
+          <p:nvPr/>
+        </p:nvSpPr>
+        <p:spPr>
+          <a:xfrm>
+            <a:off x="2019300" y="6248400"/>
+            <a:ext cx="8153400" cy="461665"/>
+          </a:xfrm>
+          <a:prstGeom prst="rect">
+            <a:avLst/>
+          </a:prstGeom>
+        </p:spPr>
+        <p:txBody>
+          <a:bodyPr wrap="square">
+            <a:spAutoFit/>
+          </a:bodyPr>
+          <a:lstStyle/>
+          <a:p>
+            <a:pPr algn="ctr"/>
+            <a:r>
+              <a:rPr lang="en-IE" sz="2400" dirty="0">
+                <a:hlinkClick r:id="rId3"/>
+              </a:rPr>
+              <a:t>http://en.wikipedia.org/wiki/List_of_Unicode_characters</a:t>
+            </a:r>
+            <a:endParaRPr lang="en-IE" sz="2400" dirty="0"/>
+          </a:p>
+        </p:txBody>
+      </p:sp>
+    </p:spTree>
+    <p:extLst>
+      <p:ext uri="{BB962C8B-B14F-4D97-AF65-F5344CB8AC3E}">
+        <p14:creationId xmlns:p14="http://schemas.microsoft.com/office/powerpoint/2010/main" val="327474517"/>
+      </p:ext>
+    </p:extLst>
+  </p:cSld>
+  <p:clrMapOvr>
+    <a:masterClrMapping/>
+  </p:clrMapOvr>
+  <p:transition/>
+</p:sld>
+</file>
+
+<file path=ppt/slides/slide28.xml><?xml version="1.0" encoding="utf-8"?>
+<p:sld xmlns:a="http://schemas.openxmlformats.org/drawingml/2006/main" xmlns:r="http://schemas.openxmlformats.org/officeDocument/2006/relationships" xmlns:p="http://schemas.openxmlformats.org/presentationml/2006/main">
+  <p:cSld>
+    <p:spTree>
+      <p:nvGrpSpPr>
+        <p:cNvPr id="1" name="">
+          <a:extLst>
+            <a:ext uri="{FF2B5EF4-FFF2-40B4-BE49-F238E27FC236}">
               <a16:creationId xmlns:a16="http://schemas.microsoft.com/office/drawing/2014/main" id="{04F94D03-749A-69EA-2B38-FAE12360B587}"/>
             </a:ext>
           </a:extLst>
@@ -17663,7 +19407,7 @@
 </p:sld>
 </file>
 
-<file path=ppt/slides/slide27.xml><?xml version="1.0" encoding="utf-8"?>
+<file path=ppt/slides/slide29.xml><?xml version="1.0" encoding="utf-8"?>
 <p:sld xmlns:a="http://schemas.openxmlformats.org/drawingml/2006/main" xmlns:r="http://schemas.openxmlformats.org/officeDocument/2006/relationships" xmlns:p="http://schemas.openxmlformats.org/presentationml/2006/main">
   <p:cSld>
     <p:spTree>
@@ -18603,7 +20347,354 @@
 </p:sld>
 </file>
 
-<file path=ppt/slides/slide28.xml><?xml version="1.0" encoding="utf-8"?>
+<file path=ppt/slides/slide3.xml><?xml version="1.0" encoding="utf-8"?>
+<p:sld xmlns:a="http://schemas.openxmlformats.org/drawingml/2006/main" xmlns:r="http://schemas.openxmlformats.org/officeDocument/2006/relationships" xmlns:p="http://schemas.openxmlformats.org/presentationml/2006/main">
+  <p:cSld>
+    <p:spTree>
+      <p:nvGrpSpPr>
+        <p:cNvPr id="1" name=""/>
+        <p:cNvGrpSpPr/>
+        <p:nvPr/>
+      </p:nvGrpSpPr>
+      <p:grpSpPr>
+        <a:xfrm>
+          <a:off x="0" y="0"/>
+          <a:ext cx="0" cy="0"/>
+          <a:chOff x="0" y="0"/>
+          <a:chExt cx="0" cy="0"/>
+        </a:xfrm>
+      </p:grpSpPr>
+      <p:sp>
+        <p:nvSpPr>
+          <p:cNvPr id="2" name="Title 1"/>
+          <p:cNvSpPr>
+            <a:spLocks noGrp="1"/>
+          </p:cNvSpPr>
+          <p:nvPr>
+            <p:ph type="title"/>
+          </p:nvPr>
+        </p:nvSpPr>
+        <p:spPr/>
+        <p:txBody>
+          <a:bodyPr/>
+          <a:lstStyle/>
+          <a:p>
+            <a:r>
+              <a:rPr lang="en-IE" dirty="0"/>
+              <a:t>Variables</a:t>
+            </a:r>
+          </a:p>
+        </p:txBody>
+      </p:sp>
+      <p:sp>
+        <p:nvSpPr>
+          <p:cNvPr id="3" name="Content Placeholder 2"/>
+          <p:cNvSpPr>
+            <a:spLocks noGrp="1"/>
+          </p:cNvSpPr>
+          <p:nvPr>
+            <p:ph idx="1"/>
+          </p:nvPr>
+        </p:nvSpPr>
+        <p:spPr/>
+        <p:txBody>
+          <a:bodyPr>
+            <a:normAutofit/>
+          </a:bodyPr>
+          <a:lstStyle/>
+          <a:p>
+            <a:pPr marL="0" indent="0">
+              <a:buNone/>
+            </a:pPr>
+            <a:r>
+              <a:rPr lang="en-IE" dirty="0"/>
+              <a:t>In Programming, variables:</a:t>
+            </a:r>
+          </a:p>
+          <a:p>
+            <a:pPr marL="0" indent="0">
+              <a:buNone/>
+            </a:pPr>
+            <a:endParaRPr lang="en-IE" dirty="0"/>
+          </a:p>
+          <a:p>
+            <a:r>
+              <a:rPr lang="en-IE" dirty="0"/>
+              <a:t>are created (defined) in your programs.</a:t>
+            </a:r>
+          </a:p>
+          <a:p>
+            <a:r>
+              <a:rPr lang="en-IE" dirty="0"/>
+              <a:t>are used to store data (whose value can change over time).</a:t>
+            </a:r>
+          </a:p>
+          <a:p>
+            <a:r>
+              <a:rPr lang="en-IE" dirty="0"/>
+              <a:t>have a data type.</a:t>
+            </a:r>
+          </a:p>
+          <a:p>
+            <a:r>
+              <a:rPr lang="en-IE" dirty="0"/>
+              <a:t>have a name.</a:t>
+            </a:r>
+          </a:p>
+          <a:p>
+            <a:r>
+              <a:rPr lang="en-IE" dirty="0"/>
+              <a:t>are a VERY important programming concept.</a:t>
+            </a:r>
+          </a:p>
+        </p:txBody>
+      </p:sp>
+    </p:spTree>
+    <p:custDataLst>
+      <p:tags r:id="rId1"/>
+    </p:custDataLst>
+    <p:extLst>
+      <p:ext uri="{BB962C8B-B14F-4D97-AF65-F5344CB8AC3E}">
+        <p14:creationId xmlns:p14="http://schemas.microsoft.com/office/powerpoint/2010/main" val="2016246218"/>
+      </p:ext>
+    </p:extLst>
+  </p:cSld>
+  <p:clrMapOvr>
+    <a:masterClrMapping/>
+  </p:clrMapOvr>
+  <p:timing>
+    <p:tnLst>
+      <p:par>
+        <p:cTn id="1" dur="indefinite" restart="never" nodeType="tmRoot">
+          <p:childTnLst>
+            <p:seq concurrent="1" nextAc="seek">
+              <p:cTn id="2" dur="indefinite" nodeType="mainSeq">
+                <p:childTnLst>
+                  <p:par>
+                    <p:cTn id="3" fill="hold">
+                      <p:stCondLst>
+                        <p:cond delay="indefinite"/>
+                      </p:stCondLst>
+                      <p:childTnLst>
+                        <p:par>
+                          <p:cTn id="4" fill="hold">
+                            <p:stCondLst>
+                              <p:cond delay="0"/>
+                            </p:stCondLst>
+                            <p:childTnLst>
+                              <p:par>
+                                <p:cTn id="5" presetID="1" presetClass="entr" presetSubtype="0" fill="hold" grpId="0" nodeType="clickEffect">
+                                  <p:stCondLst>
+                                    <p:cond delay="0"/>
+                                  </p:stCondLst>
+                                  <p:childTnLst>
+                                    <p:set>
+                                      <p:cBhvr>
+                                        <p:cTn id="6" dur="1" fill="hold">
+                                          <p:stCondLst>
+                                            <p:cond delay="0"/>
+                                          </p:stCondLst>
+                                        </p:cTn>
+                                        <p:tgtEl>
+                                          <p:spTgt spid="3">
+                                            <p:txEl>
+                                              <p:pRg st="3" end="3"/>
+                                            </p:txEl>
+                                          </p:spTgt>
+                                        </p:tgtEl>
+                                        <p:attrNameLst>
+                                          <p:attrName>style.visibility</p:attrName>
+                                        </p:attrNameLst>
+                                      </p:cBhvr>
+                                      <p:to>
+                                        <p:strVal val="visible"/>
+                                      </p:to>
+                                    </p:set>
+                                  </p:childTnLst>
+                                </p:cTn>
+                              </p:par>
+                            </p:childTnLst>
+                          </p:cTn>
+                        </p:par>
+                      </p:childTnLst>
+                    </p:cTn>
+                  </p:par>
+                  <p:par>
+                    <p:cTn id="7" fill="hold">
+                      <p:stCondLst>
+                        <p:cond delay="indefinite"/>
+                      </p:stCondLst>
+                      <p:childTnLst>
+                        <p:par>
+                          <p:cTn id="8" fill="hold">
+                            <p:stCondLst>
+                              <p:cond delay="0"/>
+                            </p:stCondLst>
+                            <p:childTnLst>
+                              <p:par>
+                                <p:cTn id="9" presetID="1" presetClass="entr" presetSubtype="0" fill="hold" grpId="0" nodeType="clickEffect">
+                                  <p:stCondLst>
+                                    <p:cond delay="0"/>
+                                  </p:stCondLst>
+                                  <p:childTnLst>
+                                    <p:set>
+                                      <p:cBhvr>
+                                        <p:cTn id="10" dur="1" fill="hold">
+                                          <p:stCondLst>
+                                            <p:cond delay="0"/>
+                                          </p:stCondLst>
+                                        </p:cTn>
+                                        <p:tgtEl>
+                                          <p:spTgt spid="3">
+                                            <p:txEl>
+                                              <p:pRg st="4" end="4"/>
+                                            </p:txEl>
+                                          </p:spTgt>
+                                        </p:tgtEl>
+                                        <p:attrNameLst>
+                                          <p:attrName>style.visibility</p:attrName>
+                                        </p:attrNameLst>
+                                      </p:cBhvr>
+                                      <p:to>
+                                        <p:strVal val="visible"/>
+                                      </p:to>
+                                    </p:set>
+                                  </p:childTnLst>
+                                </p:cTn>
+                              </p:par>
+                            </p:childTnLst>
+                          </p:cTn>
+                        </p:par>
+                      </p:childTnLst>
+                    </p:cTn>
+                  </p:par>
+                  <p:par>
+                    <p:cTn id="11" fill="hold">
+                      <p:stCondLst>
+                        <p:cond delay="indefinite"/>
+                      </p:stCondLst>
+                      <p:childTnLst>
+                        <p:par>
+                          <p:cTn id="12" fill="hold">
+                            <p:stCondLst>
+                              <p:cond delay="0"/>
+                            </p:stCondLst>
+                            <p:childTnLst>
+                              <p:par>
+                                <p:cTn id="13" presetID="1" presetClass="entr" presetSubtype="0" fill="hold" grpId="0" nodeType="clickEffect">
+                                  <p:stCondLst>
+                                    <p:cond delay="0"/>
+                                  </p:stCondLst>
+                                  <p:childTnLst>
+                                    <p:set>
+                                      <p:cBhvr>
+                                        <p:cTn id="14" dur="1" fill="hold">
+                                          <p:stCondLst>
+                                            <p:cond delay="0"/>
+                                          </p:stCondLst>
+                                        </p:cTn>
+                                        <p:tgtEl>
+                                          <p:spTgt spid="3">
+                                            <p:txEl>
+                                              <p:pRg st="5" end="5"/>
+                                            </p:txEl>
+                                          </p:spTgt>
+                                        </p:tgtEl>
+                                        <p:attrNameLst>
+                                          <p:attrName>style.visibility</p:attrName>
+                                        </p:attrNameLst>
+                                      </p:cBhvr>
+                                      <p:to>
+                                        <p:strVal val="visible"/>
+                                      </p:to>
+                                    </p:set>
+                                  </p:childTnLst>
+                                </p:cTn>
+                              </p:par>
+                            </p:childTnLst>
+                          </p:cTn>
+                        </p:par>
+                      </p:childTnLst>
+                    </p:cTn>
+                  </p:par>
+                  <p:par>
+                    <p:cTn id="15" fill="hold">
+                      <p:stCondLst>
+                        <p:cond delay="indefinite"/>
+                      </p:stCondLst>
+                      <p:childTnLst>
+                        <p:par>
+                          <p:cTn id="16" fill="hold">
+                            <p:stCondLst>
+                              <p:cond delay="0"/>
+                            </p:stCondLst>
+                            <p:childTnLst>
+                              <p:par>
+                                <p:cTn id="17" presetID="1" presetClass="entr" presetSubtype="0" fill="hold" grpId="0" nodeType="clickEffect">
+                                  <p:stCondLst>
+                                    <p:cond delay="0"/>
+                                  </p:stCondLst>
+                                  <p:childTnLst>
+                                    <p:set>
+                                      <p:cBhvr>
+                                        <p:cTn id="18" dur="1" fill="hold">
+                                          <p:stCondLst>
+                                            <p:cond delay="0"/>
+                                          </p:stCondLst>
+                                        </p:cTn>
+                                        <p:tgtEl>
+                                          <p:spTgt spid="3">
+                                            <p:txEl>
+                                              <p:pRg st="6" end="6"/>
+                                            </p:txEl>
+                                          </p:spTgt>
+                                        </p:tgtEl>
+                                        <p:attrNameLst>
+                                          <p:attrName>style.visibility</p:attrName>
+                                        </p:attrNameLst>
+                                      </p:cBhvr>
+                                      <p:to>
+                                        <p:strVal val="visible"/>
+                                      </p:to>
+                                    </p:set>
+                                  </p:childTnLst>
+                                </p:cTn>
+                              </p:par>
+                            </p:childTnLst>
+                          </p:cTn>
+                        </p:par>
+                      </p:childTnLst>
+                    </p:cTn>
+                  </p:par>
+                </p:childTnLst>
+              </p:cTn>
+              <p:prevCondLst>
+                <p:cond evt="onPrev" delay="0">
+                  <p:tgtEl>
+                    <p:sldTgt/>
+                  </p:tgtEl>
+                </p:cond>
+              </p:prevCondLst>
+              <p:nextCondLst>
+                <p:cond evt="onNext" delay="0">
+                  <p:tgtEl>
+                    <p:sldTgt/>
+                  </p:tgtEl>
+                </p:cond>
+              </p:nextCondLst>
+            </p:seq>
+          </p:childTnLst>
+        </p:cTn>
+      </p:par>
+    </p:tnLst>
+    <p:bldLst>
+      <p:bldP spid="3" grpId="0" uiExpand="1" build="p"/>
+    </p:bldLst>
+  </p:timing>
+</p:sld>
+</file>
+
+<file path=ppt/slides/slide30.xml><?xml version="1.0" encoding="utf-8"?>
 <p:sld xmlns:a="http://schemas.openxmlformats.org/drawingml/2006/main" xmlns:r="http://schemas.openxmlformats.org/officeDocument/2006/relationships" xmlns:p="http://schemas.openxmlformats.org/presentationml/2006/main">
   <p:cSld>
     <p:spTree>
@@ -19245,7 +21336,7 @@
             <a:pPr algn="ctr"/>
             <a:r>
               <a:rPr lang="en-US" dirty="0"/>
-              <a:t>Either x or y or bot are non-integers</a:t>
+              <a:t>Either x or y or both are non-integers</a:t>
             </a:r>
           </a:p>
         </p:txBody>
@@ -20994,7 +23085,7 @@
 </p:sld>
 </file>
 
-<file path=ppt/slides/slide29.xml><?xml version="1.0" encoding="utf-8"?>
+<file path=ppt/slides/slide31.xml><?xml version="1.0" encoding="utf-8"?>
 <p:sld xmlns:a="http://schemas.openxmlformats.org/drawingml/2006/main" xmlns:r="http://schemas.openxmlformats.org/officeDocument/2006/relationships" xmlns:p="http://schemas.openxmlformats.org/presentationml/2006/main">
   <p:cSld>
     <p:spTree>
@@ -21079,353 +23170,6 @@
   <p:clrMapOvr>
     <a:masterClrMapping/>
   </p:clrMapOvr>
-</p:sld>
-</file>
-
-<file path=ppt/slides/slide3.xml><?xml version="1.0" encoding="utf-8"?>
-<p:sld xmlns:a="http://schemas.openxmlformats.org/drawingml/2006/main" xmlns:r="http://schemas.openxmlformats.org/officeDocument/2006/relationships" xmlns:p="http://schemas.openxmlformats.org/presentationml/2006/main">
-  <p:cSld>
-    <p:spTree>
-      <p:nvGrpSpPr>
-        <p:cNvPr id="1" name=""/>
-        <p:cNvGrpSpPr/>
-        <p:nvPr/>
-      </p:nvGrpSpPr>
-      <p:grpSpPr>
-        <a:xfrm>
-          <a:off x="0" y="0"/>
-          <a:ext cx="0" cy="0"/>
-          <a:chOff x="0" y="0"/>
-          <a:chExt cx="0" cy="0"/>
-        </a:xfrm>
-      </p:grpSpPr>
-      <p:sp>
-        <p:nvSpPr>
-          <p:cNvPr id="2" name="Title 1"/>
-          <p:cNvSpPr>
-            <a:spLocks noGrp="1"/>
-          </p:cNvSpPr>
-          <p:nvPr>
-            <p:ph type="title"/>
-          </p:nvPr>
-        </p:nvSpPr>
-        <p:spPr/>
-        <p:txBody>
-          <a:bodyPr/>
-          <a:lstStyle/>
-          <a:p>
-            <a:r>
-              <a:rPr lang="en-IE" dirty="0"/>
-              <a:t>Variables</a:t>
-            </a:r>
-          </a:p>
-        </p:txBody>
-      </p:sp>
-      <p:sp>
-        <p:nvSpPr>
-          <p:cNvPr id="3" name="Content Placeholder 2"/>
-          <p:cNvSpPr>
-            <a:spLocks noGrp="1"/>
-          </p:cNvSpPr>
-          <p:nvPr>
-            <p:ph idx="1"/>
-          </p:nvPr>
-        </p:nvSpPr>
-        <p:spPr/>
-        <p:txBody>
-          <a:bodyPr>
-            <a:normAutofit/>
-          </a:bodyPr>
-          <a:lstStyle/>
-          <a:p>
-            <a:pPr marL="0" indent="0">
-              <a:buNone/>
-            </a:pPr>
-            <a:r>
-              <a:rPr lang="en-IE" dirty="0"/>
-              <a:t>In Programming, variables:</a:t>
-            </a:r>
-          </a:p>
-          <a:p>
-            <a:pPr marL="0" indent="0">
-              <a:buNone/>
-            </a:pPr>
-            <a:endParaRPr lang="en-IE" dirty="0"/>
-          </a:p>
-          <a:p>
-            <a:r>
-              <a:rPr lang="en-IE" dirty="0"/>
-              <a:t>are created (defined) in your programs.</a:t>
-            </a:r>
-          </a:p>
-          <a:p>
-            <a:r>
-              <a:rPr lang="en-IE" dirty="0"/>
-              <a:t>are used to store data (whose value can change over time).</a:t>
-            </a:r>
-          </a:p>
-          <a:p>
-            <a:r>
-              <a:rPr lang="en-IE" dirty="0"/>
-              <a:t>have a data type.</a:t>
-            </a:r>
-          </a:p>
-          <a:p>
-            <a:r>
-              <a:rPr lang="en-IE" dirty="0"/>
-              <a:t>have a name.</a:t>
-            </a:r>
-          </a:p>
-          <a:p>
-            <a:r>
-              <a:rPr lang="en-IE" dirty="0"/>
-              <a:t>are a VERY important programming concept.</a:t>
-            </a:r>
-          </a:p>
-        </p:txBody>
-      </p:sp>
-    </p:spTree>
-    <p:custDataLst>
-      <p:tags r:id="rId1"/>
-    </p:custDataLst>
-    <p:extLst>
-      <p:ext uri="{BB962C8B-B14F-4D97-AF65-F5344CB8AC3E}">
-        <p14:creationId xmlns:p14="http://schemas.microsoft.com/office/powerpoint/2010/main" val="2016246218"/>
-      </p:ext>
-    </p:extLst>
-  </p:cSld>
-  <p:clrMapOvr>
-    <a:masterClrMapping/>
-  </p:clrMapOvr>
-  <p:timing>
-    <p:tnLst>
-      <p:par>
-        <p:cTn id="1" dur="indefinite" restart="never" nodeType="tmRoot">
-          <p:childTnLst>
-            <p:seq concurrent="1" nextAc="seek">
-              <p:cTn id="2" dur="indefinite" nodeType="mainSeq">
-                <p:childTnLst>
-                  <p:par>
-                    <p:cTn id="3" fill="hold">
-                      <p:stCondLst>
-                        <p:cond delay="indefinite"/>
-                      </p:stCondLst>
-                      <p:childTnLst>
-                        <p:par>
-                          <p:cTn id="4" fill="hold">
-                            <p:stCondLst>
-                              <p:cond delay="0"/>
-                            </p:stCondLst>
-                            <p:childTnLst>
-                              <p:par>
-                                <p:cTn id="5" presetID="1" presetClass="entr" presetSubtype="0" fill="hold" grpId="0" nodeType="clickEffect">
-                                  <p:stCondLst>
-                                    <p:cond delay="0"/>
-                                  </p:stCondLst>
-                                  <p:childTnLst>
-                                    <p:set>
-                                      <p:cBhvr>
-                                        <p:cTn id="6" dur="1" fill="hold">
-                                          <p:stCondLst>
-                                            <p:cond delay="0"/>
-                                          </p:stCondLst>
-                                        </p:cTn>
-                                        <p:tgtEl>
-                                          <p:spTgt spid="3">
-                                            <p:txEl>
-                                              <p:pRg st="3" end="3"/>
-                                            </p:txEl>
-                                          </p:spTgt>
-                                        </p:tgtEl>
-                                        <p:attrNameLst>
-                                          <p:attrName>style.visibility</p:attrName>
-                                        </p:attrNameLst>
-                                      </p:cBhvr>
-                                      <p:to>
-                                        <p:strVal val="visible"/>
-                                      </p:to>
-                                    </p:set>
-                                  </p:childTnLst>
-                                </p:cTn>
-                              </p:par>
-                            </p:childTnLst>
-                          </p:cTn>
-                        </p:par>
-                      </p:childTnLst>
-                    </p:cTn>
-                  </p:par>
-                  <p:par>
-                    <p:cTn id="7" fill="hold">
-                      <p:stCondLst>
-                        <p:cond delay="indefinite"/>
-                      </p:stCondLst>
-                      <p:childTnLst>
-                        <p:par>
-                          <p:cTn id="8" fill="hold">
-                            <p:stCondLst>
-                              <p:cond delay="0"/>
-                            </p:stCondLst>
-                            <p:childTnLst>
-                              <p:par>
-                                <p:cTn id="9" presetID="1" presetClass="entr" presetSubtype="0" fill="hold" grpId="0" nodeType="clickEffect">
-                                  <p:stCondLst>
-                                    <p:cond delay="0"/>
-                                  </p:stCondLst>
-                                  <p:childTnLst>
-                                    <p:set>
-                                      <p:cBhvr>
-                                        <p:cTn id="10" dur="1" fill="hold">
-                                          <p:stCondLst>
-                                            <p:cond delay="0"/>
-                                          </p:stCondLst>
-                                        </p:cTn>
-                                        <p:tgtEl>
-                                          <p:spTgt spid="3">
-                                            <p:txEl>
-                                              <p:pRg st="4" end="4"/>
-                                            </p:txEl>
-                                          </p:spTgt>
-                                        </p:tgtEl>
-                                        <p:attrNameLst>
-                                          <p:attrName>style.visibility</p:attrName>
-                                        </p:attrNameLst>
-                                      </p:cBhvr>
-                                      <p:to>
-                                        <p:strVal val="visible"/>
-                                      </p:to>
-                                    </p:set>
-                                  </p:childTnLst>
-                                </p:cTn>
-                              </p:par>
-                            </p:childTnLst>
-                          </p:cTn>
-                        </p:par>
-                      </p:childTnLst>
-                    </p:cTn>
-                  </p:par>
-                  <p:par>
-                    <p:cTn id="11" fill="hold">
-                      <p:stCondLst>
-                        <p:cond delay="indefinite"/>
-                      </p:stCondLst>
-                      <p:childTnLst>
-                        <p:par>
-                          <p:cTn id="12" fill="hold">
-                            <p:stCondLst>
-                              <p:cond delay="0"/>
-                            </p:stCondLst>
-                            <p:childTnLst>
-                              <p:par>
-                                <p:cTn id="13" presetID="1" presetClass="entr" presetSubtype="0" fill="hold" grpId="0" nodeType="clickEffect">
-                                  <p:stCondLst>
-                                    <p:cond delay="0"/>
-                                  </p:stCondLst>
-                                  <p:childTnLst>
-                                    <p:set>
-                                      <p:cBhvr>
-                                        <p:cTn id="14" dur="1" fill="hold">
-                                          <p:stCondLst>
-                                            <p:cond delay="0"/>
-                                          </p:stCondLst>
-                                        </p:cTn>
-                                        <p:tgtEl>
-                                          <p:spTgt spid="3">
-                                            <p:txEl>
-                                              <p:pRg st="5" end="5"/>
-                                            </p:txEl>
-                                          </p:spTgt>
-                                        </p:tgtEl>
-                                        <p:attrNameLst>
-                                          <p:attrName>style.visibility</p:attrName>
-                                        </p:attrNameLst>
-                                      </p:cBhvr>
-                                      <p:to>
-                                        <p:strVal val="visible"/>
-                                      </p:to>
-                                    </p:set>
-                                  </p:childTnLst>
-                                </p:cTn>
-                              </p:par>
-                            </p:childTnLst>
-                          </p:cTn>
-                        </p:par>
-                      </p:childTnLst>
-                    </p:cTn>
-                  </p:par>
-                  <p:par>
-                    <p:cTn id="15" fill="hold">
-                      <p:stCondLst>
-                        <p:cond delay="indefinite"/>
-                      </p:stCondLst>
-                      <p:childTnLst>
-                        <p:par>
-                          <p:cTn id="16" fill="hold">
-                            <p:stCondLst>
-                              <p:cond delay="0"/>
-                            </p:stCondLst>
-                            <p:childTnLst>
-                              <p:par>
-                                <p:cTn id="17" presetID="1" presetClass="entr" presetSubtype="0" fill="hold" grpId="0" nodeType="clickEffect">
-                                  <p:stCondLst>
-                                    <p:cond delay="0"/>
-                                  </p:stCondLst>
-                                  <p:childTnLst>
-                                    <p:set>
-                                      <p:cBhvr>
-                                        <p:cTn id="18" dur="1" fill="hold">
-                                          <p:stCondLst>
-                                            <p:cond delay="0"/>
-                                          </p:stCondLst>
-                                        </p:cTn>
-                                        <p:tgtEl>
-                                          <p:spTgt spid="3">
-                                            <p:txEl>
-                                              <p:pRg st="6" end="6"/>
-                                            </p:txEl>
-                                          </p:spTgt>
-                                        </p:tgtEl>
-                                        <p:attrNameLst>
-                                          <p:attrName>style.visibility</p:attrName>
-                                        </p:attrNameLst>
-                                      </p:cBhvr>
-                                      <p:to>
-                                        <p:strVal val="visible"/>
-                                      </p:to>
-                                    </p:set>
-                                  </p:childTnLst>
-                                </p:cTn>
-                              </p:par>
-                            </p:childTnLst>
-                          </p:cTn>
-                        </p:par>
-                      </p:childTnLst>
-                    </p:cTn>
-                  </p:par>
-                </p:childTnLst>
-              </p:cTn>
-              <p:prevCondLst>
-                <p:cond evt="onPrev" delay="0">
-                  <p:tgtEl>
-                    <p:sldTgt/>
-                  </p:tgtEl>
-                </p:cond>
-              </p:prevCondLst>
-              <p:nextCondLst>
-                <p:cond evt="onNext" delay="0">
-                  <p:tgtEl>
-                    <p:sldTgt/>
-                  </p:tgtEl>
-                </p:cond>
-              </p:nextCondLst>
-            </p:seq>
-          </p:childTnLst>
-        </p:cTn>
-      </p:par>
-    </p:tnLst>
-    <p:bldLst>
-      <p:bldP spid="3" grpId="0" uiExpand="1" build="p"/>
-    </p:bldLst>
-  </p:timing>
 </p:sld>
 </file>
 

--- a/topic03-dataTypes-variables-and-expressions/unit-1/talk-1/a-data-types.pptx
+++ b/topic03-dataTypes-variables-and-expressions/unit-1/talk-1/a-data-types.pptx
@@ -511,14 +511,14 @@
           </a:ln>
           <a:extLst>
             <a:ext uri="{909E8E84-426E-40dd-AFC4-6F175D3DCCD1}">
-              <a14:hiddenFill xmlns="" xmlns:a14="http://schemas.microsoft.com/office/drawing/2010/main">
+              <a14:hiddenFill xmlns:a14="http://schemas.microsoft.com/office/drawing/2010/main" xmlns="">
                 <a:solidFill>
                   <a:srgbClr val="FFFFFF"/>
                 </a:solidFill>
               </a14:hiddenFill>
             </a:ext>
             <a:ext uri="{FAA26D3D-D897-4be2-8F04-BA451C77F1D7}">
-              <ma14:placeholderFlag xmlns="" xmlns:ma14="http://schemas.microsoft.com/office/mac/drawingml/2011/main" val="1"/>
+              <ma14:placeholderFlag xmlns:ma14="http://schemas.microsoft.com/office/mac/drawingml/2011/main" xmlns="" val="1"/>
             </a:ext>
           </a:extLst>
         </p:spPr>
@@ -862,14 +862,14 @@
           <a:noFill/>
           <a:extLst>
             <a:ext uri="{909E8E84-426E-40dd-AFC4-6F175D3DCCD1}">
-              <a14:hiddenFill xmlns="" xmlns:a14="http://schemas.microsoft.com/office/drawing/2010/main">
+              <a14:hiddenFill xmlns:a14="http://schemas.microsoft.com/office/drawing/2010/main" xmlns="">
                 <a:solidFill>
                   <a:srgbClr val="FFFFFF"/>
                 </a:solidFill>
               </a14:hiddenFill>
             </a:ext>
             <a:ext uri="{91240B29-F687-4f45-9708-019B960494DF}">
-              <a14:hiddenLine xmlns="" xmlns:a14="http://schemas.microsoft.com/office/drawing/2010/main" w="9525">
+              <a14:hiddenLine xmlns:a14="http://schemas.microsoft.com/office/drawing/2010/main" xmlns="" w="9525">
                 <a:solidFill>
                   <a:srgbClr val="000000"/>
                 </a:solidFill>
@@ -1017,14 +1017,14 @@
           <a:noFill/>
           <a:extLst>
             <a:ext uri="{909E8E84-426E-40dd-AFC4-6F175D3DCCD1}">
-              <a14:hiddenFill xmlns="" xmlns:a14="http://schemas.microsoft.com/office/drawing/2010/main">
+              <a14:hiddenFill xmlns:a14="http://schemas.microsoft.com/office/drawing/2010/main" xmlns="">
                 <a:solidFill>
                   <a:srgbClr val="FFFFFF"/>
                 </a:solidFill>
               </a14:hiddenFill>
             </a:ext>
             <a:ext uri="{91240B29-F687-4f45-9708-019B960494DF}">
-              <a14:hiddenLine xmlns="" xmlns:a14="http://schemas.microsoft.com/office/drawing/2010/main" w="9525">
+              <a14:hiddenLine xmlns:a14="http://schemas.microsoft.com/office/drawing/2010/main" xmlns="" w="9525">
                 <a:solidFill>
                   <a:srgbClr val="000000"/>
                 </a:solidFill>
@@ -1172,14 +1172,14 @@
           <a:noFill/>
           <a:extLst>
             <a:ext uri="{909E8E84-426E-40dd-AFC4-6F175D3DCCD1}">
-              <a14:hiddenFill xmlns="" xmlns:a14="http://schemas.microsoft.com/office/drawing/2010/main">
+              <a14:hiddenFill xmlns:a14="http://schemas.microsoft.com/office/drawing/2010/main" xmlns="">
                 <a:solidFill>
                   <a:srgbClr val="FFFFFF"/>
                 </a:solidFill>
               </a14:hiddenFill>
             </a:ext>
             <a:ext uri="{91240B29-F687-4f45-9708-019B960494DF}">
-              <a14:hiddenLine xmlns="" xmlns:a14="http://schemas.microsoft.com/office/drawing/2010/main" w="9525">
+              <a14:hiddenLine xmlns:a14="http://schemas.microsoft.com/office/drawing/2010/main" xmlns="" w="9525">
                 <a:solidFill>
                   <a:srgbClr val="000000"/>
                 </a:solidFill>
@@ -1351,7 +1351,7 @@
         <p:spPr>
           <a:extLst>
             <a:ext uri="{FAA26D3D-D897-4be2-8F04-BA451C77F1D7}">
-              <ma14:placeholderFlag xmlns="" xmlns:ma14="http://schemas.microsoft.com/office/mac/drawingml/2011/main" val="1"/>
+              <ma14:placeholderFlag xmlns:ma14="http://schemas.microsoft.com/office/mac/drawingml/2011/main" xmlns="" val="1"/>
             </a:ext>
           </a:extLst>
         </p:spPr>
@@ -1516,14 +1516,14 @@
           <a:noFill/>
           <a:extLst>
             <a:ext uri="{909E8E84-426E-40dd-AFC4-6F175D3DCCD1}">
-              <a14:hiddenFill xmlns="" xmlns:a14="http://schemas.microsoft.com/office/drawing/2010/main">
+              <a14:hiddenFill xmlns:a14="http://schemas.microsoft.com/office/drawing/2010/main" xmlns="">
                 <a:solidFill>
                   <a:srgbClr val="FFFFFF"/>
                 </a:solidFill>
               </a14:hiddenFill>
             </a:ext>
             <a:ext uri="{91240B29-F687-4f45-9708-019B960494DF}">
-              <a14:hiddenLine xmlns="" xmlns:a14="http://schemas.microsoft.com/office/drawing/2010/main" w="9525">
+              <a14:hiddenLine xmlns:a14="http://schemas.microsoft.com/office/drawing/2010/main" xmlns="" w="9525">
                 <a:solidFill>
                   <a:srgbClr val="000000"/>
                 </a:solidFill>
@@ -1671,14 +1671,14 @@
           <a:noFill/>
           <a:extLst>
             <a:ext uri="{909E8E84-426E-40dd-AFC4-6F175D3DCCD1}">
-              <a14:hiddenFill xmlns="" xmlns:a14="http://schemas.microsoft.com/office/drawing/2010/main">
+              <a14:hiddenFill xmlns:a14="http://schemas.microsoft.com/office/drawing/2010/main" xmlns="">
                 <a:solidFill>
                   <a:srgbClr val="FFFFFF"/>
                 </a:solidFill>
               </a14:hiddenFill>
             </a:ext>
             <a:ext uri="{91240B29-F687-4f45-9708-019B960494DF}">
-              <a14:hiddenLine xmlns="" xmlns:a14="http://schemas.microsoft.com/office/drawing/2010/main" w="9525">
+              <a14:hiddenLine xmlns:a14="http://schemas.microsoft.com/office/drawing/2010/main" xmlns="" w="9525">
                 <a:solidFill>
                   <a:srgbClr val="000000"/>
                 </a:solidFill>
@@ -1826,14 +1826,14 @@
           <a:noFill/>
           <a:extLst>
             <a:ext uri="{909E8E84-426E-40dd-AFC4-6F175D3DCCD1}">
-              <a14:hiddenFill xmlns="" xmlns:a14="http://schemas.microsoft.com/office/drawing/2010/main">
+              <a14:hiddenFill xmlns:a14="http://schemas.microsoft.com/office/drawing/2010/main" xmlns="">
                 <a:solidFill>
                   <a:srgbClr val="FFFFFF"/>
                 </a:solidFill>
               </a14:hiddenFill>
             </a:ext>
             <a:ext uri="{91240B29-F687-4f45-9708-019B960494DF}">
-              <a14:hiddenLine xmlns="" xmlns:a14="http://schemas.microsoft.com/office/drawing/2010/main" w="9525">
+              <a14:hiddenLine xmlns:a14="http://schemas.microsoft.com/office/drawing/2010/main" xmlns="" w="9525">
                 <a:solidFill>
                   <a:srgbClr val="000000"/>
                 </a:solidFill>
@@ -2005,7 +2005,7 @@
         <p:spPr>
           <a:extLst>
             <a:ext uri="{FAA26D3D-D897-4be2-8F04-BA451C77F1D7}">
-              <ma14:placeholderFlag xmlns="" xmlns:ma14="http://schemas.microsoft.com/office/mac/drawingml/2011/main" val="1"/>
+              <ma14:placeholderFlag xmlns:ma14="http://schemas.microsoft.com/office/mac/drawingml/2011/main" xmlns="" val="1"/>
             </a:ext>
           </a:extLst>
         </p:spPr>
@@ -2792,7 +2792,7 @@
           <a:p>
             <a:fld id="{C764DE79-268F-4C1A-8933-263129D2AF90}" type="datetimeFigureOut">
               <a:rPr lang="en-US" smtClean="0"/>
-              <a:t>10/1/25</a:t>
+              <a:t>10/16/25</a:t>
             </a:fld>
             <a:endParaRPr lang="en-US" dirty="0"/>
           </a:p>
@@ -2963,7 +2963,7 @@
           <a:p>
             <a:fld id="{C764DE79-268F-4C1A-8933-263129D2AF90}" type="datetimeFigureOut">
               <a:rPr lang="en-US" smtClean="0"/>
-              <a:t>10/1/25</a:t>
+              <a:t>10/16/25</a:t>
             </a:fld>
             <a:endParaRPr lang="en-US" dirty="0"/>
           </a:p>
@@ -3144,7 +3144,7 @@
           <a:p>
             <a:fld id="{C764DE79-268F-4C1A-8933-263129D2AF90}" type="datetimeFigureOut">
               <a:rPr lang="en-US" smtClean="0"/>
-              <a:t>10/1/25</a:t>
+              <a:t>10/16/25</a:t>
             </a:fld>
             <a:endParaRPr lang="en-US" dirty="0"/>
           </a:p>
@@ -3782,7 +3782,7 @@
           <a:p>
             <a:fld id="{C764DE79-268F-4C1A-8933-263129D2AF90}" type="datetimeFigureOut">
               <a:rPr lang="en-US" smtClean="0"/>
-              <a:t>10/1/25</a:t>
+              <a:t>10/16/25</a:t>
             </a:fld>
             <a:endParaRPr lang="en-US" dirty="0"/>
           </a:p>
@@ -4154,7 +4154,7 @@
           <a:p>
             <a:fld id="{C764DE79-268F-4C1A-8933-263129D2AF90}" type="datetimeFigureOut">
               <a:rPr lang="en-US" smtClean="0"/>
-              <a:t>10/1/25</a:t>
+              <a:t>10/16/25</a:t>
             </a:fld>
             <a:endParaRPr lang="en-US" dirty="0"/>
           </a:p>
@@ -4454,7 +4454,7 @@
           <a:p>
             <a:fld id="{C764DE79-268F-4C1A-8933-263129D2AF90}" type="datetimeFigureOut">
               <a:rPr lang="en-US" smtClean="0"/>
-              <a:t>10/1/25</a:t>
+              <a:t>10/16/25</a:t>
             </a:fld>
             <a:endParaRPr lang="en-US" dirty="0"/>
           </a:p>
@@ -5001,7 +5001,7 @@
           <a:p>
             <a:fld id="{C764DE79-268F-4C1A-8933-263129D2AF90}" type="datetimeFigureOut">
               <a:rPr lang="en-US" smtClean="0"/>
-              <a:t>10/1/25</a:t>
+              <a:t>10/16/25</a:t>
             </a:fld>
             <a:endParaRPr lang="en-US" dirty="0"/>
           </a:p>
@@ -5207,7 +5207,7 @@
           <a:p>
             <a:fld id="{C764DE79-268F-4C1A-8933-263129D2AF90}" type="datetimeFigureOut">
               <a:rPr lang="en-US" smtClean="0"/>
-              <a:t>10/1/25</a:t>
+              <a:t>10/16/25</a:t>
             </a:fld>
             <a:endParaRPr lang="en-US" dirty="0"/>
           </a:p>
@@ -5419,7 +5419,7 @@
           <a:p>
             <a:fld id="{C764DE79-268F-4C1A-8933-263129D2AF90}" type="datetimeFigureOut">
               <a:rPr lang="en-US" smtClean="0"/>
-              <a:t>10/1/25</a:t>
+              <a:t>10/16/25</a:t>
             </a:fld>
             <a:endParaRPr lang="en-US" dirty="0"/>
           </a:p>
@@ -5696,7 +5696,7 @@
           <a:p>
             <a:fld id="{C764DE79-268F-4C1A-8933-263129D2AF90}" type="datetimeFigureOut">
               <a:rPr lang="en-US" smtClean="0"/>
-              <a:t>10/1/25</a:t>
+              <a:t>10/16/25</a:t>
             </a:fld>
             <a:endParaRPr lang="en-US" dirty="0"/>
           </a:p>
@@ -5954,7 +5954,7 @@
           <a:p>
             <a:fld id="{C764DE79-268F-4C1A-8933-263129D2AF90}" type="datetimeFigureOut">
               <a:rPr lang="en-US" smtClean="0"/>
-              <a:t>10/1/25</a:t>
+              <a:t>10/16/25</a:t>
             </a:fld>
             <a:endParaRPr lang="en-US" dirty="0"/>
           </a:p>
@@ -6173,7 +6173,7 @@
           <a:p>
             <a:fld id="{C764DE79-268F-4C1A-8933-263129D2AF90}" type="datetimeFigureOut">
               <a:rPr lang="en-US" smtClean="0"/>
-              <a:t>10/1/25</a:t>
+              <a:t>10/16/25</a:t>
             </a:fld>
             <a:endParaRPr lang="en-US" dirty="0"/>
           </a:p>
@@ -6591,36 +6591,6 @@
       </p:sp>
       <p:sp>
         <p:nvSpPr>
-          <p:cNvPr id="4099" name="Rectangle 3"/>
-          <p:cNvSpPr>
-            <a:spLocks noGrp="1" noChangeArrowheads="1"/>
-          </p:cNvSpPr>
-          <p:nvPr>
-            <p:ph type="body" sz="quarter" idx="22"/>
-          </p:nvPr>
-        </p:nvSpPr>
-        <p:spPr>
-          <a:xfrm>
-            <a:off x="98936" y="1549516"/>
-            <a:ext cx="10134430" cy="584775"/>
-          </a:xfrm>
-        </p:spPr>
-        <p:txBody>
-          <a:bodyPr/>
-          <a:lstStyle/>
-          <a:p>
-            <a:pPr eaLnBrk="1" hangingPunct="1">
-              <a:defRPr/>
-            </a:pPr>
-            <a:endParaRPr lang="en-GB" dirty="0">
-              <a:ea typeface="+mn-ea"/>
-              <a:cs typeface="+mn-cs"/>
-            </a:endParaRPr>
-          </a:p>
-        </p:txBody>
-      </p:sp>
-      <p:sp>
-        <p:nvSpPr>
           <p:cNvPr id="17411" name="Text Box 4"/>
           <p:cNvSpPr txBox="1">
             <a:spLocks noChangeArrowheads="1"/>
@@ -6641,14 +6611,14 @@
           </a:ln>
           <a:extLst>
             <a:ext uri="{909E8E84-426E-40dd-AFC4-6F175D3DCCD1}">
-              <a14:hiddenFill xmlns="" xmlns:a14="http://schemas.microsoft.com/office/drawing/2010/main">
+              <a14:hiddenFill xmlns:a14="http://schemas.microsoft.com/office/drawing/2010/main" xmlns="">
                 <a:solidFill>
                   <a:srgbClr val="FFFFFF"/>
                 </a:solidFill>
               </a14:hiddenFill>
             </a:ext>
             <a:ext uri="{91240B29-F687-4f45-9708-019B960494DF}">
-              <a14:hiddenLine xmlns="" xmlns:a14="http://schemas.microsoft.com/office/drawing/2010/main" w="9525">
+              <a14:hiddenLine xmlns:a14="http://schemas.microsoft.com/office/drawing/2010/main" xmlns="" w="9525">
                 <a:solidFill>
                   <a:srgbClr val="000000"/>
                 </a:solidFill>
@@ -7078,42 +7048,6 @@
           </a:p>
         </p:txBody>
       </p:sp>
-      <p:pic>
-        <p:nvPicPr>
-          <p:cNvPr id="4" name="Picture 3" descr="Text&#10;&#10;Description automatically generated">
-            <a:extLst>
-              <a:ext uri="{FF2B5EF4-FFF2-40B4-BE49-F238E27FC236}">
-                <a16:creationId xmlns:a16="http://schemas.microsoft.com/office/drawing/2014/main" id="{3C52B6A4-97C1-5BF3-8F44-19C73FB40166}"/>
-              </a:ext>
-            </a:extLst>
-          </p:cNvPr>
-          <p:cNvPicPr>
-            <a:picLocks noChangeAspect="1"/>
-          </p:cNvPicPr>
-          <p:nvPr/>
-        </p:nvPicPr>
-        <p:blipFill>
-          <a:blip r:embed="rId3" cstate="print">
-            <a:extLst>
-              <a:ext uri="{28A0092B-C50C-407E-A947-70E740481C1C}">
-                <a14:useLocalDpi xmlns:a14="http://schemas.microsoft.com/office/drawing/2010/main" val="0"/>
-              </a:ext>
-            </a:extLst>
-          </a:blip>
-          <a:stretch>
-            <a:fillRect/>
-          </a:stretch>
-        </p:blipFill>
-        <p:spPr>
-          <a:xfrm>
-            <a:off x="651641" y="5501441"/>
-            <a:ext cx="2286000" cy="1281546"/>
-          </a:xfrm>
-          <a:prstGeom prst="rect">
-            <a:avLst/>
-          </a:prstGeom>
-        </p:spPr>
-      </p:pic>
       <p:sp>
         <p:nvSpPr>
           <p:cNvPr id="5" name="TextBox 4">
@@ -7184,7 +7118,7 @@
           <p:nvPr/>
         </p:nvPicPr>
         <p:blipFill>
-          <a:blip r:embed="rId4">
+          <a:blip r:embed="rId3">
             <a:extLst>
               <a:ext uri="{28A0092B-C50C-407E-A947-70E740481C1C}">
                 <a14:useLocalDpi xmlns:a14="http://schemas.microsoft.com/office/drawing/2010/main" val="0"/>
@@ -7214,6 +7148,42 @@
               </a14:hiddenFill>
             </a:ext>
           </a:extLst>
+        </p:spPr>
+      </p:pic>
+      <p:pic>
+        <p:nvPicPr>
+          <p:cNvPr id="7" name="Picture 6">
+            <a:extLst>
+              <a:ext uri="{FF2B5EF4-FFF2-40B4-BE49-F238E27FC236}">
+                <a16:creationId xmlns:a16="http://schemas.microsoft.com/office/drawing/2014/main" id="{1E2B1F59-647C-8E2F-55D1-2E9A13AFAC36}"/>
+              </a:ext>
+            </a:extLst>
+          </p:cNvPr>
+          <p:cNvPicPr>
+            <a:picLocks noChangeAspect="1"/>
+          </p:cNvPicPr>
+          <p:nvPr/>
+        </p:nvPicPr>
+        <p:blipFill>
+          <a:blip r:embed="rId4" cstate="print">
+            <a:extLst>
+              <a:ext uri="{28A0092B-C50C-407E-A947-70E740481C1C}">
+                <a14:useLocalDpi xmlns:a14="http://schemas.microsoft.com/office/drawing/2010/main" val="0"/>
+              </a:ext>
+            </a:extLst>
+          </a:blip>
+          <a:stretch>
+            <a:fillRect/>
+          </a:stretch>
+        </p:blipFill>
+        <p:spPr>
+          <a:xfrm>
+            <a:off x="499242" y="5565517"/>
+            <a:ext cx="2057400" cy="1153391"/>
+          </a:xfrm>
+          <a:prstGeom prst="rect">
+            <a:avLst/>
+          </a:prstGeom>
         </p:spPr>
       </p:pic>
     </p:spTree>
